--- a/attached_assets/VaughnMartin_Pitch_Deck_12Slide_FINAL.pptx
+++ b/attached_assets/VaughnMartin_Pitch_Deck_12Slide_FINAL.pptx
@@ -3244,7 +3244,7 @@
         </p:blipFill>
         <p:spPr>
           <a:xfrm>
-            <a:off x="4916343" y="914400"/>
+            <a:off x="4916343" y="841248"/>
             <a:ext cx="2356264" cy="658368"/>
           </a:xfrm>
           <a:prstGeom prst="rect">
@@ -3260,7 +3260,7 @@
         </p:nvSpPr>
         <p:spPr>
           <a:xfrm>
-            <a:off x="4631436" y="1828800"/>
+            <a:off x="4631436" y="1700784"/>
             <a:ext cx="2926080" cy="36576"/>
           </a:xfrm>
           <a:prstGeom prst="rect">
@@ -3303,8 +3303,8 @@
         </p:nvSpPr>
         <p:spPr>
           <a:xfrm>
-            <a:off x="914400" y="1938528"/>
-            <a:ext cx="10360152" cy="2011680"/>
+            <a:off x="731520" y="1828800"/>
+            <a:ext cx="10725912" cy="1920240"/>
           </a:xfrm>
           <a:prstGeom prst="rect">
             <a:avLst/>
@@ -3358,8 +3358,8 @@
         </p:nvSpPr>
         <p:spPr>
           <a:xfrm>
-            <a:off x="1280160" y="4297680"/>
-            <a:ext cx="9628632" cy="530352"/>
+            <a:off x="1097280" y="3858768"/>
+            <a:ext cx="9994392" cy="475488"/>
           </a:xfrm>
           <a:prstGeom prst="rect">
             <a:avLst/>
@@ -3374,9 +3374,44 @@
           <a:p>
             <a:pPr algn="ctr"/>
             <a:r>
-              <a:rPr sz="1700" b="0" i="1">
+              <a:rPr sz="1600" b="0" i="1">
                 <a:solidFill>
                   <a:srgbClr val="C9A84C"/>
+                </a:solidFill>
+                <a:latin typeface="Georgia"/>
+              </a:rPr>
+              <a:t>Signal advantage before execution advantage.</a:t>
+            </a:r>
+          </a:p>
+        </p:txBody>
+      </p:sp>
+      <p:sp>
+        <p:nvSpPr>
+          <p:cNvPr id="9" name="TextBox 8"/>
+          <p:cNvSpPr txBox="1"/>
+          <p:nvPr/>
+        </p:nvSpPr>
+        <p:spPr>
+          <a:xfrm>
+            <a:off x="1463040" y="4443984"/>
+            <a:ext cx="9262872" cy="365760"/>
+          </a:xfrm>
+          <a:prstGeom prst="rect">
+            <a:avLst/>
+          </a:prstGeom>
+          <a:noFill/>
+        </p:spPr>
+        <p:txBody>
+          <a:bodyPr wrap="square">
+            <a:spAutoFit/>
+          </a:bodyPr>
+          <a:lstStyle/>
+          <a:p>
+            <a:pPr algn="ctr"/>
+            <a:r>
+              <a:rPr sz="1300" b="0" i="1">
+                <a:solidFill>
+                  <a:srgbClr val="9096B2"/>
                 </a:solidFill>
                 <a:latin typeface="Georgia"/>
               </a:rPr>
@@ -3387,14 +3422,14 @@
       </p:sp>
       <p:sp>
         <p:nvSpPr>
-          <p:cNvPr id="9" name="TextBox 8"/>
+          <p:cNvPr id="10" name="TextBox 9"/>
           <p:cNvSpPr txBox="1"/>
           <p:nvPr/>
         </p:nvSpPr>
         <p:spPr>
           <a:xfrm>
-            <a:off x="1828800" y="5074920"/>
-            <a:ext cx="8531352" cy="292608"/>
+            <a:off x="1828800" y="5010912"/>
+            <a:ext cx="8531352" cy="274320"/>
           </a:xfrm>
           <a:prstGeom prst="rect">
             <a:avLst/>
@@ -3422,7 +3457,7 @@
       </p:sp>
       <p:sp>
         <p:nvSpPr>
-          <p:cNvPr id="10" name="Rectangle 9"/>
+          <p:cNvPr id="11" name="Rectangle 10"/>
           <p:cNvSpPr/>
           <p:nvPr/>
         </p:nvSpPr>
@@ -3465,7 +3500,7 @@
       </p:sp>
       <p:sp>
         <p:nvSpPr>
-          <p:cNvPr id="11" name="Rectangle 10"/>
+          <p:cNvPr id="12" name="Rectangle 11"/>
           <p:cNvSpPr/>
           <p:nvPr/>
         </p:nvSpPr>
@@ -3508,14 +3543,14 @@
       </p:sp>
       <p:sp>
         <p:nvSpPr>
-          <p:cNvPr id="12" name="TextBox 11"/>
+          <p:cNvPr id="13" name="TextBox 12"/>
           <p:cNvSpPr txBox="1"/>
           <p:nvPr/>
         </p:nvSpPr>
         <p:spPr>
           <a:xfrm>
             <a:off x="274320" y="6592824"/>
-            <a:ext cx="4572000" cy="219456"/>
+            <a:ext cx="5486400" cy="219456"/>
           </a:xfrm>
           <a:prstGeom prst="rect">
             <a:avLst/>
@@ -3543,7 +3578,7 @@
       </p:sp>
       <p:sp>
         <p:nvSpPr>
-          <p:cNvPr id="13" name="TextBox 12"/>
+          <p:cNvPr id="14" name="TextBox 13"/>
           <p:cNvSpPr txBox="1"/>
           <p:nvPr/>
         </p:nvSpPr>
@@ -3755,8 +3790,8 @@
         </p:nvSpPr>
         <p:spPr>
           <a:xfrm>
-            <a:off x="8988552" y="192024"/>
-            <a:ext cx="3017520" cy="237744"/>
+            <a:off x="8897112" y="192024"/>
+            <a:ext cx="3108960" cy="237744"/>
           </a:xfrm>
           <a:prstGeom prst="rect">
             <a:avLst/>
@@ -3777,7 +3812,7 @@
                 </a:solidFill>
                 <a:latin typeface="Calibri"/>
               </a:rPr>
-              <a:t>LIVE PRODUCTION — PROOF</a:t>
+              <a:t>LIVE PRODUCTION PROOF</a:t>
             </a:r>
           </a:p>
         </p:txBody>
@@ -3790,8 +3825,8 @@
         </p:nvSpPr>
         <p:spPr>
           <a:xfrm>
-            <a:off x="402336" y="896112"/>
-            <a:ext cx="11384280" cy="475488"/>
+            <a:off x="402336" y="877824"/>
+            <a:ext cx="11384280" cy="384048"/>
           </a:xfrm>
           <a:prstGeom prst="rect">
             <a:avLst/>
@@ -3806,70 +3841,27 @@
           <a:p>
             <a:pPr algn="ctr"/>
             <a:r>
-              <a:rPr sz="2200" b="1" i="0">
+              <a:rPr sz="1800" b="1" i="0">
                 <a:solidFill>
                   <a:srgbClr val="0A0F2E"/>
                 </a:solidFill>
                 <a:latin typeface="Calibri"/>
               </a:rPr>
-              <a:t>Live production platform. Not concept slides.</a:t>
-            </a:r>
-          </a:p>
-        </p:txBody>
-      </p:sp>
-      <p:sp>
-        <p:nvSpPr>
-          <p:cNvPr id="8" name="Oval 7"/>
-          <p:cNvSpPr/>
-          <p:nvPr/>
-        </p:nvSpPr>
-        <p:spPr>
-          <a:xfrm>
-            <a:off x="402336" y="1591056"/>
-            <a:ext cx="201168" cy="201168"/>
-          </a:xfrm>
-          <a:prstGeom prst="ellipse">
-            <a:avLst/>
-          </a:prstGeom>
-          <a:solidFill>
-            <a:srgbClr val="2B8A6E"/>
-          </a:solidFill>
-          <a:ln>
-            <a:noFill/>
-          </a:ln>
-        </p:spPr>
-        <p:style>
-          <a:lnRef idx="1">
-            <a:schemeClr val="accent1"/>
-          </a:lnRef>
-          <a:fillRef idx="3">
-            <a:schemeClr val="accent1"/>
-          </a:fillRef>
-          <a:effectRef idx="2">
-            <a:schemeClr val="accent1"/>
-          </a:effectRef>
-          <a:fontRef idx="minor">
-            <a:schemeClr val="lt1"/>
-          </a:fontRef>
-        </p:style>
-        <p:txBody>
-          <a:bodyPr rtlCol="0" anchor="ctr"/>
-          <a:lstStyle/>
-          <a:p>
-            <a:pPr algn="ctr"/>
-          </a:p>
-        </p:txBody>
-      </p:sp>
-      <p:sp>
-        <p:nvSpPr>
-          <p:cNvPr id="9" name="TextBox 8"/>
+              <a:t>Live production software: onboarding, protocol flow,</a:t>
+            </a:r>
+          </a:p>
+        </p:txBody>
+      </p:sp>
+      <p:sp>
+        <p:nvSpPr>
+          <p:cNvPr id="8" name="TextBox 7"/>
           <p:cNvSpPr txBox="1"/>
           <p:nvPr/>
         </p:nvSpPr>
         <p:spPr>
           <a:xfrm>
-            <a:off x="402336" y="1572768"/>
-            <a:ext cx="201168" cy="219456"/>
+            <a:off x="402336" y="1280160"/>
+            <a:ext cx="11384280" cy="384048"/>
           </a:xfrm>
           <a:prstGeom prst="rect">
             <a:avLst/>
@@ -3884,6 +3876,84 @@
           <a:p>
             <a:pPr algn="ctr"/>
             <a:r>
+              <a:rPr sz="1800" b="1" i="0">
+                <a:solidFill>
+                  <a:srgbClr val="2B8A6E"/>
+                </a:solidFill>
+                <a:latin typeface="Calibri"/>
+              </a:rPr>
+              <a:t>decision gates, and execution pathways are active now.</a:t>
+            </a:r>
+          </a:p>
+        </p:txBody>
+      </p:sp>
+      <p:sp>
+        <p:nvSpPr>
+          <p:cNvPr id="9" name="Oval 8"/>
+          <p:cNvSpPr/>
+          <p:nvPr/>
+        </p:nvSpPr>
+        <p:spPr>
+          <a:xfrm>
+            <a:off x="402336" y="1865376"/>
+            <a:ext cx="201168" cy="201168"/>
+          </a:xfrm>
+          <a:prstGeom prst="ellipse">
+            <a:avLst/>
+          </a:prstGeom>
+          <a:solidFill>
+            <a:srgbClr val="2B8A6E"/>
+          </a:solidFill>
+          <a:ln>
+            <a:noFill/>
+          </a:ln>
+        </p:spPr>
+        <p:style>
+          <a:lnRef idx="1">
+            <a:schemeClr val="accent1"/>
+          </a:lnRef>
+          <a:fillRef idx="3">
+            <a:schemeClr val="accent1"/>
+          </a:fillRef>
+          <a:effectRef idx="2">
+            <a:schemeClr val="accent1"/>
+          </a:effectRef>
+          <a:fontRef idx="minor">
+            <a:schemeClr val="lt1"/>
+          </a:fontRef>
+        </p:style>
+        <p:txBody>
+          <a:bodyPr rtlCol="0" anchor="ctr"/>
+          <a:lstStyle/>
+          <a:p>
+            <a:pPr algn="ctr"/>
+          </a:p>
+        </p:txBody>
+      </p:sp>
+      <p:sp>
+        <p:nvSpPr>
+          <p:cNvPr id="10" name="TextBox 9"/>
+          <p:cNvSpPr txBox="1"/>
+          <p:nvPr/>
+        </p:nvSpPr>
+        <p:spPr>
+          <a:xfrm>
+            <a:off x="402336" y="1847088"/>
+            <a:ext cx="201168" cy="219456"/>
+          </a:xfrm>
+          <a:prstGeom prst="rect">
+            <a:avLst/>
+          </a:prstGeom>
+          <a:noFill/>
+        </p:spPr>
+        <p:txBody>
+          <a:bodyPr wrap="square">
+            <a:spAutoFit/>
+          </a:bodyPr>
+          <a:lstStyle/>
+          <a:p>
+            <a:pPr algn="ctr"/>
+            <a:r>
               <a:rPr sz="800" b="1" i="0">
                 <a:solidFill>
                   <a:srgbClr val="FFFFFF"/>
@@ -3897,14 +3967,14 @@
       </p:sp>
       <p:sp>
         <p:nvSpPr>
-          <p:cNvPr id="10" name="TextBox 9"/>
+          <p:cNvPr id="11" name="TextBox 10"/>
           <p:cNvSpPr txBox="1"/>
           <p:nvPr/>
         </p:nvSpPr>
         <p:spPr>
           <a:xfrm>
-            <a:off x="694944" y="1536192"/>
-            <a:ext cx="5850696" cy="329184"/>
+            <a:off x="694944" y="1810512"/>
+            <a:ext cx="6094476" cy="329184"/>
           </a:xfrm>
           <a:prstGeom prst="rect">
             <a:avLst/>
@@ -3932,13 +4002,13 @@
       </p:sp>
       <p:sp>
         <p:nvSpPr>
-          <p:cNvPr id="11" name="Oval 10"/>
-          <p:cNvSpPr/>
-          <p:nvPr/>
-        </p:nvSpPr>
-        <p:spPr>
-          <a:xfrm>
-            <a:off x="402336" y="1956816"/>
+          <p:cNvPr id="12" name="Oval 11"/>
+          <p:cNvSpPr/>
+          <p:nvPr/>
+        </p:nvSpPr>
+        <p:spPr>
+          <a:xfrm>
+            <a:off x="402336" y="2231136"/>
             <a:ext cx="201168" cy="201168"/>
           </a:xfrm>
           <a:prstGeom prst="ellipse">
@@ -3975,13 +4045,13 @@
       </p:sp>
       <p:sp>
         <p:nvSpPr>
-          <p:cNvPr id="12" name="TextBox 11"/>
+          <p:cNvPr id="13" name="TextBox 12"/>
           <p:cNvSpPr txBox="1"/>
           <p:nvPr/>
         </p:nvSpPr>
         <p:spPr>
           <a:xfrm>
-            <a:off x="402336" y="1938528"/>
+            <a:off x="402336" y="2212848"/>
             <a:ext cx="201168" cy="219456"/>
           </a:xfrm>
           <a:prstGeom prst="rect">
@@ -4010,14 +4080,14 @@
       </p:sp>
       <p:sp>
         <p:nvSpPr>
-          <p:cNvPr id="13" name="TextBox 12"/>
+          <p:cNvPr id="14" name="TextBox 13"/>
           <p:cNvSpPr txBox="1"/>
           <p:nvPr/>
         </p:nvSpPr>
         <p:spPr>
           <a:xfrm>
-            <a:off x="694944" y="1901952"/>
-            <a:ext cx="5850696" cy="329184"/>
+            <a:off x="694944" y="2176272"/>
+            <a:ext cx="6094476" cy="329184"/>
           </a:xfrm>
           <a:prstGeom prst="rect">
             <a:avLst/>
@@ -4045,13 +4115,13 @@
       </p:sp>
       <p:sp>
         <p:nvSpPr>
-          <p:cNvPr id="14" name="Oval 13"/>
-          <p:cNvSpPr/>
-          <p:nvPr/>
-        </p:nvSpPr>
-        <p:spPr>
-          <a:xfrm>
-            <a:off x="402336" y="2322576"/>
+          <p:cNvPr id="15" name="Oval 14"/>
+          <p:cNvSpPr/>
+          <p:nvPr/>
+        </p:nvSpPr>
+        <p:spPr>
+          <a:xfrm>
+            <a:off x="402336" y="2596896"/>
             <a:ext cx="201168" cy="201168"/>
           </a:xfrm>
           <a:prstGeom prst="ellipse">
@@ -4088,13 +4158,13 @@
       </p:sp>
       <p:sp>
         <p:nvSpPr>
-          <p:cNvPr id="15" name="TextBox 14"/>
+          <p:cNvPr id="16" name="TextBox 15"/>
           <p:cNvSpPr txBox="1"/>
           <p:nvPr/>
         </p:nvSpPr>
         <p:spPr>
           <a:xfrm>
-            <a:off x="402336" y="2304288"/>
+            <a:off x="402336" y="2578608"/>
             <a:ext cx="201168" cy="219456"/>
           </a:xfrm>
           <a:prstGeom prst="rect">
@@ -4123,14 +4193,14 @@
       </p:sp>
       <p:sp>
         <p:nvSpPr>
-          <p:cNvPr id="16" name="TextBox 15"/>
+          <p:cNvPr id="17" name="TextBox 16"/>
           <p:cNvSpPr txBox="1"/>
           <p:nvPr/>
         </p:nvSpPr>
         <p:spPr>
           <a:xfrm>
-            <a:off x="694944" y="2267712"/>
-            <a:ext cx="5850696" cy="329184"/>
+            <a:off x="694944" y="2542032"/>
+            <a:ext cx="6094476" cy="329184"/>
           </a:xfrm>
           <a:prstGeom prst="rect">
             <a:avLst/>
@@ -4158,14 +4228,14 @@
       </p:sp>
       <p:sp>
         <p:nvSpPr>
-          <p:cNvPr id="17" name="Rectangle 16"/>
-          <p:cNvSpPr/>
-          <p:nvPr/>
-        </p:nvSpPr>
-        <p:spPr>
-          <a:xfrm>
-            <a:off x="402336" y="2432303"/>
-            <a:ext cx="2777490" cy="219456"/>
+          <p:cNvPr id="18" name="Rectangle 17"/>
+          <p:cNvSpPr/>
+          <p:nvPr/>
+        </p:nvSpPr>
+        <p:spPr>
+          <a:xfrm>
+            <a:off x="402336" y="2688336"/>
+            <a:ext cx="2777490" cy="201168"/>
           </a:xfrm>
           <a:prstGeom prst="rect">
             <a:avLst/>
@@ -4201,14 +4271,14 @@
       </p:sp>
       <p:sp>
         <p:nvSpPr>
-          <p:cNvPr id="18" name="TextBox 17"/>
+          <p:cNvPr id="19" name="TextBox 18"/>
           <p:cNvSpPr txBox="1"/>
           <p:nvPr/>
         </p:nvSpPr>
         <p:spPr>
           <a:xfrm>
-            <a:off x="402336" y="2432303"/>
-            <a:ext cx="2777490" cy="219456"/>
+            <a:off x="402336" y="2688336"/>
+            <a:ext cx="2777490" cy="201168"/>
           </a:xfrm>
           <a:prstGeom prst="rect">
             <a:avLst/>
@@ -4223,7 +4293,7 @@
           <a:p>
             <a:pPr algn="ctr"/>
             <a:r>
-              <a:rPr sz="800" b="1" i="0">
+              <a:rPr sz="750" b="1" i="0">
                 <a:solidFill>
                   <a:srgbClr val="8A7332"/>
                 </a:solidFill>
@@ -4236,13 +4306,13 @@
       </p:sp>
       <p:sp>
         <p:nvSpPr>
-          <p:cNvPr id="19" name="Rectangle 18"/>
-          <p:cNvSpPr/>
-          <p:nvPr/>
-        </p:nvSpPr>
-        <p:spPr>
-          <a:xfrm>
-            <a:off x="402336" y="2688335"/>
+          <p:cNvPr id="20" name="Rectangle 19"/>
+          <p:cNvSpPr/>
+          <p:nvPr/>
+        </p:nvSpPr>
+        <p:spPr>
+          <a:xfrm>
+            <a:off x="402336" y="2926080"/>
             <a:ext cx="2777490" cy="36576"/>
           </a:xfrm>
           <a:prstGeom prst="rect">
@@ -4279,7 +4349,7 @@
       </p:sp>
       <p:pic>
         <p:nvPicPr>
-          <p:cNvPr id="20" name="Picture 19" descr="slide_onboarding.jpg"/>
+          <p:cNvPr id="21" name="Picture 20" descr="slide_onboarding.jpg"/>
           <p:cNvPicPr>
             <a:picLocks noChangeAspect="1"/>
           </p:cNvPicPr>
@@ -4293,8 +4363,8 @@
         </p:blipFill>
         <p:spPr>
           <a:xfrm>
-            <a:off x="402336" y="2724911"/>
-            <a:ext cx="2777490" cy="3712465"/>
+            <a:off x="402336" y="2962656"/>
+            <a:ext cx="2777490" cy="3493008"/>
           </a:xfrm>
           <a:prstGeom prst="rect">
             <a:avLst/>
@@ -4303,14 +4373,14 @@
       </p:pic>
       <p:sp>
         <p:nvSpPr>
-          <p:cNvPr id="21" name="Rectangle 20"/>
-          <p:cNvSpPr/>
-          <p:nvPr/>
-        </p:nvSpPr>
-        <p:spPr>
-          <a:xfrm>
-            <a:off x="3271266" y="2432303"/>
-            <a:ext cx="2777490" cy="219456"/>
+          <p:cNvPr id="22" name="Rectangle 21"/>
+          <p:cNvSpPr/>
+          <p:nvPr/>
+        </p:nvSpPr>
+        <p:spPr>
+          <a:xfrm>
+            <a:off x="3271266" y="2688336"/>
+            <a:ext cx="2777490" cy="201168"/>
           </a:xfrm>
           <a:prstGeom prst="rect">
             <a:avLst/>
@@ -4346,14 +4416,14 @@
       </p:sp>
       <p:sp>
         <p:nvSpPr>
-          <p:cNvPr id="22" name="TextBox 21"/>
+          <p:cNvPr id="23" name="TextBox 22"/>
           <p:cNvSpPr txBox="1"/>
           <p:nvPr/>
         </p:nvSpPr>
         <p:spPr>
           <a:xfrm>
-            <a:off x="3271266" y="2432303"/>
-            <a:ext cx="2777490" cy="219456"/>
+            <a:off x="3271266" y="2688336"/>
+            <a:ext cx="2777490" cy="201168"/>
           </a:xfrm>
           <a:prstGeom prst="rect">
             <a:avLst/>
@@ -4368,7 +4438,7 @@
           <a:p>
             <a:pPr algn="ctr"/>
             <a:r>
-              <a:rPr sz="800" b="1" i="0">
+              <a:rPr sz="750" b="1" i="0">
                 <a:solidFill>
                   <a:srgbClr val="8A7332"/>
                 </a:solidFill>
@@ -4381,13 +4451,13 @@
       </p:sp>
       <p:sp>
         <p:nvSpPr>
-          <p:cNvPr id="23" name="Rectangle 22"/>
-          <p:cNvSpPr/>
-          <p:nvPr/>
-        </p:nvSpPr>
-        <p:spPr>
-          <a:xfrm>
-            <a:off x="3271266" y="2688335"/>
+          <p:cNvPr id="24" name="Rectangle 23"/>
+          <p:cNvSpPr/>
+          <p:nvPr/>
+        </p:nvSpPr>
+        <p:spPr>
+          <a:xfrm>
+            <a:off x="3271266" y="2926080"/>
             <a:ext cx="2777490" cy="36576"/>
           </a:xfrm>
           <a:prstGeom prst="rect">
@@ -4424,7 +4494,7 @@
       </p:sp>
       <p:pic>
         <p:nvPicPr>
-          <p:cNvPr id="24" name="Picture 23" descr="slide_protocol_library.jpg"/>
+          <p:cNvPr id="25" name="Picture 24" descr="slide_protocol_library.jpg"/>
           <p:cNvPicPr>
             <a:picLocks noChangeAspect="1"/>
           </p:cNvPicPr>
@@ -4438,8 +4508,8 @@
         </p:blipFill>
         <p:spPr>
           <a:xfrm>
-            <a:off x="3271266" y="2724911"/>
-            <a:ext cx="2777490" cy="3712465"/>
+            <a:off x="3271266" y="2962656"/>
+            <a:ext cx="2777490" cy="3493008"/>
           </a:xfrm>
           <a:prstGeom prst="rect">
             <a:avLst/>
@@ -4448,14 +4518,14 @@
       </p:pic>
       <p:sp>
         <p:nvSpPr>
-          <p:cNvPr id="25" name="Rectangle 24"/>
-          <p:cNvSpPr/>
-          <p:nvPr/>
-        </p:nvSpPr>
-        <p:spPr>
-          <a:xfrm>
-            <a:off x="6140196" y="2432303"/>
-            <a:ext cx="2777490" cy="219456"/>
+          <p:cNvPr id="26" name="Rectangle 25"/>
+          <p:cNvSpPr/>
+          <p:nvPr/>
+        </p:nvSpPr>
+        <p:spPr>
+          <a:xfrm>
+            <a:off x="6140196" y="2688336"/>
+            <a:ext cx="2777490" cy="201168"/>
           </a:xfrm>
           <a:prstGeom prst="rect">
             <a:avLst/>
@@ -4491,14 +4561,14 @@
       </p:sp>
       <p:sp>
         <p:nvSpPr>
-          <p:cNvPr id="26" name="TextBox 25"/>
+          <p:cNvPr id="27" name="TextBox 26"/>
           <p:cNvSpPr txBox="1"/>
           <p:nvPr/>
         </p:nvSpPr>
         <p:spPr>
           <a:xfrm>
-            <a:off x="6140196" y="2432303"/>
-            <a:ext cx="2777490" cy="219456"/>
+            <a:off x="6140196" y="2688336"/>
+            <a:ext cx="2777490" cy="201168"/>
           </a:xfrm>
           <a:prstGeom prst="rect">
             <a:avLst/>
@@ -4513,7 +4583,7 @@
           <a:p>
             <a:pPr algn="ctr"/>
             <a:r>
-              <a:rPr sz="800" b="1" i="0">
+              <a:rPr sz="750" b="1" i="0">
                 <a:solidFill>
                   <a:srgbClr val="8A7332"/>
                 </a:solidFill>
@@ -4526,13 +4596,13 @@
       </p:sp>
       <p:sp>
         <p:nvSpPr>
-          <p:cNvPr id="27" name="Rectangle 26"/>
-          <p:cNvSpPr/>
-          <p:nvPr/>
-        </p:nvSpPr>
-        <p:spPr>
-          <a:xfrm>
-            <a:off x="6140196" y="2688335"/>
+          <p:cNvPr id="28" name="Rectangle 27"/>
+          <p:cNvSpPr/>
+          <p:nvPr/>
+        </p:nvSpPr>
+        <p:spPr>
+          <a:xfrm>
+            <a:off x="6140196" y="2926080"/>
             <a:ext cx="2777490" cy="36576"/>
           </a:xfrm>
           <a:prstGeom prst="rect">
@@ -4569,7 +4639,7 @@
       </p:sp>
       <p:pic>
         <p:nvPicPr>
-          <p:cNvPr id="28" name="Picture 27" descr="slide_mission_control.jpg"/>
+          <p:cNvPr id="29" name="Picture 28" descr="slide_mission_control.jpg"/>
           <p:cNvPicPr>
             <a:picLocks noChangeAspect="1"/>
           </p:cNvPicPr>
@@ -4583,8 +4653,8 @@
         </p:blipFill>
         <p:spPr>
           <a:xfrm>
-            <a:off x="6140196" y="2724911"/>
-            <a:ext cx="2777490" cy="3712465"/>
+            <a:off x="6140196" y="2962656"/>
+            <a:ext cx="2777490" cy="3493008"/>
           </a:xfrm>
           <a:prstGeom prst="rect">
             <a:avLst/>
@@ -4593,14 +4663,14 @@
       </p:pic>
       <p:sp>
         <p:nvSpPr>
-          <p:cNvPr id="29" name="Rectangle 28"/>
-          <p:cNvSpPr/>
-          <p:nvPr/>
-        </p:nvSpPr>
-        <p:spPr>
-          <a:xfrm>
-            <a:off x="9009126" y="2432303"/>
-            <a:ext cx="2777490" cy="219456"/>
+          <p:cNvPr id="30" name="Rectangle 29"/>
+          <p:cNvSpPr/>
+          <p:nvPr/>
+        </p:nvSpPr>
+        <p:spPr>
+          <a:xfrm>
+            <a:off x="9009126" y="2688336"/>
+            <a:ext cx="2777490" cy="201168"/>
           </a:xfrm>
           <a:prstGeom prst="rect">
             <a:avLst/>
@@ -4636,14 +4706,14 @@
       </p:sp>
       <p:sp>
         <p:nvSpPr>
-          <p:cNvPr id="30" name="TextBox 29"/>
+          <p:cNvPr id="31" name="TextBox 30"/>
           <p:cNvSpPr txBox="1"/>
           <p:nvPr/>
         </p:nvSpPr>
         <p:spPr>
           <a:xfrm>
-            <a:off x="9009126" y="2432303"/>
-            <a:ext cx="2777490" cy="219456"/>
+            <a:off x="9009126" y="2688336"/>
+            <a:ext cx="2777490" cy="201168"/>
           </a:xfrm>
           <a:prstGeom prst="rect">
             <a:avLst/>
@@ -4658,7 +4728,7 @@
           <a:p>
             <a:pPr algn="ctr"/>
             <a:r>
-              <a:rPr sz="800" b="1" i="0">
+              <a:rPr sz="750" b="1" i="0">
                 <a:solidFill>
                   <a:srgbClr val="8A7332"/>
                 </a:solidFill>
@@ -4671,13 +4741,13 @@
       </p:sp>
       <p:sp>
         <p:nvSpPr>
-          <p:cNvPr id="31" name="Rectangle 30"/>
-          <p:cNvSpPr/>
-          <p:nvPr/>
-        </p:nvSpPr>
-        <p:spPr>
-          <a:xfrm>
-            <a:off x="9009126" y="2688335"/>
+          <p:cNvPr id="32" name="Rectangle 31"/>
+          <p:cNvSpPr/>
+          <p:nvPr/>
+        </p:nvSpPr>
+        <p:spPr>
+          <a:xfrm>
+            <a:off x="9009126" y="2926080"/>
             <a:ext cx="2777490" cy="36576"/>
           </a:xfrm>
           <a:prstGeom prst="rect">
@@ -4714,7 +4784,7 @@
       </p:sp>
       <p:pic>
         <p:nvPicPr>
-          <p:cNvPr id="32" name="Picture 31" descr="slide_buyer_packet.jpg"/>
+          <p:cNvPr id="33" name="Picture 32" descr="slide_buyer_packet.jpg"/>
           <p:cNvPicPr>
             <a:picLocks noChangeAspect="1"/>
           </p:cNvPicPr>
@@ -4728,8 +4798,8 @@
         </p:blipFill>
         <p:spPr>
           <a:xfrm>
-            <a:off x="9009126" y="2724911"/>
-            <a:ext cx="2777490" cy="3712465"/>
+            <a:off x="9009126" y="2962656"/>
+            <a:ext cx="2777490" cy="3493008"/>
           </a:xfrm>
           <a:prstGeom prst="rect">
             <a:avLst/>
@@ -4738,7 +4808,7 @@
       </p:pic>
       <p:sp>
         <p:nvSpPr>
-          <p:cNvPr id="33" name="Rectangle 32"/>
+          <p:cNvPr id="34" name="Rectangle 33"/>
           <p:cNvSpPr/>
           <p:nvPr/>
         </p:nvSpPr>
@@ -4781,7 +4851,7 @@
       </p:sp>
       <p:sp>
         <p:nvSpPr>
-          <p:cNvPr id="34" name="Rectangle 33"/>
+          <p:cNvPr id="35" name="Rectangle 34"/>
           <p:cNvSpPr/>
           <p:nvPr/>
         </p:nvSpPr>
@@ -4824,7 +4894,7 @@
       </p:sp>
       <p:sp>
         <p:nvSpPr>
-          <p:cNvPr id="35" name="TextBox 34"/>
+          <p:cNvPr id="36" name="TextBox 35"/>
           <p:cNvSpPr txBox="1"/>
           <p:nvPr/>
         </p:nvSpPr>
@@ -5036,8 +5106,8 @@
         </p:nvSpPr>
         <p:spPr>
           <a:xfrm>
-            <a:off x="8988552" y="192024"/>
-            <a:ext cx="3017520" cy="237744"/>
+            <a:off x="8897112" y="192024"/>
+            <a:ext cx="3108960" cy="237744"/>
           </a:xfrm>
           <a:prstGeom prst="rect">
             <a:avLst/>
@@ -5071,7 +5141,7 @@
         </p:nvSpPr>
         <p:spPr>
           <a:xfrm>
-            <a:off x="402336" y="896112"/>
+            <a:off x="402336" y="877824"/>
             <a:ext cx="11384280" cy="420624"/>
           </a:xfrm>
           <a:prstGeom prst="rect">
@@ -5106,7 +5176,7 @@
         </p:nvSpPr>
         <p:spPr>
           <a:xfrm>
-            <a:off x="4997196" y="1353312"/>
+            <a:off x="4997196" y="1335024"/>
             <a:ext cx="2194560" cy="36576"/>
           </a:xfrm>
           <a:prstGeom prst="rect">
@@ -5149,8 +5219,8 @@
         </p:nvSpPr>
         <p:spPr>
           <a:xfrm>
-            <a:off x="402336" y="1536192"/>
-            <a:ext cx="3721608" cy="4901184"/>
+            <a:off x="402336" y="1517904"/>
+            <a:ext cx="3721608" cy="4919472"/>
           </a:xfrm>
           <a:prstGeom prst="rect">
             <a:avLst/>
@@ -5192,7 +5262,7 @@
         </p:nvSpPr>
         <p:spPr>
           <a:xfrm>
-            <a:off x="402336" y="1536192"/>
+            <a:off x="402336" y="1517904"/>
             <a:ext cx="3721608" cy="45720"/>
           </a:xfrm>
           <a:prstGeom prst="rect">
@@ -5235,7 +5305,7 @@
         </p:nvSpPr>
         <p:spPr>
           <a:xfrm>
-            <a:off x="585216" y="1645920"/>
+            <a:off x="585216" y="1609344"/>
             <a:ext cx="548640" cy="256032"/>
           </a:xfrm>
           <a:prstGeom prst="rect">
@@ -5270,8 +5340,8 @@
         </p:nvSpPr>
         <p:spPr>
           <a:xfrm>
-            <a:off x="585216" y="1975104"/>
-            <a:ext cx="3429000" cy="292608"/>
+            <a:off x="585216" y="1938528"/>
+            <a:ext cx="3429000" cy="274320"/>
           </a:xfrm>
           <a:prstGeom prst="rect">
             <a:avLst/>
@@ -5305,8 +5375,8 @@
         </p:nvSpPr>
         <p:spPr>
           <a:xfrm>
-            <a:off x="585216" y="2286000"/>
-            <a:ext cx="3429000" cy="292608"/>
+            <a:off x="585216" y="2231136"/>
+            <a:ext cx="3429000" cy="274320"/>
           </a:xfrm>
           <a:prstGeom prst="rect">
             <a:avLst/>
@@ -5340,7 +5410,7 @@
         </p:nvSpPr>
         <p:spPr>
           <a:xfrm>
-            <a:off x="585216" y="2633472"/>
+            <a:off x="585216" y="2560319"/>
             <a:ext cx="3355848" cy="27432"/>
           </a:xfrm>
           <a:prstGeom prst="rect">
@@ -5383,7 +5453,7 @@
         </p:nvSpPr>
         <p:spPr>
           <a:xfrm>
-            <a:off x="585216" y="2724912"/>
+            <a:off x="585216" y="2651760"/>
             <a:ext cx="3429000" cy="1463040"/>
           </a:xfrm>
           <a:prstGeom prst="rect">
@@ -5405,7 +5475,7 @@
                 </a:solidFill>
                 <a:latin typeface="Calibri"/>
               </a:rPr>
-              <a:t>Select Fortune 1000 organizations — 90-day structured validation partnership. Full platform access and direct founder engagement.</a:t>
+              <a:t>Select Fortune 1000 organizations — 90-day structured validation partnership with direct founder engagement.</a:t>
             </a:r>
           </a:p>
         </p:txBody>
@@ -5483,7 +5553,7 @@
                 </a:solidFill>
                 <a:latin typeface="Calibri"/>
               </a:rPr>
-              <a:t>Success metric: one live trigger handled inside Readiness OS with documented mobilization compression.</a:t>
+              <a:t>Success: one live trigger handled inside Readiness OS with documented mobilization compression vs. baseline.</a:t>
             </a:r>
           </a:p>
         </p:txBody>
@@ -5496,8 +5566,8 @@
         </p:nvSpPr>
         <p:spPr>
           <a:xfrm>
-            <a:off x="4233672" y="1536192"/>
-            <a:ext cx="3721608" cy="4901184"/>
+            <a:off x="4233672" y="1517904"/>
+            <a:ext cx="3721608" cy="4919472"/>
           </a:xfrm>
           <a:prstGeom prst="rect">
             <a:avLst/>
@@ -5539,7 +5609,7 @@
         </p:nvSpPr>
         <p:spPr>
           <a:xfrm>
-            <a:off x="4233672" y="1536192"/>
+            <a:off x="4233672" y="1517904"/>
             <a:ext cx="3721608" cy="45720"/>
           </a:xfrm>
           <a:prstGeom prst="rect">
@@ -5582,7 +5652,7 @@
         </p:nvSpPr>
         <p:spPr>
           <a:xfrm>
-            <a:off x="4416552" y="1645920"/>
+            <a:off x="4416552" y="1609344"/>
             <a:ext cx="548640" cy="256032"/>
           </a:xfrm>
           <a:prstGeom prst="rect">
@@ -5617,8 +5687,8 @@
         </p:nvSpPr>
         <p:spPr>
           <a:xfrm>
-            <a:off x="4416552" y="1975104"/>
-            <a:ext cx="3429000" cy="292608"/>
+            <a:off x="4416552" y="1938528"/>
+            <a:ext cx="3429000" cy="274320"/>
           </a:xfrm>
           <a:prstGeom prst="rect">
             <a:avLst/>
@@ -5652,8 +5722,8 @@
         </p:nvSpPr>
         <p:spPr>
           <a:xfrm>
-            <a:off x="4416552" y="2286000"/>
-            <a:ext cx="3429000" cy="292608"/>
+            <a:off x="4416552" y="2231136"/>
+            <a:ext cx="3429000" cy="274320"/>
           </a:xfrm>
           <a:prstGeom prst="rect">
             <a:avLst/>
@@ -5687,7 +5757,7 @@
         </p:nvSpPr>
         <p:spPr>
           <a:xfrm>
-            <a:off x="4416552" y="2633472"/>
+            <a:off x="4416552" y="2560319"/>
             <a:ext cx="3355848" cy="27432"/>
           </a:xfrm>
           <a:prstGeom prst="rect">
@@ -5730,7 +5800,7 @@
         </p:nvSpPr>
         <p:spPr>
           <a:xfrm>
-            <a:off x="4416552" y="2724912"/>
+            <a:off x="4416552" y="2651760"/>
             <a:ext cx="3429000" cy="1463040"/>
           </a:xfrm>
           <a:prstGeom prst="rect">
@@ -5752,7 +5822,7 @@
                 </a:solidFill>
                 <a:latin typeface="Calibri"/>
               </a:rPr>
-              <a:t>Live activation generates documented time-to-execution data. The ROI case is built from real performance — not projections.</a:t>
+              <a:t>Live activation generates documented time-to-execution data. ROI is built from real organizational performance — not projections.</a:t>
             </a:r>
           </a:p>
         </p:txBody>
@@ -5765,8 +5835,8 @@
         </p:nvSpPr>
         <p:spPr>
           <a:xfrm>
-            <a:off x="8065008" y="1536192"/>
-            <a:ext cx="3721608" cy="4901184"/>
+            <a:off x="8065008" y="1517904"/>
+            <a:ext cx="3721608" cy="4919472"/>
           </a:xfrm>
           <a:prstGeom prst="rect">
             <a:avLst/>
@@ -5808,7 +5878,7 @@
         </p:nvSpPr>
         <p:spPr>
           <a:xfrm>
-            <a:off x="8065008" y="1536192"/>
+            <a:off x="8065008" y="1517904"/>
             <a:ext cx="3721608" cy="45720"/>
           </a:xfrm>
           <a:prstGeom prst="rect">
@@ -5851,7 +5921,7 @@
         </p:nvSpPr>
         <p:spPr>
           <a:xfrm>
-            <a:off x="8247888" y="1645920"/>
+            <a:off x="8247888" y="1609344"/>
             <a:ext cx="548640" cy="256032"/>
           </a:xfrm>
           <a:prstGeom prst="rect">
@@ -5886,8 +5956,8 @@
         </p:nvSpPr>
         <p:spPr>
           <a:xfrm>
-            <a:off x="8247888" y="1975104"/>
-            <a:ext cx="3429000" cy="292608"/>
+            <a:off x="8247888" y="1938528"/>
+            <a:ext cx="3429000" cy="274320"/>
           </a:xfrm>
           <a:prstGeom prst="rect">
             <a:avLst/>
@@ -5921,8 +5991,8 @@
         </p:nvSpPr>
         <p:spPr>
           <a:xfrm>
-            <a:off x="8247888" y="2286000"/>
-            <a:ext cx="3429000" cy="292608"/>
+            <a:off x="8247888" y="2231136"/>
+            <a:ext cx="3429000" cy="274320"/>
           </a:xfrm>
           <a:prstGeom prst="rect">
             <a:avLst/>
@@ -5956,7 +6026,7 @@
         </p:nvSpPr>
         <p:spPr>
           <a:xfrm>
-            <a:off x="8247888" y="2633472"/>
+            <a:off x="8247888" y="2560319"/>
             <a:ext cx="3355848" cy="27432"/>
           </a:xfrm>
           <a:prstGeom prst="rect">
@@ -5999,7 +6069,7 @@
         </p:nvSpPr>
         <p:spPr>
           <a:xfrm>
-            <a:off x="8247888" y="2724912"/>
+            <a:off x="8247888" y="2651760"/>
             <a:ext cx="3429000" cy="1463040"/>
           </a:xfrm>
           <a:prstGeom prst="rect">
@@ -6404,8 +6474,8 @@
         </p:nvSpPr>
         <p:spPr>
           <a:xfrm>
-            <a:off x="914400" y="1572768"/>
-            <a:ext cx="10360152" cy="566928"/>
+            <a:off x="731520" y="1499616"/>
+            <a:ext cx="10725912" cy="786384"/>
           </a:xfrm>
           <a:prstGeom prst="rect">
             <a:avLst/>
@@ -6420,13 +6490,14 @@
           <a:p>
             <a:pPr algn="ctr"/>
             <a:r>
-              <a:rPr sz="3000" b="1" i="0">
+              <a:rPr sz="2400" b="1" i="0">
                 <a:solidFill>
                   <a:srgbClr val="FFFFFF"/>
                 </a:solidFill>
                 <a:latin typeface="Calibri"/>
               </a:rPr>
-              <a:t>Partner with us to scale Readiness OS.</a:t>
+              <a:t>We're building with leaders who want operating advantage,
+not another dashboard.</a:t>
             </a:r>
           </a:p>
         </p:txBody>
@@ -6439,7 +6510,7 @@
         </p:nvSpPr>
         <p:spPr>
           <a:xfrm>
-            <a:off x="5088636" y="2212848"/>
+            <a:off x="5088636" y="2359152"/>
             <a:ext cx="2011680" cy="36576"/>
           </a:xfrm>
           <a:prstGeom prst="rect">
@@ -6482,51 +6553,94 @@
         </p:nvSpPr>
         <p:spPr>
           <a:xfrm>
-            <a:off x="1188720" y="2377440"/>
-            <a:ext cx="9811512" cy="713232"/>
-          </a:xfrm>
-          <a:prstGeom prst="rect">
-            <a:avLst/>
-          </a:prstGeom>
-          <a:solidFill>
-            <a:srgbClr val="0C1026"/>
-          </a:solidFill>
-          <a:ln>
-            <a:noFill/>
-          </a:ln>
-        </p:spPr>
-        <p:style>
-          <a:lnRef idx="1">
-            <a:schemeClr val="accent1"/>
-          </a:lnRef>
-          <a:fillRef idx="3">
-            <a:schemeClr val="accent1"/>
-          </a:fillRef>
-          <a:effectRef idx="2">
-            <a:schemeClr val="accent1"/>
-          </a:effectRef>
-          <a:fontRef idx="minor">
-            <a:schemeClr val="lt1"/>
-          </a:fontRef>
-        </p:style>
-        <p:txBody>
-          <a:bodyPr rtlCol="0" anchor="ctr"/>
-          <a:lstStyle/>
-          <a:p>
-            <a:pPr algn="ctr"/>
-          </a:p>
-        </p:txBody>
-      </p:sp>
-      <p:sp>
-        <p:nvSpPr>
-          <p:cNvPr id="9" name="TextBox 8"/>
+            <a:off x="457200" y="2542032"/>
+            <a:ext cx="5029200" cy="1664208"/>
+          </a:xfrm>
+          <a:prstGeom prst="rect">
+            <a:avLst/>
+          </a:prstGeom>
+          <a:solidFill>
+            <a:srgbClr val="0D143A"/>
+          </a:solidFill>
+          <a:ln>
+            <a:noFill/>
+          </a:ln>
+        </p:spPr>
+        <p:style>
+          <a:lnRef idx="1">
+            <a:schemeClr val="accent1"/>
+          </a:lnRef>
+          <a:fillRef idx="3">
+            <a:schemeClr val="accent1"/>
+          </a:fillRef>
+          <a:effectRef idx="2">
+            <a:schemeClr val="accent1"/>
+          </a:effectRef>
+          <a:fontRef idx="minor">
+            <a:schemeClr val="lt1"/>
+          </a:fontRef>
+        </p:style>
+        <p:txBody>
+          <a:bodyPr rtlCol="0" anchor="ctr"/>
+          <a:lstStyle/>
+          <a:p>
+            <a:pPr algn="ctr"/>
+          </a:p>
+        </p:txBody>
+      </p:sp>
+      <p:sp>
+        <p:nvSpPr>
+          <p:cNvPr id="9" name="Rectangle 8"/>
+          <p:cNvSpPr/>
+          <p:nvPr/>
+        </p:nvSpPr>
+        <p:spPr>
+          <a:xfrm>
+            <a:off x="457200" y="2542032"/>
+            <a:ext cx="5029200" cy="45720"/>
+          </a:xfrm>
+          <a:prstGeom prst="rect">
+            <a:avLst/>
+          </a:prstGeom>
+          <a:solidFill>
+            <a:srgbClr val="C9A84C"/>
+          </a:solidFill>
+          <a:ln>
+            <a:noFill/>
+          </a:ln>
+        </p:spPr>
+        <p:style>
+          <a:lnRef idx="1">
+            <a:schemeClr val="accent1"/>
+          </a:lnRef>
+          <a:fillRef idx="3">
+            <a:schemeClr val="accent1"/>
+          </a:fillRef>
+          <a:effectRef idx="2">
+            <a:schemeClr val="accent1"/>
+          </a:effectRef>
+          <a:fontRef idx="minor">
+            <a:schemeClr val="lt1"/>
+          </a:fontRef>
+        </p:style>
+        <p:txBody>
+          <a:bodyPr rtlCol="0" anchor="ctr"/>
+          <a:lstStyle/>
+          <a:p>
+            <a:pPr algn="ctr"/>
+          </a:p>
+        </p:txBody>
+      </p:sp>
+      <p:sp>
+        <p:nvSpPr>
+          <p:cNvPr id="10" name="TextBox 9"/>
           <p:cNvSpPr txBox="1"/>
           <p:nvPr/>
         </p:nvSpPr>
         <p:spPr>
           <a:xfrm>
-            <a:off x="1371600" y="2468880"/>
-            <a:ext cx="9445752" cy="566928"/>
+            <a:off x="658368" y="2651760"/>
+            <a:ext cx="4681728" cy="292608"/>
           </a:xfrm>
           <a:prstGeom prst="rect">
             <a:avLst/>
@@ -6539,115 +6653,29 @@
           </a:bodyPr>
           <a:lstStyle/>
           <a:p>
-            <a:pPr algn="ctr"/>
-            <a:r>
-              <a:rPr sz="1300" b="0" i="1">
+            <a:pPr algn="l"/>
+            <a:r>
+              <a:rPr sz="950" b="1" i="0">
                 <a:solidFill>
                   <a:srgbClr val="C9A84C"/>
                 </a:solidFill>
-                <a:latin typeface="Georgia"/>
+                <a:latin typeface="Calibri"/>
               </a:rPr>
-              <a:t>"If advantage belongs to organizations that see earlier and execute decisively, let's partner."</a:t>
-            </a:r>
-          </a:p>
-        </p:txBody>
-      </p:sp>
-      <p:sp>
-        <p:nvSpPr>
-          <p:cNvPr id="10" name="Rectangle 9"/>
-          <p:cNvSpPr/>
-          <p:nvPr/>
-        </p:nvSpPr>
-        <p:spPr>
-          <a:xfrm>
-            <a:off x="457200" y="3310128"/>
-            <a:ext cx="5029200" cy="1572768"/>
-          </a:xfrm>
-          <a:prstGeom prst="rect">
-            <a:avLst/>
-          </a:prstGeom>
-          <a:solidFill>
-            <a:srgbClr val="0D143A"/>
-          </a:solidFill>
-          <a:ln>
-            <a:noFill/>
-          </a:ln>
-        </p:spPr>
-        <p:style>
-          <a:lnRef idx="1">
-            <a:schemeClr val="accent1"/>
-          </a:lnRef>
-          <a:fillRef idx="3">
-            <a:schemeClr val="accent1"/>
-          </a:fillRef>
-          <a:effectRef idx="2">
-            <a:schemeClr val="accent1"/>
-          </a:effectRef>
-          <a:fontRef idx="minor">
-            <a:schemeClr val="lt1"/>
-          </a:fontRef>
-        </p:style>
-        <p:txBody>
-          <a:bodyPr rtlCol="0" anchor="ctr"/>
-          <a:lstStyle/>
-          <a:p>
-            <a:pPr algn="ctr"/>
-          </a:p>
-        </p:txBody>
-      </p:sp>
-      <p:sp>
-        <p:nvSpPr>
-          <p:cNvPr id="11" name="Rectangle 10"/>
-          <p:cNvSpPr/>
-          <p:nvPr/>
-        </p:nvSpPr>
-        <p:spPr>
-          <a:xfrm>
-            <a:off x="457200" y="3310128"/>
-            <a:ext cx="5029200" cy="45720"/>
-          </a:xfrm>
-          <a:prstGeom prst="rect">
-            <a:avLst/>
-          </a:prstGeom>
-          <a:solidFill>
-            <a:srgbClr val="C9A84C"/>
-          </a:solidFill>
-          <a:ln>
-            <a:noFill/>
-          </a:ln>
-        </p:spPr>
-        <p:style>
-          <a:lnRef idx="1">
-            <a:schemeClr val="accent1"/>
-          </a:lnRef>
-          <a:fillRef idx="3">
-            <a:schemeClr val="accent1"/>
-          </a:fillRef>
-          <a:effectRef idx="2">
-            <a:schemeClr val="accent1"/>
-          </a:effectRef>
-          <a:fontRef idx="minor">
-            <a:schemeClr val="lt1"/>
-          </a:fontRef>
-        </p:style>
-        <p:txBody>
-          <a:bodyPr rtlCol="0" anchor="ctr"/>
-          <a:lstStyle/>
-          <a:p>
-            <a:pPr algn="ctr"/>
-          </a:p>
-        </p:txBody>
-      </p:sp>
-      <p:sp>
-        <p:nvSpPr>
-          <p:cNvPr id="12" name="TextBox 11"/>
+              <a:t>WHO WE'RE PARTNERING WITH</a:t>
+            </a:r>
+          </a:p>
+        </p:txBody>
+      </p:sp>
+      <p:sp>
+        <p:nvSpPr>
+          <p:cNvPr id="11" name="TextBox 10"/>
           <p:cNvSpPr txBox="1"/>
           <p:nvPr/>
         </p:nvSpPr>
         <p:spPr>
           <a:xfrm>
-            <a:off x="658368" y="3419856"/>
-            <a:ext cx="4681728" cy="310896"/>
+            <a:off x="658368" y="3017520"/>
+            <a:ext cx="4681728" cy="1060704"/>
           </a:xfrm>
           <a:prstGeom prst="rect">
             <a:avLst/>
@@ -6662,27 +6690,113 @@
           <a:p>
             <a:pPr algn="l"/>
             <a:r>
-              <a:rPr sz="950" b="1" i="0">
-                <a:solidFill>
-                  <a:srgbClr val="C9A84C"/>
+              <a:rPr sz="1100" b="0" i="0">
+                <a:solidFill>
+                  <a:srgbClr val="9096B2"/>
                 </a:solidFill>
                 <a:latin typeface="Calibri"/>
               </a:rPr>
-              <a:t>FOUNDING PARTNERS + ALIGNED INVESTORS</a:t>
-            </a:r>
-          </a:p>
-        </p:txBody>
-      </p:sp>
-      <p:sp>
-        <p:nvSpPr>
-          <p:cNvPr id="13" name="TextBox 12"/>
+              <a:t>Fortune 1000 organizations and aligned investors. 90-day validation partnership. Direct founder access. First-mover positioning.</a:t>
+            </a:r>
+          </a:p>
+        </p:txBody>
+      </p:sp>
+      <p:sp>
+        <p:nvSpPr>
+          <p:cNvPr id="12" name="Rectangle 11"/>
+          <p:cNvSpPr/>
+          <p:nvPr/>
+        </p:nvSpPr>
+        <p:spPr>
+          <a:xfrm>
+            <a:off x="6492240" y="2542032"/>
+            <a:ext cx="5029200" cy="1664208"/>
+          </a:xfrm>
+          <a:prstGeom prst="rect">
+            <a:avLst/>
+          </a:prstGeom>
+          <a:solidFill>
+            <a:srgbClr val="0D143A"/>
+          </a:solidFill>
+          <a:ln>
+            <a:noFill/>
+          </a:ln>
+        </p:spPr>
+        <p:style>
+          <a:lnRef idx="1">
+            <a:schemeClr val="accent1"/>
+          </a:lnRef>
+          <a:fillRef idx="3">
+            <a:schemeClr val="accent1"/>
+          </a:fillRef>
+          <a:effectRef idx="2">
+            <a:schemeClr val="accent1"/>
+          </a:effectRef>
+          <a:fontRef idx="minor">
+            <a:schemeClr val="lt1"/>
+          </a:fontRef>
+        </p:style>
+        <p:txBody>
+          <a:bodyPr rtlCol="0" anchor="ctr"/>
+          <a:lstStyle/>
+          <a:p>
+            <a:pPr algn="ctr"/>
+          </a:p>
+        </p:txBody>
+      </p:sp>
+      <p:sp>
+        <p:nvSpPr>
+          <p:cNvPr id="13" name="Rectangle 12"/>
+          <p:cNvSpPr/>
+          <p:nvPr/>
+        </p:nvSpPr>
+        <p:spPr>
+          <a:xfrm>
+            <a:off x="6492240" y="2542032"/>
+            <a:ext cx="5029200" cy="45720"/>
+          </a:xfrm>
+          <a:prstGeom prst="rect">
+            <a:avLst/>
+          </a:prstGeom>
+          <a:solidFill>
+            <a:srgbClr val="2B8A6E"/>
+          </a:solidFill>
+          <a:ln>
+            <a:noFill/>
+          </a:ln>
+        </p:spPr>
+        <p:style>
+          <a:lnRef idx="1">
+            <a:schemeClr val="accent1"/>
+          </a:lnRef>
+          <a:fillRef idx="3">
+            <a:schemeClr val="accent1"/>
+          </a:fillRef>
+          <a:effectRef idx="2">
+            <a:schemeClr val="accent1"/>
+          </a:effectRef>
+          <a:fontRef idx="minor">
+            <a:schemeClr val="lt1"/>
+          </a:fontRef>
+        </p:style>
+        <p:txBody>
+          <a:bodyPr rtlCol="0" anchor="ctr"/>
+          <a:lstStyle/>
+          <a:p>
+            <a:pPr algn="ctr"/>
+          </a:p>
+        </p:txBody>
+      </p:sp>
+      <p:sp>
+        <p:nvSpPr>
+          <p:cNvPr id="14" name="TextBox 13"/>
           <p:cNvSpPr txBox="1"/>
           <p:nvPr/>
         </p:nvSpPr>
         <p:spPr>
           <a:xfrm>
-            <a:off x="658368" y="3785615"/>
-            <a:ext cx="4681728" cy="914400"/>
+            <a:off x="6693408" y="2651760"/>
+            <a:ext cx="4681728" cy="292608"/>
           </a:xfrm>
           <a:prstGeom prst="rect">
             <a:avLst/>
@@ -6697,113 +6811,27 @@
           <a:p>
             <a:pPr algn="l"/>
             <a:r>
-              <a:rPr sz="1050" b="0" i="0">
-                <a:solidFill>
-                  <a:srgbClr val="9096B2"/>
+              <a:rPr sz="950" b="1" i="0">
+                <a:solidFill>
+                  <a:srgbClr val="2B8A6E"/>
                 </a:solidFill>
                 <a:latin typeface="Calibri"/>
               </a:rPr>
-              <a:t>90-day validation partnership  ·  Direct founder access  ·  First-mover enterprise positioning</a:t>
-            </a:r>
-          </a:p>
-        </p:txBody>
-      </p:sp>
-      <p:sp>
-        <p:nvSpPr>
-          <p:cNvPr id="14" name="Rectangle 13"/>
-          <p:cNvSpPr/>
-          <p:nvPr/>
-        </p:nvSpPr>
-        <p:spPr>
-          <a:xfrm>
-            <a:off x="6492240" y="3310128"/>
-            <a:ext cx="5029200" cy="1572768"/>
-          </a:xfrm>
-          <a:prstGeom prst="rect">
-            <a:avLst/>
-          </a:prstGeom>
-          <a:solidFill>
-            <a:srgbClr val="0D143A"/>
-          </a:solidFill>
-          <a:ln>
-            <a:noFill/>
-          </a:ln>
-        </p:spPr>
-        <p:style>
-          <a:lnRef idx="1">
-            <a:schemeClr val="accent1"/>
-          </a:lnRef>
-          <a:fillRef idx="3">
-            <a:schemeClr val="accent1"/>
-          </a:fillRef>
-          <a:effectRef idx="2">
-            <a:schemeClr val="accent1"/>
-          </a:effectRef>
-          <a:fontRef idx="minor">
-            <a:schemeClr val="lt1"/>
-          </a:fontRef>
-        </p:style>
-        <p:txBody>
-          <a:bodyPr rtlCol="0" anchor="ctr"/>
-          <a:lstStyle/>
-          <a:p>
-            <a:pPr algn="ctr"/>
-          </a:p>
-        </p:txBody>
-      </p:sp>
-      <p:sp>
-        <p:nvSpPr>
-          <p:cNvPr id="15" name="Rectangle 14"/>
-          <p:cNvSpPr/>
-          <p:nvPr/>
-        </p:nvSpPr>
-        <p:spPr>
-          <a:xfrm>
-            <a:off x="6492240" y="3310128"/>
-            <a:ext cx="5029200" cy="45720"/>
-          </a:xfrm>
-          <a:prstGeom prst="rect">
-            <a:avLst/>
-          </a:prstGeom>
-          <a:solidFill>
-            <a:srgbClr val="2B8A6E"/>
-          </a:solidFill>
-          <a:ln>
-            <a:noFill/>
-          </a:ln>
-        </p:spPr>
-        <p:style>
-          <a:lnRef idx="1">
-            <a:schemeClr val="accent1"/>
-          </a:lnRef>
-          <a:fillRef idx="3">
-            <a:schemeClr val="accent1"/>
-          </a:fillRef>
-          <a:effectRef idx="2">
-            <a:schemeClr val="accent1"/>
-          </a:effectRef>
-          <a:fontRef idx="minor">
-            <a:schemeClr val="lt1"/>
-          </a:fontRef>
-        </p:style>
-        <p:txBody>
-          <a:bodyPr rtlCol="0" anchor="ctr"/>
-          <a:lstStyle/>
-          <a:p>
-            <a:pPr algn="ctr"/>
-          </a:p>
-        </p:txBody>
-      </p:sp>
-      <p:sp>
-        <p:nvSpPr>
-          <p:cNvPr id="16" name="TextBox 15"/>
+              <a:t>NEXT STEP: EXECUTIVE SCENARIO SESSION</a:t>
+            </a:r>
+          </a:p>
+        </p:txBody>
+      </p:sp>
+      <p:sp>
+        <p:nvSpPr>
+          <p:cNvPr id="15" name="TextBox 14"/>
           <p:cNvSpPr txBox="1"/>
           <p:nvPr/>
         </p:nvSpPr>
         <p:spPr>
           <a:xfrm>
-            <a:off x="6693408" y="3419856"/>
-            <a:ext cx="4681728" cy="310896"/>
+            <a:off x="6693408" y="3017520"/>
+            <a:ext cx="4681728" cy="1060704"/>
           </a:xfrm>
           <a:prstGeom prst="rect">
             <a:avLst/>
@@ -6818,14 +6846,57 @@
           <a:p>
             <a:pPr algn="l"/>
             <a:r>
-              <a:rPr sz="950" b="1" i="0">
-                <a:solidFill>
-                  <a:srgbClr val="2B8A6E"/>
+              <a:rPr sz="1100" b="0" i="0">
+                <a:solidFill>
+                  <a:srgbClr val="9096B2"/>
                 </a:solidFill>
                 <a:latin typeface="Calibri"/>
               </a:rPr>
-              <a:t>IMMEDIATE NEXT STEP</a:t>
-            </a:r>
+              <a:t>We walk your specific trigger context through Readiness OS live — signal detection through 12-minute execution.</a:t>
+            </a:r>
+          </a:p>
+        </p:txBody>
+      </p:sp>
+      <p:sp>
+        <p:nvSpPr>
+          <p:cNvPr id="16" name="Rectangle 15"/>
+          <p:cNvSpPr/>
+          <p:nvPr/>
+        </p:nvSpPr>
+        <p:spPr>
+          <a:xfrm>
+            <a:off x="1097280" y="4407408"/>
+            <a:ext cx="9994392" cy="530352"/>
+          </a:xfrm>
+          <a:prstGeom prst="rect">
+            <a:avLst/>
+          </a:prstGeom>
+          <a:solidFill>
+            <a:srgbClr val="0C1026"/>
+          </a:solidFill>
+          <a:ln>
+            <a:noFill/>
+          </a:ln>
+        </p:spPr>
+        <p:style>
+          <a:lnRef idx="1">
+            <a:schemeClr val="accent1"/>
+          </a:lnRef>
+          <a:fillRef idx="3">
+            <a:schemeClr val="accent1"/>
+          </a:fillRef>
+          <a:effectRef idx="2">
+            <a:schemeClr val="accent1"/>
+          </a:effectRef>
+          <a:fontRef idx="minor">
+            <a:schemeClr val="lt1"/>
+          </a:fontRef>
+        </p:style>
+        <p:txBody>
+          <a:bodyPr rtlCol="0" anchor="ctr"/>
+          <a:lstStyle/>
+          <a:p>
+            <a:pPr algn="ctr"/>
           </a:p>
         </p:txBody>
       </p:sp>
@@ -6837,8 +6908,8 @@
         </p:nvSpPr>
         <p:spPr>
           <a:xfrm>
-            <a:off x="6693408" y="3785615"/>
-            <a:ext cx="4681728" cy="914400"/>
+            <a:off x="1280160" y="4498848"/>
+            <a:ext cx="9628632" cy="384048"/>
           </a:xfrm>
           <a:prstGeom prst="rect">
             <a:avLst/>
@@ -6851,15 +6922,15 @@
           </a:bodyPr>
           <a:lstStyle/>
           <a:p>
-            <a:pPr algn="l"/>
-            <a:r>
-              <a:rPr sz="1050" b="0" i="0">
-                <a:solidFill>
-                  <a:srgbClr val="9096B2"/>
-                </a:solidFill>
-                <a:latin typeface="Calibri"/>
+            <a:pPr algn="ctr"/>
+            <a:r>
+              <a:rPr sz="1400" b="1" i="1">
+                <a:solidFill>
+                  <a:srgbClr val="C9A84C"/>
+                </a:solidFill>
+                <a:latin typeface="Georgia"/>
               </a:rPr>
-              <a:t>Executive Scenario Session — we walk your specific trigger context through Readiness OS live, in real time.</a:t>
+              <a:t>"The response is ready before the trigger fires."</a:t>
             </a:r>
           </a:p>
         </p:txBody>
@@ -6872,8 +6943,8 @@
         </p:nvSpPr>
         <p:spPr>
           <a:xfrm>
-            <a:off x="457200" y="5138928"/>
-            <a:ext cx="11274552" cy="274320"/>
+            <a:off x="457200" y="5175504"/>
+            <a:ext cx="11274552" cy="256032"/>
           </a:xfrm>
           <a:prstGeom prst="rect">
             <a:avLst/>
@@ -6994,7 +7065,7 @@
         <p:spPr>
           <a:xfrm>
             <a:off x="274320" y="6592824"/>
-            <a:ext cx="4572000" cy="219456"/>
+            <a:ext cx="5486400" cy="219456"/>
           </a:xfrm>
           <a:prstGeom prst="rect">
             <a:avLst/>
@@ -7082,7 +7153,7 @@
         <p:spPr>
           <a:xfrm>
             <a:off x="0" y="0"/>
-            <a:ext cx="12188952" cy="6858000"/>
+            <a:ext cx="4663440" cy="6858000"/>
           </a:xfrm>
           <a:prstGeom prst="rect">
             <a:avLst/>
@@ -7119,6 +7190,49 @@
       <p:sp>
         <p:nvSpPr>
           <p:cNvPr id="3" name="Rectangle 2"/>
+          <p:cNvSpPr/>
+          <p:nvPr/>
+        </p:nvSpPr>
+        <p:spPr>
+          <a:xfrm>
+            <a:off x="4663440" y="0"/>
+            <a:ext cx="7525512" cy="6858000"/>
+          </a:xfrm>
+          <a:prstGeom prst="rect">
+            <a:avLst/>
+          </a:prstGeom>
+          <a:solidFill>
+            <a:srgbClr val="0D143A"/>
+          </a:solidFill>
+          <a:ln>
+            <a:noFill/>
+          </a:ln>
+        </p:spPr>
+        <p:style>
+          <a:lnRef idx="1">
+            <a:schemeClr val="accent1"/>
+          </a:lnRef>
+          <a:fillRef idx="3">
+            <a:schemeClr val="accent1"/>
+          </a:fillRef>
+          <a:effectRef idx="2">
+            <a:schemeClr val="accent1"/>
+          </a:effectRef>
+          <a:fontRef idx="minor">
+            <a:schemeClr val="lt1"/>
+          </a:fontRef>
+        </p:style>
+        <p:txBody>
+          <a:bodyPr rtlCol="0" anchor="ctr"/>
+          <a:lstStyle/>
+          <a:p>
+            <a:pPr algn="ctr"/>
+          </a:p>
+        </p:txBody>
+      </p:sp>
+      <p:sp>
+        <p:nvSpPr>
+          <p:cNvPr id="4" name="Rectangle 3"/>
           <p:cNvSpPr/>
           <p:nvPr/>
         </p:nvSpPr>
@@ -7161,7 +7275,7 @@
       </p:sp>
       <p:sp>
         <p:nvSpPr>
-          <p:cNvPr id="4" name="Rectangle 3"/>
+          <p:cNvPr id="5" name="Rectangle 4"/>
           <p:cNvSpPr/>
           <p:nvPr/>
         </p:nvSpPr>
@@ -7204,7 +7318,7 @@
       </p:sp>
       <p:pic>
         <p:nvPicPr>
-          <p:cNvPr id="5" name="Picture 4" descr="vm_logo_hires.png"/>
+          <p:cNvPr id="6" name="Picture 5" descr="vm_logo_hires.png"/>
           <p:cNvPicPr>
             <a:picLocks noChangeAspect="1"/>
           </p:cNvPicPr>
@@ -7228,14 +7342,14 @@
       </p:pic>
       <p:sp>
         <p:nvSpPr>
-          <p:cNvPr id="6" name="TextBox 5"/>
+          <p:cNvPr id="7" name="TextBox 6"/>
           <p:cNvSpPr txBox="1"/>
           <p:nvPr/>
         </p:nvSpPr>
         <p:spPr>
           <a:xfrm>
-            <a:off x="8988552" y="192024"/>
-            <a:ext cx="3017520" cy="237744"/>
+            <a:off x="8897112" y="192024"/>
+            <a:ext cx="3108960" cy="237744"/>
           </a:xfrm>
           <a:prstGeom prst="rect">
             <a:avLst/>
@@ -7263,13 +7377,13 @@
       </p:sp>
       <p:sp>
         <p:nvSpPr>
-          <p:cNvPr id="7" name="Rectangle 6"/>
-          <p:cNvSpPr/>
-          <p:nvPr/>
-        </p:nvSpPr>
-        <p:spPr>
-          <a:xfrm>
-            <a:off x="402336" y="914400"/>
+          <p:cNvPr id="8" name="Rectangle 7"/>
+          <p:cNvSpPr/>
+          <p:nvPr/>
+        </p:nvSpPr>
+        <p:spPr>
+          <a:xfrm>
+            <a:off x="402336" y="877824"/>
             <a:ext cx="457200" cy="36576"/>
           </a:xfrm>
           <a:prstGeom prst="rect">
@@ -7306,14 +7420,14 @@
       </p:sp>
       <p:sp>
         <p:nvSpPr>
-          <p:cNvPr id="8" name="TextBox 7"/>
+          <p:cNvPr id="9" name="TextBox 8"/>
           <p:cNvSpPr txBox="1"/>
           <p:nvPr/>
         </p:nvSpPr>
         <p:spPr>
           <a:xfrm>
-            <a:off x="402336" y="1024128"/>
-            <a:ext cx="4937760" cy="1371600"/>
+            <a:off x="402336" y="987552"/>
+            <a:ext cx="4059936" cy="1426464"/>
           </a:xfrm>
           <a:prstGeom prst="rect">
             <a:avLst/>
@@ -7326,30 +7440,65 @@
           </a:bodyPr>
           <a:lstStyle/>
           <a:p>
-            <a:pPr algn="l"/>
-            <a:r>
-              <a:rPr sz="2600" b="1" i="0">
+            <a:pPr algn="l">
+              <a:spcAft>
+                <a:spcPts val="200"/>
+              </a:spcAft>
+            </a:pPr>
+            <a:r>
+              <a:rPr sz="1900" b="1" i="0">
                 <a:solidFill>
                   <a:srgbClr val="0A0F2E"/>
                 </a:solidFill>
                 <a:latin typeface="Georgia"/>
               </a:rPr>
-              <a:t>Most organizations miss the window
-before they even begin to align.</a:t>
-            </a:r>
-          </a:p>
-        </p:txBody>
-      </p:sp>
-      <p:sp>
-        <p:nvSpPr>
-          <p:cNvPr id="9" name="Rectangle 8"/>
-          <p:cNvSpPr/>
-          <p:nvPr/>
-        </p:nvSpPr>
-        <p:spPr>
-          <a:xfrm>
-            <a:off x="402336" y="2560320"/>
-            <a:ext cx="4937760" cy="822960"/>
+              <a:t>Most organizations don't lose because</a:t>
+            </a:r>
+          </a:p>
+          <a:p>
+            <a:pPr algn="l">
+              <a:spcAft>
+                <a:spcPts val="200"/>
+              </a:spcAft>
+            </a:pPr>
+            <a:r>
+              <a:rPr sz="1900" b="1" i="0">
+                <a:solidFill>
+                  <a:srgbClr val="0A0F2E"/>
+                </a:solidFill>
+                <a:latin typeface="Georgia"/>
+              </a:rPr>
+              <a:t>they can't execute — they lose because</a:t>
+            </a:r>
+          </a:p>
+          <a:p>
+            <a:pPr algn="l">
+              <a:spcAft>
+                <a:spcPts val="200"/>
+              </a:spcAft>
+            </a:pPr>
+            <a:r>
+              <a:rPr sz="1900" b="1" i="0">
+                <a:solidFill>
+                  <a:srgbClr val="0A0F2E"/>
+                </a:solidFill>
+                <a:latin typeface="Georgia"/>
+              </a:rPr>
+              <a:t>they detect too late.</a:t>
+            </a:r>
+          </a:p>
+        </p:txBody>
+      </p:sp>
+      <p:sp>
+        <p:nvSpPr>
+          <p:cNvPr id="10" name="Rectangle 9"/>
+          <p:cNvSpPr/>
+          <p:nvPr/>
+        </p:nvSpPr>
+        <p:spPr>
+          <a:xfrm>
+            <a:off x="402336" y="2523744"/>
+            <a:ext cx="4059936" cy="749808"/>
           </a:xfrm>
           <a:prstGeom prst="rect">
             <a:avLst/>
@@ -7385,14 +7534,14 @@
       </p:sp>
       <p:sp>
         <p:nvSpPr>
-          <p:cNvPr id="10" name="Rectangle 9"/>
-          <p:cNvSpPr/>
-          <p:nvPr/>
-        </p:nvSpPr>
-        <p:spPr>
-          <a:xfrm>
-            <a:off x="402336" y="2560320"/>
-            <a:ext cx="45720" cy="822960"/>
+          <p:cNvPr id="11" name="Rectangle 10"/>
+          <p:cNvSpPr/>
+          <p:nvPr/>
+        </p:nvSpPr>
+        <p:spPr>
+          <a:xfrm>
+            <a:off x="402336" y="2523744"/>
+            <a:ext cx="45720" cy="749808"/>
           </a:xfrm>
           <a:prstGeom prst="rect">
             <a:avLst/>
@@ -7428,14 +7577,14 @@
       </p:sp>
       <p:sp>
         <p:nvSpPr>
-          <p:cNvPr id="11" name="TextBox 10"/>
+          <p:cNvPr id="12" name="TextBox 11"/>
           <p:cNvSpPr txBox="1"/>
           <p:nvPr/>
         </p:nvSpPr>
         <p:spPr>
           <a:xfrm>
-            <a:off x="566928" y="2651760"/>
-            <a:ext cx="4663440" cy="256032"/>
+            <a:off x="566928" y="2615184"/>
+            <a:ext cx="3803904" cy="237744"/>
           </a:xfrm>
           <a:prstGeom prst="rect">
             <a:avLst/>
@@ -7450,7 +7599,7 @@
           <a:p>
             <a:pPr algn="l"/>
             <a:r>
-              <a:rPr sz="900" b="1" i="0">
+              <a:rPr sz="850" b="1" i="0">
                 <a:solidFill>
                   <a:srgbClr val="0A0F2E"/>
                 </a:solidFill>
@@ -7463,14 +7612,14 @@
       </p:sp>
       <p:sp>
         <p:nvSpPr>
-          <p:cNvPr id="12" name="TextBox 11"/>
+          <p:cNvPr id="13" name="TextBox 12"/>
           <p:cNvSpPr txBox="1"/>
           <p:nvPr/>
         </p:nvSpPr>
         <p:spPr>
           <a:xfrm>
-            <a:off x="566928" y="2944368"/>
-            <a:ext cx="4663440" cy="365760"/>
+            <a:off x="566928" y="2889504"/>
+            <a:ext cx="3803904" cy="329184"/>
           </a:xfrm>
           <a:prstGeom prst="rect">
             <a:avLst/>
@@ -7485,7 +7634,7 @@
           <a:p>
             <a:pPr algn="l"/>
             <a:r>
-              <a:rPr sz="1100" b="0" i="0">
+              <a:rPr sz="1050" b="0" i="0">
                 <a:solidFill>
                   <a:srgbClr val="444C66"/>
                 </a:solidFill>
@@ -7498,14 +7647,14 @@
       </p:sp>
       <p:sp>
         <p:nvSpPr>
-          <p:cNvPr id="13" name="Rectangle 12"/>
-          <p:cNvSpPr/>
-          <p:nvPr/>
-        </p:nvSpPr>
-        <p:spPr>
-          <a:xfrm>
-            <a:off x="402336" y="3511296"/>
-            <a:ext cx="4937760" cy="822960"/>
+          <p:cNvPr id="14" name="Rectangle 13"/>
+          <p:cNvSpPr/>
+          <p:nvPr/>
+        </p:nvSpPr>
+        <p:spPr>
+          <a:xfrm>
+            <a:off x="402336" y="3401568"/>
+            <a:ext cx="4059936" cy="749808"/>
           </a:xfrm>
           <a:prstGeom prst="rect">
             <a:avLst/>
@@ -7541,14 +7690,14 @@
       </p:sp>
       <p:sp>
         <p:nvSpPr>
-          <p:cNvPr id="14" name="Rectangle 13"/>
-          <p:cNvSpPr/>
-          <p:nvPr/>
-        </p:nvSpPr>
-        <p:spPr>
-          <a:xfrm>
-            <a:off x="402336" y="3511296"/>
-            <a:ext cx="45720" cy="822960"/>
+          <p:cNvPr id="15" name="Rectangle 14"/>
+          <p:cNvSpPr/>
+          <p:nvPr/>
+        </p:nvSpPr>
+        <p:spPr>
+          <a:xfrm>
+            <a:off x="402336" y="3401568"/>
+            <a:ext cx="45720" cy="749808"/>
           </a:xfrm>
           <a:prstGeom prst="rect">
             <a:avLst/>
@@ -7584,14 +7733,14 @@
       </p:sp>
       <p:sp>
         <p:nvSpPr>
-          <p:cNvPr id="15" name="TextBox 14"/>
+          <p:cNvPr id="16" name="TextBox 15"/>
           <p:cNvSpPr txBox="1"/>
           <p:nvPr/>
         </p:nvSpPr>
         <p:spPr>
           <a:xfrm>
-            <a:off x="566928" y="3602736"/>
-            <a:ext cx="4663440" cy="256032"/>
+            <a:off x="566928" y="3493008"/>
+            <a:ext cx="3803904" cy="237744"/>
           </a:xfrm>
           <a:prstGeom prst="rect">
             <a:avLst/>
@@ -7606,27 +7755,27 @@
           <a:p>
             <a:pPr algn="l"/>
             <a:r>
-              <a:rPr sz="900" b="1" i="0">
+              <a:rPr sz="850" b="1" i="0">
                 <a:solidFill>
                   <a:srgbClr val="0A0F2E"/>
                 </a:solidFill>
                 <a:latin typeface="Calibri"/>
               </a:rPr>
-              <a:t>UNCLEAR AUTHORITY</a:t>
-            </a:r>
-          </a:p>
-        </p:txBody>
-      </p:sp>
-      <p:sp>
-        <p:nvSpPr>
-          <p:cNvPr id="16" name="TextBox 15"/>
+              <a:t>NO PRE-STAGED DECISION PATH</a:t>
+            </a:r>
+          </a:p>
+        </p:txBody>
+      </p:sp>
+      <p:sp>
+        <p:nvSpPr>
+          <p:cNvPr id="17" name="TextBox 16"/>
           <p:cNvSpPr txBox="1"/>
           <p:nvPr/>
         </p:nvSpPr>
         <p:spPr>
           <a:xfrm>
-            <a:off x="566928" y="3895344"/>
-            <a:ext cx="4663440" cy="365760"/>
+            <a:off x="566928" y="3767328"/>
+            <a:ext cx="3803904" cy="329184"/>
           </a:xfrm>
           <a:prstGeom prst="rect">
             <a:avLst/>
@@ -7641,27 +7790,27 @@
           <a:p>
             <a:pPr algn="l"/>
             <a:r>
-              <a:rPr sz="1100" b="0" i="0">
+              <a:rPr sz="1050" b="0" i="0">
                 <a:solidFill>
                   <a:srgbClr val="444C66"/>
                 </a:solidFill>
                 <a:latin typeface="Calibri"/>
               </a:rPr>
-              <a:t>No pre-staged decision path. Ownership is contested in real time.</a:t>
-            </a:r>
-          </a:p>
-        </p:txBody>
-      </p:sp>
-      <p:sp>
-        <p:nvSpPr>
-          <p:cNvPr id="17" name="Rectangle 16"/>
-          <p:cNvSpPr/>
-          <p:nvPr/>
-        </p:nvSpPr>
-        <p:spPr>
-          <a:xfrm>
-            <a:off x="402336" y="4462272"/>
-            <a:ext cx="4937760" cy="822960"/>
+              <a:t>Ownership is contested in real time. No protocol is ready to deploy.</a:t>
+            </a:r>
+          </a:p>
+        </p:txBody>
+      </p:sp>
+      <p:sp>
+        <p:nvSpPr>
+          <p:cNvPr id="18" name="Rectangle 17"/>
+          <p:cNvSpPr/>
+          <p:nvPr/>
+        </p:nvSpPr>
+        <p:spPr>
+          <a:xfrm>
+            <a:off x="402336" y="4279392"/>
+            <a:ext cx="4059936" cy="749808"/>
           </a:xfrm>
           <a:prstGeom prst="rect">
             <a:avLst/>
@@ -7697,14 +7846,14 @@
       </p:sp>
       <p:sp>
         <p:nvSpPr>
-          <p:cNvPr id="18" name="Rectangle 17"/>
-          <p:cNvSpPr/>
-          <p:nvPr/>
-        </p:nvSpPr>
-        <p:spPr>
-          <a:xfrm>
-            <a:off x="402336" y="4462272"/>
-            <a:ext cx="45720" cy="822960"/>
+          <p:cNvPr id="19" name="Rectangle 18"/>
+          <p:cNvSpPr/>
+          <p:nvPr/>
+        </p:nvSpPr>
+        <p:spPr>
+          <a:xfrm>
+            <a:off x="402336" y="4279392"/>
+            <a:ext cx="45720" cy="749808"/>
           </a:xfrm>
           <a:prstGeom prst="rect">
             <a:avLst/>
@@ -7740,14 +7889,14 @@
       </p:sp>
       <p:sp>
         <p:nvSpPr>
-          <p:cNvPr id="19" name="TextBox 18"/>
+          <p:cNvPr id="20" name="TextBox 19"/>
           <p:cNvSpPr txBox="1"/>
           <p:nvPr/>
         </p:nvSpPr>
         <p:spPr>
           <a:xfrm>
-            <a:off x="566928" y="4553712"/>
-            <a:ext cx="4663440" cy="256032"/>
+            <a:off x="566928" y="4370832"/>
+            <a:ext cx="3803904" cy="237744"/>
           </a:xfrm>
           <a:prstGeom prst="rect">
             <a:avLst/>
@@ -7762,7 +7911,7 @@
           <a:p>
             <a:pPr algn="l"/>
             <a:r>
-              <a:rPr sz="900" b="1" i="0">
+              <a:rPr sz="850" b="1" i="0">
                 <a:solidFill>
                   <a:srgbClr val="0A0F2E"/>
                 </a:solidFill>
@@ -7775,14 +7924,14 @@
       </p:sp>
       <p:sp>
         <p:nvSpPr>
-          <p:cNvPr id="20" name="TextBox 19"/>
+          <p:cNvPr id="21" name="TextBox 20"/>
           <p:cNvSpPr txBox="1"/>
           <p:nvPr/>
         </p:nvSpPr>
         <p:spPr>
           <a:xfrm>
-            <a:off x="566928" y="4846320"/>
-            <a:ext cx="4663440" cy="365760"/>
+            <a:off x="566928" y="4645152"/>
+            <a:ext cx="3803904" cy="329184"/>
           </a:xfrm>
           <a:prstGeom prst="rect">
             <a:avLst/>
@@ -7797,7 +7946,7 @@
           <a:p>
             <a:pPr algn="l"/>
             <a:r>
-              <a:rPr sz="1100" b="0" i="0">
+              <a:rPr sz="1050" b="0" i="0">
                 <a:solidFill>
                   <a:srgbClr val="444C66"/>
                 </a:solidFill>
@@ -7810,14 +7959,14 @@
       </p:sp>
       <p:sp>
         <p:nvSpPr>
-          <p:cNvPr id="21" name="TextBox 20"/>
+          <p:cNvPr id="22" name="TextBox 21"/>
           <p:cNvSpPr txBox="1"/>
           <p:nvPr/>
         </p:nvSpPr>
         <p:spPr>
           <a:xfrm>
-            <a:off x="402336" y="6016752"/>
-            <a:ext cx="4937760" cy="402336"/>
+            <a:off x="402336" y="6053328"/>
+            <a:ext cx="4059936" cy="384048"/>
           </a:xfrm>
           <a:prstGeom prst="rect">
             <a:avLst/>
@@ -7845,14 +7994,14 @@
       </p:sp>
       <p:sp>
         <p:nvSpPr>
-          <p:cNvPr id="22" name="TextBox 21"/>
+          <p:cNvPr id="23" name="TextBox 22"/>
           <p:cNvSpPr txBox="1"/>
           <p:nvPr/>
         </p:nvSpPr>
         <p:spPr>
           <a:xfrm>
-            <a:off x="5797296" y="896112"/>
-            <a:ext cx="6117336" cy="256032"/>
+            <a:off x="4937760" y="877824"/>
+            <a:ext cx="7141464" cy="237744"/>
           </a:xfrm>
           <a:prstGeom prst="rect">
             <a:avLst/>
@@ -7869,67 +8018,67 @@
             <a:r>
               <a:rPr sz="800" b="1" i="0">
                 <a:solidFill>
-                  <a:srgbClr val="5A627A"/>
+                  <a:srgbClr val="9096B2"/>
                 </a:solidFill>
                 <a:latin typeface="Calibri"/>
               </a:rPr>
-              <a:t>THE TYPICAL RESPONSE TIMELINE</a:t>
-            </a:r>
-          </a:p>
-        </p:txBody>
-      </p:sp>
-      <p:sp>
-        <p:nvSpPr>
-          <p:cNvPr id="23" name="Rectangle 22"/>
-          <p:cNvSpPr/>
-          <p:nvPr/>
-        </p:nvSpPr>
-        <p:spPr>
-          <a:xfrm>
-            <a:off x="5797296" y="2450592"/>
-            <a:ext cx="6117336" cy="54864"/>
-          </a:xfrm>
-          <a:prstGeom prst="rect">
-            <a:avLst/>
-          </a:prstGeom>
-          <a:solidFill>
-            <a:srgbClr val="E6E2D6"/>
-          </a:solidFill>
-          <a:ln>
-            <a:noFill/>
-          </a:ln>
-        </p:spPr>
-        <p:style>
-          <a:lnRef idx="1">
-            <a:schemeClr val="accent1"/>
-          </a:lnRef>
-          <a:fillRef idx="3">
-            <a:schemeClr val="accent1"/>
-          </a:fillRef>
-          <a:effectRef idx="2">
-            <a:schemeClr val="accent1"/>
-          </a:effectRef>
-          <a:fontRef idx="minor">
-            <a:schemeClr val="lt1"/>
-          </a:fontRef>
-        </p:style>
-        <p:txBody>
-          <a:bodyPr rtlCol="0" anchor="ctr"/>
-          <a:lstStyle/>
-          <a:p>
-            <a:pPr algn="ctr"/>
-          </a:p>
-        </p:txBody>
-      </p:sp>
-      <p:sp>
-        <p:nvSpPr>
-          <p:cNvPr id="24" name="Oval 23"/>
-          <p:cNvSpPr/>
-          <p:nvPr/>
-        </p:nvSpPr>
-        <p:spPr>
-          <a:xfrm>
-            <a:off x="5650992" y="2322576"/>
+              <a:t>TYPICAL RESPONSE TIMELINE</a:t>
+            </a:r>
+          </a:p>
+        </p:txBody>
+      </p:sp>
+      <p:sp>
+        <p:nvSpPr>
+          <p:cNvPr id="24" name="Rectangle 23"/>
+          <p:cNvSpPr/>
+          <p:nvPr/>
+        </p:nvSpPr>
+        <p:spPr>
+          <a:xfrm>
+            <a:off x="4937760" y="2432304"/>
+            <a:ext cx="7141464" cy="54864"/>
+          </a:xfrm>
+          <a:prstGeom prst="rect">
+            <a:avLst/>
+          </a:prstGeom>
+          <a:solidFill>
+            <a:srgbClr val="202644"/>
+          </a:solidFill>
+          <a:ln>
+            <a:noFill/>
+          </a:ln>
+        </p:spPr>
+        <p:style>
+          <a:lnRef idx="1">
+            <a:schemeClr val="accent1"/>
+          </a:lnRef>
+          <a:fillRef idx="3">
+            <a:schemeClr val="accent1"/>
+          </a:fillRef>
+          <a:effectRef idx="2">
+            <a:schemeClr val="accent1"/>
+          </a:effectRef>
+          <a:fontRef idx="minor">
+            <a:schemeClr val="lt1"/>
+          </a:fontRef>
+        </p:style>
+        <p:txBody>
+          <a:bodyPr rtlCol="0" anchor="ctr"/>
+          <a:lstStyle/>
+          <a:p>
+            <a:pPr algn="ctr"/>
+          </a:p>
+        </p:txBody>
+      </p:sp>
+      <p:sp>
+        <p:nvSpPr>
+          <p:cNvPr id="25" name="Oval 24"/>
+          <p:cNvSpPr/>
+          <p:nvPr/>
+        </p:nvSpPr>
+        <p:spPr>
+          <a:xfrm>
+            <a:off x="4791456" y="2304288"/>
             <a:ext cx="292608" cy="292608"/>
           </a:xfrm>
           <a:prstGeom prst="ellipse">
@@ -7966,14 +8115,14 @@
       </p:sp>
       <p:sp>
         <p:nvSpPr>
-          <p:cNvPr id="25" name="TextBox 24"/>
+          <p:cNvPr id="26" name="TextBox 25"/>
           <p:cNvSpPr txBox="1"/>
           <p:nvPr/>
         </p:nvSpPr>
         <p:spPr>
           <a:xfrm>
-            <a:off x="5157216" y="1700784"/>
-            <a:ext cx="1280160" cy="292608"/>
+            <a:off x="4297680" y="1682496"/>
+            <a:ext cx="1280160" cy="274320"/>
           </a:xfrm>
           <a:prstGeom prst="rect">
             <a:avLst/>
@@ -8001,14 +8150,14 @@
       </p:sp>
       <p:sp>
         <p:nvSpPr>
-          <p:cNvPr id="26" name="TextBox 25"/>
+          <p:cNvPr id="27" name="TextBox 26"/>
           <p:cNvSpPr txBox="1"/>
           <p:nvPr/>
         </p:nvSpPr>
         <p:spPr>
           <a:xfrm>
-            <a:off x="5157216" y="2011680"/>
-            <a:ext cx="1280160" cy="292608"/>
+            <a:off x="4297680" y="1975104"/>
+            <a:ext cx="1280160" cy="274320"/>
           </a:xfrm>
           <a:prstGeom prst="rect">
             <a:avLst/>
@@ -8036,13 +8185,13 @@
       </p:sp>
       <p:sp>
         <p:nvSpPr>
-          <p:cNvPr id="27" name="Oval 26"/>
-          <p:cNvSpPr/>
-          <p:nvPr/>
-        </p:nvSpPr>
-        <p:spPr>
-          <a:xfrm>
-            <a:off x="8464966" y="2322576"/>
+          <p:cNvPr id="28" name="Oval 27"/>
+          <p:cNvSpPr/>
+          <p:nvPr/>
+        </p:nvSpPr>
+        <p:spPr>
+          <a:xfrm>
+            <a:off x="8076529" y="2304288"/>
             <a:ext cx="292608" cy="292608"/>
           </a:xfrm>
           <a:prstGeom prst="ellipse">
@@ -8079,14 +8228,14 @@
       </p:sp>
       <p:sp>
         <p:nvSpPr>
-          <p:cNvPr id="28" name="TextBox 27"/>
+          <p:cNvPr id="29" name="TextBox 28"/>
           <p:cNvSpPr txBox="1"/>
           <p:nvPr/>
         </p:nvSpPr>
         <p:spPr>
           <a:xfrm>
-            <a:off x="7971190" y="1700784"/>
-            <a:ext cx="1280160" cy="292608"/>
+            <a:off x="7582753" y="1682496"/>
+            <a:ext cx="1280160" cy="274320"/>
           </a:xfrm>
           <a:prstGeom prst="rect">
             <a:avLst/>
@@ -8114,14 +8263,14 @@
       </p:sp>
       <p:sp>
         <p:nvSpPr>
-          <p:cNvPr id="29" name="TextBox 28"/>
+          <p:cNvPr id="30" name="TextBox 29"/>
           <p:cNvSpPr txBox="1"/>
           <p:nvPr/>
         </p:nvSpPr>
         <p:spPr>
           <a:xfrm>
-            <a:off x="7971190" y="2011680"/>
-            <a:ext cx="1280160" cy="292608"/>
+            <a:off x="7582753" y="1975104"/>
+            <a:ext cx="1280160" cy="274320"/>
           </a:xfrm>
           <a:prstGeom prst="rect">
             <a:avLst/>
@@ -8149,13 +8298,13 @@
       </p:sp>
       <p:sp>
         <p:nvSpPr>
-          <p:cNvPr id="30" name="Oval 29"/>
-          <p:cNvSpPr/>
-          <p:nvPr/>
-        </p:nvSpPr>
-        <p:spPr>
-          <a:xfrm>
-            <a:off x="11278941" y="2322576"/>
+          <p:cNvPr id="31" name="Oval 30"/>
+          <p:cNvSpPr/>
+          <p:nvPr/>
+        </p:nvSpPr>
+        <p:spPr>
+          <a:xfrm>
+            <a:off x="11361602" y="2304288"/>
             <a:ext cx="292608" cy="292608"/>
           </a:xfrm>
           <a:prstGeom prst="ellipse">
@@ -8192,14 +8341,14 @@
       </p:sp>
       <p:sp>
         <p:nvSpPr>
-          <p:cNvPr id="31" name="TextBox 30"/>
+          <p:cNvPr id="32" name="TextBox 31"/>
           <p:cNvSpPr txBox="1"/>
           <p:nvPr/>
         </p:nvSpPr>
         <p:spPr>
           <a:xfrm>
-            <a:off x="10785165" y="1700784"/>
-            <a:ext cx="1280160" cy="292608"/>
+            <a:off x="10867826" y="1682496"/>
+            <a:ext cx="1280160" cy="274320"/>
           </a:xfrm>
           <a:prstGeom prst="rect">
             <a:avLst/>
@@ -8227,14 +8376,14 @@
       </p:sp>
       <p:sp>
         <p:nvSpPr>
-          <p:cNvPr id="32" name="TextBox 31"/>
+          <p:cNvPr id="33" name="TextBox 32"/>
           <p:cNvSpPr txBox="1"/>
           <p:nvPr/>
         </p:nvSpPr>
         <p:spPr>
           <a:xfrm>
-            <a:off x="10785165" y="2011680"/>
-            <a:ext cx="1280160" cy="292608"/>
+            <a:off x="10867826" y="1975104"/>
+            <a:ext cx="1280160" cy="274320"/>
           </a:xfrm>
           <a:prstGeom prst="rect">
             <a:avLst/>
@@ -8262,14 +8411,14 @@
       </p:sp>
       <p:sp>
         <p:nvSpPr>
-          <p:cNvPr id="33" name="Rectangle 32"/>
-          <p:cNvSpPr/>
-          <p:nvPr/>
-        </p:nvSpPr>
-        <p:spPr>
-          <a:xfrm>
-            <a:off x="5797296" y="2706623"/>
-            <a:ext cx="6117336" cy="1133856"/>
+          <p:cNvPr id="34" name="Rectangle 33"/>
+          <p:cNvSpPr/>
+          <p:nvPr/>
+        </p:nvSpPr>
+        <p:spPr>
+          <a:xfrm>
+            <a:off x="4937760" y="2706623"/>
+            <a:ext cx="7141464" cy="1097280"/>
           </a:xfrm>
           <a:prstGeom prst="rect">
             <a:avLst/>
@@ -8305,14 +8454,14 @@
       </p:sp>
       <p:sp>
         <p:nvSpPr>
-          <p:cNvPr id="34" name="Rectangle 33"/>
-          <p:cNvSpPr/>
-          <p:nvPr/>
-        </p:nvSpPr>
-        <p:spPr>
-          <a:xfrm>
-            <a:off x="5797296" y="2706623"/>
-            <a:ext cx="6117336" cy="45720"/>
+          <p:cNvPr id="35" name="Rectangle 34"/>
+          <p:cNvSpPr/>
+          <p:nvPr/>
+        </p:nvSpPr>
+        <p:spPr>
+          <a:xfrm>
+            <a:off x="4937760" y="2706623"/>
+            <a:ext cx="7141464" cy="45720"/>
           </a:xfrm>
           <a:prstGeom prst="rect">
             <a:avLst/>
@@ -8348,14 +8497,14 @@
       </p:sp>
       <p:sp>
         <p:nvSpPr>
-          <p:cNvPr id="35" name="TextBox 34"/>
+          <p:cNvPr id="36" name="TextBox 35"/>
           <p:cNvSpPr txBox="1"/>
           <p:nvPr/>
         </p:nvSpPr>
         <p:spPr>
           <a:xfrm>
-            <a:off x="5980176" y="2816352"/>
-            <a:ext cx="5843016" cy="274320"/>
+            <a:off x="5120640" y="2816352"/>
+            <a:ext cx="6867144" cy="256032"/>
           </a:xfrm>
           <a:prstGeom prst="rect">
             <a:avLst/>
@@ -8383,14 +8532,14 @@
       </p:sp>
       <p:sp>
         <p:nvSpPr>
-          <p:cNvPr id="36" name="TextBox 35"/>
+          <p:cNvPr id="37" name="TextBox 36"/>
           <p:cNvSpPr txBox="1"/>
           <p:nvPr/>
         </p:nvSpPr>
         <p:spPr>
           <a:xfrm>
-            <a:off x="5980176" y="3145536"/>
-            <a:ext cx="5843016" cy="621792"/>
+            <a:off x="5120640" y="3127248"/>
+            <a:ext cx="6867144" cy="585216"/>
           </a:xfrm>
           <a:prstGeom prst="rect">
             <a:avLst/>
@@ -8411,21 +8560,22 @@
                 </a:solidFill>
                 <a:latin typeface="Calibri"/>
               </a:rPr>
-              <a:t>The trigger fired. The competitor acted. Your organization was still scheduling alignment meetings.</a:t>
-            </a:r>
-          </a:p>
-        </p:txBody>
-      </p:sp>
-      <p:sp>
-        <p:nvSpPr>
-          <p:cNvPr id="37" name="Rectangle 36"/>
-          <p:cNvSpPr/>
-          <p:nvPr/>
-        </p:nvSpPr>
-        <p:spPr>
-          <a:xfrm>
-            <a:off x="5797296" y="4023360"/>
-            <a:ext cx="6117336" cy="36576"/>
+              <a:t>The trigger fired. The competitor acted.
+Your organization was still scheduling alignment meetings.</a:t>
+            </a:r>
+          </a:p>
+        </p:txBody>
+      </p:sp>
+      <p:sp>
+        <p:nvSpPr>
+          <p:cNvPr id="38" name="Rectangle 37"/>
+          <p:cNvSpPr/>
+          <p:nvPr/>
+        </p:nvSpPr>
+        <p:spPr>
+          <a:xfrm>
+            <a:off x="4937760" y="3986784"/>
+            <a:ext cx="7141464" cy="36576"/>
           </a:xfrm>
           <a:prstGeom prst="rect">
             <a:avLst/>
@@ -8461,14 +8611,14 @@
       </p:sp>
       <p:sp>
         <p:nvSpPr>
-          <p:cNvPr id="38" name="TextBox 37"/>
+          <p:cNvPr id="39" name="TextBox 38"/>
           <p:cNvSpPr txBox="1"/>
           <p:nvPr/>
         </p:nvSpPr>
         <p:spPr>
           <a:xfrm>
-            <a:off x="5797296" y="4133088"/>
-            <a:ext cx="6117336" cy="347472"/>
+            <a:off x="4937760" y="4096512"/>
+            <a:ext cx="7141464" cy="329184"/>
           </a:xfrm>
           <a:prstGeom prst="rect">
             <a:avLst/>
@@ -8496,7 +8646,7 @@
       </p:sp>
       <p:sp>
         <p:nvSpPr>
-          <p:cNvPr id="39" name="Rectangle 38"/>
+          <p:cNvPr id="40" name="Rectangle 39"/>
           <p:cNvSpPr/>
           <p:nvPr/>
         </p:nvSpPr>
@@ -8539,7 +8689,7 @@
       </p:sp>
       <p:sp>
         <p:nvSpPr>
-          <p:cNvPr id="40" name="Rectangle 39"/>
+          <p:cNvPr id="41" name="Rectangle 40"/>
           <p:cNvSpPr/>
           <p:nvPr/>
         </p:nvSpPr>
@@ -8582,7 +8732,7 @@
       </p:sp>
       <p:sp>
         <p:nvSpPr>
-          <p:cNvPr id="41" name="TextBox 40"/>
+          <p:cNvPr id="42" name="TextBox 41"/>
           <p:cNvSpPr txBox="1"/>
           <p:nvPr/>
         </p:nvSpPr>
@@ -8794,8 +8944,8 @@
         </p:nvSpPr>
         <p:spPr>
           <a:xfrm>
-            <a:off x="8988552" y="192024"/>
-            <a:ext cx="3017520" cy="237744"/>
+            <a:off x="8897112" y="192024"/>
+            <a:ext cx="3108960" cy="237744"/>
           </a:xfrm>
           <a:prstGeom prst="rect">
             <a:avLst/>
@@ -8829,7 +8979,7 @@
         </p:nvSpPr>
         <p:spPr>
           <a:xfrm>
-            <a:off x="402336" y="914400"/>
+            <a:off x="402336" y="877824"/>
             <a:ext cx="457200" cy="36576"/>
           </a:xfrm>
           <a:prstGeom prst="rect">
@@ -8872,8 +9022,8 @@
         </p:nvSpPr>
         <p:spPr>
           <a:xfrm>
-            <a:off x="402336" y="1024128"/>
-            <a:ext cx="6338255" cy="1755648"/>
+            <a:off x="402336" y="987552"/>
+            <a:ext cx="11384280" cy="402336"/>
           </a:xfrm>
           <a:prstGeom prst="rect">
             <a:avLst/>
@@ -8886,108 +9036,29 @@
           </a:bodyPr>
           <a:lstStyle/>
           <a:p>
-            <a:pPr algn="l">
-              <a:spcAft>
-                <a:spcPts val="300"/>
-              </a:spcAft>
-            </a:pPr>
-            <a:r>
-              <a:rPr sz="3600" b="1" i="0">
+            <a:pPr algn="l"/>
+            <a:r>
+              <a:rPr sz="2200" b="1" i="0">
                 <a:solidFill>
                   <a:srgbClr val="0A0F2E"/>
                 </a:solidFill>
                 <a:latin typeface="Georgia"/>
               </a:rPr>
-              <a:t>Earlier signal.</a:t>
-            </a:r>
-          </a:p>
-          <a:p>
-            <a:pPr algn="l">
-              <a:spcAft>
-                <a:spcPts val="300"/>
-              </a:spcAft>
-            </a:pPr>
-            <a:r>
-              <a:rPr sz="3600" b="1" i="0">
-                <a:solidFill>
-                  <a:srgbClr val="0A0F2E"/>
-                </a:solidFill>
-                <a:latin typeface="Georgia"/>
-              </a:rPr>
-              <a:t>Faster mobilization.</a:t>
-            </a:r>
-          </a:p>
-          <a:p>
-            <a:pPr algn="l">
-              <a:spcAft>
-                <a:spcPts val="300"/>
-              </a:spcAft>
-            </a:pPr>
-            <a:r>
-              <a:rPr sz="3600" b="1" i="0">
-                <a:solidFill>
-                  <a:srgbClr val="0A0F2E"/>
-                </a:solidFill>
-                <a:latin typeface="Georgia"/>
-              </a:rPr>
-              <a:t>Compounding edge.</a:t>
-            </a:r>
-          </a:p>
-        </p:txBody>
-      </p:sp>
-      <p:sp>
-        <p:nvSpPr>
-          <p:cNvPr id="9" name="Rectangle 8"/>
-          <p:cNvSpPr/>
-          <p:nvPr/>
-        </p:nvSpPr>
-        <p:spPr>
-          <a:xfrm>
-            <a:off x="402336" y="2962656"/>
-            <a:ext cx="11384280" cy="548640"/>
-          </a:xfrm>
-          <a:prstGeom prst="rect">
-            <a:avLst/>
-          </a:prstGeom>
-          <a:solidFill>
-            <a:srgbClr val="0A0F2E"/>
-          </a:solidFill>
-          <a:ln>
-            <a:noFill/>
-          </a:ln>
-        </p:spPr>
-        <p:style>
-          <a:lnRef idx="1">
-            <a:schemeClr val="accent1"/>
-          </a:lnRef>
-          <a:fillRef idx="3">
-            <a:schemeClr val="accent1"/>
-          </a:fillRef>
-          <a:effectRef idx="2">
-            <a:schemeClr val="accent1"/>
-          </a:effectRef>
-          <a:fontRef idx="minor">
-            <a:schemeClr val="lt1"/>
-          </a:fontRef>
-        </p:style>
-        <p:txBody>
-          <a:bodyPr rtlCol="0" anchor="ctr"/>
-          <a:lstStyle/>
-          <a:p>
-            <a:pPr algn="ctr"/>
-          </a:p>
-        </p:txBody>
-      </p:sp>
-      <p:sp>
-        <p:nvSpPr>
-          <p:cNvPr id="10" name="TextBox 9"/>
+              <a:t>Not just faster response — a compounding edge:</a:t>
+            </a:r>
+          </a:p>
+        </p:txBody>
+      </p:sp>
+      <p:sp>
+        <p:nvSpPr>
+          <p:cNvPr id="9" name="TextBox 8"/>
           <p:cNvSpPr txBox="1"/>
           <p:nvPr/>
         </p:nvSpPr>
         <p:spPr>
           <a:xfrm>
-            <a:off x="676656" y="3072384"/>
-            <a:ext cx="10835640" cy="347472"/>
+            <a:off x="402336" y="1408176"/>
+            <a:ext cx="11384280" cy="402336"/>
           </a:xfrm>
           <a:prstGeom prst="rect">
             <a:avLst/>
@@ -9000,6 +9071,84 @@
           </a:bodyPr>
           <a:lstStyle/>
           <a:p>
+            <a:pPr algn="l"/>
+            <a:r>
+              <a:rPr sz="2200" b="1" i="0">
+                <a:solidFill>
+                  <a:srgbClr val="2B8A6E"/>
+                </a:solidFill>
+                <a:latin typeface="Georgia"/>
+              </a:rPr>
+              <a:t>earlier signal window + 12-minute coordinated execution.</a:t>
+            </a:r>
+          </a:p>
+        </p:txBody>
+      </p:sp>
+      <p:sp>
+        <p:nvSpPr>
+          <p:cNvPr id="10" name="Rectangle 9"/>
+          <p:cNvSpPr/>
+          <p:nvPr/>
+        </p:nvSpPr>
+        <p:spPr>
+          <a:xfrm>
+            <a:off x="402336" y="1993392"/>
+            <a:ext cx="11384280" cy="512064"/>
+          </a:xfrm>
+          <a:prstGeom prst="rect">
+            <a:avLst/>
+          </a:prstGeom>
+          <a:solidFill>
+            <a:srgbClr val="0A0F2E"/>
+          </a:solidFill>
+          <a:ln>
+            <a:noFill/>
+          </a:ln>
+        </p:spPr>
+        <p:style>
+          <a:lnRef idx="1">
+            <a:schemeClr val="accent1"/>
+          </a:lnRef>
+          <a:fillRef idx="3">
+            <a:schemeClr val="accent1"/>
+          </a:fillRef>
+          <a:effectRef idx="2">
+            <a:schemeClr val="accent1"/>
+          </a:effectRef>
+          <a:fontRef idx="minor">
+            <a:schemeClr val="lt1"/>
+          </a:fontRef>
+        </p:style>
+        <p:txBody>
+          <a:bodyPr rtlCol="0" anchor="ctr"/>
+          <a:lstStyle/>
+          <a:p>
+            <a:pPr algn="ctr"/>
+          </a:p>
+        </p:txBody>
+      </p:sp>
+      <p:sp>
+        <p:nvSpPr>
+          <p:cNvPr id="11" name="TextBox 10"/>
+          <p:cNvSpPr txBox="1"/>
+          <p:nvPr/>
+        </p:nvSpPr>
+        <p:spPr>
+          <a:xfrm>
+            <a:off x="676656" y="2103120"/>
+            <a:ext cx="10835640" cy="329184"/>
+          </a:xfrm>
+          <a:prstGeom prst="rect">
+            <a:avLst/>
+          </a:prstGeom>
+          <a:noFill/>
+        </p:spPr>
+        <p:txBody>
+          <a:bodyPr wrap="square">
+            <a:spAutoFit/>
+          </a:bodyPr>
+          <a:lstStyle/>
+          <a:p>
             <a:pPr algn="ctr"/>
             <a:r>
               <a:rPr sz="1400" b="1" i="0">
@@ -9015,14 +9164,14 @@
       </p:sp>
       <p:sp>
         <p:nvSpPr>
-          <p:cNvPr id="11" name="Rectangle 10"/>
-          <p:cNvSpPr/>
-          <p:nvPr/>
-        </p:nvSpPr>
-        <p:spPr>
-          <a:xfrm>
-            <a:off x="402336" y="3694176"/>
-            <a:ext cx="5554980" cy="2194560"/>
+          <p:cNvPr id="12" name="Rectangle 11"/>
+          <p:cNvSpPr/>
+          <p:nvPr/>
+        </p:nvSpPr>
+        <p:spPr>
+          <a:xfrm>
+            <a:off x="402336" y="2688335"/>
+            <a:ext cx="5554980" cy="2048256"/>
           </a:xfrm>
           <a:prstGeom prst="rect">
             <a:avLst/>
@@ -9058,13 +9207,13 @@
       </p:sp>
       <p:sp>
         <p:nvSpPr>
-          <p:cNvPr id="12" name="Rectangle 11"/>
-          <p:cNvSpPr/>
-          <p:nvPr/>
-        </p:nvSpPr>
-        <p:spPr>
-          <a:xfrm>
-            <a:off x="402336" y="3694176"/>
+          <p:cNvPr id="13" name="Rectangle 12"/>
+          <p:cNvSpPr/>
+          <p:nvPr/>
+        </p:nvSpPr>
+        <p:spPr>
+          <a:xfrm>
+            <a:off x="402336" y="2688335"/>
             <a:ext cx="5554980" cy="45720"/>
           </a:xfrm>
           <a:prstGeom prst="rect">
@@ -9101,13 +9250,13 @@
       </p:sp>
       <p:sp>
         <p:nvSpPr>
-          <p:cNvPr id="13" name="TextBox 12"/>
+          <p:cNvPr id="14" name="TextBox 13"/>
           <p:cNvSpPr txBox="1"/>
           <p:nvPr/>
         </p:nvSpPr>
         <p:spPr>
           <a:xfrm>
-            <a:off x="585216" y="3822192"/>
+            <a:off x="585216" y="2816352"/>
             <a:ext cx="5280660" cy="256032"/>
           </a:xfrm>
           <a:prstGeom prst="rect">
@@ -9136,14 +9285,14 @@
       </p:sp>
       <p:sp>
         <p:nvSpPr>
-          <p:cNvPr id="14" name="TextBox 13"/>
+          <p:cNvPr id="15" name="TextBox 14"/>
           <p:cNvSpPr txBox="1"/>
           <p:nvPr/>
         </p:nvSpPr>
         <p:spPr>
           <a:xfrm>
-            <a:off x="585216" y="4151376"/>
-            <a:ext cx="5280660" cy="1572768"/>
+            <a:off x="585216" y="3145536"/>
+            <a:ext cx="5280660" cy="1463040"/>
           </a:xfrm>
           <a:prstGeom prst="rect">
             <a:avLst/>
@@ -9164,21 +9313,21 @@
                 </a:solidFill>
                 <a:latin typeface="Calibri"/>
               </a:rPr>
-              <a:t>System monitoring across 248+ data points and 221 trigger patterns — defined by your organization, on your terms, not generic alerts.</a:t>
-            </a:r>
-          </a:p>
-        </p:txBody>
-      </p:sp>
-      <p:sp>
-        <p:nvSpPr>
-          <p:cNvPr id="15" name="Rectangle 14"/>
-          <p:cNvSpPr/>
-          <p:nvPr/>
-        </p:nvSpPr>
-        <p:spPr>
-          <a:xfrm>
-            <a:off x="6231636" y="3694176"/>
-            <a:ext cx="5554980" cy="2194560"/>
+              <a:t>System monitoring across 248+ data points and 221 trigger patterns — defined by your organization on your terms, not generic alerts.</a:t>
+            </a:r>
+          </a:p>
+        </p:txBody>
+      </p:sp>
+      <p:sp>
+        <p:nvSpPr>
+          <p:cNvPr id="16" name="Rectangle 15"/>
+          <p:cNvSpPr/>
+          <p:nvPr/>
+        </p:nvSpPr>
+        <p:spPr>
+          <a:xfrm>
+            <a:off x="6231636" y="2688335"/>
+            <a:ext cx="5554980" cy="2048256"/>
           </a:xfrm>
           <a:prstGeom prst="rect">
             <a:avLst/>
@@ -9214,13 +9363,13 @@
       </p:sp>
       <p:sp>
         <p:nvSpPr>
-          <p:cNvPr id="16" name="Rectangle 15"/>
-          <p:cNvSpPr/>
-          <p:nvPr/>
-        </p:nvSpPr>
-        <p:spPr>
-          <a:xfrm>
-            <a:off x="6231636" y="3694176"/>
+          <p:cNvPr id="17" name="Rectangle 16"/>
+          <p:cNvSpPr/>
+          <p:nvPr/>
+        </p:nvSpPr>
+        <p:spPr>
+          <a:xfrm>
+            <a:off x="6231636" y="2688335"/>
             <a:ext cx="5554980" cy="45720"/>
           </a:xfrm>
           <a:prstGeom prst="rect">
@@ -9257,13 +9406,13 @@
       </p:sp>
       <p:sp>
         <p:nvSpPr>
-          <p:cNvPr id="17" name="TextBox 16"/>
+          <p:cNvPr id="18" name="TextBox 17"/>
           <p:cNvSpPr txBox="1"/>
           <p:nvPr/>
         </p:nvSpPr>
         <p:spPr>
           <a:xfrm>
-            <a:off x="6414516" y="3822192"/>
+            <a:off x="6414516" y="2816352"/>
             <a:ext cx="5280660" cy="256032"/>
           </a:xfrm>
           <a:prstGeom prst="rect">
@@ -9292,14 +9441,14 @@
       </p:sp>
       <p:sp>
         <p:nvSpPr>
-          <p:cNvPr id="18" name="TextBox 17"/>
+          <p:cNvPr id="19" name="TextBox 18"/>
           <p:cNvSpPr txBox="1"/>
           <p:nvPr/>
         </p:nvSpPr>
         <p:spPr>
           <a:xfrm>
-            <a:off x="6414516" y="4151376"/>
-            <a:ext cx="5280660" cy="1572768"/>
+            <a:off x="6414516" y="3145536"/>
+            <a:ext cx="5280660" cy="1463040"/>
           </a:xfrm>
           <a:prstGeom prst="rect">
             <a:avLst/>
@@ -9327,13 +9476,13 @@
       </p:sp>
       <p:sp>
         <p:nvSpPr>
-          <p:cNvPr id="19" name="TextBox 18"/>
+          <p:cNvPr id="20" name="TextBox 19"/>
           <p:cNvSpPr txBox="1"/>
           <p:nvPr/>
         </p:nvSpPr>
         <p:spPr>
           <a:xfrm>
-            <a:off x="0" y="5888736"/>
+            <a:off x="0" y="5870448"/>
             <a:ext cx="3047238" cy="420624"/>
           </a:xfrm>
           <a:prstGeom prst="rect">
@@ -9362,13 +9511,13 @@
       </p:sp>
       <p:sp>
         <p:nvSpPr>
-          <p:cNvPr id="20" name="TextBox 19"/>
+          <p:cNvPr id="21" name="TextBox 20"/>
           <p:cNvSpPr txBox="1"/>
           <p:nvPr/>
         </p:nvSpPr>
         <p:spPr>
           <a:xfrm>
-            <a:off x="0" y="6291072"/>
+            <a:off x="0" y="6272784"/>
             <a:ext cx="3047238" cy="201168"/>
           </a:xfrm>
           <a:prstGeom prst="rect">
@@ -9390,20 +9539,20 @@
                 </a:solidFill>
                 <a:latin typeface="Calibri"/>
               </a:rPr>
-              <a:t>data points monitored</a:t>
-            </a:r>
-          </a:p>
-        </p:txBody>
-      </p:sp>
-      <p:sp>
-        <p:nvSpPr>
-          <p:cNvPr id="21" name="TextBox 20"/>
+              <a:t>data points</a:t>
+            </a:r>
+          </a:p>
+        </p:txBody>
+      </p:sp>
+      <p:sp>
+        <p:nvSpPr>
+          <p:cNvPr id="22" name="TextBox 21"/>
           <p:cNvSpPr txBox="1"/>
           <p:nvPr/>
         </p:nvSpPr>
         <p:spPr>
           <a:xfrm>
-            <a:off x="3047238" y="5888736"/>
+            <a:off x="3047238" y="5870448"/>
             <a:ext cx="3047238" cy="420624"/>
           </a:xfrm>
           <a:prstGeom prst="rect">
@@ -9432,13 +9581,13 @@
       </p:sp>
       <p:sp>
         <p:nvSpPr>
-          <p:cNvPr id="22" name="TextBox 21"/>
+          <p:cNvPr id="23" name="TextBox 22"/>
           <p:cNvSpPr txBox="1"/>
           <p:nvPr/>
         </p:nvSpPr>
         <p:spPr>
           <a:xfrm>
-            <a:off x="3047238" y="6291072"/>
+            <a:off x="3047238" y="6272784"/>
             <a:ext cx="3047238" cy="201168"/>
           </a:xfrm>
           <a:prstGeom prst="rect">
@@ -9467,13 +9616,13 @@
       </p:sp>
       <p:sp>
         <p:nvSpPr>
-          <p:cNvPr id="23" name="TextBox 22"/>
+          <p:cNvPr id="24" name="TextBox 23"/>
           <p:cNvSpPr txBox="1"/>
           <p:nvPr/>
         </p:nvSpPr>
         <p:spPr>
           <a:xfrm>
-            <a:off x="6094476" y="5888736"/>
+            <a:off x="6094476" y="5870448"/>
             <a:ext cx="3047238" cy="420624"/>
           </a:xfrm>
           <a:prstGeom prst="rect">
@@ -9502,13 +9651,13 @@
       </p:sp>
       <p:sp>
         <p:nvSpPr>
-          <p:cNvPr id="24" name="TextBox 23"/>
+          <p:cNvPr id="25" name="TextBox 24"/>
           <p:cNvSpPr txBox="1"/>
           <p:nvPr/>
         </p:nvSpPr>
         <p:spPr>
           <a:xfrm>
-            <a:off x="6094476" y="6291072"/>
+            <a:off x="6094476" y="6272784"/>
             <a:ext cx="3047238" cy="201168"/>
           </a:xfrm>
           <a:prstGeom prst="rect">
@@ -9537,13 +9686,13 @@
       </p:sp>
       <p:sp>
         <p:nvSpPr>
-          <p:cNvPr id="25" name="TextBox 24"/>
+          <p:cNvPr id="26" name="TextBox 25"/>
           <p:cNvSpPr txBox="1"/>
           <p:nvPr/>
         </p:nvSpPr>
         <p:spPr>
           <a:xfrm>
-            <a:off x="9141714" y="5888736"/>
+            <a:off x="9141714" y="5870448"/>
             <a:ext cx="3047238" cy="420624"/>
           </a:xfrm>
           <a:prstGeom prst="rect">
@@ -9572,13 +9721,13 @@
       </p:sp>
       <p:sp>
         <p:nvSpPr>
-          <p:cNvPr id="26" name="TextBox 25"/>
+          <p:cNvPr id="27" name="TextBox 26"/>
           <p:cNvSpPr txBox="1"/>
           <p:nvPr/>
         </p:nvSpPr>
         <p:spPr>
           <a:xfrm>
-            <a:off x="9141714" y="6291072"/>
+            <a:off x="9141714" y="6272784"/>
             <a:ext cx="3047238" cy="201168"/>
           </a:xfrm>
           <a:prstGeom prst="rect">
@@ -9607,7 +9756,7 @@
       </p:sp>
       <p:sp>
         <p:nvSpPr>
-          <p:cNvPr id="27" name="Rectangle 26"/>
+          <p:cNvPr id="28" name="Rectangle 27"/>
           <p:cNvSpPr/>
           <p:nvPr/>
         </p:nvSpPr>
@@ -9650,7 +9799,7 @@
       </p:sp>
       <p:sp>
         <p:nvSpPr>
-          <p:cNvPr id="28" name="Rectangle 27"/>
+          <p:cNvPr id="29" name="Rectangle 28"/>
           <p:cNvSpPr/>
           <p:nvPr/>
         </p:nvSpPr>
@@ -9693,7 +9842,7 @@
       </p:sp>
       <p:sp>
         <p:nvSpPr>
-          <p:cNvPr id="29" name="TextBox 28"/>
+          <p:cNvPr id="30" name="TextBox 29"/>
           <p:cNvSpPr txBox="1"/>
           <p:nvPr/>
         </p:nvSpPr>
@@ -9905,8 +10054,8 @@
         </p:nvSpPr>
         <p:spPr>
           <a:xfrm>
-            <a:off x="8988552" y="192024"/>
-            <a:ext cx="3017520" cy="237744"/>
+            <a:off x="8897112" y="192024"/>
+            <a:ext cx="3108960" cy="237744"/>
           </a:xfrm>
           <a:prstGeom prst="rect">
             <a:avLst/>
@@ -9940,8 +10089,8 @@
         </p:nvSpPr>
         <p:spPr>
           <a:xfrm>
-            <a:off x="402336" y="896112"/>
-            <a:ext cx="11384280" cy="475488"/>
+            <a:off x="402336" y="877824"/>
+            <a:ext cx="11384280" cy="457200"/>
           </a:xfrm>
           <a:prstGeom prst="rect">
             <a:avLst/>
@@ -9975,7 +10124,7 @@
         </p:nvSpPr>
         <p:spPr>
           <a:xfrm>
-            <a:off x="4905756" y="1408176"/>
+            <a:off x="4905756" y="1371600"/>
             <a:ext cx="2377440" cy="36576"/>
           </a:xfrm>
           <a:prstGeom prst="rect">
@@ -10018,8 +10167,8 @@
         </p:nvSpPr>
         <p:spPr>
           <a:xfrm>
-            <a:off x="402336" y="1591056"/>
-            <a:ext cx="2203704" cy="4846320"/>
+            <a:off x="402336" y="1554480"/>
+            <a:ext cx="2203704" cy="4882896"/>
           </a:xfrm>
           <a:prstGeom prst="rect">
             <a:avLst/>
@@ -10061,7 +10210,7 @@
         </p:nvSpPr>
         <p:spPr>
           <a:xfrm>
-            <a:off x="402336" y="1591056"/>
+            <a:off x="402336" y="1554480"/>
             <a:ext cx="2203704" cy="45720"/>
           </a:xfrm>
           <a:prstGeom prst="rect">
@@ -10104,7 +10253,7 @@
         </p:nvSpPr>
         <p:spPr>
           <a:xfrm>
-            <a:off x="1303020" y="1719072"/>
+            <a:off x="1303020" y="1682496"/>
             <a:ext cx="402336" cy="402336"/>
           </a:xfrm>
           <a:prstGeom prst="ellipse">
@@ -10147,7 +10296,7 @@
         </p:nvSpPr>
         <p:spPr>
           <a:xfrm>
-            <a:off x="1412748" y="1792224"/>
+            <a:off x="1412748" y="1755648"/>
             <a:ext cx="182880" cy="237744"/>
           </a:xfrm>
           <a:prstGeom prst="rect">
@@ -10182,8 +10331,8 @@
         </p:nvSpPr>
         <p:spPr>
           <a:xfrm>
-            <a:off x="493776" y="2231136"/>
-            <a:ext cx="2057400" cy="274320"/>
+            <a:off x="493776" y="2194560"/>
+            <a:ext cx="2057400" cy="256032"/>
           </a:xfrm>
           <a:prstGeom prst="rect">
             <a:avLst/>
@@ -10217,8 +10366,8 @@
         </p:nvSpPr>
         <p:spPr>
           <a:xfrm>
-            <a:off x="493776" y="2505456"/>
-            <a:ext cx="2057400" cy="219456"/>
+            <a:off x="493776" y="2450592"/>
+            <a:ext cx="2057400" cy="201168"/>
           </a:xfrm>
           <a:prstGeom prst="rect">
             <a:avLst/>
@@ -10252,7 +10401,7 @@
         </p:nvSpPr>
         <p:spPr>
           <a:xfrm>
-            <a:off x="585216" y="2761488"/>
+            <a:off x="585216" y="2688336"/>
             <a:ext cx="1837944" cy="27432"/>
           </a:xfrm>
           <a:prstGeom prst="rect">
@@ -10295,8 +10444,8 @@
         </p:nvSpPr>
         <p:spPr>
           <a:xfrm>
-            <a:off x="512064" y="2871216"/>
-            <a:ext cx="2002536" cy="3456432"/>
+            <a:off x="512064" y="2798064"/>
+            <a:ext cx="2002536" cy="3547872"/>
           </a:xfrm>
           <a:prstGeom prst="rect">
             <a:avLst/>
@@ -10330,8 +10479,8 @@
         </p:nvSpPr>
         <p:spPr>
           <a:xfrm>
-            <a:off x="2697480" y="1591056"/>
-            <a:ext cx="2203704" cy="4846320"/>
+            <a:off x="2697480" y="1554480"/>
+            <a:ext cx="2203704" cy="4882896"/>
           </a:xfrm>
           <a:prstGeom prst="rect">
             <a:avLst/>
@@ -10373,7 +10522,7 @@
         </p:nvSpPr>
         <p:spPr>
           <a:xfrm>
-            <a:off x="2697480" y="1591056"/>
+            <a:off x="2697480" y="1554480"/>
             <a:ext cx="2203704" cy="45720"/>
           </a:xfrm>
           <a:prstGeom prst="rect">
@@ -10416,7 +10565,7 @@
         </p:nvSpPr>
         <p:spPr>
           <a:xfrm>
-            <a:off x="3598164" y="1719072"/>
+            <a:off x="3598164" y="1682496"/>
             <a:ext cx="402336" cy="402336"/>
           </a:xfrm>
           <a:prstGeom prst="ellipse">
@@ -10459,7 +10608,7 @@
         </p:nvSpPr>
         <p:spPr>
           <a:xfrm>
-            <a:off x="3707892" y="1792224"/>
+            <a:off x="3707892" y="1755648"/>
             <a:ext cx="182880" cy="237744"/>
           </a:xfrm>
           <a:prstGeom prst="rect">
@@ -10494,8 +10643,8 @@
         </p:nvSpPr>
         <p:spPr>
           <a:xfrm>
-            <a:off x="2788920" y="2231136"/>
-            <a:ext cx="2057400" cy="274320"/>
+            <a:off x="2788920" y="2194560"/>
+            <a:ext cx="2057400" cy="256032"/>
           </a:xfrm>
           <a:prstGeom prst="rect">
             <a:avLst/>
@@ -10529,8 +10678,8 @@
         </p:nvSpPr>
         <p:spPr>
           <a:xfrm>
-            <a:off x="2788920" y="2505456"/>
-            <a:ext cx="2057400" cy="219456"/>
+            <a:off x="2788920" y="2450592"/>
+            <a:ext cx="2057400" cy="201168"/>
           </a:xfrm>
           <a:prstGeom prst="rect">
             <a:avLst/>
@@ -10564,7 +10713,7 @@
         </p:nvSpPr>
         <p:spPr>
           <a:xfrm>
-            <a:off x="2880360" y="2761488"/>
+            <a:off x="2880360" y="2688336"/>
             <a:ext cx="1837944" cy="27432"/>
           </a:xfrm>
           <a:prstGeom prst="rect">
@@ -10607,8 +10756,8 @@
         </p:nvSpPr>
         <p:spPr>
           <a:xfrm>
-            <a:off x="2807208" y="2871216"/>
-            <a:ext cx="2002536" cy="3456432"/>
+            <a:off x="2807208" y="2798064"/>
+            <a:ext cx="2002536" cy="3547872"/>
           </a:xfrm>
           <a:prstGeom prst="rect">
             <a:avLst/>
@@ -10629,7 +10778,7 @@
                 </a:solidFill>
                 <a:latin typeface="Calibri"/>
               </a:rPr>
-              <a:t>System monitoring of customer-defined thresholds. 248+ data points. Every 15 minutes.</a:t>
+              <a:t>System monitoring of customer-defined thresholds — 248+ data points, every 15 minutes.</a:t>
             </a:r>
           </a:p>
         </p:txBody>
@@ -10642,8 +10791,8 @@
         </p:nvSpPr>
         <p:spPr>
           <a:xfrm>
-            <a:off x="4992624" y="1591056"/>
-            <a:ext cx="2203704" cy="4846320"/>
+            <a:off x="4992624" y="1554480"/>
+            <a:ext cx="2203704" cy="4882896"/>
           </a:xfrm>
           <a:prstGeom prst="rect">
             <a:avLst/>
@@ -10685,7 +10834,7 @@
         </p:nvSpPr>
         <p:spPr>
           <a:xfrm>
-            <a:off x="4992624" y="1591056"/>
+            <a:off x="4992624" y="1554480"/>
             <a:ext cx="2203704" cy="45720"/>
           </a:xfrm>
           <a:prstGeom prst="rect">
@@ -10728,7 +10877,7 @@
         </p:nvSpPr>
         <p:spPr>
           <a:xfrm>
-            <a:off x="5893308" y="1719072"/>
+            <a:off x="5893308" y="1682496"/>
             <a:ext cx="402336" cy="402336"/>
           </a:xfrm>
           <a:prstGeom prst="ellipse">
@@ -10771,7 +10920,7 @@
         </p:nvSpPr>
         <p:spPr>
           <a:xfrm>
-            <a:off x="6003036" y="1792224"/>
+            <a:off x="6003036" y="1755648"/>
             <a:ext cx="182880" cy="237744"/>
           </a:xfrm>
           <a:prstGeom prst="rect">
@@ -10806,8 +10955,8 @@
         </p:nvSpPr>
         <p:spPr>
           <a:xfrm>
-            <a:off x="5084064" y="2231136"/>
-            <a:ext cx="2057400" cy="274320"/>
+            <a:off x="5084064" y="2194560"/>
+            <a:ext cx="2057400" cy="256032"/>
           </a:xfrm>
           <a:prstGeom prst="rect">
             <a:avLst/>
@@ -10841,8 +10990,8 @@
         </p:nvSpPr>
         <p:spPr>
           <a:xfrm>
-            <a:off x="5084064" y="2505456"/>
-            <a:ext cx="2057400" cy="219456"/>
+            <a:off x="5084064" y="2450592"/>
+            <a:ext cx="2057400" cy="201168"/>
           </a:xfrm>
           <a:prstGeom prst="rect">
             <a:avLst/>
@@ -10876,7 +11025,7 @@
         </p:nvSpPr>
         <p:spPr>
           <a:xfrm>
-            <a:off x="5175504" y="2761488"/>
+            <a:off x="5175504" y="2688336"/>
             <a:ext cx="1837944" cy="27432"/>
           </a:xfrm>
           <a:prstGeom prst="rect">
@@ -10919,8 +11068,8 @@
         </p:nvSpPr>
         <p:spPr>
           <a:xfrm>
-            <a:off x="5102352" y="2871216"/>
-            <a:ext cx="2002536" cy="3456432"/>
+            <a:off x="5102352" y="2798064"/>
+            <a:ext cx="2002536" cy="3547872"/>
           </a:xfrm>
           <a:prstGeom prst="rect">
             <a:avLst/>
@@ -10941,7 +11090,7 @@
                 </a:solidFill>
                 <a:latin typeface="Calibri"/>
               </a:rPr>
-              <a:t>Explicit executive authorization at every decision point. AI monitors. Executives decide.</a:t>
+              <a:t>Explicit executive authorization at every point. AI monitors. Executives decide.</a:t>
             </a:r>
           </a:p>
         </p:txBody>
@@ -10954,8 +11103,8 @@
         </p:nvSpPr>
         <p:spPr>
           <a:xfrm>
-            <a:off x="7287768" y="1591056"/>
-            <a:ext cx="2203704" cy="4846320"/>
+            <a:off x="7287768" y="1554480"/>
+            <a:ext cx="2203704" cy="4882896"/>
           </a:xfrm>
           <a:prstGeom prst="rect">
             <a:avLst/>
@@ -10997,7 +11146,7 @@
         </p:nvSpPr>
         <p:spPr>
           <a:xfrm>
-            <a:off x="7287768" y="1591056"/>
+            <a:off x="7287768" y="1554480"/>
             <a:ext cx="2203704" cy="45720"/>
           </a:xfrm>
           <a:prstGeom prst="rect">
@@ -11040,7 +11189,7 @@
         </p:nvSpPr>
         <p:spPr>
           <a:xfrm>
-            <a:off x="8188452" y="1719072"/>
+            <a:off x="8188452" y="1682496"/>
             <a:ext cx="402336" cy="402336"/>
           </a:xfrm>
           <a:prstGeom prst="ellipse">
@@ -11083,7 +11232,7 @@
         </p:nvSpPr>
         <p:spPr>
           <a:xfrm>
-            <a:off x="8298180" y="1792224"/>
+            <a:off x="8298180" y="1755648"/>
             <a:ext cx="182880" cy="237744"/>
           </a:xfrm>
           <a:prstGeom prst="rect">
@@ -11118,8 +11267,8 @@
         </p:nvSpPr>
         <p:spPr>
           <a:xfrm>
-            <a:off x="7379208" y="2231136"/>
-            <a:ext cx="2057400" cy="274320"/>
+            <a:off x="7379208" y="2194560"/>
+            <a:ext cx="2057400" cy="256032"/>
           </a:xfrm>
           <a:prstGeom prst="rect">
             <a:avLst/>
@@ -11153,8 +11302,8 @@
         </p:nvSpPr>
         <p:spPr>
           <a:xfrm>
-            <a:off x="7379208" y="2505456"/>
-            <a:ext cx="2057400" cy="219456"/>
+            <a:off x="7379208" y="2450592"/>
+            <a:ext cx="2057400" cy="201168"/>
           </a:xfrm>
           <a:prstGeom prst="rect">
             <a:avLst/>
@@ -11188,7 +11337,7 @@
         </p:nvSpPr>
         <p:spPr>
           <a:xfrm>
-            <a:off x="7470648" y="2761488"/>
+            <a:off x="7470648" y="2688336"/>
             <a:ext cx="1837944" cy="27432"/>
           </a:xfrm>
           <a:prstGeom prst="rect">
@@ -11231,8 +11380,8 @@
         </p:nvSpPr>
         <p:spPr>
           <a:xfrm>
-            <a:off x="7397496" y="2871216"/>
-            <a:ext cx="2002536" cy="3456432"/>
+            <a:off x="7397496" y="2798064"/>
+            <a:ext cx="2002536" cy="3547872"/>
           </a:xfrm>
           <a:prstGeom prst="rect">
             <a:avLst/>
@@ -11253,7 +11402,7 @@
                 </a:solidFill>
                 <a:latin typeface="Calibri"/>
               </a:rPr>
-              <a:t>Roles, budgets, and communications deploy in coordinated sequence in minutes.</a:t>
+              <a:t>Roles, budgets, and communications deploy in coordinated sequence in 12 minutes.</a:t>
             </a:r>
           </a:p>
         </p:txBody>
@@ -11266,8 +11415,8 @@
         </p:nvSpPr>
         <p:spPr>
           <a:xfrm>
-            <a:off x="9582912" y="1591056"/>
-            <a:ext cx="2203704" cy="4846320"/>
+            <a:off x="9582912" y="1554480"/>
+            <a:ext cx="2203704" cy="4882896"/>
           </a:xfrm>
           <a:prstGeom prst="rect">
             <a:avLst/>
@@ -11309,7 +11458,7 @@
         </p:nvSpPr>
         <p:spPr>
           <a:xfrm>
-            <a:off x="9582912" y="1591056"/>
+            <a:off x="9582912" y="1554480"/>
             <a:ext cx="2203704" cy="45720"/>
           </a:xfrm>
           <a:prstGeom prst="rect">
@@ -11352,7 +11501,7 @@
         </p:nvSpPr>
         <p:spPr>
           <a:xfrm>
-            <a:off x="10483596" y="1719072"/>
+            <a:off x="10483596" y="1682496"/>
             <a:ext cx="402336" cy="402336"/>
           </a:xfrm>
           <a:prstGeom prst="ellipse">
@@ -11395,7 +11544,7 @@
         </p:nvSpPr>
         <p:spPr>
           <a:xfrm>
-            <a:off x="10593324" y="1792224"/>
+            <a:off x="10593324" y="1755648"/>
             <a:ext cx="182880" cy="237744"/>
           </a:xfrm>
           <a:prstGeom prst="rect">
@@ -11430,8 +11579,8 @@
         </p:nvSpPr>
         <p:spPr>
           <a:xfrm>
-            <a:off x="9674352" y="2231136"/>
-            <a:ext cx="2057400" cy="274320"/>
+            <a:off x="9674352" y="2194560"/>
+            <a:ext cx="2057400" cy="256032"/>
           </a:xfrm>
           <a:prstGeom prst="rect">
             <a:avLst/>
@@ -11465,8 +11614,8 @@
         </p:nvSpPr>
         <p:spPr>
           <a:xfrm>
-            <a:off x="9674352" y="2505456"/>
-            <a:ext cx="2057400" cy="219456"/>
+            <a:off x="9674352" y="2450592"/>
+            <a:ext cx="2057400" cy="201168"/>
           </a:xfrm>
           <a:prstGeom prst="rect">
             <a:avLst/>
@@ -11500,7 +11649,7 @@
         </p:nvSpPr>
         <p:spPr>
           <a:xfrm>
-            <a:off x="9765792" y="2761488"/>
+            <a:off x="9765792" y="2688336"/>
             <a:ext cx="1837944" cy="27432"/>
           </a:xfrm>
           <a:prstGeom prst="rect">
@@ -11543,8 +11692,8 @@
         </p:nvSpPr>
         <p:spPr>
           <a:xfrm>
-            <a:off x="9692640" y="2871216"/>
-            <a:ext cx="2002536" cy="3456432"/>
+            <a:off x="9692640" y="2798064"/>
+            <a:ext cx="2002536" cy="3547872"/>
           </a:xfrm>
           <a:prstGeom prst="rect">
             <a:avLst/>
@@ -11565,7 +11714,7 @@
                 </a:solidFill>
                 <a:latin typeface="Calibri"/>
               </a:rPr>
-              <a:t>Every activation feeds forward. Patterns and outcomes improve the next response.</a:t>
+              <a:t>Every activation feeds forward — patterns improve the next response cycle.</a:t>
             </a:r>
           </a:p>
         </p:txBody>
@@ -11913,8 +12062,8 @@
         </p:nvSpPr>
         <p:spPr>
           <a:xfrm>
-            <a:off x="8988552" y="192024"/>
-            <a:ext cx="3017520" cy="237744"/>
+            <a:off x="8897112" y="192024"/>
+            <a:ext cx="3108960" cy="237744"/>
           </a:xfrm>
           <a:prstGeom prst="rect">
             <a:avLst/>
@@ -11992,7 +12141,7 @@
         <p:spPr>
           <a:xfrm>
             <a:off x="402336" y="987552"/>
-            <a:ext cx="4078224" cy="1207008"/>
+            <a:ext cx="4059936" cy="1225296"/>
           </a:xfrm>
           <a:prstGeom prst="rect">
             <a:avLst/>
@@ -12005,35 +12154,15 @@
           </a:bodyPr>
           <a:lstStyle/>
           <a:p>
-            <a:pPr algn="l">
-              <a:spcAft>
-                <a:spcPts val="200"/>
-              </a:spcAft>
-            </a:pPr>
-            <a:r>
-              <a:rPr sz="2400" b="1" i="0">
+            <a:pPr algn="l"/>
+            <a:r>
+              <a:rPr sz="2200" b="1" i="0">
                 <a:solidFill>
                   <a:srgbClr val="0A0F2E"/>
                 </a:solidFill>
                 <a:latin typeface="Georgia"/>
               </a:rPr>
-              <a:t>Where leadership sees what is forming —</a:t>
-            </a:r>
-          </a:p>
-          <a:p>
-            <a:pPr algn="l">
-              <a:spcAft>
-                <a:spcPts val="200"/>
-              </a:spcAft>
-            </a:pPr>
-            <a:r>
-              <a:rPr sz="2400" b="1" i="0">
-                <a:solidFill>
-                  <a:srgbClr val="0A0F2E"/>
-                </a:solidFill>
-                <a:latin typeface="Georgia"/>
-              </a:rPr>
-              <a:t>and what to do now.</a:t>
+              <a:t>Where leadership sees what is forming — and what to do now.</a:t>
             </a:r>
           </a:p>
         </p:txBody>
@@ -12046,8 +12175,8 @@
         </p:nvSpPr>
         <p:spPr>
           <a:xfrm>
-            <a:off x="402336" y="2359152"/>
-            <a:ext cx="4078224" cy="1267968"/>
+            <a:off x="402336" y="2340864"/>
+            <a:ext cx="4059936" cy="1298448"/>
           </a:xfrm>
           <a:prstGeom prst="rect">
             <a:avLst/>
@@ -12089,8 +12218,8 @@
         </p:nvSpPr>
         <p:spPr>
           <a:xfrm>
-            <a:off x="402336" y="2359152"/>
-            <a:ext cx="45720" cy="1267968"/>
+            <a:off x="402336" y="2340864"/>
+            <a:ext cx="45720" cy="1298448"/>
           </a:xfrm>
           <a:prstGeom prst="rect">
             <a:avLst/>
@@ -12132,8 +12261,8 @@
         </p:nvSpPr>
         <p:spPr>
           <a:xfrm>
-            <a:off x="566928" y="2450592"/>
-            <a:ext cx="3822192" cy="237744"/>
+            <a:off x="566928" y="2432304"/>
+            <a:ext cx="3803904" cy="237744"/>
           </a:xfrm>
           <a:prstGeom prst="rect">
             <a:avLst/>
@@ -12167,8 +12296,8 @@
         </p:nvSpPr>
         <p:spPr>
           <a:xfrm>
-            <a:off x="566928" y="2724912"/>
-            <a:ext cx="3822192" cy="810768"/>
+            <a:off x="566928" y="2706624"/>
+            <a:ext cx="3803904" cy="841248"/>
           </a:xfrm>
           <a:prstGeom prst="rect">
             <a:avLst/>
@@ -12202,8 +12331,8 @@
         </p:nvSpPr>
         <p:spPr>
           <a:xfrm>
-            <a:off x="402336" y="3718560"/>
-            <a:ext cx="4078224" cy="1267968"/>
+            <a:off x="402336" y="3712464"/>
+            <a:ext cx="4059936" cy="1298448"/>
           </a:xfrm>
           <a:prstGeom prst="rect">
             <a:avLst/>
@@ -12245,8 +12374,8 @@
         </p:nvSpPr>
         <p:spPr>
           <a:xfrm>
-            <a:off x="402336" y="3718560"/>
-            <a:ext cx="45720" cy="1267968"/>
+            <a:off x="402336" y="3712464"/>
+            <a:ext cx="45720" cy="1298448"/>
           </a:xfrm>
           <a:prstGeom prst="rect">
             <a:avLst/>
@@ -12288,8 +12417,8 @@
         </p:nvSpPr>
         <p:spPr>
           <a:xfrm>
-            <a:off x="566928" y="3810000"/>
-            <a:ext cx="3822192" cy="237744"/>
+            <a:off x="566928" y="3803904"/>
+            <a:ext cx="3803904" cy="237744"/>
           </a:xfrm>
           <a:prstGeom prst="rect">
             <a:avLst/>
@@ -12323,8 +12452,8 @@
         </p:nvSpPr>
         <p:spPr>
           <a:xfrm>
-            <a:off x="566928" y="4084320"/>
-            <a:ext cx="3822192" cy="810768"/>
+            <a:off x="566928" y="4078224"/>
+            <a:ext cx="3803904" cy="841248"/>
           </a:xfrm>
           <a:prstGeom prst="rect">
             <a:avLst/>
@@ -12358,8 +12487,8 @@
         </p:nvSpPr>
         <p:spPr>
           <a:xfrm>
-            <a:off x="402336" y="5077968"/>
-            <a:ext cx="4078224" cy="1267968"/>
+            <a:off x="402336" y="5084064"/>
+            <a:ext cx="4059936" cy="1298448"/>
           </a:xfrm>
           <a:prstGeom prst="rect">
             <a:avLst/>
@@ -12401,8 +12530,8 @@
         </p:nvSpPr>
         <p:spPr>
           <a:xfrm>
-            <a:off x="402336" y="5077968"/>
-            <a:ext cx="45720" cy="1267968"/>
+            <a:off x="402336" y="5084064"/>
+            <a:ext cx="45720" cy="1298448"/>
           </a:xfrm>
           <a:prstGeom prst="rect">
             <a:avLst/>
@@ -12444,8 +12573,8 @@
         </p:nvSpPr>
         <p:spPr>
           <a:xfrm>
-            <a:off x="566928" y="5169408"/>
-            <a:ext cx="3822192" cy="237744"/>
+            <a:off x="566928" y="5175504"/>
+            <a:ext cx="3803904" cy="237744"/>
           </a:xfrm>
           <a:prstGeom prst="rect">
             <a:avLst/>
@@ -12479,8 +12608,8 @@
         </p:nvSpPr>
         <p:spPr>
           <a:xfrm>
-            <a:off x="566928" y="5443728"/>
-            <a:ext cx="3822192" cy="810768"/>
+            <a:off x="566928" y="5449824"/>
+            <a:ext cx="3803904" cy="841248"/>
           </a:xfrm>
           <a:prstGeom prst="rect">
             <a:avLst/>
@@ -12514,7 +12643,7 @@
         </p:nvSpPr>
         <p:spPr>
           <a:xfrm>
-            <a:off x="4864608" y="822960"/>
+            <a:off x="4864608" y="804672"/>
             <a:ext cx="7269480" cy="256032"/>
           </a:xfrm>
           <a:prstGeom prst="rect">
@@ -12557,7 +12686,7 @@
         </p:nvSpPr>
         <p:spPr>
           <a:xfrm>
-            <a:off x="4946904" y="896112"/>
+            <a:off x="4946904" y="877824"/>
             <a:ext cx="91440" cy="91440"/>
           </a:xfrm>
           <a:prstGeom prst="ellipse">
@@ -12600,7 +12729,7 @@
         </p:nvSpPr>
         <p:spPr>
           <a:xfrm>
-            <a:off x="5093208" y="896112"/>
+            <a:off x="5093208" y="877824"/>
             <a:ext cx="91440" cy="91440"/>
           </a:xfrm>
           <a:prstGeom prst="ellipse">
@@ -12643,7 +12772,7 @@
         </p:nvSpPr>
         <p:spPr>
           <a:xfrm>
-            <a:off x="5239512" y="896112"/>
+            <a:off x="5239512" y="877824"/>
             <a:ext cx="91440" cy="91440"/>
           </a:xfrm>
           <a:prstGeom prst="ellipse">
@@ -12686,7 +12815,7 @@
         </p:nvSpPr>
         <p:spPr>
           <a:xfrm>
-            <a:off x="5413248" y="868680"/>
+            <a:off x="5413248" y="850392"/>
             <a:ext cx="6611112" cy="155448"/>
           </a:xfrm>
           <a:prstGeom prst="rect">
@@ -12729,7 +12858,7 @@
         </p:nvSpPr>
         <p:spPr>
           <a:xfrm>
-            <a:off x="5458968" y="868680"/>
+            <a:off x="5458968" y="850392"/>
             <a:ext cx="6537960" cy="155448"/>
           </a:xfrm>
           <a:prstGeom prst="rect">
@@ -12772,8 +12901,8 @@
         </p:blipFill>
         <p:spPr>
           <a:xfrm>
-            <a:off x="4864608" y="1078992"/>
-            <a:ext cx="7269480" cy="5394960"/>
+            <a:off x="4864608" y="1060704"/>
+            <a:ext cx="7269480" cy="5431536"/>
           </a:xfrm>
           <a:prstGeom prst="rect">
             <a:avLst/>
@@ -13123,8 +13252,8 @@
         </p:nvSpPr>
         <p:spPr>
           <a:xfrm>
-            <a:off x="8988552" y="192024"/>
-            <a:ext cx="3017520" cy="237744"/>
+            <a:off x="8897112" y="192024"/>
+            <a:ext cx="3108960" cy="237744"/>
           </a:xfrm>
           <a:prstGeom prst="rect">
             <a:avLst/>
@@ -13202,7 +13331,7 @@
         <p:spPr>
           <a:xfrm>
             <a:off x="402336" y="987552"/>
-            <a:ext cx="4078224" cy="1207008"/>
+            <a:ext cx="4059936" cy="1225296"/>
           </a:xfrm>
           <a:prstGeom prst="rect">
             <a:avLst/>
@@ -13215,35 +13344,15 @@
           </a:bodyPr>
           <a:lstStyle/>
           <a:p>
-            <a:pPr algn="l">
-              <a:spcAft>
-                <a:spcPts val="200"/>
-              </a:spcAft>
-            </a:pPr>
-            <a:r>
-              <a:rPr sz="2400" b="1" i="0">
+            <a:pPr algn="l"/>
+            <a:r>
+              <a:rPr sz="2200" b="1" i="0">
                 <a:solidFill>
                   <a:srgbClr val="0A0F2E"/>
                 </a:solidFill>
                 <a:latin typeface="Georgia"/>
               </a:rPr>
-              <a:t>Detection on your terms,</a:t>
-            </a:r>
-          </a:p>
-          <a:p>
-            <a:pPr algn="l">
-              <a:spcAft>
-                <a:spcPts val="200"/>
-              </a:spcAft>
-            </a:pPr>
-            <a:r>
-              <a:rPr sz="2400" b="1" i="0">
-                <a:solidFill>
-                  <a:srgbClr val="0A0F2E"/>
-                </a:solidFill>
-                <a:latin typeface="Georgia"/>
-              </a:rPr>
-              <a:t>not after the fact.</a:t>
+              <a:t>Detection on your terms, not after the fact.</a:t>
             </a:r>
           </a:p>
         </p:txBody>
@@ -13256,8 +13365,8 @@
         </p:nvSpPr>
         <p:spPr>
           <a:xfrm>
-            <a:off x="402336" y="2359152"/>
-            <a:ext cx="4078224" cy="1947672"/>
+            <a:off x="402336" y="2340864"/>
+            <a:ext cx="4059936" cy="1298448"/>
           </a:xfrm>
           <a:prstGeom prst="rect">
             <a:avLst/>
@@ -13299,8 +13408,8 @@
         </p:nvSpPr>
         <p:spPr>
           <a:xfrm>
-            <a:off x="402336" y="2359152"/>
-            <a:ext cx="45720" cy="1947672"/>
+            <a:off x="402336" y="2340864"/>
+            <a:ext cx="45720" cy="1298448"/>
           </a:xfrm>
           <a:prstGeom prst="rect">
             <a:avLst/>
@@ -13342,8 +13451,8 @@
         </p:nvSpPr>
         <p:spPr>
           <a:xfrm>
-            <a:off x="566928" y="2450592"/>
-            <a:ext cx="3822192" cy="237744"/>
+            <a:off x="566928" y="2432304"/>
+            <a:ext cx="3803904" cy="237744"/>
           </a:xfrm>
           <a:prstGeom prst="rect">
             <a:avLst/>
@@ -13364,7 +13473,7 @@
                 </a:solidFill>
                 <a:latin typeface="Calibri"/>
               </a:rPr>
-              <a:t>CUSTOMER-DEFINED THRESHOLDS + ESCALATION LOGIC</a:t>
+              <a:t>CUSTOMER-DEFINED THRESHOLDS</a:t>
             </a:r>
           </a:p>
         </p:txBody>
@@ -13377,8 +13486,8 @@
         </p:nvSpPr>
         <p:spPr>
           <a:xfrm>
-            <a:off x="566928" y="2724912"/>
-            <a:ext cx="3822192" cy="1490472"/>
+            <a:off x="566928" y="2706624"/>
+            <a:ext cx="3803904" cy="841248"/>
           </a:xfrm>
           <a:prstGeom prst="rect">
             <a:avLst/>
@@ -13399,7 +13508,7 @@
                 </a:solidFill>
                 <a:latin typeface="Calibri"/>
               </a:rPr>
-              <a:t>You define what constitutes a trigger — sources, thresholds, and escalation paths. Not generic alerts.</a:t>
+              <a:t>You define what constitutes a trigger — sources, thresholds, escalation paths. Not generic alerts.</a:t>
             </a:r>
           </a:p>
         </p:txBody>
@@ -13412,8 +13521,8 @@
         </p:nvSpPr>
         <p:spPr>
           <a:xfrm>
-            <a:off x="402336" y="4398264"/>
-            <a:ext cx="4078224" cy="1947672"/>
+            <a:off x="402336" y="3712464"/>
+            <a:ext cx="4059936" cy="1298448"/>
           </a:xfrm>
           <a:prstGeom prst="rect">
             <a:avLst/>
@@ -13455,8 +13564,8 @@
         </p:nvSpPr>
         <p:spPr>
           <a:xfrm>
-            <a:off x="402336" y="4398264"/>
-            <a:ext cx="45720" cy="1947672"/>
+            <a:off x="402336" y="3712464"/>
+            <a:ext cx="45720" cy="1298448"/>
           </a:xfrm>
           <a:prstGeom prst="rect">
             <a:avLst/>
@@ -13498,8 +13607,8 @@
         </p:nvSpPr>
         <p:spPr>
           <a:xfrm>
-            <a:off x="566928" y="4489704"/>
-            <a:ext cx="3822192" cy="237744"/>
+            <a:off x="566928" y="3803904"/>
+            <a:ext cx="3803904" cy="237744"/>
           </a:xfrm>
           <a:prstGeom prst="rect">
             <a:avLst/>
@@ -13533,8 +13642,8 @@
         </p:nvSpPr>
         <p:spPr>
           <a:xfrm>
-            <a:off x="566928" y="4764024"/>
-            <a:ext cx="3822192" cy="1490472"/>
+            <a:off x="566928" y="4078224"/>
+            <a:ext cx="3803904" cy="841248"/>
           </a:xfrm>
           <a:prstGeom prst="rect">
             <a:avLst/>
@@ -13568,223 +13677,94 @@
         </p:nvSpPr>
         <p:spPr>
           <a:xfrm>
-            <a:off x="4864608" y="822960"/>
-            <a:ext cx="7269480" cy="256032"/>
-          </a:xfrm>
-          <a:prstGeom prst="rect">
-            <a:avLst/>
-          </a:prstGeom>
-          <a:solidFill>
-            <a:srgbClr val="1A1E34"/>
-          </a:solidFill>
-          <a:ln>
-            <a:noFill/>
-          </a:ln>
-        </p:spPr>
-        <p:style>
-          <a:lnRef idx="1">
-            <a:schemeClr val="accent1"/>
-          </a:lnRef>
-          <a:fillRef idx="3">
-            <a:schemeClr val="accent1"/>
-          </a:fillRef>
-          <a:effectRef idx="2">
-            <a:schemeClr val="accent1"/>
-          </a:effectRef>
-          <a:fontRef idx="minor">
-            <a:schemeClr val="lt1"/>
-          </a:fontRef>
-        </p:style>
-        <p:txBody>
-          <a:bodyPr rtlCol="0" anchor="ctr"/>
-          <a:lstStyle/>
-          <a:p>
-            <a:pPr algn="ctr"/>
-          </a:p>
-        </p:txBody>
-      </p:sp>
-      <p:sp>
-        <p:nvSpPr>
-          <p:cNvPr id="19" name="Oval 18"/>
-          <p:cNvSpPr/>
-          <p:nvPr/>
-        </p:nvSpPr>
-        <p:spPr>
-          <a:xfrm>
-            <a:off x="4946904" y="896112"/>
-            <a:ext cx="91440" cy="91440"/>
-          </a:xfrm>
-          <a:prstGeom prst="ellipse">
-            <a:avLst/>
-          </a:prstGeom>
-          <a:solidFill>
-            <a:srgbClr val="FF5F57"/>
-          </a:solidFill>
-          <a:ln>
-            <a:noFill/>
-          </a:ln>
-        </p:spPr>
-        <p:style>
-          <a:lnRef idx="1">
-            <a:schemeClr val="accent1"/>
-          </a:lnRef>
-          <a:fillRef idx="3">
-            <a:schemeClr val="accent1"/>
-          </a:fillRef>
-          <a:effectRef idx="2">
-            <a:schemeClr val="accent1"/>
-          </a:effectRef>
-          <a:fontRef idx="minor">
-            <a:schemeClr val="lt1"/>
-          </a:fontRef>
-        </p:style>
-        <p:txBody>
-          <a:bodyPr rtlCol="0" anchor="ctr"/>
-          <a:lstStyle/>
-          <a:p>
-            <a:pPr algn="ctr"/>
-          </a:p>
-        </p:txBody>
-      </p:sp>
-      <p:sp>
-        <p:nvSpPr>
-          <p:cNvPr id="20" name="Oval 19"/>
-          <p:cNvSpPr/>
-          <p:nvPr/>
-        </p:nvSpPr>
-        <p:spPr>
-          <a:xfrm>
-            <a:off x="5093208" y="896112"/>
-            <a:ext cx="91440" cy="91440"/>
-          </a:xfrm>
-          <a:prstGeom prst="ellipse">
-            <a:avLst/>
-          </a:prstGeom>
-          <a:solidFill>
-            <a:srgbClr val="FFBD2E"/>
-          </a:solidFill>
-          <a:ln>
-            <a:noFill/>
-          </a:ln>
-        </p:spPr>
-        <p:style>
-          <a:lnRef idx="1">
-            <a:schemeClr val="accent1"/>
-          </a:lnRef>
-          <a:fillRef idx="3">
-            <a:schemeClr val="accent1"/>
-          </a:fillRef>
-          <a:effectRef idx="2">
-            <a:schemeClr val="accent1"/>
-          </a:effectRef>
-          <a:fontRef idx="minor">
-            <a:schemeClr val="lt1"/>
-          </a:fontRef>
-        </p:style>
-        <p:txBody>
-          <a:bodyPr rtlCol="0" anchor="ctr"/>
-          <a:lstStyle/>
-          <a:p>
-            <a:pPr algn="ctr"/>
-          </a:p>
-        </p:txBody>
-      </p:sp>
-      <p:sp>
-        <p:nvSpPr>
-          <p:cNvPr id="21" name="Oval 20"/>
-          <p:cNvSpPr/>
-          <p:nvPr/>
-        </p:nvSpPr>
-        <p:spPr>
-          <a:xfrm>
-            <a:off x="5239512" y="896112"/>
-            <a:ext cx="91440" cy="91440"/>
-          </a:xfrm>
-          <a:prstGeom prst="ellipse">
-            <a:avLst/>
-          </a:prstGeom>
-          <a:solidFill>
-            <a:srgbClr val="28CA41"/>
-          </a:solidFill>
-          <a:ln>
-            <a:noFill/>
-          </a:ln>
-        </p:spPr>
-        <p:style>
-          <a:lnRef idx="1">
-            <a:schemeClr val="accent1"/>
-          </a:lnRef>
-          <a:fillRef idx="3">
-            <a:schemeClr val="accent1"/>
-          </a:fillRef>
-          <a:effectRef idx="2">
-            <a:schemeClr val="accent1"/>
-          </a:effectRef>
-          <a:fontRef idx="minor">
-            <a:schemeClr val="lt1"/>
-          </a:fontRef>
-        </p:style>
-        <p:txBody>
-          <a:bodyPr rtlCol="0" anchor="ctr"/>
-          <a:lstStyle/>
-          <a:p>
-            <a:pPr algn="ctr"/>
-          </a:p>
-        </p:txBody>
-      </p:sp>
-      <p:sp>
-        <p:nvSpPr>
-          <p:cNvPr id="22" name="Rectangle 21"/>
-          <p:cNvSpPr/>
-          <p:nvPr/>
-        </p:nvSpPr>
-        <p:spPr>
-          <a:xfrm>
-            <a:off x="5413248" y="868680"/>
-            <a:ext cx="6611112" cy="155448"/>
-          </a:xfrm>
-          <a:prstGeom prst="rect">
-            <a:avLst/>
-          </a:prstGeom>
-          <a:solidFill>
-            <a:srgbClr val="252944"/>
-          </a:solidFill>
-          <a:ln>
-            <a:noFill/>
-          </a:ln>
-        </p:spPr>
-        <p:style>
-          <a:lnRef idx="1">
-            <a:schemeClr val="accent1"/>
-          </a:lnRef>
-          <a:fillRef idx="3">
-            <a:schemeClr val="accent1"/>
-          </a:fillRef>
-          <a:effectRef idx="2">
-            <a:schemeClr val="accent1"/>
-          </a:effectRef>
-          <a:fontRef idx="minor">
-            <a:schemeClr val="lt1"/>
-          </a:fontRef>
-        </p:style>
-        <p:txBody>
-          <a:bodyPr rtlCol="0" anchor="ctr"/>
-          <a:lstStyle/>
-          <a:p>
-            <a:pPr algn="ctr"/>
-          </a:p>
-        </p:txBody>
-      </p:sp>
-      <p:sp>
-        <p:nvSpPr>
-          <p:cNvPr id="23" name="TextBox 22"/>
+            <a:off x="402336" y="5084064"/>
+            <a:ext cx="4059936" cy="1298448"/>
+          </a:xfrm>
+          <a:prstGeom prst="rect">
+            <a:avLst/>
+          </a:prstGeom>
+          <a:solidFill>
+            <a:srgbClr val="FFFFFF"/>
+          </a:solidFill>
+          <a:ln>
+            <a:noFill/>
+          </a:ln>
+        </p:spPr>
+        <p:style>
+          <a:lnRef idx="1">
+            <a:schemeClr val="accent1"/>
+          </a:lnRef>
+          <a:fillRef idx="3">
+            <a:schemeClr val="accent1"/>
+          </a:fillRef>
+          <a:effectRef idx="2">
+            <a:schemeClr val="accent1"/>
+          </a:effectRef>
+          <a:fontRef idx="minor">
+            <a:schemeClr val="lt1"/>
+          </a:fontRef>
+        </p:style>
+        <p:txBody>
+          <a:bodyPr rtlCol="0" anchor="ctr"/>
+          <a:lstStyle/>
+          <a:p>
+            <a:pPr algn="ctr"/>
+          </a:p>
+        </p:txBody>
+      </p:sp>
+      <p:sp>
+        <p:nvSpPr>
+          <p:cNvPr id="19" name="Rectangle 18"/>
+          <p:cNvSpPr/>
+          <p:nvPr/>
+        </p:nvSpPr>
+        <p:spPr>
+          <a:xfrm>
+            <a:off x="402336" y="5084064"/>
+            <a:ext cx="45720" cy="1298448"/>
+          </a:xfrm>
+          <a:prstGeom prst="rect">
+            <a:avLst/>
+          </a:prstGeom>
+          <a:solidFill>
+            <a:srgbClr val="C9A84C"/>
+          </a:solidFill>
+          <a:ln>
+            <a:noFill/>
+          </a:ln>
+        </p:spPr>
+        <p:style>
+          <a:lnRef idx="1">
+            <a:schemeClr val="accent1"/>
+          </a:lnRef>
+          <a:fillRef idx="3">
+            <a:schemeClr val="accent1"/>
+          </a:fillRef>
+          <a:effectRef idx="2">
+            <a:schemeClr val="accent1"/>
+          </a:effectRef>
+          <a:fontRef idx="minor">
+            <a:schemeClr val="lt1"/>
+          </a:fontRef>
+        </p:style>
+        <p:txBody>
+          <a:bodyPr rtlCol="0" anchor="ctr"/>
+          <a:lstStyle/>
+          <a:p>
+            <a:pPr algn="ctr"/>
+          </a:p>
+        </p:txBody>
+      </p:sp>
+      <p:sp>
+        <p:nvSpPr>
+          <p:cNvPr id="20" name="TextBox 19"/>
           <p:cNvSpPr txBox="1"/>
           <p:nvPr/>
         </p:nvSpPr>
         <p:spPr>
           <a:xfrm>
-            <a:off x="5458968" y="868680"/>
-            <a:ext cx="6537960" cy="155448"/>
+            <a:off x="566928" y="5175504"/>
+            <a:ext cx="3803904" cy="237744"/>
           </a:xfrm>
           <a:prstGeom prst="rect">
             <a:avLst/>
@@ -13799,6 +13779,291 @@
           <a:p>
             <a:pPr algn="l"/>
             <a:r>
+              <a:rPr sz="850" b="1" i="0">
+                <a:solidFill>
+                  <a:srgbClr val="0A0F2E"/>
+                </a:solidFill>
+                <a:latin typeface="Calibri"/>
+              </a:rPr>
+              <a:t>221 TRIGGER PATTERNS</a:t>
+            </a:r>
+          </a:p>
+        </p:txBody>
+      </p:sp>
+      <p:sp>
+        <p:nvSpPr>
+          <p:cNvPr id="21" name="TextBox 20"/>
+          <p:cNvSpPr txBox="1"/>
+          <p:nvPr/>
+        </p:nvSpPr>
+        <p:spPr>
+          <a:xfrm>
+            <a:off x="566928" y="5449824"/>
+            <a:ext cx="3803904" cy="841248"/>
+          </a:xfrm>
+          <a:prstGeom prst="rect">
+            <a:avLst/>
+          </a:prstGeom>
+          <a:noFill/>
+        </p:spPr>
+        <p:txBody>
+          <a:bodyPr wrap="square">
+            <a:spAutoFit/>
+          </a:bodyPr>
+          <a:lstStyle/>
+          <a:p>
+            <a:pPr algn="l"/>
+            <a:r>
+              <a:rPr sz="1050" b="0" i="0">
+                <a:solidFill>
+                  <a:srgbClr val="444C66"/>
+                </a:solidFill>
+                <a:latin typeface="Calibri"/>
+              </a:rPr>
+              <a:t>Scored against your defined escalation logic. Signal confidence surfaced at detection.</a:t>
+            </a:r>
+          </a:p>
+        </p:txBody>
+      </p:sp>
+      <p:sp>
+        <p:nvSpPr>
+          <p:cNvPr id="22" name="Rectangle 21"/>
+          <p:cNvSpPr/>
+          <p:nvPr/>
+        </p:nvSpPr>
+        <p:spPr>
+          <a:xfrm>
+            <a:off x="4864608" y="804672"/>
+            <a:ext cx="7269480" cy="256032"/>
+          </a:xfrm>
+          <a:prstGeom prst="rect">
+            <a:avLst/>
+          </a:prstGeom>
+          <a:solidFill>
+            <a:srgbClr val="1A1E34"/>
+          </a:solidFill>
+          <a:ln>
+            <a:noFill/>
+          </a:ln>
+        </p:spPr>
+        <p:style>
+          <a:lnRef idx="1">
+            <a:schemeClr val="accent1"/>
+          </a:lnRef>
+          <a:fillRef idx="3">
+            <a:schemeClr val="accent1"/>
+          </a:fillRef>
+          <a:effectRef idx="2">
+            <a:schemeClr val="accent1"/>
+          </a:effectRef>
+          <a:fontRef idx="minor">
+            <a:schemeClr val="lt1"/>
+          </a:fontRef>
+        </p:style>
+        <p:txBody>
+          <a:bodyPr rtlCol="0" anchor="ctr"/>
+          <a:lstStyle/>
+          <a:p>
+            <a:pPr algn="ctr"/>
+          </a:p>
+        </p:txBody>
+      </p:sp>
+      <p:sp>
+        <p:nvSpPr>
+          <p:cNvPr id="23" name="Oval 22"/>
+          <p:cNvSpPr/>
+          <p:nvPr/>
+        </p:nvSpPr>
+        <p:spPr>
+          <a:xfrm>
+            <a:off x="4946904" y="877824"/>
+            <a:ext cx="91440" cy="91440"/>
+          </a:xfrm>
+          <a:prstGeom prst="ellipse">
+            <a:avLst/>
+          </a:prstGeom>
+          <a:solidFill>
+            <a:srgbClr val="FF5F57"/>
+          </a:solidFill>
+          <a:ln>
+            <a:noFill/>
+          </a:ln>
+        </p:spPr>
+        <p:style>
+          <a:lnRef idx="1">
+            <a:schemeClr val="accent1"/>
+          </a:lnRef>
+          <a:fillRef idx="3">
+            <a:schemeClr val="accent1"/>
+          </a:fillRef>
+          <a:effectRef idx="2">
+            <a:schemeClr val="accent1"/>
+          </a:effectRef>
+          <a:fontRef idx="minor">
+            <a:schemeClr val="lt1"/>
+          </a:fontRef>
+        </p:style>
+        <p:txBody>
+          <a:bodyPr rtlCol="0" anchor="ctr"/>
+          <a:lstStyle/>
+          <a:p>
+            <a:pPr algn="ctr"/>
+          </a:p>
+        </p:txBody>
+      </p:sp>
+      <p:sp>
+        <p:nvSpPr>
+          <p:cNvPr id="24" name="Oval 23"/>
+          <p:cNvSpPr/>
+          <p:nvPr/>
+        </p:nvSpPr>
+        <p:spPr>
+          <a:xfrm>
+            <a:off x="5093208" y="877824"/>
+            <a:ext cx="91440" cy="91440"/>
+          </a:xfrm>
+          <a:prstGeom prst="ellipse">
+            <a:avLst/>
+          </a:prstGeom>
+          <a:solidFill>
+            <a:srgbClr val="FFBD2E"/>
+          </a:solidFill>
+          <a:ln>
+            <a:noFill/>
+          </a:ln>
+        </p:spPr>
+        <p:style>
+          <a:lnRef idx="1">
+            <a:schemeClr val="accent1"/>
+          </a:lnRef>
+          <a:fillRef idx="3">
+            <a:schemeClr val="accent1"/>
+          </a:fillRef>
+          <a:effectRef idx="2">
+            <a:schemeClr val="accent1"/>
+          </a:effectRef>
+          <a:fontRef idx="minor">
+            <a:schemeClr val="lt1"/>
+          </a:fontRef>
+        </p:style>
+        <p:txBody>
+          <a:bodyPr rtlCol="0" anchor="ctr"/>
+          <a:lstStyle/>
+          <a:p>
+            <a:pPr algn="ctr"/>
+          </a:p>
+        </p:txBody>
+      </p:sp>
+      <p:sp>
+        <p:nvSpPr>
+          <p:cNvPr id="25" name="Oval 24"/>
+          <p:cNvSpPr/>
+          <p:nvPr/>
+        </p:nvSpPr>
+        <p:spPr>
+          <a:xfrm>
+            <a:off x="5239512" y="877824"/>
+            <a:ext cx="91440" cy="91440"/>
+          </a:xfrm>
+          <a:prstGeom prst="ellipse">
+            <a:avLst/>
+          </a:prstGeom>
+          <a:solidFill>
+            <a:srgbClr val="28CA41"/>
+          </a:solidFill>
+          <a:ln>
+            <a:noFill/>
+          </a:ln>
+        </p:spPr>
+        <p:style>
+          <a:lnRef idx="1">
+            <a:schemeClr val="accent1"/>
+          </a:lnRef>
+          <a:fillRef idx="3">
+            <a:schemeClr val="accent1"/>
+          </a:fillRef>
+          <a:effectRef idx="2">
+            <a:schemeClr val="accent1"/>
+          </a:effectRef>
+          <a:fontRef idx="minor">
+            <a:schemeClr val="lt1"/>
+          </a:fontRef>
+        </p:style>
+        <p:txBody>
+          <a:bodyPr rtlCol="0" anchor="ctr"/>
+          <a:lstStyle/>
+          <a:p>
+            <a:pPr algn="ctr"/>
+          </a:p>
+        </p:txBody>
+      </p:sp>
+      <p:sp>
+        <p:nvSpPr>
+          <p:cNvPr id="26" name="Rectangle 25"/>
+          <p:cNvSpPr/>
+          <p:nvPr/>
+        </p:nvSpPr>
+        <p:spPr>
+          <a:xfrm>
+            <a:off x="5413248" y="850392"/>
+            <a:ext cx="6611112" cy="155448"/>
+          </a:xfrm>
+          <a:prstGeom prst="rect">
+            <a:avLst/>
+          </a:prstGeom>
+          <a:solidFill>
+            <a:srgbClr val="252944"/>
+          </a:solidFill>
+          <a:ln>
+            <a:noFill/>
+          </a:ln>
+        </p:spPr>
+        <p:style>
+          <a:lnRef idx="1">
+            <a:schemeClr val="accent1"/>
+          </a:lnRef>
+          <a:fillRef idx="3">
+            <a:schemeClr val="accent1"/>
+          </a:fillRef>
+          <a:effectRef idx="2">
+            <a:schemeClr val="accent1"/>
+          </a:effectRef>
+          <a:fontRef idx="minor">
+            <a:schemeClr val="lt1"/>
+          </a:fontRef>
+        </p:style>
+        <p:txBody>
+          <a:bodyPr rtlCol="0" anchor="ctr"/>
+          <a:lstStyle/>
+          <a:p>
+            <a:pPr algn="ctr"/>
+          </a:p>
+        </p:txBody>
+      </p:sp>
+      <p:sp>
+        <p:nvSpPr>
+          <p:cNvPr id="27" name="TextBox 26"/>
+          <p:cNvSpPr txBox="1"/>
+          <p:nvPr/>
+        </p:nvSpPr>
+        <p:spPr>
+          <a:xfrm>
+            <a:off x="5458968" y="850392"/>
+            <a:ext cx="6537960" cy="155448"/>
+          </a:xfrm>
+          <a:prstGeom prst="rect">
+            <a:avLst/>
+          </a:prstGeom>
+          <a:noFill/>
+        </p:spPr>
+        <p:txBody>
+          <a:bodyPr wrap="square">
+            <a:spAutoFit/>
+          </a:bodyPr>
+          <a:lstStyle/>
+          <a:p>
+            <a:pPr algn="l"/>
+            <a:r>
               <a:rPr sz="650" b="0" i="0">
                 <a:solidFill>
                   <a:srgbClr val="9096B2"/>
@@ -13812,7 +14077,7 @@
       </p:sp>
       <p:pic>
         <p:nvPicPr>
-          <p:cNvPr id="24" name="Picture 23" descr="deck_signals.jpg"/>
+          <p:cNvPr id="28" name="Picture 27" descr="deck_signals.jpg"/>
           <p:cNvPicPr>
             <a:picLocks noChangeAspect="1"/>
           </p:cNvPicPr>
@@ -13826,8 +14091,8 @@
         </p:blipFill>
         <p:spPr>
           <a:xfrm>
-            <a:off x="4864608" y="1078992"/>
-            <a:ext cx="7269480" cy="5394960"/>
+            <a:off x="4864608" y="1060704"/>
+            <a:ext cx="7269480" cy="5431536"/>
           </a:xfrm>
           <a:prstGeom prst="rect">
             <a:avLst/>
@@ -13836,7 +14101,7 @@
       </p:pic>
       <p:sp>
         <p:nvSpPr>
-          <p:cNvPr id="25" name="Rectangle 24"/>
+          <p:cNvPr id="29" name="Rectangle 28"/>
           <p:cNvSpPr/>
           <p:nvPr/>
         </p:nvSpPr>
@@ -13879,7 +14144,7 @@
       </p:sp>
       <p:sp>
         <p:nvSpPr>
-          <p:cNvPr id="26" name="Rectangle 25"/>
+          <p:cNvPr id="30" name="Rectangle 29"/>
           <p:cNvSpPr/>
           <p:nvPr/>
         </p:nvSpPr>
@@ -13922,7 +14187,7 @@
       </p:sp>
       <p:sp>
         <p:nvSpPr>
-          <p:cNvPr id="27" name="TextBox 26"/>
+          <p:cNvPr id="31" name="TextBox 30"/>
           <p:cNvSpPr txBox="1"/>
           <p:nvPr/>
         </p:nvSpPr>
@@ -14177,8 +14442,8 @@
         </p:nvSpPr>
         <p:spPr>
           <a:xfrm>
-            <a:off x="8988552" y="192024"/>
-            <a:ext cx="3017520" cy="237744"/>
+            <a:off x="8897112" y="192024"/>
+            <a:ext cx="3108960" cy="237744"/>
           </a:xfrm>
           <a:prstGeom prst="rect">
             <a:avLst/>
@@ -14256,7 +14521,7 @@
         <p:spPr>
           <a:xfrm>
             <a:off x="402336" y="987552"/>
-            <a:ext cx="4078224" cy="1207008"/>
+            <a:ext cx="4059936" cy="1225296"/>
           </a:xfrm>
           <a:prstGeom prst="rect">
             <a:avLst/>
@@ -14269,35 +14534,15 @@
           </a:bodyPr>
           <a:lstStyle/>
           <a:p>
-            <a:pPr algn="l">
-              <a:spcAft>
-                <a:spcPts val="200"/>
-              </a:spcAft>
-            </a:pPr>
-            <a:r>
-              <a:rPr sz="2400" b="1" i="0">
+            <a:pPr algn="l"/>
+            <a:r>
+              <a:rPr sz="2200" b="1" i="0">
                 <a:solidFill>
                   <a:srgbClr val="0A0F2E"/>
                 </a:solidFill>
                 <a:latin typeface="Georgia"/>
               </a:rPr>
-              <a:t>AI monitors.</a:t>
-            </a:r>
-          </a:p>
-          <a:p>
-            <a:pPr algn="l">
-              <a:spcAft>
-                <a:spcPts val="200"/>
-              </a:spcAft>
-            </a:pPr>
-            <a:r>
-              <a:rPr sz="2400" b="1" i="0">
-                <a:solidFill>
-                  <a:srgbClr val="0A0F2E"/>
-                </a:solidFill>
-                <a:latin typeface="Georgia"/>
-              </a:rPr>
-              <a:t>Executives authorize.</a:t>
+              <a:t>AI monitors. Executives authorize.</a:t>
             </a:r>
           </a:p>
         </p:txBody>
@@ -14310,8 +14555,8 @@
         </p:nvSpPr>
         <p:spPr>
           <a:xfrm>
-            <a:off x="402336" y="2359152"/>
-            <a:ext cx="4078224" cy="1947672"/>
+            <a:off x="402336" y="2340864"/>
+            <a:ext cx="4059936" cy="1984248"/>
           </a:xfrm>
           <a:prstGeom prst="rect">
             <a:avLst/>
@@ -14353,8 +14598,8 @@
         </p:nvSpPr>
         <p:spPr>
           <a:xfrm>
-            <a:off x="402336" y="2359152"/>
-            <a:ext cx="45720" cy="1947672"/>
+            <a:off x="402336" y="2340864"/>
+            <a:ext cx="45720" cy="1984248"/>
           </a:xfrm>
           <a:prstGeom prst="rect">
             <a:avLst/>
@@ -14396,8 +14641,8 @@
         </p:nvSpPr>
         <p:spPr>
           <a:xfrm>
-            <a:off x="566928" y="2450592"/>
-            <a:ext cx="3822192" cy="237744"/>
+            <a:off x="566928" y="2432304"/>
+            <a:ext cx="3803904" cy="237744"/>
           </a:xfrm>
           <a:prstGeom prst="rect">
             <a:avLst/>
@@ -14431,8 +14676,8 @@
         </p:nvSpPr>
         <p:spPr>
           <a:xfrm>
-            <a:off x="566928" y="2724912"/>
-            <a:ext cx="3822192" cy="1490472"/>
+            <a:off x="566928" y="2706624"/>
+            <a:ext cx="3803904" cy="1527048"/>
           </a:xfrm>
           <a:prstGeom prst="rect">
             <a:avLst/>
@@ -14453,7 +14698,7 @@
                 </a:solidFill>
                 <a:latin typeface="Calibri"/>
               </a:rPr>
-              <a:t>No Readiness Protocol activates without explicit executive sign-off. The preparation compresses mobilization. The decision stays human.</a:t>
+              <a:t>No Readiness Protocol activates without explicit executive sign-off. The decision stays human.</a:t>
             </a:r>
           </a:p>
         </p:txBody>
@@ -14467,7 +14712,7 @@
         <p:spPr>
           <a:xfrm>
             <a:off x="402336" y="4398264"/>
-            <a:ext cx="4078224" cy="1947672"/>
+            <a:ext cx="4059936" cy="1984248"/>
           </a:xfrm>
           <a:prstGeom prst="rect">
             <a:avLst/>
@@ -14510,7 +14755,7 @@
         <p:spPr>
           <a:xfrm>
             <a:off x="402336" y="4398264"/>
-            <a:ext cx="45720" cy="1947672"/>
+            <a:ext cx="45720" cy="1984248"/>
           </a:xfrm>
           <a:prstGeom prst="rect">
             <a:avLst/>
@@ -14553,7 +14798,7 @@
         <p:spPr>
           <a:xfrm>
             <a:off x="566928" y="4489704"/>
-            <a:ext cx="3822192" cy="237744"/>
+            <a:ext cx="3803904" cy="237744"/>
           </a:xfrm>
           <a:prstGeom prst="rect">
             <a:avLst/>
@@ -14588,7 +14833,7 @@
         <p:spPr>
           <a:xfrm>
             <a:off x="566928" y="4764024"/>
-            <a:ext cx="3822192" cy="1490472"/>
+            <a:ext cx="3803904" cy="1527048"/>
           </a:xfrm>
           <a:prstGeom prst="rect">
             <a:avLst/>
@@ -14609,7 +14854,7 @@
                 </a:solidFill>
                 <a:latin typeface="Calibri"/>
               </a:rPr>
-              <a:t>Every authorization logged with timestamp, decision-maker, and full context. Board-ready audit trail.</a:t>
+              <a:t>Every authorization logged with timestamp, decision-maker, and full context — board-ready audit trail.</a:t>
             </a:r>
           </a:p>
         </p:txBody>
@@ -14622,7 +14867,7 @@
         </p:nvSpPr>
         <p:spPr>
           <a:xfrm>
-            <a:off x="4864608" y="822960"/>
+            <a:off x="4864608" y="804672"/>
             <a:ext cx="7269480" cy="256032"/>
           </a:xfrm>
           <a:prstGeom prst="rect">
@@ -14665,7 +14910,7 @@
         </p:nvSpPr>
         <p:spPr>
           <a:xfrm>
-            <a:off x="4946904" y="896112"/>
+            <a:off x="4946904" y="877824"/>
             <a:ext cx="91440" cy="91440"/>
           </a:xfrm>
           <a:prstGeom prst="ellipse">
@@ -14708,7 +14953,7 @@
         </p:nvSpPr>
         <p:spPr>
           <a:xfrm>
-            <a:off x="5093208" y="896112"/>
+            <a:off x="5093208" y="877824"/>
             <a:ext cx="91440" cy="91440"/>
           </a:xfrm>
           <a:prstGeom prst="ellipse">
@@ -14751,7 +14996,7 @@
         </p:nvSpPr>
         <p:spPr>
           <a:xfrm>
-            <a:off x="5239512" y="896112"/>
+            <a:off x="5239512" y="877824"/>
             <a:ext cx="91440" cy="91440"/>
           </a:xfrm>
           <a:prstGeom prst="ellipse">
@@ -14794,7 +15039,7 @@
         </p:nvSpPr>
         <p:spPr>
           <a:xfrm>
-            <a:off x="5413248" y="868680"/>
+            <a:off x="5413248" y="850392"/>
             <a:ext cx="6611112" cy="155448"/>
           </a:xfrm>
           <a:prstGeom prst="rect">
@@ -14837,7 +15082,7 @@
         </p:nvSpPr>
         <p:spPr>
           <a:xfrm>
-            <a:off x="5458968" y="868680"/>
+            <a:off x="5458968" y="850392"/>
             <a:ext cx="6537960" cy="155448"/>
           </a:xfrm>
           <a:prstGeom prst="rect">
@@ -14880,8 +15125,8 @@
         </p:blipFill>
         <p:spPr>
           <a:xfrm>
-            <a:off x="4864608" y="1078992"/>
-            <a:ext cx="7269480" cy="5394960"/>
+            <a:off x="4864608" y="1060704"/>
+            <a:ext cx="7269480" cy="5431536"/>
           </a:xfrm>
           <a:prstGeom prst="rect">
             <a:avLst/>
@@ -15231,8 +15476,8 @@
         </p:nvSpPr>
         <p:spPr>
           <a:xfrm>
-            <a:off x="8988552" y="192024"/>
-            <a:ext cx="3017520" cy="237744"/>
+            <a:off x="8897112" y="192024"/>
+            <a:ext cx="3108960" cy="237744"/>
           </a:xfrm>
           <a:prstGeom prst="rect">
             <a:avLst/>
@@ -15310,7 +15555,7 @@
         <p:spPr>
           <a:xfrm>
             <a:off x="402336" y="987552"/>
-            <a:ext cx="4078224" cy="1207008"/>
+            <a:ext cx="4059936" cy="1225296"/>
           </a:xfrm>
           <a:prstGeom prst="rect">
             <a:avLst/>
@@ -15323,35 +15568,15 @@
           </a:bodyPr>
           <a:lstStyle/>
           <a:p>
-            <a:pPr algn="l">
-              <a:spcAft>
-                <a:spcPts val="200"/>
-              </a:spcAft>
-            </a:pPr>
-            <a:r>
-              <a:rPr sz="2400" b="1" i="0">
+            <a:pPr algn="l"/>
+            <a:r>
+              <a:rPr sz="2200" b="1" i="0">
                 <a:solidFill>
                   <a:srgbClr val="0A0F2E"/>
                 </a:solidFill>
                 <a:latin typeface="Georgia"/>
               </a:rPr>
-              <a:t>From decision to coordinated</a:t>
-            </a:r>
-          </a:p>
-          <a:p>
-            <a:pPr algn="l">
-              <a:spcAft>
-                <a:spcPts val="200"/>
-              </a:spcAft>
-            </a:pPr>
-            <a:r>
-              <a:rPr sz="2400" b="1" i="0">
-                <a:solidFill>
-                  <a:srgbClr val="0A0F2E"/>
-                </a:solidFill>
-                <a:latin typeface="Georgia"/>
-              </a:rPr>
-              <a:t>action in 12 minutes.</a:t>
+              <a:t>From decision to coordinated action in 12 minutes.</a:t>
             </a:r>
           </a:p>
         </p:txBody>
@@ -15364,8 +15589,8 @@
         </p:nvSpPr>
         <p:spPr>
           <a:xfrm>
-            <a:off x="402336" y="2359152"/>
-            <a:ext cx="4078224" cy="1947672"/>
+            <a:off x="402336" y="2340864"/>
+            <a:ext cx="4059936" cy="1984248"/>
           </a:xfrm>
           <a:prstGeom prst="rect">
             <a:avLst/>
@@ -15407,8 +15632,8 @@
         </p:nvSpPr>
         <p:spPr>
           <a:xfrm>
-            <a:off x="402336" y="2359152"/>
-            <a:ext cx="45720" cy="1947672"/>
+            <a:off x="402336" y="2340864"/>
+            <a:ext cx="45720" cy="1984248"/>
           </a:xfrm>
           <a:prstGeom prst="rect">
             <a:avLst/>
@@ -15450,8 +15675,8 @@
         </p:nvSpPr>
         <p:spPr>
           <a:xfrm>
-            <a:off x="566928" y="2450592"/>
-            <a:ext cx="3822192" cy="237744"/>
+            <a:off x="566928" y="2432304"/>
+            <a:ext cx="3803904" cy="237744"/>
           </a:xfrm>
           <a:prstGeom prst="rect">
             <a:avLst/>
@@ -15472,7 +15697,7 @@
                 </a:solidFill>
                 <a:latin typeface="Calibri"/>
               </a:rPr>
-              <a:t>ROLES  ·  BUDGET  ·  INTERNAL  ·  EXTERNAL COMMS</a:t>
+              <a:t>ROLES  ·  BUDGET  ·  COMMS</a:t>
             </a:r>
           </a:p>
         </p:txBody>
@@ -15485,8 +15710,8 @@
         </p:nvSpPr>
         <p:spPr>
           <a:xfrm>
-            <a:off x="566928" y="2724912"/>
-            <a:ext cx="3822192" cy="1490472"/>
+            <a:off x="566928" y="2706624"/>
+            <a:ext cx="3803904" cy="1527048"/>
           </a:xfrm>
           <a:prstGeom prst="rect">
             <a:avLst/>
@@ -15521,7 +15746,7 @@
         <p:spPr>
           <a:xfrm>
             <a:off x="402336" y="4398264"/>
-            <a:ext cx="4078224" cy="1947672"/>
+            <a:ext cx="4059936" cy="1984248"/>
           </a:xfrm>
           <a:prstGeom prst="rect">
             <a:avLst/>
@@ -15564,7 +15789,7 @@
         <p:spPr>
           <a:xfrm>
             <a:off x="402336" y="4398264"/>
-            <a:ext cx="45720" cy="1947672"/>
+            <a:ext cx="45720" cy="1984248"/>
           </a:xfrm>
           <a:prstGeom prst="rect">
             <a:avLst/>
@@ -15607,7 +15832,7 @@
         <p:spPr>
           <a:xfrm>
             <a:off x="566928" y="4489704"/>
-            <a:ext cx="3822192" cy="237744"/>
+            <a:ext cx="3803904" cy="237744"/>
           </a:xfrm>
           <a:prstGeom prst="rect">
             <a:avLst/>
@@ -15642,7 +15867,7 @@
         <p:spPr>
           <a:xfrm>
             <a:off x="566928" y="4764024"/>
-            <a:ext cx="3822192" cy="1490472"/>
+            <a:ext cx="3803904" cy="1527048"/>
           </a:xfrm>
           <a:prstGeom prst="rect">
             <a:avLst/>
@@ -15663,7 +15888,7 @@
                 </a:solidFill>
                 <a:latin typeface="Calibri"/>
               </a:rPr>
-              <a:t>The entire plan — people, funds, communications — deploys in a single authorized action.</a:t>
+              <a:t>The entire plan — people, funds, and communications — deploys in a single authorized action.</a:t>
             </a:r>
           </a:p>
         </p:txBody>
@@ -15676,7 +15901,7 @@
         </p:nvSpPr>
         <p:spPr>
           <a:xfrm>
-            <a:off x="4864608" y="822960"/>
+            <a:off x="4864608" y="804672"/>
             <a:ext cx="7269480" cy="256032"/>
           </a:xfrm>
           <a:prstGeom prst="rect">
@@ -15719,7 +15944,7 @@
         </p:nvSpPr>
         <p:spPr>
           <a:xfrm>
-            <a:off x="4946904" y="896112"/>
+            <a:off x="4946904" y="877824"/>
             <a:ext cx="91440" cy="91440"/>
           </a:xfrm>
           <a:prstGeom prst="ellipse">
@@ -15762,7 +15987,7 @@
         </p:nvSpPr>
         <p:spPr>
           <a:xfrm>
-            <a:off x="5093208" y="896112"/>
+            <a:off x="5093208" y="877824"/>
             <a:ext cx="91440" cy="91440"/>
           </a:xfrm>
           <a:prstGeom prst="ellipse">
@@ -15805,7 +16030,7 @@
         </p:nvSpPr>
         <p:spPr>
           <a:xfrm>
-            <a:off x="5239512" y="896112"/>
+            <a:off x="5239512" y="877824"/>
             <a:ext cx="91440" cy="91440"/>
           </a:xfrm>
           <a:prstGeom prst="ellipse">
@@ -15848,7 +16073,7 @@
         </p:nvSpPr>
         <p:spPr>
           <a:xfrm>
-            <a:off x="5413248" y="868680"/>
+            <a:off x="5413248" y="850392"/>
             <a:ext cx="6611112" cy="155448"/>
           </a:xfrm>
           <a:prstGeom prst="rect">
@@ -15891,7 +16116,7 @@
         </p:nvSpPr>
         <p:spPr>
           <a:xfrm>
-            <a:off x="5458968" y="868680"/>
+            <a:off x="5458968" y="850392"/>
             <a:ext cx="6537960" cy="155448"/>
           </a:xfrm>
           <a:prstGeom prst="rect">
@@ -15934,8 +16159,8 @@
         </p:blipFill>
         <p:spPr>
           <a:xfrm>
-            <a:off x="4864608" y="1078992"/>
-            <a:ext cx="7269480" cy="5394960"/>
+            <a:off x="4864608" y="1060704"/>
+            <a:ext cx="7269480" cy="5431536"/>
           </a:xfrm>
           <a:prstGeom prst="rect">
             <a:avLst/>
@@ -16242,8 +16467,8 @@
         </p:nvSpPr>
         <p:spPr>
           <a:xfrm>
-            <a:off x="8988552" y="192024"/>
-            <a:ext cx="3017520" cy="237744"/>
+            <a:off x="8897112" y="192024"/>
+            <a:ext cx="3108960" cy="237744"/>
           </a:xfrm>
           <a:prstGeom prst="rect">
             <a:avLst/>
@@ -16264,107 +16489,21 @@
                 </a:solidFill>
                 <a:latin typeface="Calibri"/>
               </a:rPr>
-              <a:t>ONE TRIGGER.  TWO OUTCOMES.</a:t>
-            </a:r>
-          </a:p>
-        </p:txBody>
-      </p:sp>
-      <p:sp>
-        <p:nvSpPr>
-          <p:cNvPr id="7" name="Rectangle 6"/>
-          <p:cNvSpPr/>
+              <a:t>THE 12-MINUTE SCENARIO</a:t>
+            </a:r>
+          </a:p>
+        </p:txBody>
+      </p:sp>
+      <p:sp>
+        <p:nvSpPr>
+          <p:cNvPr id="7" name="TextBox 6"/>
+          <p:cNvSpPr txBox="1"/>
           <p:nvPr/>
         </p:nvSpPr>
         <p:spPr>
           <a:xfrm>
             <a:off x="402336" y="877824"/>
-            <a:ext cx="5554980" cy="347472"/>
-          </a:xfrm>
-          <a:prstGeom prst="rect">
-            <a:avLst/>
-          </a:prstGeom>
-          <a:solidFill>
-            <a:srgbClr val="FFEEEC"/>
-          </a:solidFill>
-          <a:ln>
-            <a:noFill/>
-          </a:ln>
-        </p:spPr>
-        <p:style>
-          <a:lnRef idx="1">
-            <a:schemeClr val="accent1"/>
-          </a:lnRef>
-          <a:fillRef idx="3">
-            <a:schemeClr val="accent1"/>
-          </a:fillRef>
-          <a:effectRef idx="2">
-            <a:schemeClr val="accent1"/>
-          </a:effectRef>
-          <a:fontRef idx="minor">
-            <a:schemeClr val="lt1"/>
-          </a:fontRef>
-        </p:style>
-        <p:txBody>
-          <a:bodyPr rtlCol="0" anchor="ctr"/>
-          <a:lstStyle/>
-          <a:p>
-            <a:pPr algn="ctr"/>
-          </a:p>
-        </p:txBody>
-      </p:sp>
-      <p:sp>
-        <p:nvSpPr>
-          <p:cNvPr id="8" name="Rectangle 7"/>
-          <p:cNvSpPr/>
-          <p:nvPr/>
-        </p:nvSpPr>
-        <p:spPr>
-          <a:xfrm>
-            <a:off x="402336" y="877824"/>
-            <a:ext cx="5554980" cy="45720"/>
-          </a:xfrm>
-          <a:prstGeom prst="rect">
-            <a:avLst/>
-          </a:prstGeom>
-          <a:solidFill>
-            <a:srgbClr val="CC4444"/>
-          </a:solidFill>
-          <a:ln>
-            <a:noFill/>
-          </a:ln>
-        </p:spPr>
-        <p:style>
-          <a:lnRef idx="1">
-            <a:schemeClr val="accent1"/>
-          </a:lnRef>
-          <a:fillRef idx="3">
-            <a:schemeClr val="accent1"/>
-          </a:fillRef>
-          <a:effectRef idx="2">
-            <a:schemeClr val="accent1"/>
-          </a:effectRef>
-          <a:fontRef idx="minor">
-            <a:schemeClr val="lt1"/>
-          </a:fontRef>
-        </p:style>
-        <p:txBody>
-          <a:bodyPr rtlCol="0" anchor="ctr"/>
-          <a:lstStyle/>
-          <a:p>
-            <a:pPr algn="ctr"/>
-          </a:p>
-        </p:txBody>
-      </p:sp>
-      <p:sp>
-        <p:nvSpPr>
-          <p:cNvPr id="9" name="TextBox 8"/>
-          <p:cNvSpPr txBox="1"/>
-          <p:nvPr/>
-        </p:nvSpPr>
-        <p:spPr>
-          <a:xfrm>
-            <a:off x="402336" y="941832"/>
-            <a:ext cx="5554980" cy="256032"/>
+            <a:ext cx="11384280" cy="402336"/>
           </a:xfrm>
           <a:prstGeom prst="rect">
             <a:avLst/>
@@ -16377,6 +16516,162 @@
           </a:bodyPr>
           <a:lstStyle/>
           <a:p>
+            <a:pPr algn="l"/>
+            <a:r>
+              <a:rPr sz="2000" b="1" i="0">
+                <a:solidFill>
+                  <a:srgbClr val="0A0F2E"/>
+                </a:solidFill>
+                <a:latin typeface="Georgia"/>
+              </a:rPr>
+              <a:t>Activist investor discloses 8.3% stake. 9:47 AM.</a:t>
+            </a:r>
+          </a:p>
+        </p:txBody>
+      </p:sp>
+      <p:sp>
+        <p:nvSpPr>
+          <p:cNvPr id="8" name="TextBox 7"/>
+          <p:cNvSpPr txBox="1"/>
+          <p:nvPr/>
+        </p:nvSpPr>
+        <p:spPr>
+          <a:xfrm>
+            <a:off x="402336" y="1298448"/>
+            <a:ext cx="11384280" cy="329184"/>
+          </a:xfrm>
+          <a:prstGeom prst="rect">
+            <a:avLst/>
+          </a:prstGeom>
+          <a:noFill/>
+        </p:spPr>
+        <p:txBody>
+          <a:bodyPr wrap="square">
+            <a:spAutoFit/>
+          </a:bodyPr>
+          <a:lstStyle/>
+          <a:p>
+            <a:pPr algn="l"/>
+            <a:r>
+              <a:rPr sz="1400" b="0" i="1">
+                <a:solidFill>
+                  <a:srgbClr val="5A627A"/>
+                </a:solidFill>
+                <a:latin typeface="Georgia"/>
+              </a:rPr>
+              <a:t>One trigger. Two completely different organizations.</a:t>
+            </a:r>
+          </a:p>
+        </p:txBody>
+      </p:sp>
+      <p:sp>
+        <p:nvSpPr>
+          <p:cNvPr id="9" name="Rectangle 8"/>
+          <p:cNvSpPr/>
+          <p:nvPr/>
+        </p:nvSpPr>
+        <p:spPr>
+          <a:xfrm>
+            <a:off x="402336" y="1773936"/>
+            <a:ext cx="5554980" cy="347472"/>
+          </a:xfrm>
+          <a:prstGeom prst="rect">
+            <a:avLst/>
+          </a:prstGeom>
+          <a:solidFill>
+            <a:srgbClr val="FFEEEC"/>
+          </a:solidFill>
+          <a:ln>
+            <a:noFill/>
+          </a:ln>
+        </p:spPr>
+        <p:style>
+          <a:lnRef idx="1">
+            <a:schemeClr val="accent1"/>
+          </a:lnRef>
+          <a:fillRef idx="3">
+            <a:schemeClr val="accent1"/>
+          </a:fillRef>
+          <a:effectRef idx="2">
+            <a:schemeClr val="accent1"/>
+          </a:effectRef>
+          <a:fontRef idx="minor">
+            <a:schemeClr val="lt1"/>
+          </a:fontRef>
+        </p:style>
+        <p:txBody>
+          <a:bodyPr rtlCol="0" anchor="ctr"/>
+          <a:lstStyle/>
+          <a:p>
+            <a:pPr algn="ctr"/>
+          </a:p>
+        </p:txBody>
+      </p:sp>
+      <p:sp>
+        <p:nvSpPr>
+          <p:cNvPr id="10" name="Rectangle 9"/>
+          <p:cNvSpPr/>
+          <p:nvPr/>
+        </p:nvSpPr>
+        <p:spPr>
+          <a:xfrm>
+            <a:off x="402336" y="1773936"/>
+            <a:ext cx="5554980" cy="45720"/>
+          </a:xfrm>
+          <a:prstGeom prst="rect">
+            <a:avLst/>
+          </a:prstGeom>
+          <a:solidFill>
+            <a:srgbClr val="CC4444"/>
+          </a:solidFill>
+          <a:ln>
+            <a:noFill/>
+          </a:ln>
+        </p:spPr>
+        <p:style>
+          <a:lnRef idx="1">
+            <a:schemeClr val="accent1"/>
+          </a:lnRef>
+          <a:fillRef idx="3">
+            <a:schemeClr val="accent1"/>
+          </a:fillRef>
+          <a:effectRef idx="2">
+            <a:schemeClr val="accent1"/>
+          </a:effectRef>
+          <a:fontRef idx="minor">
+            <a:schemeClr val="lt1"/>
+          </a:fontRef>
+        </p:style>
+        <p:txBody>
+          <a:bodyPr rtlCol="0" anchor="ctr"/>
+          <a:lstStyle/>
+          <a:p>
+            <a:pPr algn="ctr"/>
+          </a:p>
+        </p:txBody>
+      </p:sp>
+      <p:sp>
+        <p:nvSpPr>
+          <p:cNvPr id="11" name="TextBox 10"/>
+          <p:cNvSpPr txBox="1"/>
+          <p:nvPr/>
+        </p:nvSpPr>
+        <p:spPr>
+          <a:xfrm>
+            <a:off x="402336" y="1837944"/>
+            <a:ext cx="5554980" cy="256032"/>
+          </a:xfrm>
+          <a:prstGeom prst="rect">
+            <a:avLst/>
+          </a:prstGeom>
+          <a:noFill/>
+        </p:spPr>
+        <p:txBody>
+          <a:bodyPr wrap="square">
+            <a:spAutoFit/>
+          </a:bodyPr>
+          <a:lstStyle/>
+          <a:p>
             <a:pPr algn="ctr"/>
             <a:r>
               <a:rPr sz="900" b="1" i="0">
@@ -16392,13 +16687,13 @@
       </p:sp>
       <p:sp>
         <p:nvSpPr>
-          <p:cNvPr id="10" name="Rectangle 9"/>
-          <p:cNvSpPr/>
-          <p:nvPr/>
-        </p:nvSpPr>
-        <p:spPr>
-          <a:xfrm>
-            <a:off x="6231636" y="877824"/>
+          <p:cNvPr id="12" name="Rectangle 11"/>
+          <p:cNvSpPr/>
+          <p:nvPr/>
+        </p:nvSpPr>
+        <p:spPr>
+          <a:xfrm>
+            <a:off x="6231636" y="1773936"/>
             <a:ext cx="5554980" cy="347472"/>
           </a:xfrm>
           <a:prstGeom prst="rect">
@@ -16435,13 +16730,13 @@
       </p:sp>
       <p:sp>
         <p:nvSpPr>
-          <p:cNvPr id="11" name="Rectangle 10"/>
-          <p:cNvSpPr/>
-          <p:nvPr/>
-        </p:nvSpPr>
-        <p:spPr>
-          <a:xfrm>
-            <a:off x="6231636" y="877824"/>
+          <p:cNvPr id="13" name="Rectangle 12"/>
+          <p:cNvSpPr/>
+          <p:nvPr/>
+        </p:nvSpPr>
+        <p:spPr>
+          <a:xfrm>
+            <a:off x="6231636" y="1773936"/>
             <a:ext cx="5554980" cy="45720"/>
           </a:xfrm>
           <a:prstGeom prst="rect">
@@ -16478,13 +16773,13 @@
       </p:sp>
       <p:sp>
         <p:nvSpPr>
-          <p:cNvPr id="12" name="TextBox 11"/>
+          <p:cNvPr id="14" name="TextBox 13"/>
           <p:cNvSpPr txBox="1"/>
           <p:nvPr/>
         </p:nvSpPr>
         <p:spPr>
           <a:xfrm>
-            <a:off x="6231636" y="941832"/>
+            <a:off x="6231636" y="1837944"/>
             <a:ext cx="5554980" cy="256032"/>
           </a:xfrm>
           <a:prstGeom prst="rect">
@@ -16513,14 +16808,14 @@
       </p:sp>
       <p:sp>
         <p:nvSpPr>
-          <p:cNvPr id="13" name="Rectangle 12"/>
-          <p:cNvSpPr/>
-          <p:nvPr/>
-        </p:nvSpPr>
-        <p:spPr>
-          <a:xfrm>
-            <a:off x="402336" y="1335024"/>
-            <a:ext cx="5554980" cy="731520"/>
+          <p:cNvPr id="15" name="Rectangle 14"/>
+          <p:cNvSpPr/>
+          <p:nvPr/>
+        </p:nvSpPr>
+        <p:spPr>
+          <a:xfrm>
+            <a:off x="402336" y="2231136"/>
+            <a:ext cx="5554980" cy="694944"/>
           </a:xfrm>
           <a:prstGeom prst="rect">
             <a:avLst/>
@@ -16556,14 +16851,14 @@
       </p:sp>
       <p:sp>
         <p:nvSpPr>
-          <p:cNvPr id="14" name="Rectangle 13"/>
-          <p:cNvSpPr/>
-          <p:nvPr/>
-        </p:nvSpPr>
-        <p:spPr>
-          <a:xfrm>
-            <a:off x="6231636" y="1335024"/>
-            <a:ext cx="5554980" cy="731520"/>
+          <p:cNvPr id="16" name="Rectangle 15"/>
+          <p:cNvSpPr/>
+          <p:nvPr/>
+        </p:nvSpPr>
+        <p:spPr>
+          <a:xfrm>
+            <a:off x="6231636" y="2231136"/>
+            <a:ext cx="5554980" cy="694944"/>
           </a:xfrm>
           <a:prstGeom prst="rect">
             <a:avLst/>
@@ -16599,14 +16894,14 @@
       </p:sp>
       <p:sp>
         <p:nvSpPr>
-          <p:cNvPr id="15" name="TextBox 14"/>
+          <p:cNvPr id="17" name="TextBox 16"/>
           <p:cNvSpPr txBox="1"/>
           <p:nvPr/>
         </p:nvSpPr>
         <p:spPr>
           <a:xfrm>
-            <a:off x="402336" y="1389888"/>
-            <a:ext cx="1005840" cy="292608"/>
+            <a:off x="402336" y="2286000"/>
+            <a:ext cx="1005840" cy="548640"/>
           </a:xfrm>
           <a:prstGeom prst="rect">
             <a:avLst/>
@@ -16621,27 +16916,27 @@
           <a:p>
             <a:pPr algn="ctr"/>
             <a:r>
-              <a:rPr sz="850" b="1" i="0">
+              <a:rPr sz="800" b="1" i="0">
                 <a:solidFill>
                   <a:srgbClr val="8A7332"/>
                 </a:solidFill>
                 <a:latin typeface="Calibri"/>
               </a:rPr>
-              <a:t>T+0</a:t>
-            </a:r>
-          </a:p>
-        </p:txBody>
-      </p:sp>
-      <p:sp>
-        <p:nvSpPr>
-          <p:cNvPr id="16" name="TextBox 15"/>
+              <a:t>9:47 AM</a:t>
+            </a:r>
+          </a:p>
+        </p:txBody>
+      </p:sp>
+      <p:sp>
+        <p:nvSpPr>
+          <p:cNvPr id="18" name="TextBox 17"/>
           <p:cNvSpPr txBox="1"/>
           <p:nvPr/>
         </p:nvSpPr>
         <p:spPr>
           <a:xfrm>
-            <a:off x="1463040" y="1517904"/>
-            <a:ext cx="4384548" cy="475488"/>
+            <a:off x="1463040" y="2359152"/>
+            <a:ext cx="4402836" cy="530352"/>
           </a:xfrm>
           <a:prstGeom prst="rect">
             <a:avLst/>
@@ -16656,27 +16951,27 @@
           <a:p>
             <a:pPr algn="l"/>
             <a:r>
-              <a:rPr sz="1050" b="0" i="0">
+              <a:rPr sz="1000" b="0" i="0">
                 <a:solidFill>
                   <a:srgbClr val="5A627A"/>
                 </a:solidFill>
                 <a:latin typeface="Calibri"/>
               </a:rPr>
-              <a:t>Signal emerges — no notification system active</a:t>
-            </a:r>
-          </a:p>
-        </p:txBody>
-      </p:sp>
-      <p:sp>
-        <p:nvSpPr>
-          <p:cNvPr id="17" name="TextBox 16"/>
+              <a:t>Disclosure detected by IR team — begins manual distribution list</a:t>
+            </a:r>
+          </a:p>
+        </p:txBody>
+      </p:sp>
+      <p:sp>
+        <p:nvSpPr>
+          <p:cNvPr id="19" name="TextBox 18"/>
           <p:cNvSpPr txBox="1"/>
           <p:nvPr/>
         </p:nvSpPr>
         <p:spPr>
           <a:xfrm>
-            <a:off x="6377940" y="1517904"/>
-            <a:ext cx="5372100" cy="475488"/>
+            <a:off x="6377940" y="2359152"/>
+            <a:ext cx="5372100" cy="530352"/>
           </a:xfrm>
           <a:prstGeom prst="rect">
             <a:avLst/>
@@ -16691,113 +16986,113 @@
           <a:p>
             <a:pPr algn="l"/>
             <a:r>
-              <a:rPr sz="1050" b="0" i="0">
+              <a:rPr sz="1000" b="0" i="0">
                 <a:solidFill>
                   <a:srgbClr val="5A627A"/>
                 </a:solidFill>
                 <a:latin typeface="Calibri"/>
               </a:rPr>
-              <a:t>Signal detected — Protocol identified immediately</a:t>
-            </a:r>
-          </a:p>
-        </p:txBody>
-      </p:sp>
-      <p:sp>
-        <p:nvSpPr>
-          <p:cNvPr id="18" name="Rectangle 17"/>
-          <p:cNvSpPr/>
-          <p:nvPr/>
-        </p:nvSpPr>
-        <p:spPr>
-          <a:xfrm>
-            <a:off x="402336" y="2121408"/>
-            <a:ext cx="5554980" cy="731520"/>
-          </a:xfrm>
-          <a:prstGeom prst="rect">
-            <a:avLst/>
-          </a:prstGeom>
-          <a:solidFill>
-            <a:srgbClr val="FFF0EE"/>
-          </a:solidFill>
-          <a:ln>
-            <a:noFill/>
-          </a:ln>
-        </p:spPr>
-        <p:style>
-          <a:lnRef idx="1">
-            <a:schemeClr val="accent1"/>
-          </a:lnRef>
-          <a:fillRef idx="3">
-            <a:schemeClr val="accent1"/>
-          </a:fillRef>
-          <a:effectRef idx="2">
-            <a:schemeClr val="accent1"/>
-          </a:effectRef>
-          <a:fontRef idx="minor">
-            <a:schemeClr val="lt1"/>
-          </a:fontRef>
-        </p:style>
-        <p:txBody>
-          <a:bodyPr rtlCol="0" anchor="ctr"/>
-          <a:lstStyle/>
-          <a:p>
-            <a:pPr algn="ctr"/>
-          </a:p>
-        </p:txBody>
-      </p:sp>
-      <p:sp>
-        <p:nvSpPr>
-          <p:cNvPr id="19" name="Rectangle 18"/>
-          <p:cNvSpPr/>
-          <p:nvPr/>
-        </p:nvSpPr>
-        <p:spPr>
-          <a:xfrm>
-            <a:off x="6231636" y="2121408"/>
-            <a:ext cx="5554980" cy="731520"/>
-          </a:xfrm>
-          <a:prstGeom prst="rect">
-            <a:avLst/>
-          </a:prstGeom>
-          <a:solidFill>
-            <a:srgbClr val="EAF7F2"/>
-          </a:solidFill>
-          <a:ln>
-            <a:noFill/>
-          </a:ln>
-        </p:spPr>
-        <p:style>
-          <a:lnRef idx="1">
-            <a:schemeClr val="accent1"/>
-          </a:lnRef>
-          <a:fillRef idx="3">
-            <a:schemeClr val="accent1"/>
-          </a:fillRef>
-          <a:effectRef idx="2">
-            <a:schemeClr val="accent1"/>
-          </a:effectRef>
-          <a:fontRef idx="minor">
-            <a:schemeClr val="lt1"/>
-          </a:fontRef>
-        </p:style>
-        <p:txBody>
-          <a:bodyPr rtlCol="0" anchor="ctr"/>
-          <a:lstStyle/>
-          <a:p>
-            <a:pPr algn="ctr"/>
-          </a:p>
-        </p:txBody>
-      </p:sp>
-      <p:sp>
-        <p:nvSpPr>
-          <p:cNvPr id="20" name="TextBox 19"/>
+              <a:t>Signal detected. Protocol #47 identified. Stakeholder map loaded.</a:t>
+            </a:r>
+          </a:p>
+        </p:txBody>
+      </p:sp>
+      <p:sp>
+        <p:nvSpPr>
+          <p:cNvPr id="20" name="Rectangle 19"/>
+          <p:cNvSpPr/>
+          <p:nvPr/>
+        </p:nvSpPr>
+        <p:spPr>
+          <a:xfrm>
+            <a:off x="402336" y="2980944"/>
+            <a:ext cx="5554980" cy="694944"/>
+          </a:xfrm>
+          <a:prstGeom prst="rect">
+            <a:avLst/>
+          </a:prstGeom>
+          <a:solidFill>
+            <a:srgbClr val="FFFFFF"/>
+          </a:solidFill>
+          <a:ln>
+            <a:noFill/>
+          </a:ln>
+        </p:spPr>
+        <p:style>
+          <a:lnRef idx="1">
+            <a:schemeClr val="accent1"/>
+          </a:lnRef>
+          <a:fillRef idx="3">
+            <a:schemeClr val="accent1"/>
+          </a:fillRef>
+          <a:effectRef idx="2">
+            <a:schemeClr val="accent1"/>
+          </a:effectRef>
+          <a:fontRef idx="minor">
+            <a:schemeClr val="lt1"/>
+          </a:fontRef>
+        </p:style>
+        <p:txBody>
+          <a:bodyPr rtlCol="0" anchor="ctr"/>
+          <a:lstStyle/>
+          <a:p>
+            <a:pPr algn="ctr"/>
+          </a:p>
+        </p:txBody>
+      </p:sp>
+      <p:sp>
+        <p:nvSpPr>
+          <p:cNvPr id="21" name="Rectangle 20"/>
+          <p:cNvSpPr/>
+          <p:nvPr/>
+        </p:nvSpPr>
+        <p:spPr>
+          <a:xfrm>
+            <a:off x="6231636" y="2980944"/>
+            <a:ext cx="5554980" cy="694944"/>
+          </a:xfrm>
+          <a:prstGeom prst="rect">
+            <a:avLst/>
+          </a:prstGeom>
+          <a:solidFill>
+            <a:srgbClr val="FFFFFF"/>
+          </a:solidFill>
+          <a:ln>
+            <a:noFill/>
+          </a:ln>
+        </p:spPr>
+        <p:style>
+          <a:lnRef idx="1">
+            <a:schemeClr val="accent1"/>
+          </a:lnRef>
+          <a:fillRef idx="3">
+            <a:schemeClr val="accent1"/>
+          </a:fillRef>
+          <a:effectRef idx="2">
+            <a:schemeClr val="accent1"/>
+          </a:effectRef>
+          <a:fontRef idx="minor">
+            <a:schemeClr val="lt1"/>
+          </a:fontRef>
+        </p:style>
+        <p:txBody>
+          <a:bodyPr rtlCol="0" anchor="ctr"/>
+          <a:lstStyle/>
+          <a:p>
+            <a:pPr algn="ctr"/>
+          </a:p>
+        </p:txBody>
+      </p:sp>
+      <p:sp>
+        <p:nvSpPr>
+          <p:cNvPr id="22" name="TextBox 21"/>
           <p:cNvSpPr txBox="1"/>
           <p:nvPr/>
         </p:nvSpPr>
         <p:spPr>
           <a:xfrm>
-            <a:off x="402336" y="2176272"/>
-            <a:ext cx="1005840" cy="292608"/>
+            <a:off x="402336" y="3035808"/>
+            <a:ext cx="1005840" cy="548640"/>
           </a:xfrm>
           <a:prstGeom prst="rect">
             <a:avLst/>
@@ -16812,27 +17107,27 @@
           <a:p>
             <a:pPr algn="ctr"/>
             <a:r>
-              <a:rPr sz="850" b="1" i="0">
+              <a:rPr sz="800" b="1" i="0">
                 <a:solidFill>
                   <a:srgbClr val="8A7332"/>
                 </a:solidFill>
                 <a:latin typeface="Calibri"/>
               </a:rPr>
-              <a:t>T+12 min</a:t>
-            </a:r>
-          </a:p>
-        </p:txBody>
-      </p:sp>
-      <p:sp>
-        <p:nvSpPr>
-          <p:cNvPr id="21" name="TextBox 20"/>
+              <a:t>9:59 AM</a:t>
+            </a:r>
+          </a:p>
+        </p:txBody>
+      </p:sp>
+      <p:sp>
+        <p:nvSpPr>
+          <p:cNvPr id="23" name="TextBox 22"/>
           <p:cNvSpPr txBox="1"/>
           <p:nvPr/>
         </p:nvSpPr>
         <p:spPr>
           <a:xfrm>
-            <a:off x="1463040" y="2304288"/>
-            <a:ext cx="4384548" cy="475488"/>
+            <a:off x="1463040" y="3108960"/>
+            <a:ext cx="4402836" cy="530352"/>
           </a:xfrm>
           <a:prstGeom prst="rect">
             <a:avLst/>
@@ -16847,27 +17142,27 @@
           <a:p>
             <a:pPr algn="l"/>
             <a:r>
-              <a:rPr sz="1050" b="0" i="0">
-                <a:solidFill>
-                  <a:srgbClr val="AA4444"/>
+              <a:rPr sz="1000" b="0" i="0">
+                <a:solidFill>
+                  <a:srgbClr val="5A627A"/>
                 </a:solidFill>
                 <a:latin typeface="Calibri"/>
               </a:rPr>
-              <a:t>First stakeholder calls begin</a:t>
-            </a:r>
-          </a:p>
-        </p:txBody>
-      </p:sp>
-      <p:sp>
-        <p:nvSpPr>
-          <p:cNvPr id="22" name="TextBox 21"/>
+              <a:t>Legal, IR, CEO calendars checked. No common slot until 2 PM.</a:t>
+            </a:r>
+          </a:p>
+        </p:txBody>
+      </p:sp>
+      <p:sp>
+        <p:nvSpPr>
+          <p:cNvPr id="24" name="TextBox 23"/>
           <p:cNvSpPr txBox="1"/>
           <p:nvPr/>
         </p:nvSpPr>
         <p:spPr>
           <a:xfrm>
-            <a:off x="6377940" y="2304288"/>
-            <a:ext cx="5372100" cy="475488"/>
+            <a:off x="6377940" y="3108960"/>
+            <a:ext cx="5372100" cy="530352"/>
           </a:xfrm>
           <a:prstGeom prst="rect">
             <a:avLst/>
@@ -16882,113 +17177,113 @@
           <a:p>
             <a:pPr algn="l"/>
             <a:r>
-              <a:rPr sz="1050" b="1" i="0">
-                <a:solidFill>
-                  <a:srgbClr val="2B8A6E"/>
+              <a:rPr sz="1000" b="0" i="0">
+                <a:solidFill>
+                  <a:srgbClr val="5A627A"/>
                 </a:solidFill>
                 <a:latin typeface="Calibri"/>
               </a:rPr>
-              <a:t>Coordinated execution live — all roles deployed</a:t>
-            </a:r>
-          </a:p>
-        </p:txBody>
-      </p:sp>
-      <p:sp>
-        <p:nvSpPr>
-          <p:cNvPr id="23" name="Rectangle 22"/>
-          <p:cNvSpPr/>
-          <p:nvPr/>
-        </p:nvSpPr>
-        <p:spPr>
-          <a:xfrm>
-            <a:off x="402336" y="2907792"/>
-            <a:ext cx="5554980" cy="731520"/>
-          </a:xfrm>
-          <a:prstGeom prst="rect">
-            <a:avLst/>
-          </a:prstGeom>
-          <a:solidFill>
-            <a:srgbClr val="FFF0EE"/>
-          </a:solidFill>
-          <a:ln>
-            <a:noFill/>
-          </a:ln>
-        </p:spPr>
-        <p:style>
-          <a:lnRef idx="1">
-            <a:schemeClr val="accent1"/>
-          </a:lnRef>
-          <a:fillRef idx="3">
-            <a:schemeClr val="accent1"/>
-          </a:fillRef>
-          <a:effectRef idx="2">
-            <a:schemeClr val="accent1"/>
-          </a:effectRef>
-          <a:fontRef idx="minor">
-            <a:schemeClr val="lt1"/>
-          </a:fontRef>
-        </p:style>
-        <p:txBody>
-          <a:bodyPr rtlCol="0" anchor="ctr"/>
-          <a:lstStyle/>
-          <a:p>
-            <a:pPr algn="ctr"/>
-          </a:p>
-        </p:txBody>
-      </p:sp>
-      <p:sp>
-        <p:nvSpPr>
-          <p:cNvPr id="24" name="Rectangle 23"/>
-          <p:cNvSpPr/>
-          <p:nvPr/>
-        </p:nvSpPr>
-        <p:spPr>
-          <a:xfrm>
-            <a:off x="6231636" y="2907792"/>
-            <a:ext cx="5554980" cy="731520"/>
-          </a:xfrm>
-          <a:prstGeom prst="rect">
-            <a:avLst/>
-          </a:prstGeom>
-          <a:solidFill>
-            <a:srgbClr val="EAF7F2"/>
-          </a:solidFill>
-          <a:ln>
-            <a:noFill/>
-          </a:ln>
-        </p:spPr>
-        <p:style>
-          <a:lnRef idx="1">
-            <a:schemeClr val="accent1"/>
-          </a:lnRef>
-          <a:fillRef idx="3">
-            <a:schemeClr val="accent1"/>
-          </a:fillRef>
-          <a:effectRef idx="2">
-            <a:schemeClr val="accent1"/>
-          </a:effectRef>
-          <a:fontRef idx="minor">
-            <a:schemeClr val="lt1"/>
-          </a:fontRef>
-        </p:style>
-        <p:txBody>
-          <a:bodyPr rtlCol="0" anchor="ctr"/>
-          <a:lstStyle/>
-          <a:p>
-            <a:pPr algn="ctr"/>
-          </a:p>
-        </p:txBody>
-      </p:sp>
-      <p:sp>
-        <p:nvSpPr>
-          <p:cNvPr id="25" name="TextBox 24"/>
+              <a:t>Board materials pre-staged. Draft communications queued for review.</a:t>
+            </a:r>
+          </a:p>
+        </p:txBody>
+      </p:sp>
+      <p:sp>
+        <p:nvSpPr>
+          <p:cNvPr id="25" name="Rectangle 24"/>
+          <p:cNvSpPr/>
+          <p:nvPr/>
+        </p:nvSpPr>
+        <p:spPr>
+          <a:xfrm>
+            <a:off x="402336" y="3730752"/>
+            <a:ext cx="5554980" cy="694944"/>
+          </a:xfrm>
+          <a:prstGeom prst="rect">
+            <a:avLst/>
+          </a:prstGeom>
+          <a:solidFill>
+            <a:srgbClr val="FFFFFF"/>
+          </a:solidFill>
+          <a:ln>
+            <a:noFill/>
+          </a:ln>
+        </p:spPr>
+        <p:style>
+          <a:lnRef idx="1">
+            <a:schemeClr val="accent1"/>
+          </a:lnRef>
+          <a:fillRef idx="3">
+            <a:schemeClr val="accent1"/>
+          </a:fillRef>
+          <a:effectRef idx="2">
+            <a:schemeClr val="accent1"/>
+          </a:effectRef>
+          <a:fontRef idx="minor">
+            <a:schemeClr val="lt1"/>
+          </a:fontRef>
+        </p:style>
+        <p:txBody>
+          <a:bodyPr rtlCol="0" anchor="ctr"/>
+          <a:lstStyle/>
+          <a:p>
+            <a:pPr algn="ctr"/>
+          </a:p>
+        </p:txBody>
+      </p:sp>
+      <p:sp>
+        <p:nvSpPr>
+          <p:cNvPr id="26" name="Rectangle 25"/>
+          <p:cNvSpPr/>
+          <p:nvPr/>
+        </p:nvSpPr>
+        <p:spPr>
+          <a:xfrm>
+            <a:off x="6231636" y="3730752"/>
+            <a:ext cx="5554980" cy="694944"/>
+          </a:xfrm>
+          <a:prstGeom prst="rect">
+            <a:avLst/>
+          </a:prstGeom>
+          <a:solidFill>
+            <a:srgbClr val="FFFFFF"/>
+          </a:solidFill>
+          <a:ln>
+            <a:noFill/>
+          </a:ln>
+        </p:spPr>
+        <p:style>
+          <a:lnRef idx="1">
+            <a:schemeClr val="accent1"/>
+          </a:lnRef>
+          <a:fillRef idx="3">
+            <a:schemeClr val="accent1"/>
+          </a:fillRef>
+          <a:effectRef idx="2">
+            <a:schemeClr val="accent1"/>
+          </a:effectRef>
+          <a:fontRef idx="minor">
+            <a:schemeClr val="lt1"/>
+          </a:fontRef>
+        </p:style>
+        <p:txBody>
+          <a:bodyPr rtlCol="0" anchor="ctr"/>
+          <a:lstStyle/>
+          <a:p>
+            <a:pPr algn="ctr"/>
+          </a:p>
+        </p:txBody>
+      </p:sp>
+      <p:sp>
+        <p:nvSpPr>
+          <p:cNvPr id="27" name="TextBox 26"/>
           <p:cNvSpPr txBox="1"/>
           <p:nvPr/>
         </p:nvSpPr>
         <p:spPr>
           <a:xfrm>
-            <a:off x="402336" y="2962656"/>
-            <a:ext cx="1005840" cy="292608"/>
+            <a:off x="402336" y="3785616"/>
+            <a:ext cx="1005840" cy="548640"/>
           </a:xfrm>
           <a:prstGeom prst="rect">
             <a:avLst/>
@@ -17003,27 +17298,27 @@
           <a:p>
             <a:pPr algn="ctr"/>
             <a:r>
-              <a:rPr sz="850" b="1" i="0">
+              <a:rPr sz="800" b="1" i="0">
                 <a:solidFill>
                   <a:srgbClr val="8A7332"/>
                 </a:solidFill>
                 <a:latin typeface="Calibri"/>
               </a:rPr>
-              <a:t>T+Day 14</a:t>
-            </a:r>
-          </a:p>
-        </p:txBody>
-      </p:sp>
-      <p:sp>
-        <p:nvSpPr>
-          <p:cNvPr id="26" name="TextBox 25"/>
+              <a:t>10:12 AM</a:t>
+            </a:r>
+          </a:p>
+        </p:txBody>
+      </p:sp>
+      <p:sp>
+        <p:nvSpPr>
+          <p:cNvPr id="28" name="TextBox 27"/>
           <p:cNvSpPr txBox="1"/>
           <p:nvPr/>
         </p:nvSpPr>
         <p:spPr>
           <a:xfrm>
-            <a:off x="1463040" y="3090672"/>
-            <a:ext cx="4384548" cy="475488"/>
+            <a:off x="1463040" y="3858768"/>
+            <a:ext cx="4402836" cy="530352"/>
           </a:xfrm>
           <a:prstGeom prst="rect">
             <a:avLst/>
@@ -17038,27 +17333,27 @@
           <a:p>
             <a:pPr algn="l"/>
             <a:r>
-              <a:rPr sz="1050" b="0" i="0">
-                <a:solidFill>
-                  <a:srgbClr val="AA4444"/>
+              <a:rPr sz="1000" b="0" i="0">
+                <a:solidFill>
+                  <a:srgbClr val="5A627A"/>
                 </a:solidFill>
                 <a:latin typeface="Calibri"/>
               </a:rPr>
-              <a:t>Ownership alignment still in progress</a:t>
-            </a:r>
-          </a:p>
-        </p:txBody>
-      </p:sp>
-      <p:sp>
-        <p:nvSpPr>
-          <p:cNvPr id="27" name="TextBox 26"/>
+              <a:t>Someone suggests pulling the defense advisor deck from last year</a:t>
+            </a:r>
+          </a:p>
+        </p:txBody>
+      </p:sp>
+      <p:sp>
+        <p:nvSpPr>
+          <p:cNvPr id="29" name="TextBox 28"/>
           <p:cNvSpPr txBox="1"/>
           <p:nvPr/>
         </p:nvSpPr>
         <p:spPr>
           <a:xfrm>
-            <a:off x="6377940" y="3090672"/>
-            <a:ext cx="5372100" cy="475488"/>
+            <a:off x="6377940" y="3858768"/>
+            <a:ext cx="5372100" cy="530352"/>
           </a:xfrm>
           <a:prstGeom prst="rect">
             <a:avLst/>
@@ -17073,113 +17368,113 @@
           <a:p>
             <a:pPr algn="l"/>
             <a:r>
-              <a:rPr sz="1050" b="1" i="0">
-                <a:solidFill>
-                  <a:srgbClr val="2B8A6E"/>
+              <a:rPr sz="1000" b="0" i="0">
+                <a:solidFill>
+                  <a:srgbClr val="5A627A"/>
                 </a:solidFill>
                 <a:latin typeface="Calibri"/>
               </a:rPr>
-              <a:t>First activation retrospective complete</a:t>
-            </a:r>
-          </a:p>
-        </p:txBody>
-      </p:sp>
-      <p:sp>
-        <p:nvSpPr>
-          <p:cNvPr id="28" name="Rectangle 27"/>
-          <p:cNvSpPr/>
-          <p:nvPr/>
-        </p:nvSpPr>
-        <p:spPr>
-          <a:xfrm>
-            <a:off x="402336" y="3694176"/>
-            <a:ext cx="5554980" cy="731520"/>
-          </a:xfrm>
-          <a:prstGeom prst="rect">
-            <a:avLst/>
-          </a:prstGeom>
-          <a:solidFill>
-            <a:srgbClr val="FFF0EE"/>
-          </a:solidFill>
-          <a:ln>
-            <a:noFill/>
-          </a:ln>
-        </p:spPr>
-        <p:style>
-          <a:lnRef idx="1">
-            <a:schemeClr val="accent1"/>
-          </a:lnRef>
-          <a:fillRef idx="3">
-            <a:schemeClr val="accent1"/>
-          </a:fillRef>
-          <a:effectRef idx="2">
-            <a:schemeClr val="accent1"/>
-          </a:effectRef>
-          <a:fontRef idx="minor">
-            <a:schemeClr val="lt1"/>
-          </a:fontRef>
-        </p:style>
-        <p:txBody>
-          <a:bodyPr rtlCol="0" anchor="ctr"/>
-          <a:lstStyle/>
-          <a:p>
-            <a:pPr algn="ctr"/>
-          </a:p>
-        </p:txBody>
-      </p:sp>
-      <p:sp>
-        <p:nvSpPr>
-          <p:cNvPr id="29" name="Rectangle 28"/>
-          <p:cNvSpPr/>
-          <p:nvPr/>
-        </p:nvSpPr>
-        <p:spPr>
-          <a:xfrm>
-            <a:off x="6231636" y="3694176"/>
-            <a:ext cx="5554980" cy="731520"/>
-          </a:xfrm>
-          <a:prstGeom prst="rect">
-            <a:avLst/>
-          </a:prstGeom>
-          <a:solidFill>
-            <a:srgbClr val="EAF7F2"/>
-          </a:solidFill>
-          <a:ln>
-            <a:noFill/>
-          </a:ln>
-        </p:spPr>
-        <p:style>
-          <a:lnRef idx="1">
-            <a:schemeClr val="accent1"/>
-          </a:lnRef>
-          <a:fillRef idx="3">
-            <a:schemeClr val="accent1"/>
-          </a:fillRef>
-          <a:effectRef idx="2">
-            <a:schemeClr val="accent1"/>
-          </a:effectRef>
-          <a:fontRef idx="minor">
-            <a:schemeClr val="lt1"/>
-          </a:fontRef>
-        </p:style>
-        <p:txBody>
-          <a:bodyPr rtlCol="0" anchor="ctr"/>
-          <a:lstStyle/>
-          <a:p>
-            <a:pPr algn="ctr"/>
-          </a:p>
-        </p:txBody>
-      </p:sp>
-      <p:sp>
-        <p:nvSpPr>
-          <p:cNvPr id="30" name="TextBox 29"/>
+              <a:t>Executive authorization requested — one click to activate.</a:t>
+            </a:r>
+          </a:p>
+        </p:txBody>
+      </p:sp>
+      <p:sp>
+        <p:nvSpPr>
+          <p:cNvPr id="30" name="Rectangle 29"/>
+          <p:cNvSpPr/>
+          <p:nvPr/>
+        </p:nvSpPr>
+        <p:spPr>
+          <a:xfrm>
+            <a:off x="402336" y="4480560"/>
+            <a:ext cx="5554980" cy="694944"/>
+          </a:xfrm>
+          <a:prstGeom prst="rect">
+            <a:avLst/>
+          </a:prstGeom>
+          <a:solidFill>
+            <a:srgbClr val="FFF4F3"/>
+          </a:solidFill>
+          <a:ln>
+            <a:noFill/>
+          </a:ln>
+        </p:spPr>
+        <p:style>
+          <a:lnRef idx="1">
+            <a:schemeClr val="accent1"/>
+          </a:lnRef>
+          <a:fillRef idx="3">
+            <a:schemeClr val="accent1"/>
+          </a:fillRef>
+          <a:effectRef idx="2">
+            <a:schemeClr val="accent1"/>
+          </a:effectRef>
+          <a:fontRef idx="minor">
+            <a:schemeClr val="lt1"/>
+          </a:fontRef>
+        </p:style>
+        <p:txBody>
+          <a:bodyPr rtlCol="0" anchor="ctr"/>
+          <a:lstStyle/>
+          <a:p>
+            <a:pPr algn="ctr"/>
+          </a:p>
+        </p:txBody>
+      </p:sp>
+      <p:sp>
+        <p:nvSpPr>
+          <p:cNvPr id="31" name="Rectangle 30"/>
+          <p:cNvSpPr/>
+          <p:nvPr/>
+        </p:nvSpPr>
+        <p:spPr>
+          <a:xfrm>
+            <a:off x="6231636" y="4480560"/>
+            <a:ext cx="5554980" cy="694944"/>
+          </a:xfrm>
+          <a:prstGeom prst="rect">
+            <a:avLst/>
+          </a:prstGeom>
+          <a:solidFill>
+            <a:srgbClr val="E8F5F0"/>
+          </a:solidFill>
+          <a:ln>
+            <a:noFill/>
+          </a:ln>
+        </p:spPr>
+        <p:style>
+          <a:lnRef idx="1">
+            <a:schemeClr val="accent1"/>
+          </a:lnRef>
+          <a:fillRef idx="3">
+            <a:schemeClr val="accent1"/>
+          </a:fillRef>
+          <a:effectRef idx="2">
+            <a:schemeClr val="accent1"/>
+          </a:effectRef>
+          <a:fontRef idx="minor">
+            <a:schemeClr val="lt1"/>
+          </a:fontRef>
+        </p:style>
+        <p:txBody>
+          <a:bodyPr rtlCol="0" anchor="ctr"/>
+          <a:lstStyle/>
+          <a:p>
+            <a:pPr algn="ctr"/>
+          </a:p>
+        </p:txBody>
+      </p:sp>
+      <p:sp>
+        <p:nvSpPr>
+          <p:cNvPr id="32" name="TextBox 31"/>
           <p:cNvSpPr txBox="1"/>
           <p:nvPr/>
         </p:nvSpPr>
         <p:spPr>
           <a:xfrm>
-            <a:off x="402336" y="3749040"/>
-            <a:ext cx="1005840" cy="292608"/>
+            <a:off x="402336" y="4535424"/>
+            <a:ext cx="1005840" cy="548640"/>
           </a:xfrm>
           <a:prstGeom prst="rect">
             <a:avLst/>
@@ -17194,27 +17489,28 @@
           <a:p>
             <a:pPr algn="ctr"/>
             <a:r>
-              <a:rPr sz="850" b="1" i="0">
+              <a:rPr sz="800" b="1" i="0">
                 <a:solidFill>
                   <a:srgbClr val="8A7332"/>
                 </a:solidFill>
                 <a:latin typeface="Calibri"/>
               </a:rPr>
-              <a:t>T+Day 30+</a:t>
-            </a:r>
-          </a:p>
-        </p:txBody>
-      </p:sp>
-      <p:sp>
-        <p:nvSpPr>
-          <p:cNvPr id="31" name="TextBox 30"/>
+              <a:t>9:59 AM →
+12 minutes</a:t>
+            </a:r>
+          </a:p>
+        </p:txBody>
+      </p:sp>
+      <p:sp>
+        <p:nvSpPr>
+          <p:cNvPr id="33" name="TextBox 32"/>
           <p:cNvSpPr txBox="1"/>
           <p:nvPr/>
         </p:nvSpPr>
         <p:spPr>
           <a:xfrm>
-            <a:off x="1463040" y="3877056"/>
-            <a:ext cx="4384548" cy="475488"/>
+            <a:off x="1463040" y="4608576"/>
+            <a:ext cx="4402836" cy="530352"/>
           </a:xfrm>
           <a:prstGeom prst="rect">
             <a:avLst/>
@@ -17229,27 +17525,27 @@
           <a:p>
             <a:pPr algn="l"/>
             <a:r>
-              <a:rPr sz="1050" b="0" i="0">
-                <a:solidFill>
-                  <a:srgbClr val="AA4444"/>
+              <a:rPr sz="1000" b="0" i="0">
+                <a:solidFill>
+                  <a:srgbClr val="CC2222"/>
                 </a:solidFill>
                 <a:latin typeface="Calibri"/>
               </a:rPr>
-              <a:t>Response plan finally approved</a:t>
-            </a:r>
-          </a:p>
-        </p:txBody>
-      </p:sp>
-      <p:sp>
-        <p:nvSpPr>
-          <p:cNvPr id="32" name="TextBox 31"/>
+              <a:t>—</a:t>
+            </a:r>
+          </a:p>
+        </p:txBody>
+      </p:sp>
+      <p:sp>
+        <p:nvSpPr>
+          <p:cNvPr id="34" name="TextBox 33"/>
           <p:cNvSpPr txBox="1"/>
           <p:nvPr/>
         </p:nvSpPr>
         <p:spPr>
           <a:xfrm>
-            <a:off x="6377940" y="3877056"/>
-            <a:ext cx="5372100" cy="475488"/>
+            <a:off x="6377940" y="4608576"/>
+            <a:ext cx="5372100" cy="530352"/>
           </a:xfrm>
           <a:prstGeom prst="rect">
             <a:avLst/>
@@ -17264,27 +17560,27 @@
           <a:p>
             <a:pPr algn="l"/>
             <a:r>
-              <a:rPr sz="1050" b="1" i="0">
+              <a:rPr sz="1000" b="1" i="0">
                 <a:solidFill>
                   <a:srgbClr val="2B8A6E"/>
                 </a:solidFill>
                 <a:latin typeface="Calibri"/>
               </a:rPr>
-              <a:t>Protocol updated — ready for the next event</a:t>
-            </a:r>
-          </a:p>
-        </p:txBody>
-      </p:sp>
-      <p:sp>
-        <p:nvSpPr>
-          <p:cNvPr id="33" name="Rectangle 32"/>
-          <p:cNvSpPr/>
-          <p:nvPr/>
-        </p:nvSpPr>
-        <p:spPr>
-          <a:xfrm>
-            <a:off x="402336" y="5852160"/>
-            <a:ext cx="11384280" cy="566928"/>
+              <a:t>Coordinated response live. Legal, IR, external counsel, board notified.</a:t>
+            </a:r>
+          </a:p>
+        </p:txBody>
+      </p:sp>
+      <p:sp>
+        <p:nvSpPr>
+          <p:cNvPr id="35" name="Rectangle 34"/>
+          <p:cNvSpPr/>
+          <p:nvPr/>
+        </p:nvSpPr>
+        <p:spPr>
+          <a:xfrm>
+            <a:off x="402336" y="5907024"/>
+            <a:ext cx="11384280" cy="512064"/>
           </a:xfrm>
           <a:prstGeom prst="rect">
             <a:avLst/>
@@ -17320,14 +17616,14 @@
       </p:sp>
       <p:sp>
         <p:nvSpPr>
-          <p:cNvPr id="34" name="TextBox 33"/>
+          <p:cNvPr id="36" name="TextBox 35"/>
           <p:cNvSpPr txBox="1"/>
           <p:nvPr/>
         </p:nvSpPr>
         <p:spPr>
           <a:xfrm>
-            <a:off x="676656" y="5925312"/>
-            <a:ext cx="10835640" cy="475488"/>
+            <a:off x="676656" y="5980176"/>
+            <a:ext cx="10835640" cy="402336"/>
           </a:xfrm>
           <a:prstGeom prst="rect">
             <a:avLst/>
@@ -17342,7 +17638,7 @@
           <a:p>
             <a:pPr algn="ctr"/>
             <a:r>
-              <a:rPr sz="1600" b="1" i="1">
+              <a:rPr sz="1500" b="1" i="1">
                 <a:solidFill>
                   <a:srgbClr val="C9A84C"/>
                 </a:solidFill>
@@ -17355,7 +17651,7 @@
       </p:sp>
       <p:sp>
         <p:nvSpPr>
-          <p:cNvPr id="35" name="Rectangle 34"/>
+          <p:cNvPr id="37" name="Rectangle 36"/>
           <p:cNvSpPr/>
           <p:nvPr/>
         </p:nvSpPr>
@@ -17398,7 +17694,7 @@
       </p:sp>
       <p:sp>
         <p:nvSpPr>
-          <p:cNvPr id="36" name="Rectangle 35"/>
+          <p:cNvPr id="38" name="Rectangle 37"/>
           <p:cNvSpPr/>
           <p:nvPr/>
         </p:nvSpPr>
@@ -17441,7 +17737,7 @@
       </p:sp>
       <p:sp>
         <p:nvSpPr>
-          <p:cNvPr id="37" name="TextBox 36"/>
+          <p:cNvPr id="39" name="TextBox 38"/>
           <p:cNvSpPr txBox="1"/>
           <p:nvPr/>
         </p:nvSpPr>

--- a/attached_assets/VaughnMartin_Pitch_Deck_12Slide_FINAL.pptx
+++ b/attached_assets/VaughnMartin_Pitch_Deck_12Slide_FINAL.pptx
@@ -3895,7 +3895,7 @@
         </p:nvSpPr>
         <p:spPr>
           <a:xfrm>
-            <a:off x="402336" y="1865376"/>
+            <a:off x="402336" y="1627632"/>
             <a:ext cx="201168" cy="201168"/>
           </a:xfrm>
           <a:prstGeom prst="ellipse">
@@ -3938,7 +3938,7 @@
         </p:nvSpPr>
         <p:spPr>
           <a:xfrm>
-            <a:off x="402336" y="1847088"/>
+            <a:off x="402336" y="1609344"/>
             <a:ext cx="201168" cy="219456"/>
           </a:xfrm>
           <a:prstGeom prst="rect">
@@ -3973,7 +3973,7 @@
         </p:nvSpPr>
         <p:spPr>
           <a:xfrm>
-            <a:off x="694944" y="1810512"/>
+            <a:off x="694944" y="1572768"/>
             <a:ext cx="6094476" cy="329184"/>
           </a:xfrm>
           <a:prstGeom prst="rect">
@@ -4008,7 +4008,7 @@
         </p:nvSpPr>
         <p:spPr>
           <a:xfrm>
-            <a:off x="402336" y="2231136"/>
+            <a:off x="402336" y="1993392"/>
             <a:ext cx="201168" cy="201168"/>
           </a:xfrm>
           <a:prstGeom prst="ellipse">
@@ -4051,7 +4051,7 @@
         </p:nvSpPr>
         <p:spPr>
           <a:xfrm>
-            <a:off x="402336" y="2212848"/>
+            <a:off x="402336" y="1975104"/>
             <a:ext cx="201168" cy="219456"/>
           </a:xfrm>
           <a:prstGeom prst="rect">
@@ -4086,7 +4086,7 @@
         </p:nvSpPr>
         <p:spPr>
           <a:xfrm>
-            <a:off x="694944" y="2176272"/>
+            <a:off x="694944" y="1938528"/>
             <a:ext cx="6094476" cy="329184"/>
           </a:xfrm>
           <a:prstGeom prst="rect">
@@ -4121,7 +4121,7 @@
         </p:nvSpPr>
         <p:spPr>
           <a:xfrm>
-            <a:off x="402336" y="2596896"/>
+            <a:off x="402336" y="2359152"/>
             <a:ext cx="201168" cy="201168"/>
           </a:xfrm>
           <a:prstGeom prst="ellipse">
@@ -4164,7 +4164,7 @@
         </p:nvSpPr>
         <p:spPr>
           <a:xfrm>
-            <a:off x="402336" y="2578608"/>
+            <a:off x="402336" y="2340864"/>
             <a:ext cx="201168" cy="219456"/>
           </a:xfrm>
           <a:prstGeom prst="rect">
@@ -4199,7 +4199,7 @@
         </p:nvSpPr>
         <p:spPr>
           <a:xfrm>
-            <a:off x="694944" y="2542032"/>
+            <a:off x="694944" y="2304288"/>
             <a:ext cx="6094476" cy="329184"/>
           </a:xfrm>
           <a:prstGeom prst="rect">
@@ -15109,9 +15109,130 @@
           </a:p>
         </p:txBody>
       </p:sp>
+      <p:sp>
+        <p:nvSpPr>
+          <p:cNvPr id="25" name="Rectangle 24"/>
+          <p:cNvSpPr/>
+          <p:nvPr/>
+        </p:nvSpPr>
+        <p:spPr>
+          <a:xfrm>
+            <a:off x="0" y="6528816"/>
+            <a:ext cx="12188952" cy="329184"/>
+          </a:xfrm>
+          <a:prstGeom prst="rect">
+            <a:avLst/>
+          </a:prstGeom>
+          <a:solidFill>
+            <a:srgbClr val="0A0F2E"/>
+          </a:solidFill>
+          <a:ln>
+            <a:noFill/>
+          </a:ln>
+        </p:spPr>
+        <p:style>
+          <a:lnRef idx="1">
+            <a:schemeClr val="accent1"/>
+          </a:lnRef>
+          <a:fillRef idx="3">
+            <a:schemeClr val="accent1"/>
+          </a:fillRef>
+          <a:effectRef idx="2">
+            <a:schemeClr val="accent1"/>
+          </a:effectRef>
+          <a:fontRef idx="minor">
+            <a:schemeClr val="lt1"/>
+          </a:fontRef>
+        </p:style>
+        <p:txBody>
+          <a:bodyPr rtlCol="0" anchor="ctr"/>
+          <a:lstStyle/>
+          <a:p>
+            <a:pPr algn="ctr"/>
+          </a:p>
+        </p:txBody>
+      </p:sp>
+      <p:sp>
+        <p:nvSpPr>
+          <p:cNvPr id="26" name="Rectangle 25"/>
+          <p:cNvSpPr/>
+          <p:nvPr/>
+        </p:nvSpPr>
+        <p:spPr>
+          <a:xfrm>
+            <a:off x="0" y="6528816"/>
+            <a:ext cx="12188952" cy="27432"/>
+          </a:xfrm>
+          <a:prstGeom prst="rect">
+            <a:avLst/>
+          </a:prstGeom>
+          <a:solidFill>
+            <a:srgbClr val="C9A84C"/>
+          </a:solidFill>
+          <a:ln>
+            <a:noFill/>
+          </a:ln>
+        </p:spPr>
+        <p:style>
+          <a:lnRef idx="1">
+            <a:schemeClr val="accent1"/>
+          </a:lnRef>
+          <a:fillRef idx="3">
+            <a:schemeClr val="accent1"/>
+          </a:fillRef>
+          <a:effectRef idx="2">
+            <a:schemeClr val="accent1"/>
+          </a:effectRef>
+          <a:fontRef idx="minor">
+            <a:schemeClr val="lt1"/>
+          </a:fontRef>
+        </p:style>
+        <p:txBody>
+          <a:bodyPr rtlCol="0" anchor="ctr"/>
+          <a:lstStyle/>
+          <a:p>
+            <a:pPr algn="ctr"/>
+          </a:p>
+        </p:txBody>
+      </p:sp>
+      <p:sp>
+        <p:nvSpPr>
+          <p:cNvPr id="27" name="TextBox 26"/>
+          <p:cNvSpPr txBox="1"/>
+          <p:nvPr/>
+        </p:nvSpPr>
+        <p:spPr>
+          <a:xfrm>
+            <a:off x="11091672" y="6592824"/>
+            <a:ext cx="914400" cy="219456"/>
+          </a:xfrm>
+          <a:prstGeom prst="rect">
+            <a:avLst/>
+          </a:prstGeom>
+          <a:noFill/>
+        </p:spPr>
+        <p:txBody>
+          <a:bodyPr wrap="square">
+            <a:spAutoFit/>
+          </a:bodyPr>
+          <a:lstStyle/>
+          <a:p>
+            <a:pPr algn="r"/>
+            <a:r>
+              <a:rPr sz="800" b="0" i="0">
+                <a:solidFill>
+                  <a:srgbClr val="9096B2"/>
+                </a:solidFill>
+                <a:latin typeface="Calibri"/>
+              </a:rPr>
+              <a:t>7  /  12</a:t>
+            </a:r>
+          </a:p>
+        </p:txBody>
+      </p:sp>
       <p:pic>
         <p:nvPicPr>
-          <p:cNvPr id="24" name="Picture 23" descr="deck_activation.jpg"/>
+          <p:cNvPr id="28" name="Picture 27" descr="image.jpg"/>
           <p:cNvPicPr>
             <a:picLocks noChangeAspect="1"/>
           </p:cNvPicPr>
@@ -15133,127 +15254,6 @@
           </a:prstGeom>
         </p:spPr>
       </p:pic>
-      <p:sp>
-        <p:nvSpPr>
-          <p:cNvPr id="25" name="Rectangle 24"/>
-          <p:cNvSpPr/>
-          <p:nvPr/>
-        </p:nvSpPr>
-        <p:spPr>
-          <a:xfrm>
-            <a:off x="0" y="6528816"/>
-            <a:ext cx="12188952" cy="329184"/>
-          </a:xfrm>
-          <a:prstGeom prst="rect">
-            <a:avLst/>
-          </a:prstGeom>
-          <a:solidFill>
-            <a:srgbClr val="0A0F2E"/>
-          </a:solidFill>
-          <a:ln>
-            <a:noFill/>
-          </a:ln>
-        </p:spPr>
-        <p:style>
-          <a:lnRef idx="1">
-            <a:schemeClr val="accent1"/>
-          </a:lnRef>
-          <a:fillRef idx="3">
-            <a:schemeClr val="accent1"/>
-          </a:fillRef>
-          <a:effectRef idx="2">
-            <a:schemeClr val="accent1"/>
-          </a:effectRef>
-          <a:fontRef idx="minor">
-            <a:schemeClr val="lt1"/>
-          </a:fontRef>
-        </p:style>
-        <p:txBody>
-          <a:bodyPr rtlCol="0" anchor="ctr"/>
-          <a:lstStyle/>
-          <a:p>
-            <a:pPr algn="ctr"/>
-          </a:p>
-        </p:txBody>
-      </p:sp>
-      <p:sp>
-        <p:nvSpPr>
-          <p:cNvPr id="26" name="Rectangle 25"/>
-          <p:cNvSpPr/>
-          <p:nvPr/>
-        </p:nvSpPr>
-        <p:spPr>
-          <a:xfrm>
-            <a:off x="0" y="6528816"/>
-            <a:ext cx="12188952" cy="27432"/>
-          </a:xfrm>
-          <a:prstGeom prst="rect">
-            <a:avLst/>
-          </a:prstGeom>
-          <a:solidFill>
-            <a:srgbClr val="C9A84C"/>
-          </a:solidFill>
-          <a:ln>
-            <a:noFill/>
-          </a:ln>
-        </p:spPr>
-        <p:style>
-          <a:lnRef idx="1">
-            <a:schemeClr val="accent1"/>
-          </a:lnRef>
-          <a:fillRef idx="3">
-            <a:schemeClr val="accent1"/>
-          </a:fillRef>
-          <a:effectRef idx="2">
-            <a:schemeClr val="accent1"/>
-          </a:effectRef>
-          <a:fontRef idx="minor">
-            <a:schemeClr val="lt1"/>
-          </a:fontRef>
-        </p:style>
-        <p:txBody>
-          <a:bodyPr rtlCol="0" anchor="ctr"/>
-          <a:lstStyle/>
-          <a:p>
-            <a:pPr algn="ctr"/>
-          </a:p>
-        </p:txBody>
-      </p:sp>
-      <p:sp>
-        <p:nvSpPr>
-          <p:cNvPr id="27" name="TextBox 26"/>
-          <p:cNvSpPr txBox="1"/>
-          <p:nvPr/>
-        </p:nvSpPr>
-        <p:spPr>
-          <a:xfrm>
-            <a:off x="11091672" y="6592824"/>
-            <a:ext cx="914400" cy="219456"/>
-          </a:xfrm>
-          <a:prstGeom prst="rect">
-            <a:avLst/>
-          </a:prstGeom>
-          <a:noFill/>
-        </p:spPr>
-        <p:txBody>
-          <a:bodyPr wrap="square">
-            <a:spAutoFit/>
-          </a:bodyPr>
-          <a:lstStyle/>
-          <a:p>
-            <a:pPr algn="r"/>
-            <a:r>
-              <a:rPr sz="800" b="0" i="0">
-                <a:solidFill>
-                  <a:srgbClr val="9096B2"/>
-                </a:solidFill>
-                <a:latin typeface="Calibri"/>
-              </a:rPr>
-              <a:t>7  /  12</a:t>
-            </a:r>
-          </a:p>
-        </p:txBody>
-      </p:sp>
     </p:spTree>
   </p:cSld>
   <p:clrMapOvr>
@@ -16143,9 +16143,130 @@
           </a:p>
         </p:txBody>
       </p:sp>
+      <p:sp>
+        <p:nvSpPr>
+          <p:cNvPr id="25" name="Rectangle 24"/>
+          <p:cNvSpPr/>
+          <p:nvPr/>
+        </p:nvSpPr>
+        <p:spPr>
+          <a:xfrm>
+            <a:off x="0" y="6528816"/>
+            <a:ext cx="12188952" cy="329184"/>
+          </a:xfrm>
+          <a:prstGeom prst="rect">
+            <a:avLst/>
+          </a:prstGeom>
+          <a:solidFill>
+            <a:srgbClr val="0A0F2E"/>
+          </a:solidFill>
+          <a:ln>
+            <a:noFill/>
+          </a:ln>
+        </p:spPr>
+        <p:style>
+          <a:lnRef idx="1">
+            <a:schemeClr val="accent1"/>
+          </a:lnRef>
+          <a:fillRef idx="3">
+            <a:schemeClr val="accent1"/>
+          </a:fillRef>
+          <a:effectRef idx="2">
+            <a:schemeClr val="accent1"/>
+          </a:effectRef>
+          <a:fontRef idx="minor">
+            <a:schemeClr val="lt1"/>
+          </a:fontRef>
+        </p:style>
+        <p:txBody>
+          <a:bodyPr rtlCol="0" anchor="ctr"/>
+          <a:lstStyle/>
+          <a:p>
+            <a:pPr algn="ctr"/>
+          </a:p>
+        </p:txBody>
+      </p:sp>
+      <p:sp>
+        <p:nvSpPr>
+          <p:cNvPr id="26" name="Rectangle 25"/>
+          <p:cNvSpPr/>
+          <p:nvPr/>
+        </p:nvSpPr>
+        <p:spPr>
+          <a:xfrm>
+            <a:off x="0" y="6528816"/>
+            <a:ext cx="12188952" cy="27432"/>
+          </a:xfrm>
+          <a:prstGeom prst="rect">
+            <a:avLst/>
+          </a:prstGeom>
+          <a:solidFill>
+            <a:srgbClr val="C9A84C"/>
+          </a:solidFill>
+          <a:ln>
+            <a:noFill/>
+          </a:ln>
+        </p:spPr>
+        <p:style>
+          <a:lnRef idx="1">
+            <a:schemeClr val="accent1"/>
+          </a:lnRef>
+          <a:fillRef idx="3">
+            <a:schemeClr val="accent1"/>
+          </a:fillRef>
+          <a:effectRef idx="2">
+            <a:schemeClr val="accent1"/>
+          </a:effectRef>
+          <a:fontRef idx="minor">
+            <a:schemeClr val="lt1"/>
+          </a:fontRef>
+        </p:style>
+        <p:txBody>
+          <a:bodyPr rtlCol="0" anchor="ctr"/>
+          <a:lstStyle/>
+          <a:p>
+            <a:pPr algn="ctr"/>
+          </a:p>
+        </p:txBody>
+      </p:sp>
+      <p:sp>
+        <p:nvSpPr>
+          <p:cNvPr id="27" name="TextBox 26"/>
+          <p:cNvSpPr txBox="1"/>
+          <p:nvPr/>
+        </p:nvSpPr>
+        <p:spPr>
+          <a:xfrm>
+            <a:off x="11091672" y="6592824"/>
+            <a:ext cx="914400" cy="219456"/>
+          </a:xfrm>
+          <a:prstGeom prst="rect">
+            <a:avLst/>
+          </a:prstGeom>
+          <a:noFill/>
+        </p:spPr>
+        <p:txBody>
+          <a:bodyPr wrap="square">
+            <a:spAutoFit/>
+          </a:bodyPr>
+          <a:lstStyle/>
+          <a:p>
+            <a:pPr algn="r"/>
+            <a:r>
+              <a:rPr sz="800" b="0" i="0">
+                <a:solidFill>
+                  <a:srgbClr val="9096B2"/>
+                </a:solidFill>
+                <a:latin typeface="Calibri"/>
+              </a:rPr>
+              <a:t>8  /  12</a:t>
+            </a:r>
+          </a:p>
+        </p:txBody>
+      </p:sp>
       <p:pic>
         <p:nvPicPr>
-          <p:cNvPr id="24" name="Picture 23" descr="slide_execution.jpg"/>
+          <p:cNvPr id="28" name="Picture 27" descr="image.jpg"/>
           <p:cNvPicPr>
             <a:picLocks noChangeAspect="1"/>
           </p:cNvPicPr>
@@ -16167,127 +16288,6 @@
           </a:prstGeom>
         </p:spPr>
       </p:pic>
-      <p:sp>
-        <p:nvSpPr>
-          <p:cNvPr id="25" name="Rectangle 24"/>
-          <p:cNvSpPr/>
-          <p:nvPr/>
-        </p:nvSpPr>
-        <p:spPr>
-          <a:xfrm>
-            <a:off x="0" y="6528816"/>
-            <a:ext cx="12188952" cy="329184"/>
-          </a:xfrm>
-          <a:prstGeom prst="rect">
-            <a:avLst/>
-          </a:prstGeom>
-          <a:solidFill>
-            <a:srgbClr val="0A0F2E"/>
-          </a:solidFill>
-          <a:ln>
-            <a:noFill/>
-          </a:ln>
-        </p:spPr>
-        <p:style>
-          <a:lnRef idx="1">
-            <a:schemeClr val="accent1"/>
-          </a:lnRef>
-          <a:fillRef idx="3">
-            <a:schemeClr val="accent1"/>
-          </a:fillRef>
-          <a:effectRef idx="2">
-            <a:schemeClr val="accent1"/>
-          </a:effectRef>
-          <a:fontRef idx="minor">
-            <a:schemeClr val="lt1"/>
-          </a:fontRef>
-        </p:style>
-        <p:txBody>
-          <a:bodyPr rtlCol="0" anchor="ctr"/>
-          <a:lstStyle/>
-          <a:p>
-            <a:pPr algn="ctr"/>
-          </a:p>
-        </p:txBody>
-      </p:sp>
-      <p:sp>
-        <p:nvSpPr>
-          <p:cNvPr id="26" name="Rectangle 25"/>
-          <p:cNvSpPr/>
-          <p:nvPr/>
-        </p:nvSpPr>
-        <p:spPr>
-          <a:xfrm>
-            <a:off x="0" y="6528816"/>
-            <a:ext cx="12188952" cy="27432"/>
-          </a:xfrm>
-          <a:prstGeom prst="rect">
-            <a:avLst/>
-          </a:prstGeom>
-          <a:solidFill>
-            <a:srgbClr val="C9A84C"/>
-          </a:solidFill>
-          <a:ln>
-            <a:noFill/>
-          </a:ln>
-        </p:spPr>
-        <p:style>
-          <a:lnRef idx="1">
-            <a:schemeClr val="accent1"/>
-          </a:lnRef>
-          <a:fillRef idx="3">
-            <a:schemeClr val="accent1"/>
-          </a:fillRef>
-          <a:effectRef idx="2">
-            <a:schemeClr val="accent1"/>
-          </a:effectRef>
-          <a:fontRef idx="minor">
-            <a:schemeClr val="lt1"/>
-          </a:fontRef>
-        </p:style>
-        <p:txBody>
-          <a:bodyPr rtlCol="0" anchor="ctr"/>
-          <a:lstStyle/>
-          <a:p>
-            <a:pPr algn="ctr"/>
-          </a:p>
-        </p:txBody>
-      </p:sp>
-      <p:sp>
-        <p:nvSpPr>
-          <p:cNvPr id="27" name="TextBox 26"/>
-          <p:cNvSpPr txBox="1"/>
-          <p:nvPr/>
-        </p:nvSpPr>
-        <p:spPr>
-          <a:xfrm>
-            <a:off x="11091672" y="6592824"/>
-            <a:ext cx="914400" cy="219456"/>
-          </a:xfrm>
-          <a:prstGeom prst="rect">
-            <a:avLst/>
-          </a:prstGeom>
-          <a:noFill/>
-        </p:spPr>
-        <p:txBody>
-          <a:bodyPr wrap="square">
-            <a:spAutoFit/>
-          </a:bodyPr>
-          <a:lstStyle/>
-          <a:p>
-            <a:pPr algn="r"/>
-            <a:r>
-              <a:rPr sz="800" b="0" i="0">
-                <a:solidFill>
-                  <a:srgbClr val="9096B2"/>
-                </a:solidFill>
-                <a:latin typeface="Calibri"/>
-              </a:rPr>
-              <a:t>8  /  12</a:t>
-            </a:r>
-          </a:p>
-        </p:txBody>
-      </p:sp>
     </p:spTree>
   </p:cSld>
   <p:clrMapOvr>

--- a/attached_assets/VaughnMartin_Pitch_Deck_12Slide_FINAL.pptx
+++ b/attached_assets/VaughnMartin_Pitch_Deck_12Slide_FINAL.pptx
@@ -15230,20 +15230,12 @@
           </a:p>
         </p:txBody>
       </p:sp>
-      <p:pic>
-        <p:nvPicPr>
-          <p:cNvPr id="28" name="Picture 27" descr="image.jpg"/>
-          <p:cNvPicPr>
-            <a:picLocks noChangeAspect="1"/>
-          </p:cNvPicPr>
-          <p:nvPr/>
-        </p:nvPicPr>
-        <p:blipFill>
-          <a:blip r:embed="rId3"/>
-          <a:stretch>
-            <a:fillRect/>
-          </a:stretch>
-        </p:blipFill>
+      <p:sp>
+        <p:nvSpPr>
+          <p:cNvPr id="28" name="Rectangle 27"/>
+          <p:cNvSpPr/>
+          <p:nvPr/>
+        </p:nvSpPr>
         <p:spPr>
           <a:xfrm>
             <a:off x="4864608" y="1060704"/>
@@ -15252,8 +15244,2395 @@
           <a:prstGeom prst="rect">
             <a:avLst/>
           </a:prstGeom>
-        </p:spPr>
-      </p:pic>
+          <a:solidFill>
+            <a:srgbClr val="0C1238"/>
+          </a:solidFill>
+          <a:ln>
+            <a:noFill/>
+          </a:ln>
+        </p:spPr>
+        <p:style>
+          <a:lnRef idx="1">
+            <a:schemeClr val="accent1"/>
+          </a:lnRef>
+          <a:fillRef idx="3">
+            <a:schemeClr val="accent1"/>
+          </a:fillRef>
+          <a:effectRef idx="2">
+            <a:schemeClr val="accent1"/>
+          </a:effectRef>
+          <a:fontRef idx="minor">
+            <a:schemeClr val="lt1"/>
+          </a:fontRef>
+        </p:style>
+        <p:txBody>
+          <a:bodyPr rtlCol="0" anchor="ctr"/>
+          <a:lstStyle/>
+          <a:p>
+            <a:pPr algn="ctr"/>
+          </a:p>
+        </p:txBody>
+      </p:sp>
+      <p:sp>
+        <p:nvSpPr>
+          <p:cNvPr id="29" name="Rectangle 28"/>
+          <p:cNvSpPr/>
+          <p:nvPr/>
+        </p:nvSpPr>
+        <p:spPr>
+          <a:xfrm>
+            <a:off x="4864608" y="1060704"/>
+            <a:ext cx="7269480" cy="27432"/>
+          </a:xfrm>
+          <a:prstGeom prst="rect">
+            <a:avLst/>
+          </a:prstGeom>
+          <a:solidFill>
+            <a:srgbClr val="2B8A6E"/>
+          </a:solidFill>
+          <a:ln>
+            <a:noFill/>
+          </a:ln>
+        </p:spPr>
+        <p:style>
+          <a:lnRef idx="1">
+            <a:schemeClr val="accent1"/>
+          </a:lnRef>
+          <a:fillRef idx="3">
+            <a:schemeClr val="accent1"/>
+          </a:fillRef>
+          <a:effectRef idx="2">
+            <a:schemeClr val="accent1"/>
+          </a:effectRef>
+          <a:fontRef idx="minor">
+            <a:schemeClr val="lt1"/>
+          </a:fontRef>
+        </p:style>
+        <p:txBody>
+          <a:bodyPr rtlCol="0" anchor="ctr"/>
+          <a:lstStyle/>
+          <a:p>
+            <a:pPr algn="ctr"/>
+          </a:p>
+        </p:txBody>
+      </p:sp>
+      <p:sp>
+        <p:nvSpPr>
+          <p:cNvPr id="30" name="Rectangle 29"/>
+          <p:cNvSpPr/>
+          <p:nvPr/>
+        </p:nvSpPr>
+        <p:spPr>
+          <a:xfrm>
+            <a:off x="4864608" y="1060704"/>
+            <a:ext cx="7269480" cy="292608"/>
+          </a:xfrm>
+          <a:prstGeom prst="rect">
+            <a:avLst/>
+          </a:prstGeom>
+          <a:solidFill>
+            <a:srgbClr val="070B22"/>
+          </a:solidFill>
+          <a:ln>
+            <a:noFill/>
+          </a:ln>
+        </p:spPr>
+        <p:style>
+          <a:lnRef idx="1">
+            <a:schemeClr val="accent1"/>
+          </a:lnRef>
+          <a:fillRef idx="3">
+            <a:schemeClr val="accent1"/>
+          </a:fillRef>
+          <a:effectRef idx="2">
+            <a:schemeClr val="accent1"/>
+          </a:effectRef>
+          <a:fontRef idx="minor">
+            <a:schemeClr val="lt1"/>
+          </a:fontRef>
+        </p:style>
+        <p:txBody>
+          <a:bodyPr rtlCol="0" anchor="ctr"/>
+          <a:lstStyle/>
+          <a:p>
+            <a:pPr algn="ctr"/>
+          </a:p>
+        </p:txBody>
+      </p:sp>
+      <p:sp>
+        <p:nvSpPr>
+          <p:cNvPr id="31" name="Oval 30"/>
+          <p:cNvSpPr/>
+          <p:nvPr/>
+        </p:nvSpPr>
+        <p:spPr>
+          <a:xfrm>
+            <a:off x="4992624" y="1161288"/>
+            <a:ext cx="91440" cy="91440"/>
+          </a:xfrm>
+          <a:prstGeom prst="ellipse">
+            <a:avLst/>
+          </a:prstGeom>
+          <a:solidFill>
+            <a:srgbClr val="C03A2B"/>
+          </a:solidFill>
+          <a:ln>
+            <a:noFill/>
+          </a:ln>
+        </p:spPr>
+        <p:style>
+          <a:lnRef idx="1">
+            <a:schemeClr val="accent1"/>
+          </a:lnRef>
+          <a:fillRef idx="3">
+            <a:schemeClr val="accent1"/>
+          </a:fillRef>
+          <a:effectRef idx="2">
+            <a:schemeClr val="accent1"/>
+          </a:effectRef>
+          <a:fontRef idx="minor">
+            <a:schemeClr val="lt1"/>
+          </a:fontRef>
+        </p:style>
+        <p:txBody>
+          <a:bodyPr rtlCol="0" anchor="ctr"/>
+          <a:lstStyle/>
+          <a:p>
+            <a:pPr algn="ctr"/>
+          </a:p>
+        </p:txBody>
+      </p:sp>
+      <p:sp>
+        <p:nvSpPr>
+          <p:cNvPr id="32" name="Oval 31"/>
+          <p:cNvSpPr/>
+          <p:nvPr/>
+        </p:nvSpPr>
+        <p:spPr>
+          <a:xfrm>
+            <a:off x="5138928" y="1161288"/>
+            <a:ext cx="91440" cy="91440"/>
+          </a:xfrm>
+          <a:prstGeom prst="ellipse">
+            <a:avLst/>
+          </a:prstGeom>
+          <a:solidFill>
+            <a:srgbClr val="E08A20"/>
+          </a:solidFill>
+          <a:ln>
+            <a:noFill/>
+          </a:ln>
+        </p:spPr>
+        <p:style>
+          <a:lnRef idx="1">
+            <a:schemeClr val="accent1"/>
+          </a:lnRef>
+          <a:fillRef idx="3">
+            <a:schemeClr val="accent1"/>
+          </a:fillRef>
+          <a:effectRef idx="2">
+            <a:schemeClr val="accent1"/>
+          </a:effectRef>
+          <a:fontRef idx="minor">
+            <a:schemeClr val="lt1"/>
+          </a:fontRef>
+        </p:style>
+        <p:txBody>
+          <a:bodyPr rtlCol="0" anchor="ctr"/>
+          <a:lstStyle/>
+          <a:p>
+            <a:pPr algn="ctr"/>
+          </a:p>
+        </p:txBody>
+      </p:sp>
+      <p:sp>
+        <p:nvSpPr>
+          <p:cNvPr id="33" name="Oval 32"/>
+          <p:cNvSpPr/>
+          <p:nvPr/>
+        </p:nvSpPr>
+        <p:spPr>
+          <a:xfrm>
+            <a:off x="5285232" y="1161288"/>
+            <a:ext cx="91440" cy="91440"/>
+          </a:xfrm>
+          <a:prstGeom prst="ellipse">
+            <a:avLst/>
+          </a:prstGeom>
+          <a:solidFill>
+            <a:srgbClr val="278A5B"/>
+          </a:solidFill>
+          <a:ln>
+            <a:noFill/>
+          </a:ln>
+        </p:spPr>
+        <p:style>
+          <a:lnRef idx="1">
+            <a:schemeClr val="accent1"/>
+          </a:lnRef>
+          <a:fillRef idx="3">
+            <a:schemeClr val="accent1"/>
+          </a:fillRef>
+          <a:effectRef idx="2">
+            <a:schemeClr val="accent1"/>
+          </a:effectRef>
+          <a:fontRef idx="minor">
+            <a:schemeClr val="lt1"/>
+          </a:fontRef>
+        </p:style>
+        <p:txBody>
+          <a:bodyPr rtlCol="0" anchor="ctr"/>
+          <a:lstStyle/>
+          <a:p>
+            <a:pPr algn="ctr"/>
+          </a:p>
+        </p:txBody>
+      </p:sp>
+      <p:sp>
+        <p:nvSpPr>
+          <p:cNvPr id="34" name="Rectangle 33"/>
+          <p:cNvSpPr/>
+          <p:nvPr/>
+        </p:nvSpPr>
+        <p:spPr>
+          <a:xfrm>
+            <a:off x="5468112" y="1124712"/>
+            <a:ext cx="6501384" cy="164592"/>
+          </a:xfrm>
+          <a:prstGeom prst="rect">
+            <a:avLst/>
+          </a:prstGeom>
+          <a:solidFill>
+            <a:srgbClr val="12183A"/>
+          </a:solidFill>
+          <a:ln>
+            <a:noFill/>
+          </a:ln>
+        </p:spPr>
+        <p:style>
+          <a:lnRef idx="1">
+            <a:schemeClr val="accent1"/>
+          </a:lnRef>
+          <a:fillRef idx="3">
+            <a:schemeClr val="accent1"/>
+          </a:fillRef>
+          <a:effectRef idx="2">
+            <a:schemeClr val="accent1"/>
+          </a:effectRef>
+          <a:fontRef idx="minor">
+            <a:schemeClr val="lt1"/>
+          </a:fontRef>
+        </p:style>
+        <p:txBody>
+          <a:bodyPr rtlCol="0" anchor="ctr"/>
+          <a:lstStyle/>
+          <a:p>
+            <a:pPr algn="ctr"/>
+          </a:p>
+        </p:txBody>
+      </p:sp>
+      <p:sp>
+        <p:nvSpPr>
+          <p:cNvPr id="35" name="TextBox 34"/>
+          <p:cNvSpPr txBox="1"/>
+          <p:nvPr/>
+        </p:nvSpPr>
+        <p:spPr>
+          <a:xfrm>
+            <a:off x="5541264" y="1129284"/>
+            <a:ext cx="6355080" cy="150876"/>
+          </a:xfrm>
+          <a:prstGeom prst="rect">
+            <a:avLst/>
+          </a:prstGeom>
+          <a:noFill/>
+        </p:spPr>
+        <p:txBody>
+          <a:bodyPr wrap="square">
+            <a:spAutoFit/>
+          </a:bodyPr>
+          <a:lstStyle/>
+          <a:p>
+            <a:pPr algn="l"/>
+            <a:r>
+              <a:rPr sz="750" b="0" i="0">
+                <a:solidFill>
+                  <a:srgbClr val="9096B2"/>
+                </a:solidFill>
+                <a:latin typeface="Calibri"/>
+              </a:rPr>
+              <a:t>readinessOS.vaughnmartin.com  —  Activation Console · LIVE</a:t>
+            </a:r>
+          </a:p>
+        </p:txBody>
+      </p:sp>
+      <p:sp>
+        <p:nvSpPr>
+          <p:cNvPr id="36" name="Rectangle 35"/>
+          <p:cNvSpPr/>
+          <p:nvPr/>
+        </p:nvSpPr>
+        <p:spPr>
+          <a:xfrm>
+            <a:off x="4864608" y="1389888"/>
+            <a:ext cx="7269480" cy="347472"/>
+          </a:xfrm>
+          <a:prstGeom prst="rect">
+            <a:avLst/>
+          </a:prstGeom>
+          <a:solidFill>
+            <a:srgbClr val="1A0707"/>
+          </a:solidFill>
+          <a:ln>
+            <a:noFill/>
+          </a:ln>
+        </p:spPr>
+        <p:style>
+          <a:lnRef idx="1">
+            <a:schemeClr val="accent1"/>
+          </a:lnRef>
+          <a:fillRef idx="3">
+            <a:schemeClr val="accent1"/>
+          </a:fillRef>
+          <a:effectRef idx="2">
+            <a:schemeClr val="accent1"/>
+          </a:effectRef>
+          <a:fontRef idx="minor">
+            <a:schemeClr val="lt1"/>
+          </a:fontRef>
+        </p:style>
+        <p:txBody>
+          <a:bodyPr rtlCol="0" anchor="ctr"/>
+          <a:lstStyle/>
+          <a:p>
+            <a:pPr algn="ctr"/>
+          </a:p>
+        </p:txBody>
+      </p:sp>
+      <p:sp>
+        <p:nvSpPr>
+          <p:cNvPr id="37" name="Rectangle 36"/>
+          <p:cNvSpPr/>
+          <p:nvPr/>
+        </p:nvSpPr>
+        <p:spPr>
+          <a:xfrm>
+            <a:off x="4864608" y="1389888"/>
+            <a:ext cx="7269480" cy="22860"/>
+          </a:xfrm>
+          <a:prstGeom prst="rect">
+            <a:avLst/>
+          </a:prstGeom>
+          <a:solidFill>
+            <a:srgbClr val="FF6B5B"/>
+          </a:solidFill>
+          <a:ln>
+            <a:noFill/>
+          </a:ln>
+        </p:spPr>
+        <p:style>
+          <a:lnRef idx="1">
+            <a:schemeClr val="accent1"/>
+          </a:lnRef>
+          <a:fillRef idx="3">
+            <a:schemeClr val="accent1"/>
+          </a:fillRef>
+          <a:effectRef idx="2">
+            <a:schemeClr val="accent1"/>
+          </a:effectRef>
+          <a:fontRef idx="minor">
+            <a:schemeClr val="lt1"/>
+          </a:fontRef>
+        </p:style>
+        <p:txBody>
+          <a:bodyPr rtlCol="0" anchor="ctr"/>
+          <a:lstStyle/>
+          <a:p>
+            <a:pPr algn="ctr"/>
+          </a:p>
+        </p:txBody>
+      </p:sp>
+      <p:sp>
+        <p:nvSpPr>
+          <p:cNvPr id="38" name="Rectangle 37"/>
+          <p:cNvSpPr/>
+          <p:nvPr/>
+        </p:nvSpPr>
+        <p:spPr>
+          <a:xfrm>
+            <a:off x="5029200" y="1517904"/>
+            <a:ext cx="100584" cy="100584"/>
+          </a:xfrm>
+          <a:prstGeom prst="rect">
+            <a:avLst/>
+          </a:prstGeom>
+          <a:solidFill>
+            <a:srgbClr val="FF6B5B"/>
+          </a:solidFill>
+          <a:ln>
+            <a:noFill/>
+          </a:ln>
+        </p:spPr>
+        <p:style>
+          <a:lnRef idx="1">
+            <a:schemeClr val="accent1"/>
+          </a:lnRef>
+          <a:fillRef idx="3">
+            <a:schemeClr val="accent1"/>
+          </a:fillRef>
+          <a:effectRef idx="2">
+            <a:schemeClr val="accent1"/>
+          </a:effectRef>
+          <a:fontRef idx="minor">
+            <a:schemeClr val="lt1"/>
+          </a:fontRef>
+        </p:style>
+        <p:txBody>
+          <a:bodyPr rtlCol="0" anchor="ctr"/>
+          <a:lstStyle/>
+          <a:p>
+            <a:pPr algn="ctr"/>
+          </a:p>
+        </p:txBody>
+      </p:sp>
+      <p:sp>
+        <p:nvSpPr>
+          <p:cNvPr id="39" name="TextBox 38"/>
+          <p:cNvSpPr txBox="1"/>
+          <p:nvPr/>
+        </p:nvSpPr>
+        <p:spPr>
+          <a:xfrm>
+            <a:off x="5212080" y="1472184"/>
+            <a:ext cx="3474720" cy="201168"/>
+          </a:xfrm>
+          <a:prstGeom prst="rect">
+            <a:avLst/>
+          </a:prstGeom>
+          <a:noFill/>
+        </p:spPr>
+        <p:txBody>
+          <a:bodyPr wrap="square">
+            <a:spAutoFit/>
+          </a:bodyPr>
+          <a:lstStyle/>
+          <a:p>
+            <a:pPr algn="l"/>
+            <a:r>
+              <a:rPr sz="950" b="1" i="0">
+                <a:solidFill>
+                  <a:srgbClr val="FF6B5B"/>
+                </a:solidFill>
+                <a:latin typeface="Calibri"/>
+              </a:rPr>
+              <a:t>⚠  SIGNAL DETECTED  ·  HIGH PRIORITY</a:t>
+            </a:r>
+          </a:p>
+        </p:txBody>
+      </p:sp>
+      <p:sp>
+        <p:nvSpPr>
+          <p:cNvPr id="40" name="TextBox 39"/>
+          <p:cNvSpPr txBox="1"/>
+          <p:nvPr/>
+        </p:nvSpPr>
+        <p:spPr>
+          <a:xfrm>
+            <a:off x="8796528" y="1472184"/>
+            <a:ext cx="3154680" cy="201168"/>
+          </a:xfrm>
+          <a:prstGeom prst="rect">
+            <a:avLst/>
+          </a:prstGeom>
+          <a:noFill/>
+        </p:spPr>
+        <p:txBody>
+          <a:bodyPr wrap="square">
+            <a:spAutoFit/>
+          </a:bodyPr>
+          <a:lstStyle/>
+          <a:p>
+            <a:pPr algn="r"/>
+            <a:r>
+              <a:rPr sz="800" b="0" i="0">
+                <a:solidFill>
+                  <a:srgbClr val="9096B2"/>
+                </a:solidFill>
+                <a:latin typeface="Calibri"/>
+              </a:rPr>
+              <a:t>09:02:17  ·  13F SEC FILING  ·  EDGAR ALERT</a:t>
+            </a:r>
+          </a:p>
+        </p:txBody>
+      </p:sp>
+      <p:sp>
+        <p:nvSpPr>
+          <p:cNvPr id="41" name="TextBox 40"/>
+          <p:cNvSpPr txBox="1"/>
+          <p:nvPr/>
+        </p:nvSpPr>
+        <p:spPr>
+          <a:xfrm>
+            <a:off x="5212080" y="1604772"/>
+            <a:ext cx="6720840" cy="146304"/>
+          </a:xfrm>
+          <a:prstGeom prst="rect">
+            <a:avLst/>
+          </a:prstGeom>
+          <a:noFill/>
+        </p:spPr>
+        <p:txBody>
+          <a:bodyPr wrap="square">
+            <a:spAutoFit/>
+          </a:bodyPr>
+          <a:lstStyle/>
+          <a:p>
+            <a:pPr algn="l"/>
+            <a:r>
+              <a:rPr sz="850" b="1" i="0">
+                <a:solidFill>
+                  <a:srgbClr val="FFFFFF"/>
+                </a:solidFill>
+                <a:latin typeface="Calibri"/>
+              </a:rPr>
+              <a:t>Activist Investor  —  Elliott Management Partners, L.P.</a:t>
+            </a:r>
+          </a:p>
+        </p:txBody>
+      </p:sp>
+      <p:sp>
+        <p:nvSpPr>
+          <p:cNvPr id="42" name="Rectangle 41"/>
+          <p:cNvSpPr/>
+          <p:nvPr/>
+        </p:nvSpPr>
+        <p:spPr>
+          <a:xfrm>
+            <a:off x="5029200" y="1773936"/>
+            <a:ext cx="6940296" cy="749808"/>
+          </a:xfrm>
+          <a:prstGeom prst="rect">
+            <a:avLst/>
+          </a:prstGeom>
+          <a:solidFill>
+            <a:srgbClr val="0E1642"/>
+          </a:solidFill>
+          <a:ln>
+            <a:noFill/>
+          </a:ln>
+        </p:spPr>
+        <p:style>
+          <a:lnRef idx="1">
+            <a:schemeClr val="accent1"/>
+          </a:lnRef>
+          <a:fillRef idx="3">
+            <a:schemeClr val="accent1"/>
+          </a:fillRef>
+          <a:effectRef idx="2">
+            <a:schemeClr val="accent1"/>
+          </a:effectRef>
+          <a:fontRef idx="minor">
+            <a:schemeClr val="lt1"/>
+          </a:fontRef>
+        </p:style>
+        <p:txBody>
+          <a:bodyPr rtlCol="0" anchor="ctr"/>
+          <a:lstStyle/>
+          <a:p>
+            <a:pPr algn="ctr"/>
+          </a:p>
+        </p:txBody>
+      </p:sp>
+      <p:sp>
+        <p:nvSpPr>
+          <p:cNvPr id="43" name="Rectangle 42"/>
+          <p:cNvSpPr/>
+          <p:nvPr/>
+        </p:nvSpPr>
+        <p:spPr>
+          <a:xfrm>
+            <a:off x="5029200" y="1773936"/>
+            <a:ext cx="32004" cy="749808"/>
+          </a:xfrm>
+          <a:prstGeom prst="rect">
+            <a:avLst/>
+          </a:prstGeom>
+          <a:solidFill>
+            <a:srgbClr val="FF6B5B"/>
+          </a:solidFill>
+          <a:ln>
+            <a:noFill/>
+          </a:ln>
+        </p:spPr>
+        <p:style>
+          <a:lnRef idx="1">
+            <a:schemeClr val="accent1"/>
+          </a:lnRef>
+          <a:fillRef idx="3">
+            <a:schemeClr val="accent1"/>
+          </a:fillRef>
+          <a:effectRef idx="2">
+            <a:schemeClr val="accent1"/>
+          </a:effectRef>
+          <a:fontRef idx="minor">
+            <a:schemeClr val="lt1"/>
+          </a:fontRef>
+        </p:style>
+        <p:txBody>
+          <a:bodyPr rtlCol="0" anchor="ctr"/>
+          <a:lstStyle/>
+          <a:p>
+            <a:pPr algn="ctr"/>
+          </a:p>
+        </p:txBody>
+      </p:sp>
+      <p:sp>
+        <p:nvSpPr>
+          <p:cNvPr id="44" name="TextBox 43"/>
+          <p:cNvSpPr txBox="1"/>
+          <p:nvPr/>
+        </p:nvSpPr>
+        <p:spPr>
+          <a:xfrm>
+            <a:off x="5138928" y="1856231"/>
+            <a:ext cx="2154936" cy="146304"/>
+          </a:xfrm>
+          <a:prstGeom prst="rect">
+            <a:avLst/>
+          </a:prstGeom>
+          <a:noFill/>
+        </p:spPr>
+        <p:txBody>
+          <a:bodyPr wrap="square">
+            <a:spAutoFit/>
+          </a:bodyPr>
+          <a:lstStyle/>
+          <a:p>
+            <a:pPr algn="l"/>
+            <a:r>
+              <a:rPr sz="700" b="1" i="0">
+                <a:solidFill>
+                  <a:srgbClr val="9096B2"/>
+                </a:solidFill>
+                <a:latin typeface="Calibri"/>
+              </a:rPr>
+              <a:t>POSITION FILED</a:t>
+            </a:r>
+          </a:p>
+        </p:txBody>
+      </p:sp>
+      <p:sp>
+        <p:nvSpPr>
+          <p:cNvPr id="45" name="TextBox 44"/>
+          <p:cNvSpPr txBox="1"/>
+          <p:nvPr/>
+        </p:nvSpPr>
+        <p:spPr>
+          <a:xfrm>
+            <a:off x="5138928" y="2020824"/>
+            <a:ext cx="2154936" cy="173736"/>
+          </a:xfrm>
+          <a:prstGeom prst="rect">
+            <a:avLst/>
+          </a:prstGeom>
+          <a:noFill/>
+        </p:spPr>
+        <p:txBody>
+          <a:bodyPr wrap="square">
+            <a:spAutoFit/>
+          </a:bodyPr>
+          <a:lstStyle/>
+          <a:p>
+            <a:pPr algn="l"/>
+            <a:r>
+              <a:rPr sz="950" b="1" i="0">
+                <a:solidFill>
+                  <a:srgbClr val="FFFFFF"/>
+                </a:solidFill>
+                <a:latin typeface="Calibri"/>
+              </a:rPr>
+              <a:t>9.2% stake</a:t>
+            </a:r>
+          </a:p>
+        </p:txBody>
+      </p:sp>
+      <p:sp>
+        <p:nvSpPr>
+          <p:cNvPr id="46" name="TextBox 45"/>
+          <p:cNvSpPr txBox="1"/>
+          <p:nvPr/>
+        </p:nvSpPr>
+        <p:spPr>
+          <a:xfrm>
+            <a:off x="5138928" y="2194560"/>
+            <a:ext cx="2154936" cy="173736"/>
+          </a:xfrm>
+          <a:prstGeom prst="rect">
+            <a:avLst/>
+          </a:prstGeom>
+          <a:noFill/>
+        </p:spPr>
+        <p:txBody>
+          <a:bodyPr wrap="square">
+            <a:spAutoFit/>
+          </a:bodyPr>
+          <a:lstStyle/>
+          <a:p>
+            <a:pPr algn="l"/>
+            <a:r>
+              <a:rPr sz="950" b="0" i="0">
+                <a:solidFill>
+                  <a:srgbClr val="CCCEDC"/>
+                </a:solidFill>
+                <a:latin typeface="Calibri"/>
+              </a:rPr>
+              <a:t>$2.1B market value</a:t>
+            </a:r>
+          </a:p>
+        </p:txBody>
+      </p:sp>
+      <p:sp>
+        <p:nvSpPr>
+          <p:cNvPr id="47" name="Rectangle 46"/>
+          <p:cNvSpPr/>
+          <p:nvPr/>
+        </p:nvSpPr>
+        <p:spPr>
+          <a:xfrm>
+            <a:off x="7339584" y="1865376"/>
+            <a:ext cx="9144" cy="566928"/>
+          </a:xfrm>
+          <a:prstGeom prst="rect">
+            <a:avLst/>
+          </a:prstGeom>
+          <a:solidFill>
+            <a:srgbClr val="555C78"/>
+          </a:solidFill>
+          <a:ln>
+            <a:noFill/>
+          </a:ln>
+        </p:spPr>
+        <p:style>
+          <a:lnRef idx="1">
+            <a:schemeClr val="accent1"/>
+          </a:lnRef>
+          <a:fillRef idx="3">
+            <a:schemeClr val="accent1"/>
+          </a:fillRef>
+          <a:effectRef idx="2">
+            <a:schemeClr val="accent1"/>
+          </a:effectRef>
+          <a:fontRef idx="minor">
+            <a:schemeClr val="lt1"/>
+          </a:fontRef>
+        </p:style>
+        <p:txBody>
+          <a:bodyPr rtlCol="0" anchor="ctr"/>
+          <a:lstStyle/>
+          <a:p>
+            <a:pPr algn="ctr"/>
+          </a:p>
+        </p:txBody>
+      </p:sp>
+      <p:sp>
+        <p:nvSpPr>
+          <p:cNvPr id="48" name="TextBox 47"/>
+          <p:cNvSpPr txBox="1"/>
+          <p:nvPr/>
+        </p:nvSpPr>
+        <p:spPr>
+          <a:xfrm>
+            <a:off x="7421880" y="1856231"/>
+            <a:ext cx="2154936" cy="146304"/>
+          </a:xfrm>
+          <a:prstGeom prst="rect">
+            <a:avLst/>
+          </a:prstGeom>
+          <a:noFill/>
+        </p:spPr>
+        <p:txBody>
+          <a:bodyPr wrap="square">
+            <a:spAutoFit/>
+          </a:bodyPr>
+          <a:lstStyle/>
+          <a:p>
+            <a:pPr algn="l"/>
+            <a:r>
+              <a:rPr sz="700" b="1" i="0">
+                <a:solidFill>
+                  <a:srgbClr val="9096B2"/>
+                </a:solidFill>
+                <a:latin typeface="Calibri"/>
+              </a:rPr>
+              <a:t>CAMPAIGN TYPE</a:t>
+            </a:r>
+          </a:p>
+        </p:txBody>
+      </p:sp>
+      <p:sp>
+        <p:nvSpPr>
+          <p:cNvPr id="49" name="TextBox 48"/>
+          <p:cNvSpPr txBox="1"/>
+          <p:nvPr/>
+        </p:nvSpPr>
+        <p:spPr>
+          <a:xfrm>
+            <a:off x="7421880" y="2020824"/>
+            <a:ext cx="2154936" cy="173736"/>
+          </a:xfrm>
+          <a:prstGeom prst="rect">
+            <a:avLst/>
+          </a:prstGeom>
+          <a:noFill/>
+        </p:spPr>
+        <p:txBody>
+          <a:bodyPr wrap="square">
+            <a:spAutoFit/>
+          </a:bodyPr>
+          <a:lstStyle/>
+          <a:p>
+            <a:pPr algn="l"/>
+            <a:r>
+              <a:rPr sz="950" b="1" i="0">
+                <a:solidFill>
+                  <a:srgbClr val="FFFFFF"/>
+                </a:solidFill>
+                <a:latin typeface="Calibri"/>
+              </a:rPr>
+              <a:t>Board Representation</a:t>
+            </a:r>
+          </a:p>
+        </p:txBody>
+      </p:sp>
+      <p:sp>
+        <p:nvSpPr>
+          <p:cNvPr id="50" name="TextBox 49"/>
+          <p:cNvSpPr txBox="1"/>
+          <p:nvPr/>
+        </p:nvSpPr>
+        <p:spPr>
+          <a:xfrm>
+            <a:off x="7421880" y="2194560"/>
+            <a:ext cx="2154936" cy="173736"/>
+          </a:xfrm>
+          <a:prstGeom prst="rect">
+            <a:avLst/>
+          </a:prstGeom>
+          <a:noFill/>
+        </p:spPr>
+        <p:txBody>
+          <a:bodyPr wrap="square">
+            <a:spAutoFit/>
+          </a:bodyPr>
+          <a:lstStyle/>
+          <a:p>
+            <a:pPr algn="l"/>
+            <a:r>
+              <a:rPr sz="950" b="0" i="0">
+                <a:solidFill>
+                  <a:srgbClr val="CCCEDC"/>
+                </a:solidFill>
+                <a:latin typeface="Calibri"/>
+              </a:rPr>
+              <a:t>+ Strategic Review</a:t>
+            </a:r>
+          </a:p>
+        </p:txBody>
+      </p:sp>
+      <p:sp>
+        <p:nvSpPr>
+          <p:cNvPr id="51" name="Rectangle 50"/>
+          <p:cNvSpPr/>
+          <p:nvPr/>
+        </p:nvSpPr>
+        <p:spPr>
+          <a:xfrm>
+            <a:off x="9622536" y="1865376"/>
+            <a:ext cx="9144" cy="566928"/>
+          </a:xfrm>
+          <a:prstGeom prst="rect">
+            <a:avLst/>
+          </a:prstGeom>
+          <a:solidFill>
+            <a:srgbClr val="555C78"/>
+          </a:solidFill>
+          <a:ln>
+            <a:noFill/>
+          </a:ln>
+        </p:spPr>
+        <p:style>
+          <a:lnRef idx="1">
+            <a:schemeClr val="accent1"/>
+          </a:lnRef>
+          <a:fillRef idx="3">
+            <a:schemeClr val="accent1"/>
+          </a:fillRef>
+          <a:effectRef idx="2">
+            <a:schemeClr val="accent1"/>
+          </a:effectRef>
+          <a:fontRef idx="minor">
+            <a:schemeClr val="lt1"/>
+          </a:fontRef>
+        </p:style>
+        <p:txBody>
+          <a:bodyPr rtlCol="0" anchor="ctr"/>
+          <a:lstStyle/>
+          <a:p>
+            <a:pPr algn="ctr"/>
+          </a:p>
+        </p:txBody>
+      </p:sp>
+      <p:sp>
+        <p:nvSpPr>
+          <p:cNvPr id="52" name="TextBox 51"/>
+          <p:cNvSpPr txBox="1"/>
+          <p:nvPr/>
+        </p:nvSpPr>
+        <p:spPr>
+          <a:xfrm>
+            <a:off x="9704832" y="1856231"/>
+            <a:ext cx="2154936" cy="146304"/>
+          </a:xfrm>
+          <a:prstGeom prst="rect">
+            <a:avLst/>
+          </a:prstGeom>
+          <a:noFill/>
+        </p:spPr>
+        <p:txBody>
+          <a:bodyPr wrap="square">
+            <a:spAutoFit/>
+          </a:bodyPr>
+          <a:lstStyle/>
+          <a:p>
+            <a:pPr algn="l"/>
+            <a:r>
+              <a:rPr sz="700" b="1" i="0">
+                <a:solidFill>
+                  <a:srgbClr val="9096B2"/>
+                </a:solidFill>
+                <a:latin typeface="Calibri"/>
+              </a:rPr>
+              <a:t>WINDOW TO RESPOND</a:t>
+            </a:r>
+          </a:p>
+        </p:txBody>
+      </p:sp>
+      <p:sp>
+        <p:nvSpPr>
+          <p:cNvPr id="53" name="TextBox 52"/>
+          <p:cNvSpPr txBox="1"/>
+          <p:nvPr/>
+        </p:nvSpPr>
+        <p:spPr>
+          <a:xfrm>
+            <a:off x="9704832" y="2020824"/>
+            <a:ext cx="2154936" cy="173736"/>
+          </a:xfrm>
+          <a:prstGeom prst="rect">
+            <a:avLst/>
+          </a:prstGeom>
+          <a:noFill/>
+        </p:spPr>
+        <p:txBody>
+          <a:bodyPr wrap="square">
+            <a:spAutoFit/>
+          </a:bodyPr>
+          <a:lstStyle/>
+          <a:p>
+            <a:pPr algn="l"/>
+            <a:r>
+              <a:rPr sz="950" b="1" i="0">
+                <a:solidFill>
+                  <a:srgbClr val="FFFFFF"/>
+                </a:solidFill>
+                <a:latin typeface="Calibri"/>
+              </a:rPr>
+              <a:t>72 hours</a:t>
+            </a:r>
+          </a:p>
+        </p:txBody>
+      </p:sp>
+      <p:sp>
+        <p:nvSpPr>
+          <p:cNvPr id="54" name="TextBox 53"/>
+          <p:cNvSpPr txBox="1"/>
+          <p:nvPr/>
+        </p:nvSpPr>
+        <p:spPr>
+          <a:xfrm>
+            <a:off x="9704832" y="2194560"/>
+            <a:ext cx="2154936" cy="173736"/>
+          </a:xfrm>
+          <a:prstGeom prst="rect">
+            <a:avLst/>
+          </a:prstGeom>
+          <a:noFill/>
+        </p:spPr>
+        <p:txBody>
+          <a:bodyPr wrap="square">
+            <a:spAutoFit/>
+          </a:bodyPr>
+          <a:lstStyle/>
+          <a:p>
+            <a:pPr algn="l"/>
+            <a:r>
+              <a:rPr sz="950" b="0" i="0">
+                <a:solidFill>
+                  <a:srgbClr val="CCCEDC"/>
+                </a:solidFill>
+                <a:latin typeface="Calibri"/>
+              </a:rPr>
+              <a:t>before media breaks</a:t>
+            </a:r>
+          </a:p>
+        </p:txBody>
+      </p:sp>
+      <p:sp>
+        <p:nvSpPr>
+          <p:cNvPr id="55" name="TextBox 54"/>
+          <p:cNvSpPr txBox="1"/>
+          <p:nvPr/>
+        </p:nvSpPr>
+        <p:spPr>
+          <a:xfrm>
+            <a:off x="5029200" y="2578608"/>
+            <a:ext cx="1828800" cy="164592"/>
+          </a:xfrm>
+          <a:prstGeom prst="rect">
+            <a:avLst/>
+          </a:prstGeom>
+          <a:noFill/>
+        </p:spPr>
+        <p:txBody>
+          <a:bodyPr wrap="square">
+            <a:spAutoFit/>
+          </a:bodyPr>
+          <a:lstStyle/>
+          <a:p>
+            <a:pPr algn="l"/>
+            <a:r>
+              <a:rPr sz="700" b="1" i="0">
+                <a:solidFill>
+                  <a:srgbClr val="9096B2"/>
+                </a:solidFill>
+                <a:latin typeface="Calibri"/>
+              </a:rPr>
+              <a:t>SYSTEM RISK SCORE</a:t>
+            </a:r>
+          </a:p>
+        </p:txBody>
+      </p:sp>
+      <p:sp>
+        <p:nvSpPr>
+          <p:cNvPr id="56" name="TextBox 55"/>
+          <p:cNvSpPr txBox="1"/>
+          <p:nvPr/>
+        </p:nvSpPr>
+        <p:spPr>
+          <a:xfrm>
+            <a:off x="6876288" y="2578608"/>
+            <a:ext cx="2286000" cy="164592"/>
+          </a:xfrm>
+          <a:prstGeom prst="rect">
+            <a:avLst/>
+          </a:prstGeom>
+          <a:noFill/>
+        </p:spPr>
+        <p:txBody>
+          <a:bodyPr wrap="square">
+            <a:spAutoFit/>
+          </a:bodyPr>
+          <a:lstStyle/>
+          <a:p>
+            <a:pPr algn="l"/>
+            <a:r>
+              <a:rPr sz="850" b="1" i="0">
+                <a:solidFill>
+                  <a:srgbClr val="FF6B5B"/>
+                </a:solidFill>
+                <a:latin typeface="Calibri"/>
+              </a:rPr>
+              <a:t>89 / 100   ·   CRITICAL</a:t>
+            </a:r>
+          </a:p>
+        </p:txBody>
+      </p:sp>
+      <p:sp>
+        <p:nvSpPr>
+          <p:cNvPr id="57" name="Rectangle 56"/>
+          <p:cNvSpPr/>
+          <p:nvPr/>
+        </p:nvSpPr>
+        <p:spPr>
+          <a:xfrm>
+            <a:off x="5029200" y="2770632"/>
+            <a:ext cx="6940296" cy="118872"/>
+          </a:xfrm>
+          <a:prstGeom prst="rect">
+            <a:avLst/>
+          </a:prstGeom>
+          <a:solidFill>
+            <a:srgbClr val="141838"/>
+          </a:solidFill>
+          <a:ln>
+            <a:noFill/>
+          </a:ln>
+        </p:spPr>
+        <p:style>
+          <a:lnRef idx="1">
+            <a:schemeClr val="accent1"/>
+          </a:lnRef>
+          <a:fillRef idx="3">
+            <a:schemeClr val="accent1"/>
+          </a:fillRef>
+          <a:effectRef idx="2">
+            <a:schemeClr val="accent1"/>
+          </a:effectRef>
+          <a:fontRef idx="minor">
+            <a:schemeClr val="lt1"/>
+          </a:fontRef>
+        </p:style>
+        <p:txBody>
+          <a:bodyPr rtlCol="0" anchor="ctr"/>
+          <a:lstStyle/>
+          <a:p>
+            <a:pPr algn="ctr"/>
+          </a:p>
+        </p:txBody>
+      </p:sp>
+      <p:sp>
+        <p:nvSpPr>
+          <p:cNvPr id="58" name="Rectangle 57"/>
+          <p:cNvSpPr/>
+          <p:nvPr/>
+        </p:nvSpPr>
+        <p:spPr>
+          <a:xfrm>
+            <a:off x="5029200" y="2770632"/>
+            <a:ext cx="6176863" cy="118872"/>
+          </a:xfrm>
+          <a:prstGeom prst="rect">
+            <a:avLst/>
+          </a:prstGeom>
+          <a:solidFill>
+            <a:srgbClr val="C03A2B"/>
+          </a:solidFill>
+          <a:ln>
+            <a:noFill/>
+          </a:ln>
+        </p:spPr>
+        <p:style>
+          <a:lnRef idx="1">
+            <a:schemeClr val="accent1"/>
+          </a:lnRef>
+          <a:fillRef idx="3">
+            <a:schemeClr val="accent1"/>
+          </a:fillRef>
+          <a:effectRef idx="2">
+            <a:schemeClr val="accent1"/>
+          </a:effectRef>
+          <a:fontRef idx="minor">
+            <a:schemeClr val="lt1"/>
+          </a:fontRef>
+        </p:style>
+        <p:txBody>
+          <a:bodyPr rtlCol="0" anchor="ctr"/>
+          <a:lstStyle/>
+          <a:p>
+            <a:pPr algn="ctr"/>
+          </a:p>
+        </p:txBody>
+      </p:sp>
+      <p:sp>
+        <p:nvSpPr>
+          <p:cNvPr id="59" name="Rectangle 58"/>
+          <p:cNvSpPr/>
+          <p:nvPr/>
+        </p:nvSpPr>
+        <p:spPr>
+          <a:xfrm>
+            <a:off x="11187775" y="2770632"/>
+            <a:ext cx="164592" cy="118872"/>
+          </a:xfrm>
+          <a:prstGeom prst="rect">
+            <a:avLst/>
+          </a:prstGeom>
+          <a:solidFill>
+            <a:srgbClr val="FF6B5B"/>
+          </a:solidFill>
+          <a:ln>
+            <a:noFill/>
+          </a:ln>
+        </p:spPr>
+        <p:style>
+          <a:lnRef idx="1">
+            <a:schemeClr val="accent1"/>
+          </a:lnRef>
+          <a:fillRef idx="3">
+            <a:schemeClr val="accent1"/>
+          </a:fillRef>
+          <a:effectRef idx="2">
+            <a:schemeClr val="accent1"/>
+          </a:effectRef>
+          <a:fontRef idx="minor">
+            <a:schemeClr val="lt1"/>
+          </a:fontRef>
+        </p:style>
+        <p:txBody>
+          <a:bodyPr rtlCol="0" anchor="ctr"/>
+          <a:lstStyle/>
+          <a:p>
+            <a:pPr algn="ctr"/>
+          </a:p>
+        </p:txBody>
+      </p:sp>
+      <p:sp>
+        <p:nvSpPr>
+          <p:cNvPr id="60" name="Rectangle 59"/>
+          <p:cNvSpPr/>
+          <p:nvPr/>
+        </p:nvSpPr>
+        <p:spPr>
+          <a:xfrm>
+            <a:off x="5029200" y="2971800"/>
+            <a:ext cx="6940296" cy="877824"/>
+          </a:xfrm>
+          <a:prstGeom prst="rect">
+            <a:avLst/>
+          </a:prstGeom>
+          <a:solidFill>
+            <a:srgbClr val="071028"/>
+          </a:solidFill>
+          <a:ln>
+            <a:noFill/>
+          </a:ln>
+        </p:spPr>
+        <p:style>
+          <a:lnRef idx="1">
+            <a:schemeClr val="accent1"/>
+          </a:lnRef>
+          <a:fillRef idx="3">
+            <a:schemeClr val="accent1"/>
+          </a:fillRef>
+          <a:effectRef idx="2">
+            <a:schemeClr val="accent1"/>
+          </a:effectRef>
+          <a:fontRef idx="minor">
+            <a:schemeClr val="lt1"/>
+          </a:fontRef>
+        </p:style>
+        <p:txBody>
+          <a:bodyPr rtlCol="0" anchor="ctr"/>
+          <a:lstStyle/>
+          <a:p>
+            <a:pPr algn="ctr"/>
+          </a:p>
+        </p:txBody>
+      </p:sp>
+      <p:sp>
+        <p:nvSpPr>
+          <p:cNvPr id="61" name="Rectangle 60"/>
+          <p:cNvSpPr/>
+          <p:nvPr/>
+        </p:nvSpPr>
+        <p:spPr>
+          <a:xfrm>
+            <a:off x="5029200" y="2971800"/>
+            <a:ext cx="6940296" cy="22860"/>
+          </a:xfrm>
+          <a:prstGeom prst="rect">
+            <a:avLst/>
+          </a:prstGeom>
+          <a:solidFill>
+            <a:srgbClr val="C9A84C"/>
+          </a:solidFill>
+          <a:ln>
+            <a:noFill/>
+          </a:ln>
+        </p:spPr>
+        <p:style>
+          <a:lnRef idx="1">
+            <a:schemeClr val="accent1"/>
+          </a:lnRef>
+          <a:fillRef idx="3">
+            <a:schemeClr val="accent1"/>
+          </a:fillRef>
+          <a:effectRef idx="2">
+            <a:schemeClr val="accent1"/>
+          </a:effectRef>
+          <a:fontRef idx="minor">
+            <a:schemeClr val="lt1"/>
+          </a:fontRef>
+        </p:style>
+        <p:txBody>
+          <a:bodyPr rtlCol="0" anchor="ctr"/>
+          <a:lstStyle/>
+          <a:p>
+            <a:pPr algn="ctr"/>
+          </a:p>
+        </p:txBody>
+      </p:sp>
+      <p:sp>
+        <p:nvSpPr>
+          <p:cNvPr id="62" name="TextBox 61"/>
+          <p:cNvSpPr txBox="1"/>
+          <p:nvPr/>
+        </p:nvSpPr>
+        <p:spPr>
+          <a:xfrm>
+            <a:off x="5120640" y="3035808"/>
+            <a:ext cx="2286000" cy="164592"/>
+          </a:xfrm>
+          <a:prstGeom prst="rect">
+            <a:avLst/>
+          </a:prstGeom>
+          <a:noFill/>
+        </p:spPr>
+        <p:txBody>
+          <a:bodyPr wrap="square">
+            <a:spAutoFit/>
+          </a:bodyPr>
+          <a:lstStyle/>
+          <a:p>
+            <a:pPr algn="l"/>
+            <a:r>
+              <a:rPr sz="700" b="1" i="0">
+                <a:solidFill>
+                  <a:srgbClr val="C9A84C"/>
+                </a:solidFill>
+                <a:latin typeface="Calibri"/>
+              </a:rPr>
+              <a:t>SYSTEM RECOMMENDATION</a:t>
+            </a:r>
+          </a:p>
+        </p:txBody>
+      </p:sp>
+      <p:sp>
+        <p:nvSpPr>
+          <p:cNvPr id="63" name="TextBox 62"/>
+          <p:cNvSpPr txBox="1"/>
+          <p:nvPr/>
+        </p:nvSpPr>
+        <p:spPr>
+          <a:xfrm>
+            <a:off x="5120640" y="3218688"/>
+            <a:ext cx="6720840" cy="219456"/>
+          </a:xfrm>
+          <a:prstGeom prst="rect">
+            <a:avLst/>
+          </a:prstGeom>
+          <a:noFill/>
+        </p:spPr>
+        <p:txBody>
+          <a:bodyPr wrap="square">
+            <a:spAutoFit/>
+          </a:bodyPr>
+          <a:lstStyle/>
+          <a:p>
+            <a:pPr algn="l"/>
+            <a:r>
+              <a:rPr sz="1200" b="1" i="0">
+                <a:solidFill>
+                  <a:srgbClr val="FFFFFF"/>
+                </a:solidFill>
+                <a:latin typeface="Georgia"/>
+              </a:rPr>
+              <a:t>Protocol #42 — Activist Investor Response</a:t>
+            </a:r>
+          </a:p>
+        </p:txBody>
+      </p:sp>
+      <p:sp>
+        <p:nvSpPr>
+          <p:cNvPr id="64" name="Rectangle 63"/>
+          <p:cNvSpPr/>
+          <p:nvPr/>
+        </p:nvSpPr>
+        <p:spPr>
+          <a:xfrm>
+            <a:off x="5157216" y="3506724"/>
+            <a:ext cx="64008" cy="64008"/>
+          </a:xfrm>
+          <a:prstGeom prst="rect">
+            <a:avLst/>
+          </a:prstGeom>
+          <a:solidFill>
+            <a:srgbClr val="3DBB97"/>
+          </a:solidFill>
+          <a:ln>
+            <a:noFill/>
+          </a:ln>
+        </p:spPr>
+        <p:style>
+          <a:lnRef idx="1">
+            <a:schemeClr val="accent1"/>
+          </a:lnRef>
+          <a:fillRef idx="3">
+            <a:schemeClr val="accent1"/>
+          </a:fillRef>
+          <a:effectRef idx="2">
+            <a:schemeClr val="accent1"/>
+          </a:effectRef>
+          <a:fontRef idx="minor">
+            <a:schemeClr val="lt1"/>
+          </a:fontRef>
+        </p:style>
+        <p:txBody>
+          <a:bodyPr rtlCol="0" anchor="ctr"/>
+          <a:lstStyle/>
+          <a:p>
+            <a:pPr algn="ctr"/>
+          </a:p>
+        </p:txBody>
+      </p:sp>
+      <p:sp>
+        <p:nvSpPr>
+          <p:cNvPr id="65" name="TextBox 64"/>
+          <p:cNvSpPr txBox="1"/>
+          <p:nvPr/>
+        </p:nvSpPr>
+        <p:spPr>
+          <a:xfrm>
+            <a:off x="5266944" y="3474720"/>
+            <a:ext cx="3232404" cy="123444"/>
+          </a:xfrm>
+          <a:prstGeom prst="rect">
+            <a:avLst/>
+          </a:prstGeom>
+          <a:noFill/>
+        </p:spPr>
+        <p:txBody>
+          <a:bodyPr wrap="square">
+            <a:spAutoFit/>
+          </a:bodyPr>
+          <a:lstStyle/>
+          <a:p>
+            <a:pPr algn="l"/>
+            <a:r>
+              <a:rPr sz="850" b="0" i="0">
+                <a:solidFill>
+                  <a:srgbClr val="CCCEDC"/>
+                </a:solidFill>
+                <a:latin typeface="Calibri"/>
+              </a:rPr>
+              <a:t>28 tasks pre-staged</a:t>
+            </a:r>
+          </a:p>
+        </p:txBody>
+      </p:sp>
+      <p:sp>
+        <p:nvSpPr>
+          <p:cNvPr id="66" name="Rectangle 65"/>
+          <p:cNvSpPr/>
+          <p:nvPr/>
+        </p:nvSpPr>
+        <p:spPr>
+          <a:xfrm>
+            <a:off x="5157216" y="3630168"/>
+            <a:ext cx="64008" cy="64008"/>
+          </a:xfrm>
+          <a:prstGeom prst="rect">
+            <a:avLst/>
+          </a:prstGeom>
+          <a:solidFill>
+            <a:srgbClr val="3DBB97"/>
+          </a:solidFill>
+          <a:ln>
+            <a:noFill/>
+          </a:ln>
+        </p:spPr>
+        <p:style>
+          <a:lnRef idx="1">
+            <a:schemeClr val="accent1"/>
+          </a:lnRef>
+          <a:fillRef idx="3">
+            <a:schemeClr val="accent1"/>
+          </a:fillRef>
+          <a:effectRef idx="2">
+            <a:schemeClr val="accent1"/>
+          </a:effectRef>
+          <a:fontRef idx="minor">
+            <a:schemeClr val="lt1"/>
+          </a:fontRef>
+        </p:style>
+        <p:txBody>
+          <a:bodyPr rtlCol="0" anchor="ctr"/>
+          <a:lstStyle/>
+          <a:p>
+            <a:pPr algn="ctr"/>
+          </a:p>
+        </p:txBody>
+      </p:sp>
+      <p:sp>
+        <p:nvSpPr>
+          <p:cNvPr id="67" name="TextBox 66"/>
+          <p:cNvSpPr txBox="1"/>
+          <p:nvPr/>
+        </p:nvSpPr>
+        <p:spPr>
+          <a:xfrm>
+            <a:off x="5266944" y="3598163"/>
+            <a:ext cx="3232404" cy="123444"/>
+          </a:xfrm>
+          <a:prstGeom prst="rect">
+            <a:avLst/>
+          </a:prstGeom>
+          <a:noFill/>
+        </p:spPr>
+        <p:txBody>
+          <a:bodyPr wrap="square">
+            <a:spAutoFit/>
+          </a:bodyPr>
+          <a:lstStyle/>
+          <a:p>
+            <a:pPr algn="l"/>
+            <a:r>
+              <a:rPr sz="850" b="0" i="0">
+                <a:solidFill>
+                  <a:srgbClr val="CCCEDC"/>
+                </a:solidFill>
+                <a:latin typeface="Calibri"/>
+              </a:rPr>
+              <a:t>8 stakeholders mapped with decision rights</a:t>
+            </a:r>
+          </a:p>
+        </p:txBody>
+      </p:sp>
+      <p:sp>
+        <p:nvSpPr>
+          <p:cNvPr id="68" name="Rectangle 67"/>
+          <p:cNvSpPr/>
+          <p:nvPr/>
+        </p:nvSpPr>
+        <p:spPr>
+          <a:xfrm>
+            <a:off x="5157216" y="3753612"/>
+            <a:ext cx="64008" cy="64008"/>
+          </a:xfrm>
+          <a:prstGeom prst="rect">
+            <a:avLst/>
+          </a:prstGeom>
+          <a:solidFill>
+            <a:srgbClr val="C9A84C"/>
+          </a:solidFill>
+          <a:ln>
+            <a:noFill/>
+          </a:ln>
+        </p:spPr>
+        <p:style>
+          <a:lnRef idx="1">
+            <a:schemeClr val="accent1"/>
+          </a:lnRef>
+          <a:fillRef idx="3">
+            <a:schemeClr val="accent1"/>
+          </a:fillRef>
+          <a:effectRef idx="2">
+            <a:schemeClr val="accent1"/>
+          </a:effectRef>
+          <a:fontRef idx="minor">
+            <a:schemeClr val="lt1"/>
+          </a:fontRef>
+        </p:style>
+        <p:txBody>
+          <a:bodyPr rtlCol="0" anchor="ctr"/>
+          <a:lstStyle/>
+          <a:p>
+            <a:pPr algn="ctr"/>
+          </a:p>
+        </p:txBody>
+      </p:sp>
+      <p:sp>
+        <p:nvSpPr>
+          <p:cNvPr id="69" name="TextBox 68"/>
+          <p:cNvSpPr txBox="1"/>
+          <p:nvPr/>
+        </p:nvSpPr>
+        <p:spPr>
+          <a:xfrm>
+            <a:off x="5266944" y="3721608"/>
+            <a:ext cx="3232404" cy="123444"/>
+          </a:xfrm>
+          <a:prstGeom prst="rect">
+            <a:avLst/>
+          </a:prstGeom>
+          <a:noFill/>
+        </p:spPr>
+        <p:txBody>
+          <a:bodyPr wrap="square">
+            <a:spAutoFit/>
+          </a:bodyPr>
+          <a:lstStyle/>
+          <a:p>
+            <a:pPr algn="l"/>
+            <a:r>
+              <a:rPr sz="850" b="0" i="0">
+                <a:solidFill>
+                  <a:srgbClr val="CCCEDC"/>
+                </a:solidFill>
+                <a:latin typeface="Calibri"/>
+              </a:rPr>
+              <a:t>Board communication drafted and ready</a:t>
+            </a:r>
+          </a:p>
+        </p:txBody>
+      </p:sp>
+      <p:sp>
+        <p:nvSpPr>
+          <p:cNvPr id="70" name="Rectangle 69"/>
+          <p:cNvSpPr/>
+          <p:nvPr/>
+        </p:nvSpPr>
+        <p:spPr>
+          <a:xfrm>
+            <a:off x="8627364" y="3506724"/>
+            <a:ext cx="64008" cy="64008"/>
+          </a:xfrm>
+          <a:prstGeom prst="rect">
+            <a:avLst/>
+          </a:prstGeom>
+          <a:solidFill>
+            <a:srgbClr val="C9A84C"/>
+          </a:solidFill>
+          <a:ln>
+            <a:noFill/>
+          </a:ln>
+        </p:spPr>
+        <p:style>
+          <a:lnRef idx="1">
+            <a:schemeClr val="accent1"/>
+          </a:lnRef>
+          <a:fillRef idx="3">
+            <a:schemeClr val="accent1"/>
+          </a:fillRef>
+          <a:effectRef idx="2">
+            <a:schemeClr val="accent1"/>
+          </a:effectRef>
+          <a:fontRef idx="minor">
+            <a:schemeClr val="lt1"/>
+          </a:fontRef>
+        </p:style>
+        <p:txBody>
+          <a:bodyPr rtlCol="0" anchor="ctr"/>
+          <a:lstStyle/>
+          <a:p>
+            <a:pPr algn="ctr"/>
+          </a:p>
+        </p:txBody>
+      </p:sp>
+      <p:sp>
+        <p:nvSpPr>
+          <p:cNvPr id="71" name="TextBox 70"/>
+          <p:cNvSpPr txBox="1"/>
+          <p:nvPr/>
+        </p:nvSpPr>
+        <p:spPr>
+          <a:xfrm>
+            <a:off x="8737092" y="3474720"/>
+            <a:ext cx="3232404" cy="123444"/>
+          </a:xfrm>
+          <a:prstGeom prst="rect">
+            <a:avLst/>
+          </a:prstGeom>
+          <a:noFill/>
+        </p:spPr>
+        <p:txBody>
+          <a:bodyPr wrap="square">
+            <a:spAutoFit/>
+          </a:bodyPr>
+          <a:lstStyle/>
+          <a:p>
+            <a:pPr algn="l"/>
+            <a:r>
+              <a:rPr sz="850" b="0" i="0">
+                <a:solidFill>
+                  <a:srgbClr val="CCCEDC"/>
+                </a:solidFill>
+                <a:latin typeface="Calibri"/>
+              </a:rPr>
+              <a:t>Legal team and PR firm notified automatically</a:t>
+            </a:r>
+          </a:p>
+        </p:txBody>
+      </p:sp>
+      <p:sp>
+        <p:nvSpPr>
+          <p:cNvPr id="72" name="Rectangle 71"/>
+          <p:cNvSpPr/>
+          <p:nvPr/>
+        </p:nvSpPr>
+        <p:spPr>
+          <a:xfrm>
+            <a:off x="8627364" y="3630168"/>
+            <a:ext cx="64008" cy="64008"/>
+          </a:xfrm>
+          <a:prstGeom prst="rect">
+            <a:avLst/>
+          </a:prstGeom>
+          <a:solidFill>
+            <a:srgbClr val="3DBB97"/>
+          </a:solidFill>
+          <a:ln>
+            <a:noFill/>
+          </a:ln>
+        </p:spPr>
+        <p:style>
+          <a:lnRef idx="1">
+            <a:schemeClr val="accent1"/>
+          </a:lnRef>
+          <a:fillRef idx="3">
+            <a:schemeClr val="accent1"/>
+          </a:fillRef>
+          <a:effectRef idx="2">
+            <a:schemeClr val="accent1"/>
+          </a:effectRef>
+          <a:fontRef idx="minor">
+            <a:schemeClr val="lt1"/>
+          </a:fontRef>
+        </p:style>
+        <p:txBody>
+          <a:bodyPr rtlCol="0" anchor="ctr"/>
+          <a:lstStyle/>
+          <a:p>
+            <a:pPr algn="ctr"/>
+          </a:p>
+        </p:txBody>
+      </p:sp>
+      <p:sp>
+        <p:nvSpPr>
+          <p:cNvPr id="73" name="TextBox 72"/>
+          <p:cNvSpPr txBox="1"/>
+          <p:nvPr/>
+        </p:nvSpPr>
+        <p:spPr>
+          <a:xfrm>
+            <a:off x="8737092" y="3598163"/>
+            <a:ext cx="3232404" cy="123444"/>
+          </a:xfrm>
+          <a:prstGeom prst="rect">
+            <a:avLst/>
+          </a:prstGeom>
+          <a:noFill/>
+        </p:spPr>
+        <p:txBody>
+          <a:bodyPr wrap="square">
+            <a:spAutoFit/>
+          </a:bodyPr>
+          <a:lstStyle/>
+          <a:p>
+            <a:pPr algn="l"/>
+            <a:r>
+              <a:rPr sz="850" b="0" i="0">
+                <a:solidFill>
+                  <a:srgbClr val="CCCEDC"/>
+                </a:solidFill>
+                <a:latin typeface="Calibri"/>
+              </a:rPr>
+              <a:t>Shareholder messaging pre-approved</a:t>
+            </a:r>
+          </a:p>
+        </p:txBody>
+      </p:sp>
+      <p:sp>
+        <p:nvSpPr>
+          <p:cNvPr id="74" name="Rectangle 73"/>
+          <p:cNvSpPr/>
+          <p:nvPr/>
+        </p:nvSpPr>
+        <p:spPr>
+          <a:xfrm>
+            <a:off x="5029200" y="3941064"/>
+            <a:ext cx="6940296" cy="1078992"/>
+          </a:xfrm>
+          <a:prstGeom prst="rect">
+            <a:avLst/>
+          </a:prstGeom>
+          <a:solidFill>
+            <a:srgbClr val="081430"/>
+          </a:solidFill>
+          <a:ln>
+            <a:noFill/>
+          </a:ln>
+        </p:spPr>
+        <p:style>
+          <a:lnRef idx="1">
+            <a:schemeClr val="accent1"/>
+          </a:lnRef>
+          <a:fillRef idx="3">
+            <a:schemeClr val="accent1"/>
+          </a:fillRef>
+          <a:effectRef idx="2">
+            <a:schemeClr val="accent1"/>
+          </a:effectRef>
+          <a:fontRef idx="minor">
+            <a:schemeClr val="lt1"/>
+          </a:fontRef>
+        </p:style>
+        <p:txBody>
+          <a:bodyPr rtlCol="0" anchor="ctr"/>
+          <a:lstStyle/>
+          <a:p>
+            <a:pPr algn="ctr"/>
+          </a:p>
+        </p:txBody>
+      </p:sp>
+      <p:sp>
+        <p:nvSpPr>
+          <p:cNvPr id="75" name="Rectangle 74"/>
+          <p:cNvSpPr/>
+          <p:nvPr/>
+        </p:nvSpPr>
+        <p:spPr>
+          <a:xfrm>
+            <a:off x="5029200" y="3941064"/>
+            <a:ext cx="6940296" cy="54864"/>
+          </a:xfrm>
+          <a:prstGeom prst="rect">
+            <a:avLst/>
+          </a:prstGeom>
+          <a:solidFill>
+            <a:srgbClr val="C9A84C"/>
+          </a:solidFill>
+          <a:ln>
+            <a:noFill/>
+          </a:ln>
+        </p:spPr>
+        <p:style>
+          <a:lnRef idx="1">
+            <a:schemeClr val="accent1"/>
+          </a:lnRef>
+          <a:fillRef idx="3">
+            <a:schemeClr val="accent1"/>
+          </a:fillRef>
+          <a:effectRef idx="2">
+            <a:schemeClr val="accent1"/>
+          </a:effectRef>
+          <a:fontRef idx="minor">
+            <a:schemeClr val="lt1"/>
+          </a:fontRef>
+        </p:style>
+        <p:txBody>
+          <a:bodyPr rtlCol="0" anchor="ctr"/>
+          <a:lstStyle/>
+          <a:p>
+            <a:pPr algn="ctr"/>
+          </a:p>
+        </p:txBody>
+      </p:sp>
+      <p:sp>
+        <p:nvSpPr>
+          <p:cNvPr id="76" name="Rectangle 75"/>
+          <p:cNvSpPr/>
+          <p:nvPr/>
+        </p:nvSpPr>
+        <p:spPr>
+          <a:xfrm>
+            <a:off x="5029200" y="3941064"/>
+            <a:ext cx="54864" cy="1078992"/>
+          </a:xfrm>
+          <a:prstGeom prst="rect">
+            <a:avLst/>
+          </a:prstGeom>
+          <a:solidFill>
+            <a:srgbClr val="C9A84C"/>
+          </a:solidFill>
+          <a:ln>
+            <a:noFill/>
+          </a:ln>
+        </p:spPr>
+        <p:style>
+          <a:lnRef idx="1">
+            <a:schemeClr val="accent1"/>
+          </a:lnRef>
+          <a:fillRef idx="3">
+            <a:schemeClr val="accent1"/>
+          </a:fillRef>
+          <a:effectRef idx="2">
+            <a:schemeClr val="accent1"/>
+          </a:effectRef>
+          <a:fontRef idx="minor">
+            <a:schemeClr val="lt1"/>
+          </a:fontRef>
+        </p:style>
+        <p:txBody>
+          <a:bodyPr rtlCol="0" anchor="ctr"/>
+          <a:lstStyle/>
+          <a:p>
+            <a:pPr algn="ctr"/>
+          </a:p>
+        </p:txBody>
+      </p:sp>
+      <p:sp>
+        <p:nvSpPr>
+          <p:cNvPr id="77" name="TextBox 76"/>
+          <p:cNvSpPr txBox="1"/>
+          <p:nvPr/>
+        </p:nvSpPr>
+        <p:spPr>
+          <a:xfrm>
+            <a:off x="5212080" y="4023360"/>
+            <a:ext cx="3657600" cy="182880"/>
+          </a:xfrm>
+          <a:prstGeom prst="rect">
+            <a:avLst/>
+          </a:prstGeom>
+          <a:noFill/>
+        </p:spPr>
+        <p:txBody>
+          <a:bodyPr wrap="square">
+            <a:spAutoFit/>
+          </a:bodyPr>
+          <a:lstStyle/>
+          <a:p>
+            <a:pPr algn="l"/>
+            <a:r>
+              <a:rPr sz="800" b="1" i="0">
+                <a:solidFill>
+                  <a:srgbClr val="C9A84C"/>
+                </a:solidFill>
+                <a:latin typeface="Calibri"/>
+              </a:rPr>
+              <a:t>EXECUTIVE AUTHORIZATION REQUIRED</a:t>
+            </a:r>
+          </a:p>
+        </p:txBody>
+      </p:sp>
+      <p:sp>
+        <p:nvSpPr>
+          <p:cNvPr id="78" name="TextBox 77"/>
+          <p:cNvSpPr txBox="1"/>
+          <p:nvPr/>
+        </p:nvSpPr>
+        <p:spPr>
+          <a:xfrm>
+            <a:off x="5212080" y="4224528"/>
+            <a:ext cx="3474720" cy="201168"/>
+          </a:xfrm>
+          <a:prstGeom prst="rect">
+            <a:avLst/>
+          </a:prstGeom>
+          <a:noFill/>
+        </p:spPr>
+        <p:txBody>
+          <a:bodyPr wrap="square">
+            <a:spAutoFit/>
+          </a:bodyPr>
+          <a:lstStyle/>
+          <a:p>
+            <a:pPr algn="l"/>
+            <a:r>
+              <a:rPr sz="1150" b="1" i="0">
+                <a:solidFill>
+                  <a:srgbClr val="FFFFFF"/>
+                </a:solidFill>
+                <a:latin typeface="Georgia"/>
+              </a:rPr>
+              <a:t>Sarah Chen  ·  Chief Strategy Officer</a:t>
+            </a:r>
+          </a:p>
+        </p:txBody>
+      </p:sp>
+      <p:sp>
+        <p:nvSpPr>
+          <p:cNvPr id="79" name="TextBox 78"/>
+          <p:cNvSpPr txBox="1"/>
+          <p:nvPr/>
+        </p:nvSpPr>
+        <p:spPr>
+          <a:xfrm>
+            <a:off x="5212080" y="4443984"/>
+            <a:ext cx="3840480" cy="274320"/>
+          </a:xfrm>
+          <a:prstGeom prst="rect">
+            <a:avLst/>
+          </a:prstGeom>
+          <a:noFill/>
+        </p:spPr>
+        <p:txBody>
+          <a:bodyPr wrap="square">
+            <a:spAutoFit/>
+          </a:bodyPr>
+          <a:lstStyle/>
+          <a:p>
+            <a:pPr algn="l"/>
+            <a:r>
+              <a:rPr sz="850" b="0" i="0">
+                <a:solidFill>
+                  <a:srgbClr val="CCCEDC"/>
+                </a:solidFill>
+                <a:latin typeface="Calibri"/>
+              </a:rPr>
+              <a:t>Protocol #42 is staged and ready. Authorization releases 28 tasks across 8 stakeholders.</a:t>
+            </a:r>
+          </a:p>
+        </p:txBody>
+      </p:sp>
+      <p:sp>
+        <p:nvSpPr>
+          <p:cNvPr id="80" name="Rectangle 79"/>
+          <p:cNvSpPr/>
+          <p:nvPr/>
+        </p:nvSpPr>
+        <p:spPr>
+          <a:xfrm>
+            <a:off x="9235440" y="4123944"/>
+            <a:ext cx="1408176" cy="365760"/>
+          </a:xfrm>
+          <a:prstGeom prst="rect">
+            <a:avLst/>
+          </a:prstGeom>
+          <a:solidFill>
+            <a:srgbClr val="C9A84C"/>
+          </a:solidFill>
+          <a:ln>
+            <a:noFill/>
+          </a:ln>
+        </p:spPr>
+        <p:style>
+          <a:lnRef idx="1">
+            <a:schemeClr val="accent1"/>
+          </a:lnRef>
+          <a:fillRef idx="3">
+            <a:schemeClr val="accent1"/>
+          </a:fillRef>
+          <a:effectRef idx="2">
+            <a:schemeClr val="accent1"/>
+          </a:effectRef>
+          <a:fontRef idx="minor">
+            <a:schemeClr val="lt1"/>
+          </a:fontRef>
+        </p:style>
+        <p:txBody>
+          <a:bodyPr rtlCol="0" anchor="ctr"/>
+          <a:lstStyle/>
+          <a:p>
+            <a:pPr algn="ctr"/>
+          </a:p>
+        </p:txBody>
+      </p:sp>
+      <p:sp>
+        <p:nvSpPr>
+          <p:cNvPr id="81" name="TextBox 80"/>
+          <p:cNvSpPr txBox="1"/>
+          <p:nvPr/>
+        </p:nvSpPr>
+        <p:spPr>
+          <a:xfrm>
+            <a:off x="9235440" y="4206240"/>
+            <a:ext cx="1408176" cy="201168"/>
+          </a:xfrm>
+          <a:prstGeom prst="rect">
+            <a:avLst/>
+          </a:prstGeom>
+          <a:noFill/>
+        </p:spPr>
+        <p:txBody>
+          <a:bodyPr wrap="square">
+            <a:spAutoFit/>
+          </a:bodyPr>
+          <a:lstStyle/>
+          <a:p>
+            <a:pPr algn="ctr"/>
+            <a:r>
+              <a:rPr sz="900" b="1" i="0">
+                <a:solidFill>
+                  <a:srgbClr val="0A0F2E"/>
+                </a:solidFill>
+                <a:latin typeface="Calibri"/>
+              </a:rPr>
+              <a:t>AUTHORIZE  →</a:t>
+            </a:r>
+          </a:p>
+        </p:txBody>
+      </p:sp>
+      <p:sp>
+        <p:nvSpPr>
+          <p:cNvPr id="82" name="Rectangle 81"/>
+          <p:cNvSpPr/>
+          <p:nvPr/>
+        </p:nvSpPr>
+        <p:spPr>
+          <a:xfrm>
+            <a:off x="10753344" y="4123944"/>
+            <a:ext cx="1097280" cy="365760"/>
+          </a:xfrm>
+          <a:prstGeom prst="rect">
+            <a:avLst/>
+          </a:prstGeom>
+          <a:solidFill>
+            <a:srgbClr val="121A44"/>
+          </a:solidFill>
+          <a:ln w="9144">
+            <a:solidFill>
+              <a:srgbClr val="555C78"/>
+            </a:solidFill>
+          </a:ln>
+        </p:spPr>
+        <p:style>
+          <a:lnRef idx="1">
+            <a:schemeClr val="accent1"/>
+          </a:lnRef>
+          <a:fillRef idx="3">
+            <a:schemeClr val="accent1"/>
+          </a:fillRef>
+          <a:effectRef idx="2">
+            <a:schemeClr val="accent1"/>
+          </a:effectRef>
+          <a:fontRef idx="minor">
+            <a:schemeClr val="lt1"/>
+          </a:fontRef>
+        </p:style>
+        <p:txBody>
+          <a:bodyPr rtlCol="0" anchor="ctr"/>
+          <a:lstStyle/>
+          <a:p>
+            <a:pPr algn="ctr"/>
+          </a:p>
+        </p:txBody>
+      </p:sp>
+      <p:sp>
+        <p:nvSpPr>
+          <p:cNvPr id="83" name="Rectangle 82"/>
+          <p:cNvSpPr/>
+          <p:nvPr/>
+        </p:nvSpPr>
+        <p:spPr>
+          <a:xfrm>
+            <a:off x="10753344" y="4123944"/>
+            <a:ext cx="1097280" cy="365760"/>
+          </a:xfrm>
+          <a:prstGeom prst="rect">
+            <a:avLst/>
+          </a:prstGeom>
+          <a:solidFill>
+            <a:srgbClr val="121A44"/>
+          </a:solidFill>
+          <a:ln>
+            <a:noFill/>
+          </a:ln>
+        </p:spPr>
+        <p:style>
+          <a:lnRef idx="1">
+            <a:schemeClr val="accent1"/>
+          </a:lnRef>
+          <a:fillRef idx="3">
+            <a:schemeClr val="accent1"/>
+          </a:fillRef>
+          <a:effectRef idx="2">
+            <a:schemeClr val="accent1"/>
+          </a:effectRef>
+          <a:fontRef idx="minor">
+            <a:schemeClr val="lt1"/>
+          </a:fontRef>
+        </p:style>
+        <p:txBody>
+          <a:bodyPr rtlCol="0" anchor="ctr"/>
+          <a:lstStyle/>
+          <a:p>
+            <a:pPr algn="ctr"/>
+          </a:p>
+        </p:txBody>
+      </p:sp>
+      <p:sp>
+        <p:nvSpPr>
+          <p:cNvPr id="84" name="Rectangle 83"/>
+          <p:cNvSpPr/>
+          <p:nvPr/>
+        </p:nvSpPr>
+        <p:spPr>
+          <a:xfrm>
+            <a:off x="10753344" y="4123944"/>
+            <a:ext cx="1097280" cy="365760"/>
+          </a:xfrm>
+          <a:prstGeom prst="rect">
+            <a:avLst/>
+          </a:prstGeom>
+          <a:solidFill>
+            <a:srgbClr val="121A44"/>
+          </a:solidFill>
+          <a:ln>
+            <a:noFill/>
+          </a:ln>
+        </p:spPr>
+        <p:style>
+          <a:lnRef idx="1">
+            <a:schemeClr val="accent1"/>
+          </a:lnRef>
+          <a:fillRef idx="3">
+            <a:schemeClr val="accent1"/>
+          </a:fillRef>
+          <a:effectRef idx="2">
+            <a:schemeClr val="accent1"/>
+          </a:effectRef>
+          <a:fontRef idx="minor">
+            <a:schemeClr val="lt1"/>
+          </a:fontRef>
+        </p:style>
+        <p:txBody>
+          <a:bodyPr rtlCol="0" anchor="ctr"/>
+          <a:lstStyle/>
+          <a:p>
+            <a:pPr algn="ctr"/>
+          </a:p>
+        </p:txBody>
+      </p:sp>
+      <p:sp>
+        <p:nvSpPr>
+          <p:cNvPr id="85" name="Rectangle 84"/>
+          <p:cNvSpPr/>
+          <p:nvPr/>
+        </p:nvSpPr>
+        <p:spPr>
+          <a:xfrm>
+            <a:off x="10753344" y="4123944"/>
+            <a:ext cx="1097280" cy="365760"/>
+          </a:xfrm>
+          <a:prstGeom prst="rect">
+            <a:avLst/>
+          </a:prstGeom>
+          <a:solidFill>
+            <a:srgbClr val="121A44"/>
+          </a:solidFill>
+          <a:ln w="9144">
+            <a:solidFill>
+              <a:srgbClr val="555C78"/>
+            </a:solidFill>
+          </a:ln>
+        </p:spPr>
+        <p:style>
+          <a:lnRef idx="1">
+            <a:schemeClr val="accent1"/>
+          </a:lnRef>
+          <a:fillRef idx="3">
+            <a:schemeClr val="accent1"/>
+          </a:fillRef>
+          <a:effectRef idx="2">
+            <a:schemeClr val="accent1"/>
+          </a:effectRef>
+          <a:fontRef idx="minor">
+            <a:schemeClr val="lt1"/>
+          </a:fontRef>
+        </p:style>
+        <p:txBody>
+          <a:bodyPr rtlCol="0" anchor="ctr"/>
+          <a:lstStyle/>
+          <a:p>
+            <a:pPr algn="ctr"/>
+          </a:p>
+        </p:txBody>
+      </p:sp>
+      <p:sp>
+        <p:nvSpPr>
+          <p:cNvPr id="86" name="TextBox 85"/>
+          <p:cNvSpPr txBox="1"/>
+          <p:nvPr/>
+        </p:nvSpPr>
+        <p:spPr>
+          <a:xfrm>
+            <a:off x="10753344" y="4206240"/>
+            <a:ext cx="1097280" cy="201168"/>
+          </a:xfrm>
+          <a:prstGeom prst="rect">
+            <a:avLst/>
+          </a:prstGeom>
+          <a:noFill/>
+        </p:spPr>
+        <p:txBody>
+          <a:bodyPr wrap="square">
+            <a:spAutoFit/>
+          </a:bodyPr>
+          <a:lstStyle/>
+          <a:p>
+            <a:pPr algn="ctr"/>
+            <a:r>
+              <a:rPr sz="900" b="1" i="0">
+                <a:solidFill>
+                  <a:srgbClr val="9096B2"/>
+                </a:solidFill>
+                <a:latin typeface="Calibri"/>
+              </a:rPr>
+              <a:t>VIEW BRIEF</a:t>
+            </a:r>
+          </a:p>
+        </p:txBody>
+      </p:sp>
+      <p:sp>
+        <p:nvSpPr>
+          <p:cNvPr id="87" name="Rectangle 86"/>
+          <p:cNvSpPr/>
+          <p:nvPr/>
+        </p:nvSpPr>
+        <p:spPr>
+          <a:xfrm>
+            <a:off x="5029200" y="5074920"/>
+            <a:ext cx="6940296" cy="256032"/>
+          </a:xfrm>
+          <a:prstGeom prst="rect">
+            <a:avLst/>
+          </a:prstGeom>
+          <a:solidFill>
+            <a:srgbClr val="070D22"/>
+          </a:solidFill>
+          <a:ln>
+            <a:noFill/>
+          </a:ln>
+        </p:spPr>
+        <p:style>
+          <a:lnRef idx="1">
+            <a:schemeClr val="accent1"/>
+          </a:lnRef>
+          <a:fillRef idx="3">
+            <a:schemeClr val="accent1"/>
+          </a:fillRef>
+          <a:effectRef idx="2">
+            <a:schemeClr val="accent1"/>
+          </a:effectRef>
+          <a:fontRef idx="minor">
+            <a:schemeClr val="lt1"/>
+          </a:fontRef>
+        </p:style>
+        <p:txBody>
+          <a:bodyPr rtlCol="0" anchor="ctr"/>
+          <a:lstStyle/>
+          <a:p>
+            <a:pPr algn="ctr"/>
+          </a:p>
+        </p:txBody>
+      </p:sp>
+      <p:sp>
+        <p:nvSpPr>
+          <p:cNvPr id="88" name="TextBox 87"/>
+          <p:cNvSpPr txBox="1"/>
+          <p:nvPr/>
+        </p:nvSpPr>
+        <p:spPr>
+          <a:xfrm>
+            <a:off x="5138928" y="5120640"/>
+            <a:ext cx="6757416" cy="173736"/>
+          </a:xfrm>
+          <a:prstGeom prst="rect">
+            <a:avLst/>
+          </a:prstGeom>
+          <a:noFill/>
+        </p:spPr>
+        <p:txBody>
+          <a:bodyPr wrap="square">
+            <a:spAutoFit/>
+          </a:bodyPr>
+          <a:lstStyle/>
+          <a:p>
+            <a:pPr algn="l"/>
+            <a:r>
+              <a:rPr sz="750" b="0" i="0">
+                <a:solidFill>
+                  <a:srgbClr val="3DBB97"/>
+                </a:solidFill>
+                <a:latin typeface="Calibri"/>
+              </a:rPr>
+              <a:t>✓  AUTHORIZED  09:14:33  ·  Sarah Chen, CSO  ·  Activation ID: ACT-2026-042-04  ·  Audit logged  ·  Board brief auto-generated</a:t>
+            </a:r>
+          </a:p>
+        </p:txBody>
+      </p:sp>
     </p:spTree>
   </p:cSld>
   <p:clrMapOvr>
@@ -16264,20 +18643,12 @@
           </a:p>
         </p:txBody>
       </p:sp>
-      <p:pic>
-        <p:nvPicPr>
-          <p:cNvPr id="28" name="Picture 27" descr="image.jpg"/>
-          <p:cNvPicPr>
-            <a:picLocks noChangeAspect="1"/>
-          </p:cNvPicPr>
-          <p:nvPr/>
-        </p:nvPicPr>
-        <p:blipFill>
-          <a:blip r:embed="rId3"/>
-          <a:stretch>
-            <a:fillRect/>
-          </a:stretch>
-        </p:blipFill>
+      <p:sp>
+        <p:nvSpPr>
+          <p:cNvPr id="28" name="Rectangle 27"/>
+          <p:cNvSpPr/>
+          <p:nvPr/>
+        </p:nvSpPr>
         <p:spPr>
           <a:xfrm>
             <a:off x="4864608" y="1060704"/>
@@ -16286,8 +18657,5229 @@
           <a:prstGeom prst="rect">
             <a:avLst/>
           </a:prstGeom>
-        </p:spPr>
-      </p:pic>
+          <a:solidFill>
+            <a:srgbClr val="0C1238"/>
+          </a:solidFill>
+          <a:ln>
+            <a:noFill/>
+          </a:ln>
+        </p:spPr>
+        <p:style>
+          <a:lnRef idx="1">
+            <a:schemeClr val="accent1"/>
+          </a:lnRef>
+          <a:fillRef idx="3">
+            <a:schemeClr val="accent1"/>
+          </a:fillRef>
+          <a:effectRef idx="2">
+            <a:schemeClr val="accent1"/>
+          </a:effectRef>
+          <a:fontRef idx="minor">
+            <a:schemeClr val="lt1"/>
+          </a:fontRef>
+        </p:style>
+        <p:txBody>
+          <a:bodyPr rtlCol="0" anchor="ctr"/>
+          <a:lstStyle/>
+          <a:p>
+            <a:pPr algn="ctr"/>
+          </a:p>
+        </p:txBody>
+      </p:sp>
+      <p:sp>
+        <p:nvSpPr>
+          <p:cNvPr id="29" name="Rectangle 28"/>
+          <p:cNvSpPr/>
+          <p:nvPr/>
+        </p:nvSpPr>
+        <p:spPr>
+          <a:xfrm>
+            <a:off x="4864608" y="1060704"/>
+            <a:ext cx="7269480" cy="27432"/>
+          </a:xfrm>
+          <a:prstGeom prst="rect">
+            <a:avLst/>
+          </a:prstGeom>
+          <a:solidFill>
+            <a:srgbClr val="C9A84C"/>
+          </a:solidFill>
+          <a:ln>
+            <a:noFill/>
+          </a:ln>
+        </p:spPr>
+        <p:style>
+          <a:lnRef idx="1">
+            <a:schemeClr val="accent1"/>
+          </a:lnRef>
+          <a:fillRef idx="3">
+            <a:schemeClr val="accent1"/>
+          </a:fillRef>
+          <a:effectRef idx="2">
+            <a:schemeClr val="accent1"/>
+          </a:effectRef>
+          <a:fontRef idx="minor">
+            <a:schemeClr val="lt1"/>
+          </a:fontRef>
+        </p:style>
+        <p:txBody>
+          <a:bodyPr rtlCol="0" anchor="ctr"/>
+          <a:lstStyle/>
+          <a:p>
+            <a:pPr algn="ctr"/>
+          </a:p>
+        </p:txBody>
+      </p:sp>
+      <p:sp>
+        <p:nvSpPr>
+          <p:cNvPr id="30" name="Rectangle 29"/>
+          <p:cNvSpPr/>
+          <p:nvPr/>
+        </p:nvSpPr>
+        <p:spPr>
+          <a:xfrm>
+            <a:off x="4864608" y="1060704"/>
+            <a:ext cx="7269480" cy="292608"/>
+          </a:xfrm>
+          <a:prstGeom prst="rect">
+            <a:avLst/>
+          </a:prstGeom>
+          <a:solidFill>
+            <a:srgbClr val="070B22"/>
+          </a:solidFill>
+          <a:ln>
+            <a:noFill/>
+          </a:ln>
+        </p:spPr>
+        <p:style>
+          <a:lnRef idx="1">
+            <a:schemeClr val="accent1"/>
+          </a:lnRef>
+          <a:fillRef idx="3">
+            <a:schemeClr val="accent1"/>
+          </a:fillRef>
+          <a:effectRef idx="2">
+            <a:schemeClr val="accent1"/>
+          </a:effectRef>
+          <a:fontRef idx="minor">
+            <a:schemeClr val="lt1"/>
+          </a:fontRef>
+        </p:style>
+        <p:txBody>
+          <a:bodyPr rtlCol="0" anchor="ctr"/>
+          <a:lstStyle/>
+          <a:p>
+            <a:pPr algn="ctr"/>
+          </a:p>
+        </p:txBody>
+      </p:sp>
+      <p:sp>
+        <p:nvSpPr>
+          <p:cNvPr id="31" name="Oval 30"/>
+          <p:cNvSpPr/>
+          <p:nvPr/>
+        </p:nvSpPr>
+        <p:spPr>
+          <a:xfrm>
+            <a:off x="4992624" y="1161288"/>
+            <a:ext cx="91440" cy="91440"/>
+          </a:xfrm>
+          <a:prstGeom prst="ellipse">
+            <a:avLst/>
+          </a:prstGeom>
+          <a:solidFill>
+            <a:srgbClr val="C03A2B"/>
+          </a:solidFill>
+          <a:ln>
+            <a:noFill/>
+          </a:ln>
+        </p:spPr>
+        <p:style>
+          <a:lnRef idx="1">
+            <a:schemeClr val="accent1"/>
+          </a:lnRef>
+          <a:fillRef idx="3">
+            <a:schemeClr val="accent1"/>
+          </a:fillRef>
+          <a:effectRef idx="2">
+            <a:schemeClr val="accent1"/>
+          </a:effectRef>
+          <a:fontRef idx="minor">
+            <a:schemeClr val="lt1"/>
+          </a:fontRef>
+        </p:style>
+        <p:txBody>
+          <a:bodyPr rtlCol="0" anchor="ctr"/>
+          <a:lstStyle/>
+          <a:p>
+            <a:pPr algn="ctr"/>
+          </a:p>
+        </p:txBody>
+      </p:sp>
+      <p:sp>
+        <p:nvSpPr>
+          <p:cNvPr id="32" name="Oval 31"/>
+          <p:cNvSpPr/>
+          <p:nvPr/>
+        </p:nvSpPr>
+        <p:spPr>
+          <a:xfrm>
+            <a:off x="5138928" y="1161288"/>
+            <a:ext cx="91440" cy="91440"/>
+          </a:xfrm>
+          <a:prstGeom prst="ellipse">
+            <a:avLst/>
+          </a:prstGeom>
+          <a:solidFill>
+            <a:srgbClr val="E08A20"/>
+          </a:solidFill>
+          <a:ln>
+            <a:noFill/>
+          </a:ln>
+        </p:spPr>
+        <p:style>
+          <a:lnRef idx="1">
+            <a:schemeClr val="accent1"/>
+          </a:lnRef>
+          <a:fillRef idx="3">
+            <a:schemeClr val="accent1"/>
+          </a:fillRef>
+          <a:effectRef idx="2">
+            <a:schemeClr val="accent1"/>
+          </a:effectRef>
+          <a:fontRef idx="minor">
+            <a:schemeClr val="lt1"/>
+          </a:fontRef>
+        </p:style>
+        <p:txBody>
+          <a:bodyPr rtlCol="0" anchor="ctr"/>
+          <a:lstStyle/>
+          <a:p>
+            <a:pPr algn="ctr"/>
+          </a:p>
+        </p:txBody>
+      </p:sp>
+      <p:sp>
+        <p:nvSpPr>
+          <p:cNvPr id="33" name="Oval 32"/>
+          <p:cNvSpPr/>
+          <p:nvPr/>
+        </p:nvSpPr>
+        <p:spPr>
+          <a:xfrm>
+            <a:off x="5285232" y="1161288"/>
+            <a:ext cx="91440" cy="91440"/>
+          </a:xfrm>
+          <a:prstGeom prst="ellipse">
+            <a:avLst/>
+          </a:prstGeom>
+          <a:solidFill>
+            <a:srgbClr val="278A5B"/>
+          </a:solidFill>
+          <a:ln>
+            <a:noFill/>
+          </a:ln>
+        </p:spPr>
+        <p:style>
+          <a:lnRef idx="1">
+            <a:schemeClr val="accent1"/>
+          </a:lnRef>
+          <a:fillRef idx="3">
+            <a:schemeClr val="accent1"/>
+          </a:fillRef>
+          <a:effectRef idx="2">
+            <a:schemeClr val="accent1"/>
+          </a:effectRef>
+          <a:fontRef idx="minor">
+            <a:schemeClr val="lt1"/>
+          </a:fontRef>
+        </p:style>
+        <p:txBody>
+          <a:bodyPr rtlCol="0" anchor="ctr"/>
+          <a:lstStyle/>
+          <a:p>
+            <a:pPr algn="ctr"/>
+          </a:p>
+        </p:txBody>
+      </p:sp>
+      <p:sp>
+        <p:nvSpPr>
+          <p:cNvPr id="34" name="Rectangle 33"/>
+          <p:cNvSpPr/>
+          <p:nvPr/>
+        </p:nvSpPr>
+        <p:spPr>
+          <a:xfrm>
+            <a:off x="5468112" y="1124712"/>
+            <a:ext cx="6501384" cy="164592"/>
+          </a:xfrm>
+          <a:prstGeom prst="rect">
+            <a:avLst/>
+          </a:prstGeom>
+          <a:solidFill>
+            <a:srgbClr val="12183A"/>
+          </a:solidFill>
+          <a:ln>
+            <a:noFill/>
+          </a:ln>
+        </p:spPr>
+        <p:style>
+          <a:lnRef idx="1">
+            <a:schemeClr val="accent1"/>
+          </a:lnRef>
+          <a:fillRef idx="3">
+            <a:schemeClr val="accent1"/>
+          </a:fillRef>
+          <a:effectRef idx="2">
+            <a:schemeClr val="accent1"/>
+          </a:effectRef>
+          <a:fontRef idx="minor">
+            <a:schemeClr val="lt1"/>
+          </a:fontRef>
+        </p:style>
+        <p:txBody>
+          <a:bodyPr rtlCol="0" anchor="ctr"/>
+          <a:lstStyle/>
+          <a:p>
+            <a:pPr algn="ctr"/>
+          </a:p>
+        </p:txBody>
+      </p:sp>
+      <p:sp>
+        <p:nvSpPr>
+          <p:cNvPr id="35" name="TextBox 34"/>
+          <p:cNvSpPr txBox="1"/>
+          <p:nvPr/>
+        </p:nvSpPr>
+        <p:spPr>
+          <a:xfrm>
+            <a:off x="5541264" y="1129284"/>
+            <a:ext cx="6355080" cy="150876"/>
+          </a:xfrm>
+          <a:prstGeom prst="rect">
+            <a:avLst/>
+          </a:prstGeom>
+          <a:noFill/>
+        </p:spPr>
+        <p:txBody>
+          <a:bodyPr wrap="square">
+            <a:spAutoFit/>
+          </a:bodyPr>
+          <a:lstStyle/>
+          <a:p>
+            <a:pPr algn="l"/>
+            <a:r>
+              <a:rPr sz="750" b="0" i="0">
+                <a:solidFill>
+                  <a:srgbClr val="9096B2"/>
+                </a:solidFill>
+                <a:latin typeface="Calibri"/>
+              </a:rPr>
+              <a:t>readinessOS.vaughnmartin.com  —  Execution Dashboard · Protocol #42</a:t>
+            </a:r>
+          </a:p>
+        </p:txBody>
+      </p:sp>
+      <p:sp>
+        <p:nvSpPr>
+          <p:cNvPr id="36" name="Rectangle 35"/>
+          <p:cNvSpPr/>
+          <p:nvPr/>
+        </p:nvSpPr>
+        <p:spPr>
+          <a:xfrm>
+            <a:off x="4864608" y="1389888"/>
+            <a:ext cx="7269480" cy="420624"/>
+          </a:xfrm>
+          <a:prstGeom prst="rect">
+            <a:avLst/>
+          </a:prstGeom>
+          <a:solidFill>
+            <a:srgbClr val="050E20"/>
+          </a:solidFill>
+          <a:ln>
+            <a:noFill/>
+          </a:ln>
+        </p:spPr>
+        <p:style>
+          <a:lnRef idx="1">
+            <a:schemeClr val="accent1"/>
+          </a:lnRef>
+          <a:fillRef idx="3">
+            <a:schemeClr val="accent1"/>
+          </a:fillRef>
+          <a:effectRef idx="2">
+            <a:schemeClr val="accent1"/>
+          </a:effectRef>
+          <a:fontRef idx="minor">
+            <a:schemeClr val="lt1"/>
+          </a:fontRef>
+        </p:style>
+        <p:txBody>
+          <a:bodyPr rtlCol="0" anchor="ctr"/>
+          <a:lstStyle/>
+          <a:p>
+            <a:pPr algn="ctr"/>
+          </a:p>
+        </p:txBody>
+      </p:sp>
+      <p:sp>
+        <p:nvSpPr>
+          <p:cNvPr id="37" name="Rectangle 36"/>
+          <p:cNvSpPr/>
+          <p:nvPr/>
+        </p:nvSpPr>
+        <p:spPr>
+          <a:xfrm>
+            <a:off x="4864608" y="1389888"/>
+            <a:ext cx="7269480" cy="22860"/>
+          </a:xfrm>
+          <a:prstGeom prst="rect">
+            <a:avLst/>
+          </a:prstGeom>
+          <a:solidFill>
+            <a:srgbClr val="3DBB97"/>
+          </a:solidFill>
+          <a:ln>
+            <a:noFill/>
+          </a:ln>
+        </p:spPr>
+        <p:style>
+          <a:lnRef idx="1">
+            <a:schemeClr val="accent1"/>
+          </a:lnRef>
+          <a:fillRef idx="3">
+            <a:schemeClr val="accent1"/>
+          </a:fillRef>
+          <a:effectRef idx="2">
+            <a:schemeClr val="accent1"/>
+          </a:effectRef>
+          <a:fontRef idx="minor">
+            <a:schemeClr val="lt1"/>
+          </a:fontRef>
+        </p:style>
+        <p:txBody>
+          <a:bodyPr rtlCol="0" anchor="ctr"/>
+          <a:lstStyle/>
+          <a:p>
+            <a:pPr algn="ctr"/>
+          </a:p>
+        </p:txBody>
+      </p:sp>
+      <p:sp>
+        <p:nvSpPr>
+          <p:cNvPr id="38" name="Rectangle 37"/>
+          <p:cNvSpPr/>
+          <p:nvPr/>
+        </p:nvSpPr>
+        <p:spPr>
+          <a:xfrm>
+            <a:off x="5010912" y="1472184"/>
+            <a:ext cx="256032" cy="256032"/>
+          </a:xfrm>
+          <a:prstGeom prst="rect">
+            <a:avLst/>
+          </a:prstGeom>
+          <a:solidFill>
+            <a:srgbClr val="2B8A6E"/>
+          </a:solidFill>
+          <a:ln>
+            <a:noFill/>
+          </a:ln>
+        </p:spPr>
+        <p:style>
+          <a:lnRef idx="1">
+            <a:schemeClr val="accent1"/>
+          </a:lnRef>
+          <a:fillRef idx="3">
+            <a:schemeClr val="accent1"/>
+          </a:fillRef>
+          <a:effectRef idx="2">
+            <a:schemeClr val="accent1"/>
+          </a:effectRef>
+          <a:fontRef idx="minor">
+            <a:schemeClr val="lt1"/>
+          </a:fontRef>
+        </p:style>
+        <p:txBody>
+          <a:bodyPr rtlCol="0" anchor="ctr"/>
+          <a:lstStyle/>
+          <a:p>
+            <a:pPr algn="ctr"/>
+          </a:p>
+        </p:txBody>
+      </p:sp>
+      <p:sp>
+        <p:nvSpPr>
+          <p:cNvPr id="39" name="TextBox 38"/>
+          <p:cNvSpPr txBox="1"/>
+          <p:nvPr/>
+        </p:nvSpPr>
+        <p:spPr>
+          <a:xfrm>
+            <a:off x="5020056" y="1453896"/>
+            <a:ext cx="237744" cy="274320"/>
+          </a:xfrm>
+          <a:prstGeom prst="rect">
+            <a:avLst/>
+          </a:prstGeom>
+          <a:noFill/>
+        </p:spPr>
+        <p:txBody>
+          <a:bodyPr wrap="square">
+            <a:spAutoFit/>
+          </a:bodyPr>
+          <a:lstStyle/>
+          <a:p>
+            <a:pPr algn="ctr"/>
+            <a:r>
+              <a:rPr sz="1400" b="0" i="0">
+                <a:solidFill>
+                  <a:srgbClr val="FFFFFF"/>
+                </a:solidFill>
+                <a:latin typeface="Calibri"/>
+              </a:rPr>
+              <a:t>⏱</a:t>
+            </a:r>
+          </a:p>
+        </p:txBody>
+      </p:sp>
+      <p:sp>
+        <p:nvSpPr>
+          <p:cNvPr id="40" name="TextBox 39"/>
+          <p:cNvSpPr txBox="1"/>
+          <p:nvPr/>
+        </p:nvSpPr>
+        <p:spPr>
+          <a:xfrm>
+            <a:off x="5358384" y="1444752"/>
+            <a:ext cx="1645920" cy="182880"/>
+          </a:xfrm>
+          <a:prstGeom prst="rect">
+            <a:avLst/>
+          </a:prstGeom>
+          <a:noFill/>
+        </p:spPr>
+        <p:txBody>
+          <a:bodyPr wrap="square">
+            <a:spAutoFit/>
+          </a:bodyPr>
+          <a:lstStyle/>
+          <a:p>
+            <a:pPr algn="l"/>
+            <a:r>
+              <a:rPr sz="1300" b="1" i="0">
+                <a:solidFill>
+                  <a:srgbClr val="3DBB97"/>
+                </a:solidFill>
+                <a:latin typeface="Courier New"/>
+              </a:rPr>
+              <a:t>11:47  ELAPSED</a:t>
+            </a:r>
+          </a:p>
+        </p:txBody>
+      </p:sp>
+      <p:sp>
+        <p:nvSpPr>
+          <p:cNvPr id="41" name="TextBox 40"/>
+          <p:cNvSpPr txBox="1"/>
+          <p:nvPr/>
+        </p:nvSpPr>
+        <p:spPr>
+          <a:xfrm>
+            <a:off x="5358384" y="1627632"/>
+            <a:ext cx="1645920" cy="146304"/>
+          </a:xfrm>
+          <a:prstGeom prst="rect">
+            <a:avLst/>
+          </a:prstGeom>
+          <a:noFill/>
+        </p:spPr>
+        <p:txBody>
+          <a:bodyPr wrap="square">
+            <a:spAutoFit/>
+          </a:bodyPr>
+          <a:lstStyle/>
+          <a:p>
+            <a:pPr algn="l"/>
+            <a:r>
+              <a:rPr sz="800" b="0" i="0">
+                <a:solidFill>
+                  <a:srgbClr val="3DBB97"/>
+                </a:solidFill>
+                <a:latin typeface="Calibri"/>
+              </a:rPr>
+              <a:t>0:13 REMAINING</a:t>
+            </a:r>
+          </a:p>
+        </p:txBody>
+      </p:sp>
+      <p:sp>
+        <p:nvSpPr>
+          <p:cNvPr id="42" name="TextBox 41"/>
+          <p:cNvSpPr txBox="1"/>
+          <p:nvPr/>
+        </p:nvSpPr>
+        <p:spPr>
+          <a:xfrm>
+            <a:off x="7150608" y="1499616"/>
+            <a:ext cx="4782312" cy="201168"/>
+          </a:xfrm>
+          <a:prstGeom prst="rect">
+            <a:avLst/>
+          </a:prstGeom>
+          <a:noFill/>
+        </p:spPr>
+        <p:txBody>
+          <a:bodyPr wrap="square">
+            <a:spAutoFit/>
+          </a:bodyPr>
+          <a:lstStyle/>
+          <a:p>
+            <a:pPr algn="l"/>
+            <a:r>
+              <a:rPr sz="850" b="1" i="0">
+                <a:solidFill>
+                  <a:srgbClr val="FFFFFF"/>
+                </a:solidFill>
+                <a:latin typeface="Calibri"/>
+              </a:rPr>
+              <a:t>PROTOCOL #42  ·  ACTIVIST INVESTOR RESPONSE  ·  EXECUTION ACTIVE</a:t>
+            </a:r>
+          </a:p>
+        </p:txBody>
+      </p:sp>
+      <p:sp>
+        <p:nvSpPr>
+          <p:cNvPr id="43" name="Rectangle 42"/>
+          <p:cNvSpPr/>
+          <p:nvPr/>
+        </p:nvSpPr>
+        <p:spPr>
+          <a:xfrm>
+            <a:off x="4864608" y="1773936"/>
+            <a:ext cx="7269480" cy="128016"/>
+          </a:xfrm>
+          <a:prstGeom prst="rect">
+            <a:avLst/>
+          </a:prstGeom>
+          <a:solidFill>
+            <a:srgbClr val="0C1430"/>
+          </a:solidFill>
+          <a:ln>
+            <a:noFill/>
+          </a:ln>
+        </p:spPr>
+        <p:style>
+          <a:lnRef idx="1">
+            <a:schemeClr val="accent1"/>
+          </a:lnRef>
+          <a:fillRef idx="3">
+            <a:schemeClr val="accent1"/>
+          </a:fillRef>
+          <a:effectRef idx="2">
+            <a:schemeClr val="accent1"/>
+          </a:effectRef>
+          <a:fontRef idx="minor">
+            <a:schemeClr val="lt1"/>
+          </a:fontRef>
+        </p:style>
+        <p:txBody>
+          <a:bodyPr rtlCol="0" anchor="ctr"/>
+          <a:lstStyle/>
+          <a:p>
+            <a:pPr algn="ctr"/>
+          </a:p>
+        </p:txBody>
+      </p:sp>
+      <p:sp>
+        <p:nvSpPr>
+          <p:cNvPr id="44" name="Rectangle 43"/>
+          <p:cNvSpPr/>
+          <p:nvPr/>
+        </p:nvSpPr>
+        <p:spPr>
+          <a:xfrm>
+            <a:off x="4864608" y="1773936"/>
+            <a:ext cx="7145898" cy="128016"/>
+          </a:xfrm>
+          <a:prstGeom prst="rect">
+            <a:avLst/>
+          </a:prstGeom>
+          <a:solidFill>
+            <a:srgbClr val="2B8A6E"/>
+          </a:solidFill>
+          <a:ln>
+            <a:noFill/>
+          </a:ln>
+        </p:spPr>
+        <p:style>
+          <a:lnRef idx="1">
+            <a:schemeClr val="accent1"/>
+          </a:lnRef>
+          <a:fillRef idx="3">
+            <a:schemeClr val="accent1"/>
+          </a:fillRef>
+          <a:effectRef idx="2">
+            <a:schemeClr val="accent1"/>
+          </a:effectRef>
+          <a:fontRef idx="minor">
+            <a:schemeClr val="lt1"/>
+          </a:fontRef>
+        </p:style>
+        <p:txBody>
+          <a:bodyPr rtlCol="0" anchor="ctr"/>
+          <a:lstStyle/>
+          <a:p>
+            <a:pPr algn="ctr"/>
+          </a:p>
+        </p:txBody>
+      </p:sp>
+      <p:sp>
+        <p:nvSpPr>
+          <p:cNvPr id="45" name="Rectangle 44"/>
+          <p:cNvSpPr/>
+          <p:nvPr/>
+        </p:nvSpPr>
+        <p:spPr>
+          <a:xfrm>
+            <a:off x="11937354" y="1773936"/>
+            <a:ext cx="146304" cy="128016"/>
+          </a:xfrm>
+          <a:prstGeom prst="rect">
+            <a:avLst/>
+          </a:prstGeom>
+          <a:solidFill>
+            <a:srgbClr val="3DBB97"/>
+          </a:solidFill>
+          <a:ln>
+            <a:noFill/>
+          </a:ln>
+        </p:spPr>
+        <p:style>
+          <a:lnRef idx="1">
+            <a:schemeClr val="accent1"/>
+          </a:lnRef>
+          <a:fillRef idx="3">
+            <a:schemeClr val="accent1"/>
+          </a:fillRef>
+          <a:effectRef idx="2">
+            <a:schemeClr val="accent1"/>
+          </a:effectRef>
+          <a:fontRef idx="minor">
+            <a:schemeClr val="lt1"/>
+          </a:fontRef>
+        </p:style>
+        <p:txBody>
+          <a:bodyPr rtlCol="0" anchor="ctr"/>
+          <a:lstStyle/>
+          <a:p>
+            <a:pPr algn="ctr"/>
+          </a:p>
+        </p:txBody>
+      </p:sp>
+      <p:sp>
+        <p:nvSpPr>
+          <p:cNvPr id="46" name="TextBox 45"/>
+          <p:cNvSpPr txBox="1"/>
+          <p:nvPr/>
+        </p:nvSpPr>
+        <p:spPr>
+          <a:xfrm>
+            <a:off x="11603736" y="1773936"/>
+            <a:ext cx="512064" cy="128016"/>
+          </a:xfrm>
+          <a:prstGeom prst="rect">
+            <a:avLst/>
+          </a:prstGeom>
+          <a:noFill/>
+        </p:spPr>
+        <p:txBody>
+          <a:bodyPr wrap="square">
+            <a:spAutoFit/>
+          </a:bodyPr>
+          <a:lstStyle/>
+          <a:p>
+            <a:pPr algn="r"/>
+            <a:r>
+              <a:rPr sz="750" b="1" i="0">
+                <a:solidFill>
+                  <a:srgbClr val="0A0F2E"/>
+                </a:solidFill>
+                <a:latin typeface="Calibri"/>
+              </a:rPr>
+              <a:t>98.3%</a:t>
+            </a:r>
+          </a:p>
+        </p:txBody>
+      </p:sp>
+      <p:sp>
+        <p:nvSpPr>
+          <p:cNvPr id="47" name="Rectangle 46"/>
+          <p:cNvSpPr/>
+          <p:nvPr/>
+        </p:nvSpPr>
+        <p:spPr>
+          <a:xfrm>
+            <a:off x="4992624" y="1938528"/>
+            <a:ext cx="2240279" cy="4151376"/>
+          </a:xfrm>
+          <a:prstGeom prst="rect">
+            <a:avLst/>
+          </a:prstGeom>
+          <a:solidFill>
+            <a:srgbClr val="0A1028"/>
+          </a:solidFill>
+          <a:ln>
+            <a:noFill/>
+          </a:ln>
+        </p:spPr>
+        <p:style>
+          <a:lnRef idx="1">
+            <a:schemeClr val="accent1"/>
+          </a:lnRef>
+          <a:fillRef idx="3">
+            <a:schemeClr val="accent1"/>
+          </a:fillRef>
+          <a:effectRef idx="2">
+            <a:schemeClr val="accent1"/>
+          </a:effectRef>
+          <a:fontRef idx="minor">
+            <a:schemeClr val="lt1"/>
+          </a:fontRef>
+        </p:style>
+        <p:txBody>
+          <a:bodyPr rtlCol="0" anchor="ctr"/>
+          <a:lstStyle/>
+          <a:p>
+            <a:pPr algn="ctr"/>
+          </a:p>
+        </p:txBody>
+      </p:sp>
+      <p:sp>
+        <p:nvSpPr>
+          <p:cNvPr id="48" name="Rectangle 47"/>
+          <p:cNvSpPr/>
+          <p:nvPr/>
+        </p:nvSpPr>
+        <p:spPr>
+          <a:xfrm>
+            <a:off x="4992624" y="1938528"/>
+            <a:ext cx="2240279" cy="36576"/>
+          </a:xfrm>
+          <a:prstGeom prst="rect">
+            <a:avLst/>
+          </a:prstGeom>
+          <a:solidFill>
+            <a:srgbClr val="2B8A6E"/>
+          </a:solidFill>
+          <a:ln>
+            <a:noFill/>
+          </a:ln>
+        </p:spPr>
+        <p:style>
+          <a:lnRef idx="1">
+            <a:schemeClr val="accent1"/>
+          </a:lnRef>
+          <a:fillRef idx="3">
+            <a:schemeClr val="accent1"/>
+          </a:fillRef>
+          <a:effectRef idx="2">
+            <a:schemeClr val="accent1"/>
+          </a:effectRef>
+          <a:fontRef idx="minor">
+            <a:schemeClr val="lt1"/>
+          </a:fontRef>
+        </p:style>
+        <p:txBody>
+          <a:bodyPr rtlCol="0" anchor="ctr"/>
+          <a:lstStyle/>
+          <a:p>
+            <a:pPr algn="ctr"/>
+          </a:p>
+        </p:txBody>
+      </p:sp>
+      <p:sp>
+        <p:nvSpPr>
+          <p:cNvPr id="49" name="TextBox 48"/>
+          <p:cNvSpPr txBox="1"/>
+          <p:nvPr/>
+        </p:nvSpPr>
+        <p:spPr>
+          <a:xfrm>
+            <a:off x="5102352" y="2011680"/>
+            <a:ext cx="2020824" cy="182880"/>
+          </a:xfrm>
+          <a:prstGeom prst="rect">
+            <a:avLst/>
+          </a:prstGeom>
+          <a:noFill/>
+        </p:spPr>
+        <p:txBody>
+          <a:bodyPr wrap="square">
+            <a:spAutoFit/>
+          </a:bodyPr>
+          <a:lstStyle/>
+          <a:p>
+            <a:pPr algn="l"/>
+            <a:r>
+              <a:rPr sz="750" b="1" i="0">
+                <a:solidFill>
+                  <a:srgbClr val="2B8A6E"/>
+                </a:solidFill>
+                <a:latin typeface="Calibri"/>
+              </a:rPr>
+              <a:t>ROLES DEPLOYED</a:t>
+            </a:r>
+          </a:p>
+        </p:txBody>
+      </p:sp>
+      <p:sp>
+        <p:nvSpPr>
+          <p:cNvPr id="50" name="Rectangle 49"/>
+          <p:cNvSpPr/>
+          <p:nvPr/>
+        </p:nvSpPr>
+        <p:spPr>
+          <a:xfrm>
+            <a:off x="7403591" y="1938528"/>
+            <a:ext cx="2240279" cy="4151376"/>
+          </a:xfrm>
+          <a:prstGeom prst="rect">
+            <a:avLst/>
+          </a:prstGeom>
+          <a:solidFill>
+            <a:srgbClr val="0A1028"/>
+          </a:solidFill>
+          <a:ln>
+            <a:noFill/>
+          </a:ln>
+        </p:spPr>
+        <p:style>
+          <a:lnRef idx="1">
+            <a:schemeClr val="accent1"/>
+          </a:lnRef>
+          <a:fillRef idx="3">
+            <a:schemeClr val="accent1"/>
+          </a:fillRef>
+          <a:effectRef idx="2">
+            <a:schemeClr val="accent1"/>
+          </a:effectRef>
+          <a:fontRef idx="minor">
+            <a:schemeClr val="lt1"/>
+          </a:fontRef>
+        </p:style>
+        <p:txBody>
+          <a:bodyPr rtlCol="0" anchor="ctr"/>
+          <a:lstStyle/>
+          <a:p>
+            <a:pPr algn="ctr"/>
+          </a:p>
+        </p:txBody>
+      </p:sp>
+      <p:sp>
+        <p:nvSpPr>
+          <p:cNvPr id="51" name="Rectangle 50"/>
+          <p:cNvSpPr/>
+          <p:nvPr/>
+        </p:nvSpPr>
+        <p:spPr>
+          <a:xfrm>
+            <a:off x="7403591" y="1938528"/>
+            <a:ext cx="2240279" cy="36576"/>
+          </a:xfrm>
+          <a:prstGeom prst="rect">
+            <a:avLst/>
+          </a:prstGeom>
+          <a:solidFill>
+            <a:srgbClr val="C9A84C"/>
+          </a:solidFill>
+          <a:ln>
+            <a:noFill/>
+          </a:ln>
+        </p:spPr>
+        <p:style>
+          <a:lnRef idx="1">
+            <a:schemeClr val="accent1"/>
+          </a:lnRef>
+          <a:fillRef idx="3">
+            <a:schemeClr val="accent1"/>
+          </a:fillRef>
+          <a:effectRef idx="2">
+            <a:schemeClr val="accent1"/>
+          </a:effectRef>
+          <a:fontRef idx="minor">
+            <a:schemeClr val="lt1"/>
+          </a:fontRef>
+        </p:style>
+        <p:txBody>
+          <a:bodyPr rtlCol="0" anchor="ctr"/>
+          <a:lstStyle/>
+          <a:p>
+            <a:pPr algn="ctr"/>
+          </a:p>
+        </p:txBody>
+      </p:sp>
+      <p:sp>
+        <p:nvSpPr>
+          <p:cNvPr id="52" name="TextBox 51"/>
+          <p:cNvSpPr txBox="1"/>
+          <p:nvPr/>
+        </p:nvSpPr>
+        <p:spPr>
+          <a:xfrm>
+            <a:off x="7513319" y="2011680"/>
+            <a:ext cx="2020824" cy="182880"/>
+          </a:xfrm>
+          <a:prstGeom prst="rect">
+            <a:avLst/>
+          </a:prstGeom>
+          <a:noFill/>
+        </p:spPr>
+        <p:txBody>
+          <a:bodyPr wrap="square">
+            <a:spAutoFit/>
+          </a:bodyPr>
+          <a:lstStyle/>
+          <a:p>
+            <a:pPr algn="l"/>
+            <a:r>
+              <a:rPr sz="750" b="1" i="0">
+                <a:solidFill>
+                  <a:srgbClr val="C9A84C"/>
+                </a:solidFill>
+                <a:latin typeface="Calibri"/>
+              </a:rPr>
+              <a:t>BUDGET RELEASED</a:t>
+            </a:r>
+          </a:p>
+        </p:txBody>
+      </p:sp>
+      <p:sp>
+        <p:nvSpPr>
+          <p:cNvPr id="53" name="Rectangle 52"/>
+          <p:cNvSpPr/>
+          <p:nvPr/>
+        </p:nvSpPr>
+        <p:spPr>
+          <a:xfrm>
+            <a:off x="9814560" y="1938528"/>
+            <a:ext cx="2240279" cy="4151376"/>
+          </a:xfrm>
+          <a:prstGeom prst="rect">
+            <a:avLst/>
+          </a:prstGeom>
+          <a:solidFill>
+            <a:srgbClr val="0A1028"/>
+          </a:solidFill>
+          <a:ln>
+            <a:noFill/>
+          </a:ln>
+        </p:spPr>
+        <p:style>
+          <a:lnRef idx="1">
+            <a:schemeClr val="accent1"/>
+          </a:lnRef>
+          <a:fillRef idx="3">
+            <a:schemeClr val="accent1"/>
+          </a:fillRef>
+          <a:effectRef idx="2">
+            <a:schemeClr val="accent1"/>
+          </a:effectRef>
+          <a:fontRef idx="minor">
+            <a:schemeClr val="lt1"/>
+          </a:fontRef>
+        </p:style>
+        <p:txBody>
+          <a:bodyPr rtlCol="0" anchor="ctr"/>
+          <a:lstStyle/>
+          <a:p>
+            <a:pPr algn="ctr"/>
+          </a:p>
+        </p:txBody>
+      </p:sp>
+      <p:sp>
+        <p:nvSpPr>
+          <p:cNvPr id="54" name="Rectangle 53"/>
+          <p:cNvSpPr/>
+          <p:nvPr/>
+        </p:nvSpPr>
+        <p:spPr>
+          <a:xfrm>
+            <a:off x="9814560" y="1938528"/>
+            <a:ext cx="2240279" cy="36576"/>
+          </a:xfrm>
+          <a:prstGeom prst="rect">
+            <a:avLst/>
+          </a:prstGeom>
+          <a:solidFill>
+            <a:srgbClr val="558BD4"/>
+          </a:solidFill>
+          <a:ln>
+            <a:noFill/>
+          </a:ln>
+        </p:spPr>
+        <p:style>
+          <a:lnRef idx="1">
+            <a:schemeClr val="accent1"/>
+          </a:lnRef>
+          <a:fillRef idx="3">
+            <a:schemeClr val="accent1"/>
+          </a:fillRef>
+          <a:effectRef idx="2">
+            <a:schemeClr val="accent1"/>
+          </a:effectRef>
+          <a:fontRef idx="minor">
+            <a:schemeClr val="lt1"/>
+          </a:fontRef>
+        </p:style>
+        <p:txBody>
+          <a:bodyPr rtlCol="0" anchor="ctr"/>
+          <a:lstStyle/>
+          <a:p>
+            <a:pPr algn="ctr"/>
+          </a:p>
+        </p:txBody>
+      </p:sp>
+      <p:sp>
+        <p:nvSpPr>
+          <p:cNvPr id="55" name="TextBox 54"/>
+          <p:cNvSpPr txBox="1"/>
+          <p:nvPr/>
+        </p:nvSpPr>
+        <p:spPr>
+          <a:xfrm>
+            <a:off x="9924288" y="2011680"/>
+            <a:ext cx="2020824" cy="182880"/>
+          </a:xfrm>
+          <a:prstGeom prst="rect">
+            <a:avLst/>
+          </a:prstGeom>
+          <a:noFill/>
+        </p:spPr>
+        <p:txBody>
+          <a:bodyPr wrap="square">
+            <a:spAutoFit/>
+          </a:bodyPr>
+          <a:lstStyle/>
+          <a:p>
+            <a:pPr algn="l"/>
+            <a:r>
+              <a:rPr sz="750" b="1" i="0">
+                <a:solidFill>
+                  <a:srgbClr val="558BD4"/>
+                </a:solidFill>
+                <a:latin typeface="Calibri"/>
+              </a:rPr>
+              <a:t>COMMS STAGED</a:t>
+            </a:r>
+          </a:p>
+        </p:txBody>
+      </p:sp>
+      <p:sp>
+        <p:nvSpPr>
+          <p:cNvPr id="56" name="Rectangle 55"/>
+          <p:cNvSpPr/>
+          <p:nvPr/>
+        </p:nvSpPr>
+        <p:spPr>
+          <a:xfrm>
+            <a:off x="5084064" y="2249424"/>
+            <a:ext cx="2057399" cy="402336"/>
+          </a:xfrm>
+          <a:prstGeom prst="rect">
+            <a:avLst/>
+          </a:prstGeom>
+          <a:solidFill>
+            <a:srgbClr val="0C1434"/>
+          </a:solidFill>
+          <a:ln>
+            <a:noFill/>
+          </a:ln>
+        </p:spPr>
+        <p:style>
+          <a:lnRef idx="1">
+            <a:schemeClr val="accent1"/>
+          </a:lnRef>
+          <a:fillRef idx="3">
+            <a:schemeClr val="accent1"/>
+          </a:fillRef>
+          <a:effectRef idx="2">
+            <a:schemeClr val="accent1"/>
+          </a:effectRef>
+          <a:fontRef idx="minor">
+            <a:schemeClr val="lt1"/>
+          </a:fontRef>
+        </p:style>
+        <p:txBody>
+          <a:bodyPr rtlCol="0" anchor="ctr"/>
+          <a:lstStyle/>
+          <a:p>
+            <a:pPr algn="ctr"/>
+          </a:p>
+        </p:txBody>
+      </p:sp>
+      <p:sp>
+        <p:nvSpPr>
+          <p:cNvPr id="57" name="Rectangle 56"/>
+          <p:cNvSpPr/>
+          <p:nvPr/>
+        </p:nvSpPr>
+        <p:spPr>
+          <a:xfrm>
+            <a:off x="5084064" y="2249424"/>
+            <a:ext cx="27432" cy="402336"/>
+          </a:xfrm>
+          <a:prstGeom prst="rect">
+            <a:avLst/>
+          </a:prstGeom>
+          <a:solidFill>
+            <a:srgbClr val="3DBB7A"/>
+          </a:solidFill>
+          <a:ln>
+            <a:noFill/>
+          </a:ln>
+        </p:spPr>
+        <p:style>
+          <a:lnRef idx="1">
+            <a:schemeClr val="accent1"/>
+          </a:lnRef>
+          <a:fillRef idx="3">
+            <a:schemeClr val="accent1"/>
+          </a:fillRef>
+          <a:effectRef idx="2">
+            <a:schemeClr val="accent1"/>
+          </a:effectRef>
+          <a:fontRef idx="minor">
+            <a:schemeClr val="lt1"/>
+          </a:fontRef>
+        </p:style>
+        <p:txBody>
+          <a:bodyPr rtlCol="0" anchor="ctr"/>
+          <a:lstStyle/>
+          <a:p>
+            <a:pPr algn="ctr"/>
+          </a:p>
+        </p:txBody>
+      </p:sp>
+      <p:sp>
+        <p:nvSpPr>
+          <p:cNvPr id="58" name="TextBox 57"/>
+          <p:cNvSpPr txBox="1"/>
+          <p:nvPr/>
+        </p:nvSpPr>
+        <p:spPr>
+          <a:xfrm>
+            <a:off x="5138928" y="2286000"/>
+            <a:ext cx="164592" cy="182880"/>
+          </a:xfrm>
+          <a:prstGeom prst="rect">
+            <a:avLst/>
+          </a:prstGeom>
+          <a:noFill/>
+        </p:spPr>
+        <p:txBody>
+          <a:bodyPr wrap="square">
+            <a:spAutoFit/>
+          </a:bodyPr>
+          <a:lstStyle/>
+          <a:p>
+            <a:pPr algn="l"/>
+            <a:r>
+              <a:rPr sz="900" b="1" i="0">
+                <a:solidFill>
+                  <a:srgbClr val="3DBB7A"/>
+                </a:solidFill>
+                <a:latin typeface="Calibri"/>
+              </a:rPr>
+              <a:t>✓</a:t>
+            </a:r>
+          </a:p>
+        </p:txBody>
+      </p:sp>
+      <p:sp>
+        <p:nvSpPr>
+          <p:cNvPr id="59" name="TextBox 58"/>
+          <p:cNvSpPr txBox="1"/>
+          <p:nvPr/>
+        </p:nvSpPr>
+        <p:spPr>
+          <a:xfrm>
+            <a:off x="5285232" y="2286000"/>
+            <a:ext cx="1801367" cy="182880"/>
+          </a:xfrm>
+          <a:prstGeom prst="rect">
+            <a:avLst/>
+          </a:prstGeom>
+          <a:noFill/>
+        </p:spPr>
+        <p:txBody>
+          <a:bodyPr wrap="square">
+            <a:spAutoFit/>
+          </a:bodyPr>
+          <a:lstStyle/>
+          <a:p>
+            <a:pPr algn="l"/>
+            <a:r>
+              <a:rPr sz="850" b="1" i="0">
+                <a:solidFill>
+                  <a:srgbClr val="FFFFFF"/>
+                </a:solidFill>
+                <a:latin typeface="Calibri"/>
+              </a:rPr>
+              <a:t>General Counsel</a:t>
+            </a:r>
+          </a:p>
+        </p:txBody>
+      </p:sp>
+      <p:sp>
+        <p:nvSpPr>
+          <p:cNvPr id="60" name="TextBox 59"/>
+          <p:cNvSpPr txBox="1"/>
+          <p:nvPr/>
+        </p:nvSpPr>
+        <p:spPr>
+          <a:xfrm>
+            <a:off x="5285232" y="2468880"/>
+            <a:ext cx="1801367" cy="155448"/>
+          </a:xfrm>
+          <a:prstGeom prst="rect">
+            <a:avLst/>
+          </a:prstGeom>
+          <a:noFill/>
+        </p:spPr>
+        <p:txBody>
+          <a:bodyPr wrap="square">
+            <a:spAutoFit/>
+          </a:bodyPr>
+          <a:lstStyle/>
+          <a:p>
+            <a:pPr algn="l"/>
+            <a:r>
+              <a:rPr sz="750" b="0" i="0">
+                <a:solidFill>
+                  <a:srgbClr val="9096B2"/>
+                </a:solidFill>
+                <a:latin typeface="Calibri"/>
+              </a:rPr>
+              <a:t>Notified  ·  0:42</a:t>
+            </a:r>
+          </a:p>
+        </p:txBody>
+      </p:sp>
+      <p:sp>
+        <p:nvSpPr>
+          <p:cNvPr id="61" name="Rectangle 60"/>
+          <p:cNvSpPr/>
+          <p:nvPr/>
+        </p:nvSpPr>
+        <p:spPr>
+          <a:xfrm>
+            <a:off x="5084064" y="2715768"/>
+            <a:ext cx="2057399" cy="402336"/>
+          </a:xfrm>
+          <a:prstGeom prst="rect">
+            <a:avLst/>
+          </a:prstGeom>
+          <a:solidFill>
+            <a:srgbClr val="0C1434"/>
+          </a:solidFill>
+          <a:ln>
+            <a:noFill/>
+          </a:ln>
+        </p:spPr>
+        <p:style>
+          <a:lnRef idx="1">
+            <a:schemeClr val="accent1"/>
+          </a:lnRef>
+          <a:fillRef idx="3">
+            <a:schemeClr val="accent1"/>
+          </a:fillRef>
+          <a:effectRef idx="2">
+            <a:schemeClr val="accent1"/>
+          </a:effectRef>
+          <a:fontRef idx="minor">
+            <a:schemeClr val="lt1"/>
+          </a:fontRef>
+        </p:style>
+        <p:txBody>
+          <a:bodyPr rtlCol="0" anchor="ctr"/>
+          <a:lstStyle/>
+          <a:p>
+            <a:pPr algn="ctr"/>
+          </a:p>
+        </p:txBody>
+      </p:sp>
+      <p:sp>
+        <p:nvSpPr>
+          <p:cNvPr id="62" name="Rectangle 61"/>
+          <p:cNvSpPr/>
+          <p:nvPr/>
+        </p:nvSpPr>
+        <p:spPr>
+          <a:xfrm>
+            <a:off x="5084064" y="2715768"/>
+            <a:ext cx="27432" cy="402336"/>
+          </a:xfrm>
+          <a:prstGeom prst="rect">
+            <a:avLst/>
+          </a:prstGeom>
+          <a:solidFill>
+            <a:srgbClr val="3DBB7A"/>
+          </a:solidFill>
+          <a:ln>
+            <a:noFill/>
+          </a:ln>
+        </p:spPr>
+        <p:style>
+          <a:lnRef idx="1">
+            <a:schemeClr val="accent1"/>
+          </a:lnRef>
+          <a:fillRef idx="3">
+            <a:schemeClr val="accent1"/>
+          </a:fillRef>
+          <a:effectRef idx="2">
+            <a:schemeClr val="accent1"/>
+          </a:effectRef>
+          <a:fontRef idx="minor">
+            <a:schemeClr val="lt1"/>
+          </a:fontRef>
+        </p:style>
+        <p:txBody>
+          <a:bodyPr rtlCol="0" anchor="ctr"/>
+          <a:lstStyle/>
+          <a:p>
+            <a:pPr algn="ctr"/>
+          </a:p>
+        </p:txBody>
+      </p:sp>
+      <p:sp>
+        <p:nvSpPr>
+          <p:cNvPr id="63" name="TextBox 62"/>
+          <p:cNvSpPr txBox="1"/>
+          <p:nvPr/>
+        </p:nvSpPr>
+        <p:spPr>
+          <a:xfrm>
+            <a:off x="5138928" y="2752344"/>
+            <a:ext cx="164592" cy="182880"/>
+          </a:xfrm>
+          <a:prstGeom prst="rect">
+            <a:avLst/>
+          </a:prstGeom>
+          <a:noFill/>
+        </p:spPr>
+        <p:txBody>
+          <a:bodyPr wrap="square">
+            <a:spAutoFit/>
+          </a:bodyPr>
+          <a:lstStyle/>
+          <a:p>
+            <a:pPr algn="l"/>
+            <a:r>
+              <a:rPr sz="900" b="1" i="0">
+                <a:solidFill>
+                  <a:srgbClr val="3DBB7A"/>
+                </a:solidFill>
+                <a:latin typeface="Calibri"/>
+              </a:rPr>
+              <a:t>✓</a:t>
+            </a:r>
+          </a:p>
+        </p:txBody>
+      </p:sp>
+      <p:sp>
+        <p:nvSpPr>
+          <p:cNvPr id="64" name="TextBox 63"/>
+          <p:cNvSpPr txBox="1"/>
+          <p:nvPr/>
+        </p:nvSpPr>
+        <p:spPr>
+          <a:xfrm>
+            <a:off x="5285232" y="2752344"/>
+            <a:ext cx="1801367" cy="182880"/>
+          </a:xfrm>
+          <a:prstGeom prst="rect">
+            <a:avLst/>
+          </a:prstGeom>
+          <a:noFill/>
+        </p:spPr>
+        <p:txBody>
+          <a:bodyPr wrap="square">
+            <a:spAutoFit/>
+          </a:bodyPr>
+          <a:lstStyle/>
+          <a:p>
+            <a:pPr algn="l"/>
+            <a:r>
+              <a:rPr sz="850" b="1" i="0">
+                <a:solidFill>
+                  <a:srgbClr val="FFFFFF"/>
+                </a:solidFill>
+                <a:latin typeface="Calibri"/>
+              </a:rPr>
+              <a:t>Chief Strategy Officer</a:t>
+            </a:r>
+          </a:p>
+        </p:txBody>
+      </p:sp>
+      <p:sp>
+        <p:nvSpPr>
+          <p:cNvPr id="65" name="TextBox 64"/>
+          <p:cNvSpPr txBox="1"/>
+          <p:nvPr/>
+        </p:nvSpPr>
+        <p:spPr>
+          <a:xfrm>
+            <a:off x="5285232" y="2935224"/>
+            <a:ext cx="1801367" cy="155448"/>
+          </a:xfrm>
+          <a:prstGeom prst="rect">
+            <a:avLst/>
+          </a:prstGeom>
+          <a:noFill/>
+        </p:spPr>
+        <p:txBody>
+          <a:bodyPr wrap="square">
+            <a:spAutoFit/>
+          </a:bodyPr>
+          <a:lstStyle/>
+          <a:p>
+            <a:pPr algn="l"/>
+            <a:r>
+              <a:rPr sz="750" b="0" i="0">
+                <a:solidFill>
+                  <a:srgbClr val="9096B2"/>
+                </a:solidFill>
+                <a:latin typeface="Calibri"/>
+              </a:rPr>
+              <a:t>Authorized  ·  1:15</a:t>
+            </a:r>
+          </a:p>
+        </p:txBody>
+      </p:sp>
+      <p:sp>
+        <p:nvSpPr>
+          <p:cNvPr id="66" name="Rectangle 65"/>
+          <p:cNvSpPr/>
+          <p:nvPr/>
+        </p:nvSpPr>
+        <p:spPr>
+          <a:xfrm>
+            <a:off x="5084064" y="3182112"/>
+            <a:ext cx="2057399" cy="402336"/>
+          </a:xfrm>
+          <a:prstGeom prst="rect">
+            <a:avLst/>
+          </a:prstGeom>
+          <a:solidFill>
+            <a:srgbClr val="0C1434"/>
+          </a:solidFill>
+          <a:ln>
+            <a:noFill/>
+          </a:ln>
+        </p:spPr>
+        <p:style>
+          <a:lnRef idx="1">
+            <a:schemeClr val="accent1"/>
+          </a:lnRef>
+          <a:fillRef idx="3">
+            <a:schemeClr val="accent1"/>
+          </a:fillRef>
+          <a:effectRef idx="2">
+            <a:schemeClr val="accent1"/>
+          </a:effectRef>
+          <a:fontRef idx="minor">
+            <a:schemeClr val="lt1"/>
+          </a:fontRef>
+        </p:style>
+        <p:txBody>
+          <a:bodyPr rtlCol="0" anchor="ctr"/>
+          <a:lstStyle/>
+          <a:p>
+            <a:pPr algn="ctr"/>
+          </a:p>
+        </p:txBody>
+      </p:sp>
+      <p:sp>
+        <p:nvSpPr>
+          <p:cNvPr id="67" name="Rectangle 66"/>
+          <p:cNvSpPr/>
+          <p:nvPr/>
+        </p:nvSpPr>
+        <p:spPr>
+          <a:xfrm>
+            <a:off x="5084064" y="3182112"/>
+            <a:ext cx="27432" cy="402336"/>
+          </a:xfrm>
+          <a:prstGeom prst="rect">
+            <a:avLst/>
+          </a:prstGeom>
+          <a:solidFill>
+            <a:srgbClr val="3DBB7A"/>
+          </a:solidFill>
+          <a:ln>
+            <a:noFill/>
+          </a:ln>
+        </p:spPr>
+        <p:style>
+          <a:lnRef idx="1">
+            <a:schemeClr val="accent1"/>
+          </a:lnRef>
+          <a:fillRef idx="3">
+            <a:schemeClr val="accent1"/>
+          </a:fillRef>
+          <a:effectRef idx="2">
+            <a:schemeClr val="accent1"/>
+          </a:effectRef>
+          <a:fontRef idx="minor">
+            <a:schemeClr val="lt1"/>
+          </a:fontRef>
+        </p:style>
+        <p:txBody>
+          <a:bodyPr rtlCol="0" anchor="ctr"/>
+          <a:lstStyle/>
+          <a:p>
+            <a:pPr algn="ctr"/>
+          </a:p>
+        </p:txBody>
+      </p:sp>
+      <p:sp>
+        <p:nvSpPr>
+          <p:cNvPr id="68" name="TextBox 67"/>
+          <p:cNvSpPr txBox="1"/>
+          <p:nvPr/>
+        </p:nvSpPr>
+        <p:spPr>
+          <a:xfrm>
+            <a:off x="5138928" y="3218688"/>
+            <a:ext cx="164592" cy="182880"/>
+          </a:xfrm>
+          <a:prstGeom prst="rect">
+            <a:avLst/>
+          </a:prstGeom>
+          <a:noFill/>
+        </p:spPr>
+        <p:txBody>
+          <a:bodyPr wrap="square">
+            <a:spAutoFit/>
+          </a:bodyPr>
+          <a:lstStyle/>
+          <a:p>
+            <a:pPr algn="l"/>
+            <a:r>
+              <a:rPr sz="900" b="1" i="0">
+                <a:solidFill>
+                  <a:srgbClr val="3DBB7A"/>
+                </a:solidFill>
+                <a:latin typeface="Calibri"/>
+              </a:rPr>
+              <a:t>✓</a:t>
+            </a:r>
+          </a:p>
+        </p:txBody>
+      </p:sp>
+      <p:sp>
+        <p:nvSpPr>
+          <p:cNvPr id="69" name="TextBox 68"/>
+          <p:cNvSpPr txBox="1"/>
+          <p:nvPr/>
+        </p:nvSpPr>
+        <p:spPr>
+          <a:xfrm>
+            <a:off x="5285232" y="3218688"/>
+            <a:ext cx="1801367" cy="182880"/>
+          </a:xfrm>
+          <a:prstGeom prst="rect">
+            <a:avLst/>
+          </a:prstGeom>
+          <a:noFill/>
+        </p:spPr>
+        <p:txBody>
+          <a:bodyPr wrap="square">
+            <a:spAutoFit/>
+          </a:bodyPr>
+          <a:lstStyle/>
+          <a:p>
+            <a:pPr algn="l"/>
+            <a:r>
+              <a:rPr sz="850" b="1" i="0">
+                <a:solidFill>
+                  <a:srgbClr val="FFFFFF"/>
+                </a:solidFill>
+                <a:latin typeface="Calibri"/>
+              </a:rPr>
+              <a:t>Chief Financial Officer</a:t>
+            </a:r>
+          </a:p>
+        </p:txBody>
+      </p:sp>
+      <p:sp>
+        <p:nvSpPr>
+          <p:cNvPr id="70" name="TextBox 69"/>
+          <p:cNvSpPr txBox="1"/>
+          <p:nvPr/>
+        </p:nvSpPr>
+        <p:spPr>
+          <a:xfrm>
+            <a:off x="5285232" y="3401568"/>
+            <a:ext cx="1801367" cy="155448"/>
+          </a:xfrm>
+          <a:prstGeom prst="rect">
+            <a:avLst/>
+          </a:prstGeom>
+          <a:noFill/>
+        </p:spPr>
+        <p:txBody>
+          <a:bodyPr wrap="square">
+            <a:spAutoFit/>
+          </a:bodyPr>
+          <a:lstStyle/>
+          <a:p>
+            <a:pPr algn="l"/>
+            <a:r>
+              <a:rPr sz="750" b="0" i="0">
+                <a:solidFill>
+                  <a:srgbClr val="9096B2"/>
+                </a:solidFill>
+                <a:latin typeface="Calibri"/>
+              </a:rPr>
+              <a:t>Briefed  ·  2:08</a:t>
+            </a:r>
+          </a:p>
+        </p:txBody>
+      </p:sp>
+      <p:sp>
+        <p:nvSpPr>
+          <p:cNvPr id="71" name="Rectangle 70"/>
+          <p:cNvSpPr/>
+          <p:nvPr/>
+        </p:nvSpPr>
+        <p:spPr>
+          <a:xfrm>
+            <a:off x="5084064" y="3648456"/>
+            <a:ext cx="2057399" cy="402336"/>
+          </a:xfrm>
+          <a:prstGeom prst="rect">
+            <a:avLst/>
+          </a:prstGeom>
+          <a:solidFill>
+            <a:srgbClr val="0C1434"/>
+          </a:solidFill>
+          <a:ln>
+            <a:noFill/>
+          </a:ln>
+        </p:spPr>
+        <p:style>
+          <a:lnRef idx="1">
+            <a:schemeClr val="accent1"/>
+          </a:lnRef>
+          <a:fillRef idx="3">
+            <a:schemeClr val="accent1"/>
+          </a:fillRef>
+          <a:effectRef idx="2">
+            <a:schemeClr val="accent1"/>
+          </a:effectRef>
+          <a:fontRef idx="minor">
+            <a:schemeClr val="lt1"/>
+          </a:fontRef>
+        </p:style>
+        <p:txBody>
+          <a:bodyPr rtlCol="0" anchor="ctr"/>
+          <a:lstStyle/>
+          <a:p>
+            <a:pPr algn="ctr"/>
+          </a:p>
+        </p:txBody>
+      </p:sp>
+      <p:sp>
+        <p:nvSpPr>
+          <p:cNvPr id="72" name="Rectangle 71"/>
+          <p:cNvSpPr/>
+          <p:nvPr/>
+        </p:nvSpPr>
+        <p:spPr>
+          <a:xfrm>
+            <a:off x="5084064" y="3648456"/>
+            <a:ext cx="27432" cy="402336"/>
+          </a:xfrm>
+          <a:prstGeom prst="rect">
+            <a:avLst/>
+          </a:prstGeom>
+          <a:solidFill>
+            <a:srgbClr val="3DBB7A"/>
+          </a:solidFill>
+          <a:ln>
+            <a:noFill/>
+          </a:ln>
+        </p:spPr>
+        <p:style>
+          <a:lnRef idx="1">
+            <a:schemeClr val="accent1"/>
+          </a:lnRef>
+          <a:fillRef idx="3">
+            <a:schemeClr val="accent1"/>
+          </a:fillRef>
+          <a:effectRef idx="2">
+            <a:schemeClr val="accent1"/>
+          </a:effectRef>
+          <a:fontRef idx="minor">
+            <a:schemeClr val="lt1"/>
+          </a:fontRef>
+        </p:style>
+        <p:txBody>
+          <a:bodyPr rtlCol="0" anchor="ctr"/>
+          <a:lstStyle/>
+          <a:p>
+            <a:pPr algn="ctr"/>
+          </a:p>
+        </p:txBody>
+      </p:sp>
+      <p:sp>
+        <p:nvSpPr>
+          <p:cNvPr id="73" name="TextBox 72"/>
+          <p:cNvSpPr txBox="1"/>
+          <p:nvPr/>
+        </p:nvSpPr>
+        <p:spPr>
+          <a:xfrm>
+            <a:off x="5138928" y="3685032"/>
+            <a:ext cx="164592" cy="182880"/>
+          </a:xfrm>
+          <a:prstGeom prst="rect">
+            <a:avLst/>
+          </a:prstGeom>
+          <a:noFill/>
+        </p:spPr>
+        <p:txBody>
+          <a:bodyPr wrap="square">
+            <a:spAutoFit/>
+          </a:bodyPr>
+          <a:lstStyle/>
+          <a:p>
+            <a:pPr algn="l"/>
+            <a:r>
+              <a:rPr sz="900" b="1" i="0">
+                <a:solidFill>
+                  <a:srgbClr val="3DBB7A"/>
+                </a:solidFill>
+                <a:latin typeface="Calibri"/>
+              </a:rPr>
+              <a:t>✓</a:t>
+            </a:r>
+          </a:p>
+        </p:txBody>
+      </p:sp>
+      <p:sp>
+        <p:nvSpPr>
+          <p:cNvPr id="74" name="TextBox 73"/>
+          <p:cNvSpPr txBox="1"/>
+          <p:nvPr/>
+        </p:nvSpPr>
+        <p:spPr>
+          <a:xfrm>
+            <a:off x="5285232" y="3685032"/>
+            <a:ext cx="1801367" cy="182880"/>
+          </a:xfrm>
+          <a:prstGeom prst="rect">
+            <a:avLst/>
+          </a:prstGeom>
+          <a:noFill/>
+        </p:spPr>
+        <p:txBody>
+          <a:bodyPr wrap="square">
+            <a:spAutoFit/>
+          </a:bodyPr>
+          <a:lstStyle/>
+          <a:p>
+            <a:pPr algn="l"/>
+            <a:r>
+              <a:rPr sz="850" b="1" i="0">
+                <a:solidFill>
+                  <a:srgbClr val="FFFFFF"/>
+                </a:solidFill>
+                <a:latin typeface="Calibri"/>
+              </a:rPr>
+              <a:t>Head of Investor Relations</a:t>
+            </a:r>
+          </a:p>
+        </p:txBody>
+      </p:sp>
+      <p:sp>
+        <p:nvSpPr>
+          <p:cNvPr id="75" name="TextBox 74"/>
+          <p:cNvSpPr txBox="1"/>
+          <p:nvPr/>
+        </p:nvSpPr>
+        <p:spPr>
+          <a:xfrm>
+            <a:off x="5285232" y="3867912"/>
+            <a:ext cx="1801367" cy="155448"/>
+          </a:xfrm>
+          <a:prstGeom prst="rect">
+            <a:avLst/>
+          </a:prstGeom>
+          <a:noFill/>
+        </p:spPr>
+        <p:txBody>
+          <a:bodyPr wrap="square">
+            <a:spAutoFit/>
+          </a:bodyPr>
+          <a:lstStyle/>
+          <a:p>
+            <a:pPr algn="l"/>
+            <a:r>
+              <a:rPr sz="750" b="0" i="0">
+                <a:solidFill>
+                  <a:srgbClr val="9096B2"/>
+                </a:solidFill>
+                <a:latin typeface="Calibri"/>
+              </a:rPr>
+              <a:t>Active  ·  3:22</a:t>
+            </a:r>
+          </a:p>
+        </p:txBody>
+      </p:sp>
+      <p:sp>
+        <p:nvSpPr>
+          <p:cNvPr id="76" name="Rectangle 75"/>
+          <p:cNvSpPr/>
+          <p:nvPr/>
+        </p:nvSpPr>
+        <p:spPr>
+          <a:xfrm>
+            <a:off x="5084064" y="4114800"/>
+            <a:ext cx="2057399" cy="402336"/>
+          </a:xfrm>
+          <a:prstGeom prst="rect">
+            <a:avLst/>
+          </a:prstGeom>
+          <a:solidFill>
+            <a:srgbClr val="0C1434"/>
+          </a:solidFill>
+          <a:ln>
+            <a:noFill/>
+          </a:ln>
+        </p:spPr>
+        <p:style>
+          <a:lnRef idx="1">
+            <a:schemeClr val="accent1"/>
+          </a:lnRef>
+          <a:fillRef idx="3">
+            <a:schemeClr val="accent1"/>
+          </a:fillRef>
+          <a:effectRef idx="2">
+            <a:schemeClr val="accent1"/>
+          </a:effectRef>
+          <a:fontRef idx="minor">
+            <a:schemeClr val="lt1"/>
+          </a:fontRef>
+        </p:style>
+        <p:txBody>
+          <a:bodyPr rtlCol="0" anchor="ctr"/>
+          <a:lstStyle/>
+          <a:p>
+            <a:pPr algn="ctr"/>
+          </a:p>
+        </p:txBody>
+      </p:sp>
+      <p:sp>
+        <p:nvSpPr>
+          <p:cNvPr id="77" name="Rectangle 76"/>
+          <p:cNvSpPr/>
+          <p:nvPr/>
+        </p:nvSpPr>
+        <p:spPr>
+          <a:xfrm>
+            <a:off x="5084064" y="4114800"/>
+            <a:ext cx="27432" cy="402336"/>
+          </a:xfrm>
+          <a:prstGeom prst="rect">
+            <a:avLst/>
+          </a:prstGeom>
+          <a:solidFill>
+            <a:srgbClr val="3DBB7A"/>
+          </a:solidFill>
+          <a:ln>
+            <a:noFill/>
+          </a:ln>
+        </p:spPr>
+        <p:style>
+          <a:lnRef idx="1">
+            <a:schemeClr val="accent1"/>
+          </a:lnRef>
+          <a:fillRef idx="3">
+            <a:schemeClr val="accent1"/>
+          </a:fillRef>
+          <a:effectRef idx="2">
+            <a:schemeClr val="accent1"/>
+          </a:effectRef>
+          <a:fontRef idx="minor">
+            <a:schemeClr val="lt1"/>
+          </a:fontRef>
+        </p:style>
+        <p:txBody>
+          <a:bodyPr rtlCol="0" anchor="ctr"/>
+          <a:lstStyle/>
+          <a:p>
+            <a:pPr algn="ctr"/>
+          </a:p>
+        </p:txBody>
+      </p:sp>
+      <p:sp>
+        <p:nvSpPr>
+          <p:cNvPr id="78" name="TextBox 77"/>
+          <p:cNvSpPr txBox="1"/>
+          <p:nvPr/>
+        </p:nvSpPr>
+        <p:spPr>
+          <a:xfrm>
+            <a:off x="5138928" y="4151376"/>
+            <a:ext cx="164592" cy="182880"/>
+          </a:xfrm>
+          <a:prstGeom prst="rect">
+            <a:avLst/>
+          </a:prstGeom>
+          <a:noFill/>
+        </p:spPr>
+        <p:txBody>
+          <a:bodyPr wrap="square">
+            <a:spAutoFit/>
+          </a:bodyPr>
+          <a:lstStyle/>
+          <a:p>
+            <a:pPr algn="l"/>
+            <a:r>
+              <a:rPr sz="900" b="1" i="0">
+                <a:solidFill>
+                  <a:srgbClr val="3DBB7A"/>
+                </a:solidFill>
+                <a:latin typeface="Calibri"/>
+              </a:rPr>
+              <a:t>✓</a:t>
+            </a:r>
+          </a:p>
+        </p:txBody>
+      </p:sp>
+      <p:sp>
+        <p:nvSpPr>
+          <p:cNvPr id="79" name="TextBox 78"/>
+          <p:cNvSpPr txBox="1"/>
+          <p:nvPr/>
+        </p:nvSpPr>
+        <p:spPr>
+          <a:xfrm>
+            <a:off x="5285232" y="4151376"/>
+            <a:ext cx="1801367" cy="182880"/>
+          </a:xfrm>
+          <a:prstGeom prst="rect">
+            <a:avLst/>
+          </a:prstGeom>
+          <a:noFill/>
+        </p:spPr>
+        <p:txBody>
+          <a:bodyPr wrap="square">
+            <a:spAutoFit/>
+          </a:bodyPr>
+          <a:lstStyle/>
+          <a:p>
+            <a:pPr algn="l"/>
+            <a:r>
+              <a:rPr sz="850" b="1" i="0">
+                <a:solidFill>
+                  <a:srgbClr val="FFFFFF"/>
+                </a:solidFill>
+                <a:latin typeface="Calibri"/>
+              </a:rPr>
+              <a:t>Board Chair</a:t>
+            </a:r>
+          </a:p>
+        </p:txBody>
+      </p:sp>
+      <p:sp>
+        <p:nvSpPr>
+          <p:cNvPr id="80" name="TextBox 79"/>
+          <p:cNvSpPr txBox="1"/>
+          <p:nvPr/>
+        </p:nvSpPr>
+        <p:spPr>
+          <a:xfrm>
+            <a:off x="5285232" y="4334256"/>
+            <a:ext cx="1801367" cy="155448"/>
+          </a:xfrm>
+          <a:prstGeom prst="rect">
+            <a:avLst/>
+          </a:prstGeom>
+          <a:noFill/>
+        </p:spPr>
+        <p:txBody>
+          <a:bodyPr wrap="square">
+            <a:spAutoFit/>
+          </a:bodyPr>
+          <a:lstStyle/>
+          <a:p>
+            <a:pPr algn="l"/>
+            <a:r>
+              <a:rPr sz="750" b="0" i="0">
+                <a:solidFill>
+                  <a:srgbClr val="9096B2"/>
+                </a:solidFill>
+                <a:latin typeface="Calibri"/>
+              </a:rPr>
+              <a:t>Alerted  ·  4:01</a:t>
+            </a:r>
+          </a:p>
+        </p:txBody>
+      </p:sp>
+      <p:sp>
+        <p:nvSpPr>
+          <p:cNvPr id="81" name="Rectangle 80"/>
+          <p:cNvSpPr/>
+          <p:nvPr/>
+        </p:nvSpPr>
+        <p:spPr>
+          <a:xfrm>
+            <a:off x="5084064" y="4581144"/>
+            <a:ext cx="2057399" cy="402336"/>
+          </a:xfrm>
+          <a:prstGeom prst="rect">
+            <a:avLst/>
+          </a:prstGeom>
+          <a:solidFill>
+            <a:srgbClr val="0C1434"/>
+          </a:solidFill>
+          <a:ln>
+            <a:noFill/>
+          </a:ln>
+        </p:spPr>
+        <p:style>
+          <a:lnRef idx="1">
+            <a:schemeClr val="accent1"/>
+          </a:lnRef>
+          <a:fillRef idx="3">
+            <a:schemeClr val="accent1"/>
+          </a:fillRef>
+          <a:effectRef idx="2">
+            <a:schemeClr val="accent1"/>
+          </a:effectRef>
+          <a:fontRef idx="minor">
+            <a:schemeClr val="lt1"/>
+          </a:fontRef>
+        </p:style>
+        <p:txBody>
+          <a:bodyPr rtlCol="0" anchor="ctr"/>
+          <a:lstStyle/>
+          <a:p>
+            <a:pPr algn="ctr"/>
+          </a:p>
+        </p:txBody>
+      </p:sp>
+      <p:sp>
+        <p:nvSpPr>
+          <p:cNvPr id="82" name="Rectangle 81"/>
+          <p:cNvSpPr/>
+          <p:nvPr/>
+        </p:nvSpPr>
+        <p:spPr>
+          <a:xfrm>
+            <a:off x="5084064" y="4581144"/>
+            <a:ext cx="27432" cy="402336"/>
+          </a:xfrm>
+          <a:prstGeom prst="rect">
+            <a:avLst/>
+          </a:prstGeom>
+          <a:solidFill>
+            <a:srgbClr val="3DBB7A"/>
+          </a:solidFill>
+          <a:ln>
+            <a:noFill/>
+          </a:ln>
+        </p:spPr>
+        <p:style>
+          <a:lnRef idx="1">
+            <a:schemeClr val="accent1"/>
+          </a:lnRef>
+          <a:fillRef idx="3">
+            <a:schemeClr val="accent1"/>
+          </a:fillRef>
+          <a:effectRef idx="2">
+            <a:schemeClr val="accent1"/>
+          </a:effectRef>
+          <a:fontRef idx="minor">
+            <a:schemeClr val="lt1"/>
+          </a:fontRef>
+        </p:style>
+        <p:txBody>
+          <a:bodyPr rtlCol="0" anchor="ctr"/>
+          <a:lstStyle/>
+          <a:p>
+            <a:pPr algn="ctr"/>
+          </a:p>
+        </p:txBody>
+      </p:sp>
+      <p:sp>
+        <p:nvSpPr>
+          <p:cNvPr id="83" name="TextBox 82"/>
+          <p:cNvSpPr txBox="1"/>
+          <p:nvPr/>
+        </p:nvSpPr>
+        <p:spPr>
+          <a:xfrm>
+            <a:off x="5138928" y="4617720"/>
+            <a:ext cx="164592" cy="182880"/>
+          </a:xfrm>
+          <a:prstGeom prst="rect">
+            <a:avLst/>
+          </a:prstGeom>
+          <a:noFill/>
+        </p:spPr>
+        <p:txBody>
+          <a:bodyPr wrap="square">
+            <a:spAutoFit/>
+          </a:bodyPr>
+          <a:lstStyle/>
+          <a:p>
+            <a:pPr algn="l"/>
+            <a:r>
+              <a:rPr sz="900" b="1" i="0">
+                <a:solidFill>
+                  <a:srgbClr val="3DBB7A"/>
+                </a:solidFill>
+                <a:latin typeface="Calibri"/>
+              </a:rPr>
+              <a:t>✓</a:t>
+            </a:r>
+          </a:p>
+        </p:txBody>
+      </p:sp>
+      <p:sp>
+        <p:nvSpPr>
+          <p:cNvPr id="84" name="TextBox 83"/>
+          <p:cNvSpPr txBox="1"/>
+          <p:nvPr/>
+        </p:nvSpPr>
+        <p:spPr>
+          <a:xfrm>
+            <a:off x="5285232" y="4617720"/>
+            <a:ext cx="1801367" cy="182880"/>
+          </a:xfrm>
+          <a:prstGeom prst="rect">
+            <a:avLst/>
+          </a:prstGeom>
+          <a:noFill/>
+        </p:spPr>
+        <p:txBody>
+          <a:bodyPr wrap="square">
+            <a:spAutoFit/>
+          </a:bodyPr>
+          <a:lstStyle/>
+          <a:p>
+            <a:pPr algn="l"/>
+            <a:r>
+              <a:rPr sz="850" b="1" i="0">
+                <a:solidFill>
+                  <a:srgbClr val="FFFFFF"/>
+                </a:solidFill>
+                <a:latin typeface="Calibri"/>
+              </a:rPr>
+              <a:t>Communications Director</a:t>
+            </a:r>
+          </a:p>
+        </p:txBody>
+      </p:sp>
+      <p:sp>
+        <p:nvSpPr>
+          <p:cNvPr id="85" name="TextBox 84"/>
+          <p:cNvSpPr txBox="1"/>
+          <p:nvPr/>
+        </p:nvSpPr>
+        <p:spPr>
+          <a:xfrm>
+            <a:off x="5285232" y="4800600"/>
+            <a:ext cx="1801367" cy="155448"/>
+          </a:xfrm>
+          <a:prstGeom prst="rect">
+            <a:avLst/>
+          </a:prstGeom>
+          <a:noFill/>
+        </p:spPr>
+        <p:txBody>
+          <a:bodyPr wrap="square">
+            <a:spAutoFit/>
+          </a:bodyPr>
+          <a:lstStyle/>
+          <a:p>
+            <a:pPr algn="l"/>
+            <a:r>
+              <a:rPr sz="750" b="0" i="0">
+                <a:solidFill>
+                  <a:srgbClr val="9096B2"/>
+                </a:solidFill>
+                <a:latin typeface="Calibri"/>
+              </a:rPr>
+              <a:t>Engaged  ·  5:14</a:t>
+            </a:r>
+          </a:p>
+        </p:txBody>
+      </p:sp>
+      <p:sp>
+        <p:nvSpPr>
+          <p:cNvPr id="86" name="Rectangle 85"/>
+          <p:cNvSpPr/>
+          <p:nvPr/>
+        </p:nvSpPr>
+        <p:spPr>
+          <a:xfrm>
+            <a:off x="5084064" y="5047488"/>
+            <a:ext cx="2057399" cy="402336"/>
+          </a:xfrm>
+          <a:prstGeom prst="rect">
+            <a:avLst/>
+          </a:prstGeom>
+          <a:solidFill>
+            <a:srgbClr val="0C1434"/>
+          </a:solidFill>
+          <a:ln>
+            <a:noFill/>
+          </a:ln>
+        </p:spPr>
+        <p:style>
+          <a:lnRef idx="1">
+            <a:schemeClr val="accent1"/>
+          </a:lnRef>
+          <a:fillRef idx="3">
+            <a:schemeClr val="accent1"/>
+          </a:fillRef>
+          <a:effectRef idx="2">
+            <a:schemeClr val="accent1"/>
+          </a:effectRef>
+          <a:fontRef idx="minor">
+            <a:schemeClr val="lt1"/>
+          </a:fontRef>
+        </p:style>
+        <p:txBody>
+          <a:bodyPr rtlCol="0" anchor="ctr"/>
+          <a:lstStyle/>
+          <a:p>
+            <a:pPr algn="ctr"/>
+          </a:p>
+        </p:txBody>
+      </p:sp>
+      <p:sp>
+        <p:nvSpPr>
+          <p:cNvPr id="87" name="Rectangle 86"/>
+          <p:cNvSpPr/>
+          <p:nvPr/>
+        </p:nvSpPr>
+        <p:spPr>
+          <a:xfrm>
+            <a:off x="5084064" y="5047488"/>
+            <a:ext cx="27432" cy="402336"/>
+          </a:xfrm>
+          <a:prstGeom prst="rect">
+            <a:avLst/>
+          </a:prstGeom>
+          <a:solidFill>
+            <a:srgbClr val="E08A20"/>
+          </a:solidFill>
+          <a:ln>
+            <a:noFill/>
+          </a:ln>
+        </p:spPr>
+        <p:style>
+          <a:lnRef idx="1">
+            <a:schemeClr val="accent1"/>
+          </a:lnRef>
+          <a:fillRef idx="3">
+            <a:schemeClr val="accent1"/>
+          </a:fillRef>
+          <a:effectRef idx="2">
+            <a:schemeClr val="accent1"/>
+          </a:effectRef>
+          <a:fontRef idx="minor">
+            <a:schemeClr val="lt1"/>
+          </a:fontRef>
+        </p:style>
+        <p:txBody>
+          <a:bodyPr rtlCol="0" anchor="ctr"/>
+          <a:lstStyle/>
+          <a:p>
+            <a:pPr algn="ctr"/>
+          </a:p>
+        </p:txBody>
+      </p:sp>
+      <p:sp>
+        <p:nvSpPr>
+          <p:cNvPr id="88" name="TextBox 87"/>
+          <p:cNvSpPr txBox="1"/>
+          <p:nvPr/>
+        </p:nvSpPr>
+        <p:spPr>
+          <a:xfrm>
+            <a:off x="5138928" y="5084064"/>
+            <a:ext cx="164592" cy="182880"/>
+          </a:xfrm>
+          <a:prstGeom prst="rect">
+            <a:avLst/>
+          </a:prstGeom>
+          <a:noFill/>
+        </p:spPr>
+        <p:txBody>
+          <a:bodyPr wrap="square">
+            <a:spAutoFit/>
+          </a:bodyPr>
+          <a:lstStyle/>
+          <a:p>
+            <a:pPr algn="l"/>
+            <a:r>
+              <a:rPr sz="900" b="1" i="0">
+                <a:solidFill>
+                  <a:srgbClr val="E08A20"/>
+                </a:solidFill>
+                <a:latin typeface="Calibri"/>
+              </a:rPr>
+              <a:t>◎</a:t>
+            </a:r>
+          </a:p>
+        </p:txBody>
+      </p:sp>
+      <p:sp>
+        <p:nvSpPr>
+          <p:cNvPr id="89" name="TextBox 88"/>
+          <p:cNvSpPr txBox="1"/>
+          <p:nvPr/>
+        </p:nvSpPr>
+        <p:spPr>
+          <a:xfrm>
+            <a:off x="5285232" y="5084064"/>
+            <a:ext cx="1801367" cy="182880"/>
+          </a:xfrm>
+          <a:prstGeom prst="rect">
+            <a:avLst/>
+          </a:prstGeom>
+          <a:noFill/>
+        </p:spPr>
+        <p:txBody>
+          <a:bodyPr wrap="square">
+            <a:spAutoFit/>
+          </a:bodyPr>
+          <a:lstStyle/>
+          <a:p>
+            <a:pPr algn="l"/>
+            <a:r>
+              <a:rPr sz="850" b="1" i="0">
+                <a:solidFill>
+                  <a:srgbClr val="FFFFFF"/>
+                </a:solidFill>
+                <a:latin typeface="Calibri"/>
+              </a:rPr>
+              <a:t>External PR Firm</a:t>
+            </a:r>
+          </a:p>
+        </p:txBody>
+      </p:sp>
+      <p:sp>
+        <p:nvSpPr>
+          <p:cNvPr id="90" name="TextBox 89"/>
+          <p:cNvSpPr txBox="1"/>
+          <p:nvPr/>
+        </p:nvSpPr>
+        <p:spPr>
+          <a:xfrm>
+            <a:off x="5285232" y="5266944"/>
+            <a:ext cx="1801367" cy="155448"/>
+          </a:xfrm>
+          <a:prstGeom prst="rect">
+            <a:avLst/>
+          </a:prstGeom>
+          <a:noFill/>
+        </p:spPr>
+        <p:txBody>
+          <a:bodyPr wrap="square">
+            <a:spAutoFit/>
+          </a:bodyPr>
+          <a:lstStyle/>
+          <a:p>
+            <a:pPr algn="l"/>
+            <a:r>
+              <a:rPr sz="750" b="0" i="0">
+                <a:solidFill>
+                  <a:srgbClr val="9096B2"/>
+                </a:solidFill>
+                <a:latin typeface="Calibri"/>
+              </a:rPr>
+              <a:t>Activating...</a:t>
+            </a:r>
+          </a:p>
+        </p:txBody>
+      </p:sp>
+      <p:sp>
+        <p:nvSpPr>
+          <p:cNvPr id="91" name="Rectangle 90"/>
+          <p:cNvSpPr/>
+          <p:nvPr/>
+        </p:nvSpPr>
+        <p:spPr>
+          <a:xfrm>
+            <a:off x="5084064" y="5513832"/>
+            <a:ext cx="2057399" cy="402336"/>
+          </a:xfrm>
+          <a:prstGeom prst="rect">
+            <a:avLst/>
+          </a:prstGeom>
+          <a:solidFill>
+            <a:srgbClr val="0C1434"/>
+          </a:solidFill>
+          <a:ln>
+            <a:noFill/>
+          </a:ln>
+        </p:spPr>
+        <p:style>
+          <a:lnRef idx="1">
+            <a:schemeClr val="accent1"/>
+          </a:lnRef>
+          <a:fillRef idx="3">
+            <a:schemeClr val="accent1"/>
+          </a:fillRef>
+          <a:effectRef idx="2">
+            <a:schemeClr val="accent1"/>
+          </a:effectRef>
+          <a:fontRef idx="minor">
+            <a:schemeClr val="lt1"/>
+          </a:fontRef>
+        </p:style>
+        <p:txBody>
+          <a:bodyPr rtlCol="0" anchor="ctr"/>
+          <a:lstStyle/>
+          <a:p>
+            <a:pPr algn="ctr"/>
+          </a:p>
+        </p:txBody>
+      </p:sp>
+      <p:sp>
+        <p:nvSpPr>
+          <p:cNvPr id="92" name="Rectangle 91"/>
+          <p:cNvSpPr/>
+          <p:nvPr/>
+        </p:nvSpPr>
+        <p:spPr>
+          <a:xfrm>
+            <a:off x="5084064" y="5513832"/>
+            <a:ext cx="27432" cy="402336"/>
+          </a:xfrm>
+          <a:prstGeom prst="rect">
+            <a:avLst/>
+          </a:prstGeom>
+          <a:solidFill>
+            <a:srgbClr val="555C78"/>
+          </a:solidFill>
+          <a:ln>
+            <a:noFill/>
+          </a:ln>
+        </p:spPr>
+        <p:style>
+          <a:lnRef idx="1">
+            <a:schemeClr val="accent1"/>
+          </a:lnRef>
+          <a:fillRef idx="3">
+            <a:schemeClr val="accent1"/>
+          </a:fillRef>
+          <a:effectRef idx="2">
+            <a:schemeClr val="accent1"/>
+          </a:effectRef>
+          <a:fontRef idx="minor">
+            <a:schemeClr val="lt1"/>
+          </a:fontRef>
+        </p:style>
+        <p:txBody>
+          <a:bodyPr rtlCol="0" anchor="ctr"/>
+          <a:lstStyle/>
+          <a:p>
+            <a:pPr algn="ctr"/>
+          </a:p>
+        </p:txBody>
+      </p:sp>
+      <p:sp>
+        <p:nvSpPr>
+          <p:cNvPr id="93" name="TextBox 92"/>
+          <p:cNvSpPr txBox="1"/>
+          <p:nvPr/>
+        </p:nvSpPr>
+        <p:spPr>
+          <a:xfrm>
+            <a:off x="5138928" y="5550408"/>
+            <a:ext cx="164592" cy="182880"/>
+          </a:xfrm>
+          <a:prstGeom prst="rect">
+            <a:avLst/>
+          </a:prstGeom>
+          <a:noFill/>
+        </p:spPr>
+        <p:txBody>
+          <a:bodyPr wrap="square">
+            <a:spAutoFit/>
+          </a:bodyPr>
+          <a:lstStyle/>
+          <a:p>
+            <a:pPr algn="l"/>
+            <a:r>
+              <a:rPr sz="900" b="1" i="0">
+                <a:solidFill>
+                  <a:srgbClr val="555C78"/>
+                </a:solidFill>
+                <a:latin typeface="Calibri"/>
+              </a:rPr>
+              <a:t>○</a:t>
+            </a:r>
+          </a:p>
+        </p:txBody>
+      </p:sp>
+      <p:sp>
+        <p:nvSpPr>
+          <p:cNvPr id="94" name="TextBox 93"/>
+          <p:cNvSpPr txBox="1"/>
+          <p:nvPr/>
+        </p:nvSpPr>
+        <p:spPr>
+          <a:xfrm>
+            <a:off x="5285232" y="5550408"/>
+            <a:ext cx="1801367" cy="182880"/>
+          </a:xfrm>
+          <a:prstGeom prst="rect">
+            <a:avLst/>
+          </a:prstGeom>
+          <a:noFill/>
+        </p:spPr>
+        <p:txBody>
+          <a:bodyPr wrap="square">
+            <a:spAutoFit/>
+          </a:bodyPr>
+          <a:lstStyle/>
+          <a:p>
+            <a:pPr algn="l"/>
+            <a:r>
+              <a:rPr sz="850" b="1" i="0">
+                <a:solidFill>
+                  <a:srgbClr val="FFFFFF"/>
+                </a:solidFill>
+                <a:latin typeface="Calibri"/>
+              </a:rPr>
+              <a:t>M&amp;A Counsel</a:t>
+            </a:r>
+          </a:p>
+        </p:txBody>
+      </p:sp>
+      <p:sp>
+        <p:nvSpPr>
+          <p:cNvPr id="95" name="TextBox 94"/>
+          <p:cNvSpPr txBox="1"/>
+          <p:nvPr/>
+        </p:nvSpPr>
+        <p:spPr>
+          <a:xfrm>
+            <a:off x="5285232" y="5733288"/>
+            <a:ext cx="1801367" cy="155448"/>
+          </a:xfrm>
+          <a:prstGeom prst="rect">
+            <a:avLst/>
+          </a:prstGeom>
+          <a:noFill/>
+        </p:spPr>
+        <p:txBody>
+          <a:bodyPr wrap="square">
+            <a:spAutoFit/>
+          </a:bodyPr>
+          <a:lstStyle/>
+          <a:p>
+            <a:pPr algn="l"/>
+            <a:r>
+              <a:rPr sz="750" b="0" i="0">
+                <a:solidFill>
+                  <a:srgbClr val="9096B2"/>
+                </a:solidFill>
+                <a:latin typeface="Calibri"/>
+              </a:rPr>
+              <a:t>Queued</a:t>
+            </a:r>
+          </a:p>
+        </p:txBody>
+      </p:sp>
+      <p:sp>
+        <p:nvSpPr>
+          <p:cNvPr id="96" name="TextBox 95"/>
+          <p:cNvSpPr txBox="1"/>
+          <p:nvPr/>
+        </p:nvSpPr>
+        <p:spPr>
+          <a:xfrm>
+            <a:off x="7513319" y="2249424"/>
+            <a:ext cx="2020824" cy="164592"/>
+          </a:xfrm>
+          <a:prstGeom prst="rect">
+            <a:avLst/>
+          </a:prstGeom>
+          <a:noFill/>
+        </p:spPr>
+        <p:txBody>
+          <a:bodyPr wrap="square">
+            <a:spAutoFit/>
+          </a:bodyPr>
+          <a:lstStyle/>
+          <a:p>
+            <a:pPr algn="l"/>
+            <a:r>
+              <a:rPr sz="700" b="0" i="0">
+                <a:solidFill>
+                  <a:srgbClr val="9096B2"/>
+                </a:solidFill>
+                <a:latin typeface="Calibri"/>
+              </a:rPr>
+              <a:t>TOTAL PRE-AUTHORIZED</a:t>
+            </a:r>
+          </a:p>
+        </p:txBody>
+      </p:sp>
+      <p:sp>
+        <p:nvSpPr>
+          <p:cNvPr id="97" name="TextBox 96"/>
+          <p:cNvSpPr txBox="1"/>
+          <p:nvPr/>
+        </p:nvSpPr>
+        <p:spPr>
+          <a:xfrm>
+            <a:off x="7513319" y="2414016"/>
+            <a:ext cx="2020824" cy="256032"/>
+          </a:xfrm>
+          <a:prstGeom prst="rect">
+            <a:avLst/>
+          </a:prstGeom>
+          <a:noFill/>
+        </p:spPr>
+        <p:txBody>
+          <a:bodyPr wrap="square">
+            <a:spAutoFit/>
+          </a:bodyPr>
+          <a:lstStyle/>
+          <a:p>
+            <a:pPr algn="l"/>
+            <a:r>
+              <a:rPr sz="1600" b="1" i="0">
+                <a:solidFill>
+                  <a:srgbClr val="C9A84C"/>
+                </a:solidFill>
+                <a:latin typeface="Georgia"/>
+              </a:rPr>
+              <a:t>$2,400,000</a:t>
+            </a:r>
+          </a:p>
+        </p:txBody>
+      </p:sp>
+      <p:sp>
+        <p:nvSpPr>
+          <p:cNvPr id="98" name="TextBox 97"/>
+          <p:cNvSpPr txBox="1"/>
+          <p:nvPr/>
+        </p:nvSpPr>
+        <p:spPr>
+          <a:xfrm>
+            <a:off x="7513319" y="2670048"/>
+            <a:ext cx="2020824" cy="146304"/>
+          </a:xfrm>
+          <a:prstGeom prst="rect">
+            <a:avLst/>
+          </a:prstGeom>
+          <a:noFill/>
+        </p:spPr>
+        <p:txBody>
+          <a:bodyPr wrap="square">
+            <a:spAutoFit/>
+          </a:bodyPr>
+          <a:lstStyle/>
+          <a:p>
+            <a:pPr algn="l"/>
+            <a:r>
+              <a:rPr sz="750" b="0" i="0">
+                <a:solidFill>
+                  <a:srgbClr val="9096B2"/>
+                </a:solidFill>
+                <a:latin typeface="Calibri"/>
+              </a:rPr>
+              <a:t>3 cost centers unlocked</a:t>
+            </a:r>
+          </a:p>
+        </p:txBody>
+      </p:sp>
+      <p:sp>
+        <p:nvSpPr>
+          <p:cNvPr id="99" name="Rectangle 98"/>
+          <p:cNvSpPr/>
+          <p:nvPr/>
+        </p:nvSpPr>
+        <p:spPr>
+          <a:xfrm>
+            <a:off x="7495031" y="2834640"/>
+            <a:ext cx="2057399" cy="22860"/>
+          </a:xfrm>
+          <a:prstGeom prst="rect">
+            <a:avLst/>
+          </a:prstGeom>
+          <a:solidFill>
+            <a:srgbClr val="555C78"/>
+          </a:solidFill>
+          <a:ln>
+            <a:noFill/>
+          </a:ln>
+        </p:spPr>
+        <p:style>
+          <a:lnRef idx="1">
+            <a:schemeClr val="accent1"/>
+          </a:lnRef>
+          <a:fillRef idx="3">
+            <a:schemeClr val="accent1"/>
+          </a:fillRef>
+          <a:effectRef idx="2">
+            <a:schemeClr val="accent1"/>
+          </a:effectRef>
+          <a:fontRef idx="minor">
+            <a:schemeClr val="lt1"/>
+          </a:fontRef>
+        </p:style>
+        <p:txBody>
+          <a:bodyPr rtlCol="0" anchor="ctr"/>
+          <a:lstStyle/>
+          <a:p>
+            <a:pPr algn="ctr"/>
+          </a:p>
+        </p:txBody>
+      </p:sp>
+      <p:sp>
+        <p:nvSpPr>
+          <p:cNvPr id="100" name="Rectangle 99"/>
+          <p:cNvSpPr/>
+          <p:nvPr/>
+        </p:nvSpPr>
+        <p:spPr>
+          <a:xfrm>
+            <a:off x="7495031" y="2907792"/>
+            <a:ext cx="2057399" cy="457200"/>
+          </a:xfrm>
+          <a:prstGeom prst="rect">
+            <a:avLst/>
+          </a:prstGeom>
+          <a:solidFill>
+            <a:srgbClr val="0C1434"/>
+          </a:solidFill>
+          <a:ln>
+            <a:noFill/>
+          </a:ln>
+        </p:spPr>
+        <p:style>
+          <a:lnRef idx="1">
+            <a:schemeClr val="accent1"/>
+          </a:lnRef>
+          <a:fillRef idx="3">
+            <a:schemeClr val="accent1"/>
+          </a:fillRef>
+          <a:effectRef idx="2">
+            <a:schemeClr val="accent1"/>
+          </a:effectRef>
+          <a:fontRef idx="minor">
+            <a:schemeClr val="lt1"/>
+          </a:fontRef>
+        </p:style>
+        <p:txBody>
+          <a:bodyPr rtlCol="0" anchor="ctr"/>
+          <a:lstStyle/>
+          <a:p>
+            <a:pPr algn="ctr"/>
+          </a:p>
+        </p:txBody>
+      </p:sp>
+      <p:sp>
+        <p:nvSpPr>
+          <p:cNvPr id="101" name="Rectangle 100"/>
+          <p:cNvSpPr/>
+          <p:nvPr/>
+        </p:nvSpPr>
+        <p:spPr>
+          <a:xfrm>
+            <a:off x="7495031" y="2907792"/>
+            <a:ext cx="27432" cy="457200"/>
+          </a:xfrm>
+          <a:prstGeom prst="rect">
+            <a:avLst/>
+          </a:prstGeom>
+          <a:solidFill>
+            <a:srgbClr val="3DBB7A"/>
+          </a:solidFill>
+          <a:ln>
+            <a:noFill/>
+          </a:ln>
+        </p:spPr>
+        <p:style>
+          <a:lnRef idx="1">
+            <a:schemeClr val="accent1"/>
+          </a:lnRef>
+          <a:fillRef idx="3">
+            <a:schemeClr val="accent1"/>
+          </a:fillRef>
+          <a:effectRef idx="2">
+            <a:schemeClr val="accent1"/>
+          </a:effectRef>
+          <a:fontRef idx="minor">
+            <a:schemeClr val="lt1"/>
+          </a:fontRef>
+        </p:style>
+        <p:txBody>
+          <a:bodyPr rtlCol="0" anchor="ctr"/>
+          <a:lstStyle/>
+          <a:p>
+            <a:pPr algn="ctr"/>
+          </a:p>
+        </p:txBody>
+      </p:sp>
+      <p:sp>
+        <p:nvSpPr>
+          <p:cNvPr id="102" name="TextBox 101"/>
+          <p:cNvSpPr txBox="1"/>
+          <p:nvPr/>
+        </p:nvSpPr>
+        <p:spPr>
+          <a:xfrm>
+            <a:off x="7586471" y="2953512"/>
+            <a:ext cx="1911095" cy="182880"/>
+          </a:xfrm>
+          <a:prstGeom prst="rect">
+            <a:avLst/>
+          </a:prstGeom>
+          <a:noFill/>
+        </p:spPr>
+        <p:txBody>
+          <a:bodyPr wrap="square">
+            <a:spAutoFit/>
+          </a:bodyPr>
+          <a:lstStyle/>
+          <a:p>
+            <a:pPr algn="l"/>
+            <a:r>
+              <a:rPr sz="800" b="1" i="0">
+                <a:solidFill>
+                  <a:srgbClr val="FFFFFF"/>
+                </a:solidFill>
+                <a:latin typeface="Calibri"/>
+              </a:rPr>
+              <a:t>✓ Legal Retainer</a:t>
+            </a:r>
+          </a:p>
+        </p:txBody>
+      </p:sp>
+      <p:sp>
+        <p:nvSpPr>
+          <p:cNvPr id="103" name="TextBox 102"/>
+          <p:cNvSpPr txBox="1"/>
+          <p:nvPr/>
+        </p:nvSpPr>
+        <p:spPr>
+          <a:xfrm>
+            <a:off x="7586471" y="3154680"/>
+            <a:ext cx="1911095" cy="164592"/>
+          </a:xfrm>
+          <a:prstGeom prst="rect">
+            <a:avLst/>
+          </a:prstGeom>
+          <a:noFill/>
+        </p:spPr>
+        <p:txBody>
+          <a:bodyPr wrap="square">
+            <a:spAutoFit/>
+          </a:bodyPr>
+          <a:lstStyle/>
+          <a:p>
+            <a:pPr algn="l"/>
+            <a:r>
+              <a:rPr sz="950" b="1" i="0">
+                <a:solidFill>
+                  <a:srgbClr val="C9A84C"/>
+                </a:solidFill>
+                <a:latin typeface="Calibri"/>
+              </a:rPr>
+              <a:t>$800,000</a:t>
+            </a:r>
+          </a:p>
+        </p:txBody>
+      </p:sp>
+      <p:sp>
+        <p:nvSpPr>
+          <p:cNvPr id="104" name="Rectangle 103"/>
+          <p:cNvSpPr/>
+          <p:nvPr/>
+        </p:nvSpPr>
+        <p:spPr>
+          <a:xfrm>
+            <a:off x="7495031" y="3419856"/>
+            <a:ext cx="2057399" cy="457200"/>
+          </a:xfrm>
+          <a:prstGeom prst="rect">
+            <a:avLst/>
+          </a:prstGeom>
+          <a:solidFill>
+            <a:srgbClr val="0C1434"/>
+          </a:solidFill>
+          <a:ln>
+            <a:noFill/>
+          </a:ln>
+        </p:spPr>
+        <p:style>
+          <a:lnRef idx="1">
+            <a:schemeClr val="accent1"/>
+          </a:lnRef>
+          <a:fillRef idx="3">
+            <a:schemeClr val="accent1"/>
+          </a:fillRef>
+          <a:effectRef idx="2">
+            <a:schemeClr val="accent1"/>
+          </a:effectRef>
+          <a:fontRef idx="minor">
+            <a:schemeClr val="lt1"/>
+          </a:fontRef>
+        </p:style>
+        <p:txBody>
+          <a:bodyPr rtlCol="0" anchor="ctr"/>
+          <a:lstStyle/>
+          <a:p>
+            <a:pPr algn="ctr"/>
+          </a:p>
+        </p:txBody>
+      </p:sp>
+      <p:sp>
+        <p:nvSpPr>
+          <p:cNvPr id="105" name="Rectangle 104"/>
+          <p:cNvSpPr/>
+          <p:nvPr/>
+        </p:nvSpPr>
+        <p:spPr>
+          <a:xfrm>
+            <a:off x="7495031" y="3419856"/>
+            <a:ext cx="27432" cy="457200"/>
+          </a:xfrm>
+          <a:prstGeom prst="rect">
+            <a:avLst/>
+          </a:prstGeom>
+          <a:solidFill>
+            <a:srgbClr val="3DBB7A"/>
+          </a:solidFill>
+          <a:ln>
+            <a:noFill/>
+          </a:ln>
+        </p:spPr>
+        <p:style>
+          <a:lnRef idx="1">
+            <a:schemeClr val="accent1"/>
+          </a:lnRef>
+          <a:fillRef idx="3">
+            <a:schemeClr val="accent1"/>
+          </a:fillRef>
+          <a:effectRef idx="2">
+            <a:schemeClr val="accent1"/>
+          </a:effectRef>
+          <a:fontRef idx="minor">
+            <a:schemeClr val="lt1"/>
+          </a:fontRef>
+        </p:style>
+        <p:txBody>
+          <a:bodyPr rtlCol="0" anchor="ctr"/>
+          <a:lstStyle/>
+          <a:p>
+            <a:pPr algn="ctr"/>
+          </a:p>
+        </p:txBody>
+      </p:sp>
+      <p:sp>
+        <p:nvSpPr>
+          <p:cNvPr id="106" name="TextBox 105"/>
+          <p:cNvSpPr txBox="1"/>
+          <p:nvPr/>
+        </p:nvSpPr>
+        <p:spPr>
+          <a:xfrm>
+            <a:off x="7586471" y="3465576"/>
+            <a:ext cx="1911095" cy="182880"/>
+          </a:xfrm>
+          <a:prstGeom prst="rect">
+            <a:avLst/>
+          </a:prstGeom>
+          <a:noFill/>
+        </p:spPr>
+        <p:txBody>
+          <a:bodyPr wrap="square">
+            <a:spAutoFit/>
+          </a:bodyPr>
+          <a:lstStyle/>
+          <a:p>
+            <a:pPr algn="l"/>
+            <a:r>
+              <a:rPr sz="800" b="1" i="0">
+                <a:solidFill>
+                  <a:srgbClr val="FFFFFF"/>
+                </a:solidFill>
+                <a:latin typeface="Calibri"/>
+              </a:rPr>
+              <a:t>✓ PR / Crisis Comms</a:t>
+            </a:r>
+          </a:p>
+        </p:txBody>
+      </p:sp>
+      <p:sp>
+        <p:nvSpPr>
+          <p:cNvPr id="107" name="TextBox 106"/>
+          <p:cNvSpPr txBox="1"/>
+          <p:nvPr/>
+        </p:nvSpPr>
+        <p:spPr>
+          <a:xfrm>
+            <a:off x="7586471" y="3666744"/>
+            <a:ext cx="1911095" cy="164592"/>
+          </a:xfrm>
+          <a:prstGeom prst="rect">
+            <a:avLst/>
+          </a:prstGeom>
+          <a:noFill/>
+        </p:spPr>
+        <p:txBody>
+          <a:bodyPr wrap="square">
+            <a:spAutoFit/>
+          </a:bodyPr>
+          <a:lstStyle/>
+          <a:p>
+            <a:pPr algn="l"/>
+            <a:r>
+              <a:rPr sz="950" b="1" i="0">
+                <a:solidFill>
+                  <a:srgbClr val="C9A84C"/>
+                </a:solidFill>
+                <a:latin typeface="Calibri"/>
+              </a:rPr>
+              <a:t>$400,000</a:t>
+            </a:r>
+          </a:p>
+        </p:txBody>
+      </p:sp>
+      <p:sp>
+        <p:nvSpPr>
+          <p:cNvPr id="108" name="Rectangle 107"/>
+          <p:cNvSpPr/>
+          <p:nvPr/>
+        </p:nvSpPr>
+        <p:spPr>
+          <a:xfrm>
+            <a:off x="7495031" y="3931920"/>
+            <a:ext cx="2057399" cy="457200"/>
+          </a:xfrm>
+          <a:prstGeom prst="rect">
+            <a:avLst/>
+          </a:prstGeom>
+          <a:solidFill>
+            <a:srgbClr val="0C1434"/>
+          </a:solidFill>
+          <a:ln>
+            <a:noFill/>
+          </a:ln>
+        </p:spPr>
+        <p:style>
+          <a:lnRef idx="1">
+            <a:schemeClr val="accent1"/>
+          </a:lnRef>
+          <a:fillRef idx="3">
+            <a:schemeClr val="accent1"/>
+          </a:fillRef>
+          <a:effectRef idx="2">
+            <a:schemeClr val="accent1"/>
+          </a:effectRef>
+          <a:fontRef idx="minor">
+            <a:schemeClr val="lt1"/>
+          </a:fontRef>
+        </p:style>
+        <p:txBody>
+          <a:bodyPr rtlCol="0" anchor="ctr"/>
+          <a:lstStyle/>
+          <a:p>
+            <a:pPr algn="ctr"/>
+          </a:p>
+        </p:txBody>
+      </p:sp>
+      <p:sp>
+        <p:nvSpPr>
+          <p:cNvPr id="109" name="Rectangle 108"/>
+          <p:cNvSpPr/>
+          <p:nvPr/>
+        </p:nvSpPr>
+        <p:spPr>
+          <a:xfrm>
+            <a:off x="7495031" y="3931920"/>
+            <a:ext cx="27432" cy="457200"/>
+          </a:xfrm>
+          <a:prstGeom prst="rect">
+            <a:avLst/>
+          </a:prstGeom>
+          <a:solidFill>
+            <a:srgbClr val="3DBB7A"/>
+          </a:solidFill>
+          <a:ln>
+            <a:noFill/>
+          </a:ln>
+        </p:spPr>
+        <p:style>
+          <a:lnRef idx="1">
+            <a:schemeClr val="accent1"/>
+          </a:lnRef>
+          <a:fillRef idx="3">
+            <a:schemeClr val="accent1"/>
+          </a:fillRef>
+          <a:effectRef idx="2">
+            <a:schemeClr val="accent1"/>
+          </a:effectRef>
+          <a:fontRef idx="minor">
+            <a:schemeClr val="lt1"/>
+          </a:fontRef>
+        </p:style>
+        <p:txBody>
+          <a:bodyPr rtlCol="0" anchor="ctr"/>
+          <a:lstStyle/>
+          <a:p>
+            <a:pPr algn="ctr"/>
+          </a:p>
+        </p:txBody>
+      </p:sp>
+      <p:sp>
+        <p:nvSpPr>
+          <p:cNvPr id="110" name="TextBox 109"/>
+          <p:cNvSpPr txBox="1"/>
+          <p:nvPr/>
+        </p:nvSpPr>
+        <p:spPr>
+          <a:xfrm>
+            <a:off x="7586471" y="3977640"/>
+            <a:ext cx="1911095" cy="182880"/>
+          </a:xfrm>
+          <a:prstGeom prst="rect">
+            <a:avLst/>
+          </a:prstGeom>
+          <a:noFill/>
+        </p:spPr>
+        <p:txBody>
+          <a:bodyPr wrap="square">
+            <a:spAutoFit/>
+          </a:bodyPr>
+          <a:lstStyle/>
+          <a:p>
+            <a:pPr algn="l"/>
+            <a:r>
+              <a:rPr sz="800" b="1" i="0">
+                <a:solidFill>
+                  <a:srgbClr val="FFFFFF"/>
+                </a:solidFill>
+                <a:latin typeface="Calibri"/>
+              </a:rPr>
+              <a:t>✓ Investment Banking Advisory</a:t>
+            </a:r>
+          </a:p>
+        </p:txBody>
+      </p:sp>
+      <p:sp>
+        <p:nvSpPr>
+          <p:cNvPr id="111" name="TextBox 110"/>
+          <p:cNvSpPr txBox="1"/>
+          <p:nvPr/>
+        </p:nvSpPr>
+        <p:spPr>
+          <a:xfrm>
+            <a:off x="7586471" y="4178808"/>
+            <a:ext cx="1911095" cy="164592"/>
+          </a:xfrm>
+          <a:prstGeom prst="rect">
+            <a:avLst/>
+          </a:prstGeom>
+          <a:noFill/>
+        </p:spPr>
+        <p:txBody>
+          <a:bodyPr wrap="square">
+            <a:spAutoFit/>
+          </a:bodyPr>
+          <a:lstStyle/>
+          <a:p>
+            <a:pPr algn="l"/>
+            <a:r>
+              <a:rPr sz="950" b="1" i="0">
+                <a:solidFill>
+                  <a:srgbClr val="C9A84C"/>
+                </a:solidFill>
+                <a:latin typeface="Calibri"/>
+              </a:rPr>
+              <a:t>$750,000</a:t>
+            </a:r>
+          </a:p>
+        </p:txBody>
+      </p:sp>
+      <p:sp>
+        <p:nvSpPr>
+          <p:cNvPr id="112" name="Rectangle 111"/>
+          <p:cNvSpPr/>
+          <p:nvPr/>
+        </p:nvSpPr>
+        <p:spPr>
+          <a:xfrm>
+            <a:off x="7495031" y="4443984"/>
+            <a:ext cx="2057399" cy="457200"/>
+          </a:xfrm>
+          <a:prstGeom prst="rect">
+            <a:avLst/>
+          </a:prstGeom>
+          <a:solidFill>
+            <a:srgbClr val="0C1434"/>
+          </a:solidFill>
+          <a:ln>
+            <a:noFill/>
+          </a:ln>
+        </p:spPr>
+        <p:style>
+          <a:lnRef idx="1">
+            <a:schemeClr val="accent1"/>
+          </a:lnRef>
+          <a:fillRef idx="3">
+            <a:schemeClr val="accent1"/>
+          </a:fillRef>
+          <a:effectRef idx="2">
+            <a:schemeClr val="accent1"/>
+          </a:effectRef>
+          <a:fontRef idx="minor">
+            <a:schemeClr val="lt1"/>
+          </a:fontRef>
+        </p:style>
+        <p:txBody>
+          <a:bodyPr rtlCol="0" anchor="ctr"/>
+          <a:lstStyle/>
+          <a:p>
+            <a:pPr algn="ctr"/>
+          </a:p>
+        </p:txBody>
+      </p:sp>
+      <p:sp>
+        <p:nvSpPr>
+          <p:cNvPr id="113" name="Rectangle 112"/>
+          <p:cNvSpPr/>
+          <p:nvPr/>
+        </p:nvSpPr>
+        <p:spPr>
+          <a:xfrm>
+            <a:off x="7495031" y="4443984"/>
+            <a:ext cx="27432" cy="457200"/>
+          </a:xfrm>
+          <a:prstGeom prst="rect">
+            <a:avLst/>
+          </a:prstGeom>
+          <a:solidFill>
+            <a:srgbClr val="3DBB7A"/>
+          </a:solidFill>
+          <a:ln>
+            <a:noFill/>
+          </a:ln>
+        </p:spPr>
+        <p:style>
+          <a:lnRef idx="1">
+            <a:schemeClr val="accent1"/>
+          </a:lnRef>
+          <a:fillRef idx="3">
+            <a:schemeClr val="accent1"/>
+          </a:fillRef>
+          <a:effectRef idx="2">
+            <a:schemeClr val="accent1"/>
+          </a:effectRef>
+          <a:fontRef idx="minor">
+            <a:schemeClr val="lt1"/>
+          </a:fontRef>
+        </p:style>
+        <p:txBody>
+          <a:bodyPr rtlCol="0" anchor="ctr"/>
+          <a:lstStyle/>
+          <a:p>
+            <a:pPr algn="ctr"/>
+          </a:p>
+        </p:txBody>
+      </p:sp>
+      <p:sp>
+        <p:nvSpPr>
+          <p:cNvPr id="114" name="TextBox 113"/>
+          <p:cNvSpPr txBox="1"/>
+          <p:nvPr/>
+        </p:nvSpPr>
+        <p:spPr>
+          <a:xfrm>
+            <a:off x="7586471" y="4489704"/>
+            <a:ext cx="1911095" cy="182880"/>
+          </a:xfrm>
+          <a:prstGeom prst="rect">
+            <a:avLst/>
+          </a:prstGeom>
+          <a:noFill/>
+        </p:spPr>
+        <p:txBody>
+          <a:bodyPr wrap="square">
+            <a:spAutoFit/>
+          </a:bodyPr>
+          <a:lstStyle/>
+          <a:p>
+            <a:pPr algn="l"/>
+            <a:r>
+              <a:rPr sz="800" b="1" i="0">
+                <a:solidFill>
+                  <a:srgbClr val="FFFFFF"/>
+                </a:solidFill>
+                <a:latin typeface="Calibri"/>
+              </a:rPr>
+              <a:t>✓ Board Counsel</a:t>
+            </a:r>
+          </a:p>
+        </p:txBody>
+      </p:sp>
+      <p:sp>
+        <p:nvSpPr>
+          <p:cNvPr id="115" name="TextBox 114"/>
+          <p:cNvSpPr txBox="1"/>
+          <p:nvPr/>
+        </p:nvSpPr>
+        <p:spPr>
+          <a:xfrm>
+            <a:off x="7586471" y="4690872"/>
+            <a:ext cx="1911095" cy="164592"/>
+          </a:xfrm>
+          <a:prstGeom prst="rect">
+            <a:avLst/>
+          </a:prstGeom>
+          <a:noFill/>
+        </p:spPr>
+        <p:txBody>
+          <a:bodyPr wrap="square">
+            <a:spAutoFit/>
+          </a:bodyPr>
+          <a:lstStyle/>
+          <a:p>
+            <a:pPr algn="l"/>
+            <a:r>
+              <a:rPr sz="950" b="1" i="0">
+                <a:solidFill>
+                  <a:srgbClr val="C9A84C"/>
+                </a:solidFill>
+                <a:latin typeface="Calibri"/>
+              </a:rPr>
+              <a:t>$250,000</a:t>
+            </a:r>
+          </a:p>
+        </p:txBody>
+      </p:sp>
+      <p:sp>
+        <p:nvSpPr>
+          <p:cNvPr id="116" name="Rectangle 115"/>
+          <p:cNvSpPr/>
+          <p:nvPr/>
+        </p:nvSpPr>
+        <p:spPr>
+          <a:xfrm>
+            <a:off x="7495031" y="4956048"/>
+            <a:ext cx="2057399" cy="457200"/>
+          </a:xfrm>
+          <a:prstGeom prst="rect">
+            <a:avLst/>
+          </a:prstGeom>
+          <a:solidFill>
+            <a:srgbClr val="0C1434"/>
+          </a:solidFill>
+          <a:ln>
+            <a:noFill/>
+          </a:ln>
+        </p:spPr>
+        <p:style>
+          <a:lnRef idx="1">
+            <a:schemeClr val="accent1"/>
+          </a:lnRef>
+          <a:fillRef idx="3">
+            <a:schemeClr val="accent1"/>
+          </a:fillRef>
+          <a:effectRef idx="2">
+            <a:schemeClr val="accent1"/>
+          </a:effectRef>
+          <a:fontRef idx="minor">
+            <a:schemeClr val="lt1"/>
+          </a:fontRef>
+        </p:style>
+        <p:txBody>
+          <a:bodyPr rtlCol="0" anchor="ctr"/>
+          <a:lstStyle/>
+          <a:p>
+            <a:pPr algn="ctr"/>
+          </a:p>
+        </p:txBody>
+      </p:sp>
+      <p:sp>
+        <p:nvSpPr>
+          <p:cNvPr id="117" name="Rectangle 116"/>
+          <p:cNvSpPr/>
+          <p:nvPr/>
+        </p:nvSpPr>
+        <p:spPr>
+          <a:xfrm>
+            <a:off x="7495031" y="4956048"/>
+            <a:ext cx="27432" cy="457200"/>
+          </a:xfrm>
+          <a:prstGeom prst="rect">
+            <a:avLst/>
+          </a:prstGeom>
+          <a:solidFill>
+            <a:srgbClr val="E08A20"/>
+          </a:solidFill>
+          <a:ln>
+            <a:noFill/>
+          </a:ln>
+        </p:spPr>
+        <p:style>
+          <a:lnRef idx="1">
+            <a:schemeClr val="accent1"/>
+          </a:lnRef>
+          <a:fillRef idx="3">
+            <a:schemeClr val="accent1"/>
+          </a:fillRef>
+          <a:effectRef idx="2">
+            <a:schemeClr val="accent1"/>
+          </a:effectRef>
+          <a:fontRef idx="minor">
+            <a:schemeClr val="lt1"/>
+          </a:fontRef>
+        </p:style>
+        <p:txBody>
+          <a:bodyPr rtlCol="0" anchor="ctr"/>
+          <a:lstStyle/>
+          <a:p>
+            <a:pPr algn="ctr"/>
+          </a:p>
+        </p:txBody>
+      </p:sp>
+      <p:sp>
+        <p:nvSpPr>
+          <p:cNvPr id="118" name="TextBox 117"/>
+          <p:cNvSpPr txBox="1"/>
+          <p:nvPr/>
+        </p:nvSpPr>
+        <p:spPr>
+          <a:xfrm>
+            <a:off x="7586471" y="5001768"/>
+            <a:ext cx="1911095" cy="182880"/>
+          </a:xfrm>
+          <a:prstGeom prst="rect">
+            <a:avLst/>
+          </a:prstGeom>
+          <a:noFill/>
+        </p:spPr>
+        <p:txBody>
+          <a:bodyPr wrap="square">
+            <a:spAutoFit/>
+          </a:bodyPr>
+          <a:lstStyle/>
+          <a:p>
+            <a:pPr algn="l"/>
+            <a:r>
+              <a:rPr sz="800" b="1" i="0">
+                <a:solidFill>
+                  <a:srgbClr val="9096B2"/>
+                </a:solidFill>
+                <a:latin typeface="Calibri"/>
+              </a:rPr>
+              <a:t>◎ Shareholder Defense Fund</a:t>
+            </a:r>
+          </a:p>
+        </p:txBody>
+      </p:sp>
+      <p:sp>
+        <p:nvSpPr>
+          <p:cNvPr id="119" name="TextBox 118"/>
+          <p:cNvSpPr txBox="1"/>
+          <p:nvPr/>
+        </p:nvSpPr>
+        <p:spPr>
+          <a:xfrm>
+            <a:off x="7586471" y="5202936"/>
+            <a:ext cx="1911095" cy="164592"/>
+          </a:xfrm>
+          <a:prstGeom prst="rect">
+            <a:avLst/>
+          </a:prstGeom>
+          <a:noFill/>
+        </p:spPr>
+        <p:txBody>
+          <a:bodyPr wrap="square">
+            <a:spAutoFit/>
+          </a:bodyPr>
+          <a:lstStyle/>
+          <a:p>
+            <a:pPr algn="l"/>
+            <a:r>
+              <a:rPr sz="950" b="1" i="0">
+                <a:solidFill>
+                  <a:srgbClr val="9096B2"/>
+                </a:solidFill>
+                <a:latin typeface="Calibri"/>
+              </a:rPr>
+              <a:t>$200,000</a:t>
+            </a:r>
+          </a:p>
+        </p:txBody>
+      </p:sp>
+      <p:sp>
+        <p:nvSpPr>
+          <p:cNvPr id="120" name="Rectangle 119"/>
+          <p:cNvSpPr/>
+          <p:nvPr/>
+        </p:nvSpPr>
+        <p:spPr>
+          <a:xfrm>
+            <a:off x="9906000" y="2249424"/>
+            <a:ext cx="2057399" cy="402336"/>
+          </a:xfrm>
+          <a:prstGeom prst="rect">
+            <a:avLst/>
+          </a:prstGeom>
+          <a:solidFill>
+            <a:srgbClr val="0C1434"/>
+          </a:solidFill>
+          <a:ln>
+            <a:noFill/>
+          </a:ln>
+        </p:spPr>
+        <p:style>
+          <a:lnRef idx="1">
+            <a:schemeClr val="accent1"/>
+          </a:lnRef>
+          <a:fillRef idx="3">
+            <a:schemeClr val="accent1"/>
+          </a:fillRef>
+          <a:effectRef idx="2">
+            <a:schemeClr val="accent1"/>
+          </a:effectRef>
+          <a:fontRef idx="minor">
+            <a:schemeClr val="lt1"/>
+          </a:fontRef>
+        </p:style>
+        <p:txBody>
+          <a:bodyPr rtlCol="0" anchor="ctr"/>
+          <a:lstStyle/>
+          <a:p>
+            <a:pPr algn="ctr"/>
+          </a:p>
+        </p:txBody>
+      </p:sp>
+      <p:sp>
+        <p:nvSpPr>
+          <p:cNvPr id="121" name="Rectangle 120"/>
+          <p:cNvSpPr/>
+          <p:nvPr/>
+        </p:nvSpPr>
+        <p:spPr>
+          <a:xfrm>
+            <a:off x="9906000" y="2249424"/>
+            <a:ext cx="27432" cy="402336"/>
+          </a:xfrm>
+          <a:prstGeom prst="rect">
+            <a:avLst/>
+          </a:prstGeom>
+          <a:solidFill>
+            <a:srgbClr val="3DBB7A"/>
+          </a:solidFill>
+          <a:ln>
+            <a:noFill/>
+          </a:ln>
+        </p:spPr>
+        <p:style>
+          <a:lnRef idx="1">
+            <a:schemeClr val="accent1"/>
+          </a:lnRef>
+          <a:fillRef idx="3">
+            <a:schemeClr val="accent1"/>
+          </a:fillRef>
+          <a:effectRef idx="2">
+            <a:schemeClr val="accent1"/>
+          </a:effectRef>
+          <a:fontRef idx="minor">
+            <a:schemeClr val="lt1"/>
+          </a:fontRef>
+        </p:style>
+        <p:txBody>
+          <a:bodyPr rtlCol="0" anchor="ctr"/>
+          <a:lstStyle/>
+          <a:p>
+            <a:pPr algn="ctr"/>
+          </a:p>
+        </p:txBody>
+      </p:sp>
+      <p:sp>
+        <p:nvSpPr>
+          <p:cNvPr id="122" name="TextBox 121"/>
+          <p:cNvSpPr txBox="1"/>
+          <p:nvPr/>
+        </p:nvSpPr>
+        <p:spPr>
+          <a:xfrm>
+            <a:off x="9960864" y="2286000"/>
+            <a:ext cx="164592" cy="182880"/>
+          </a:xfrm>
+          <a:prstGeom prst="rect">
+            <a:avLst/>
+          </a:prstGeom>
+          <a:noFill/>
+        </p:spPr>
+        <p:txBody>
+          <a:bodyPr wrap="square">
+            <a:spAutoFit/>
+          </a:bodyPr>
+          <a:lstStyle/>
+          <a:p>
+            <a:pPr algn="l"/>
+            <a:r>
+              <a:rPr sz="900" b="1" i="0">
+                <a:solidFill>
+                  <a:srgbClr val="3DBB7A"/>
+                </a:solidFill>
+                <a:latin typeface="Calibri"/>
+              </a:rPr>
+              <a:t>✓</a:t>
+            </a:r>
+          </a:p>
+        </p:txBody>
+      </p:sp>
+      <p:sp>
+        <p:nvSpPr>
+          <p:cNvPr id="123" name="TextBox 122"/>
+          <p:cNvSpPr txBox="1"/>
+          <p:nvPr/>
+        </p:nvSpPr>
+        <p:spPr>
+          <a:xfrm>
+            <a:off x="10107168" y="2286000"/>
+            <a:ext cx="1801367" cy="182880"/>
+          </a:xfrm>
+          <a:prstGeom prst="rect">
+            <a:avLst/>
+          </a:prstGeom>
+          <a:noFill/>
+        </p:spPr>
+        <p:txBody>
+          <a:bodyPr wrap="square">
+            <a:spAutoFit/>
+          </a:bodyPr>
+          <a:lstStyle/>
+          <a:p>
+            <a:pPr algn="l"/>
+            <a:r>
+              <a:rPr sz="850" b="1" i="0">
+                <a:solidFill>
+                  <a:srgbClr val="FFFFFF"/>
+                </a:solidFill>
+                <a:latin typeface="Calibri"/>
+              </a:rPr>
+              <a:t>Board Alert</a:t>
+            </a:r>
+          </a:p>
+        </p:txBody>
+      </p:sp>
+      <p:sp>
+        <p:nvSpPr>
+          <p:cNvPr id="124" name="TextBox 123"/>
+          <p:cNvSpPr txBox="1"/>
+          <p:nvPr/>
+        </p:nvSpPr>
+        <p:spPr>
+          <a:xfrm>
+            <a:off x="10107168" y="2468880"/>
+            <a:ext cx="1801367" cy="155448"/>
+          </a:xfrm>
+          <a:prstGeom prst="rect">
+            <a:avLst/>
+          </a:prstGeom>
+          <a:noFill/>
+        </p:spPr>
+        <p:txBody>
+          <a:bodyPr wrap="square">
+            <a:spAutoFit/>
+          </a:bodyPr>
+          <a:lstStyle/>
+          <a:p>
+            <a:pPr algn="l"/>
+            <a:r>
+              <a:rPr sz="750" b="0" i="0">
+                <a:solidFill>
+                  <a:srgbClr val="3DBB97"/>
+                </a:solidFill>
+                <a:latin typeface="Calibri"/>
+              </a:rPr>
+              <a:t>Delivered</a:t>
+            </a:r>
+          </a:p>
+        </p:txBody>
+      </p:sp>
+      <p:sp>
+        <p:nvSpPr>
+          <p:cNvPr id="125" name="Rectangle 124"/>
+          <p:cNvSpPr/>
+          <p:nvPr/>
+        </p:nvSpPr>
+        <p:spPr>
+          <a:xfrm>
+            <a:off x="9906000" y="2715768"/>
+            <a:ext cx="2057399" cy="402336"/>
+          </a:xfrm>
+          <a:prstGeom prst="rect">
+            <a:avLst/>
+          </a:prstGeom>
+          <a:solidFill>
+            <a:srgbClr val="0C1434"/>
+          </a:solidFill>
+          <a:ln>
+            <a:noFill/>
+          </a:ln>
+        </p:spPr>
+        <p:style>
+          <a:lnRef idx="1">
+            <a:schemeClr val="accent1"/>
+          </a:lnRef>
+          <a:fillRef idx="3">
+            <a:schemeClr val="accent1"/>
+          </a:fillRef>
+          <a:effectRef idx="2">
+            <a:schemeClr val="accent1"/>
+          </a:effectRef>
+          <a:fontRef idx="minor">
+            <a:schemeClr val="lt1"/>
+          </a:fontRef>
+        </p:style>
+        <p:txBody>
+          <a:bodyPr rtlCol="0" anchor="ctr"/>
+          <a:lstStyle/>
+          <a:p>
+            <a:pPr algn="ctr"/>
+          </a:p>
+        </p:txBody>
+      </p:sp>
+      <p:sp>
+        <p:nvSpPr>
+          <p:cNvPr id="126" name="Rectangle 125"/>
+          <p:cNvSpPr/>
+          <p:nvPr/>
+        </p:nvSpPr>
+        <p:spPr>
+          <a:xfrm>
+            <a:off x="9906000" y="2715768"/>
+            <a:ext cx="27432" cy="402336"/>
+          </a:xfrm>
+          <a:prstGeom prst="rect">
+            <a:avLst/>
+          </a:prstGeom>
+          <a:solidFill>
+            <a:srgbClr val="3DBB7A"/>
+          </a:solidFill>
+          <a:ln>
+            <a:noFill/>
+          </a:ln>
+        </p:spPr>
+        <p:style>
+          <a:lnRef idx="1">
+            <a:schemeClr val="accent1"/>
+          </a:lnRef>
+          <a:fillRef idx="3">
+            <a:schemeClr val="accent1"/>
+          </a:fillRef>
+          <a:effectRef idx="2">
+            <a:schemeClr val="accent1"/>
+          </a:effectRef>
+          <a:fontRef idx="minor">
+            <a:schemeClr val="lt1"/>
+          </a:fontRef>
+        </p:style>
+        <p:txBody>
+          <a:bodyPr rtlCol="0" anchor="ctr"/>
+          <a:lstStyle/>
+          <a:p>
+            <a:pPr algn="ctr"/>
+          </a:p>
+        </p:txBody>
+      </p:sp>
+      <p:sp>
+        <p:nvSpPr>
+          <p:cNvPr id="127" name="TextBox 126"/>
+          <p:cNvSpPr txBox="1"/>
+          <p:nvPr/>
+        </p:nvSpPr>
+        <p:spPr>
+          <a:xfrm>
+            <a:off x="9960864" y="2752344"/>
+            <a:ext cx="164592" cy="182880"/>
+          </a:xfrm>
+          <a:prstGeom prst="rect">
+            <a:avLst/>
+          </a:prstGeom>
+          <a:noFill/>
+        </p:spPr>
+        <p:txBody>
+          <a:bodyPr wrap="square">
+            <a:spAutoFit/>
+          </a:bodyPr>
+          <a:lstStyle/>
+          <a:p>
+            <a:pPr algn="l"/>
+            <a:r>
+              <a:rPr sz="900" b="1" i="0">
+                <a:solidFill>
+                  <a:srgbClr val="3DBB7A"/>
+                </a:solidFill>
+                <a:latin typeface="Calibri"/>
+              </a:rPr>
+              <a:t>✓</a:t>
+            </a:r>
+          </a:p>
+        </p:txBody>
+      </p:sp>
+      <p:sp>
+        <p:nvSpPr>
+          <p:cNvPr id="128" name="TextBox 127"/>
+          <p:cNvSpPr txBox="1"/>
+          <p:nvPr/>
+        </p:nvSpPr>
+        <p:spPr>
+          <a:xfrm>
+            <a:off x="10107168" y="2752344"/>
+            <a:ext cx="1801367" cy="182880"/>
+          </a:xfrm>
+          <a:prstGeom prst="rect">
+            <a:avLst/>
+          </a:prstGeom>
+          <a:noFill/>
+        </p:spPr>
+        <p:txBody>
+          <a:bodyPr wrap="square">
+            <a:spAutoFit/>
+          </a:bodyPr>
+          <a:lstStyle/>
+          <a:p>
+            <a:pPr algn="l"/>
+            <a:r>
+              <a:rPr sz="850" b="1" i="0">
+                <a:solidFill>
+                  <a:srgbClr val="FFFFFF"/>
+                </a:solidFill>
+                <a:latin typeface="Calibri"/>
+              </a:rPr>
+              <a:t>Press Hold Statement</a:t>
+            </a:r>
+          </a:p>
+        </p:txBody>
+      </p:sp>
+      <p:sp>
+        <p:nvSpPr>
+          <p:cNvPr id="129" name="TextBox 128"/>
+          <p:cNvSpPr txBox="1"/>
+          <p:nvPr/>
+        </p:nvSpPr>
+        <p:spPr>
+          <a:xfrm>
+            <a:off x="10107168" y="2935224"/>
+            <a:ext cx="1801367" cy="155448"/>
+          </a:xfrm>
+          <a:prstGeom prst="rect">
+            <a:avLst/>
+          </a:prstGeom>
+          <a:noFill/>
+        </p:spPr>
+        <p:txBody>
+          <a:bodyPr wrap="square">
+            <a:spAutoFit/>
+          </a:bodyPr>
+          <a:lstStyle/>
+          <a:p>
+            <a:pPr algn="l"/>
+            <a:r>
+              <a:rPr sz="750" b="0" i="0">
+                <a:solidFill>
+                  <a:srgbClr val="9096B2"/>
+                </a:solidFill>
+                <a:latin typeface="Calibri"/>
+              </a:rPr>
+              <a:t>Drafted</a:t>
+            </a:r>
+          </a:p>
+        </p:txBody>
+      </p:sp>
+      <p:sp>
+        <p:nvSpPr>
+          <p:cNvPr id="130" name="Rectangle 129"/>
+          <p:cNvSpPr/>
+          <p:nvPr/>
+        </p:nvSpPr>
+        <p:spPr>
+          <a:xfrm>
+            <a:off x="9906000" y="3182112"/>
+            <a:ext cx="2057399" cy="402336"/>
+          </a:xfrm>
+          <a:prstGeom prst="rect">
+            <a:avLst/>
+          </a:prstGeom>
+          <a:solidFill>
+            <a:srgbClr val="0C1434"/>
+          </a:solidFill>
+          <a:ln>
+            <a:noFill/>
+          </a:ln>
+        </p:spPr>
+        <p:style>
+          <a:lnRef idx="1">
+            <a:schemeClr val="accent1"/>
+          </a:lnRef>
+          <a:fillRef idx="3">
+            <a:schemeClr val="accent1"/>
+          </a:fillRef>
+          <a:effectRef idx="2">
+            <a:schemeClr val="accent1"/>
+          </a:effectRef>
+          <a:fontRef idx="minor">
+            <a:schemeClr val="lt1"/>
+          </a:fontRef>
+        </p:style>
+        <p:txBody>
+          <a:bodyPr rtlCol="0" anchor="ctr"/>
+          <a:lstStyle/>
+          <a:p>
+            <a:pPr algn="ctr"/>
+          </a:p>
+        </p:txBody>
+      </p:sp>
+      <p:sp>
+        <p:nvSpPr>
+          <p:cNvPr id="131" name="Rectangle 130"/>
+          <p:cNvSpPr/>
+          <p:nvPr/>
+        </p:nvSpPr>
+        <p:spPr>
+          <a:xfrm>
+            <a:off x="9906000" y="3182112"/>
+            <a:ext cx="27432" cy="402336"/>
+          </a:xfrm>
+          <a:prstGeom prst="rect">
+            <a:avLst/>
+          </a:prstGeom>
+          <a:solidFill>
+            <a:srgbClr val="3DBB7A"/>
+          </a:solidFill>
+          <a:ln>
+            <a:noFill/>
+          </a:ln>
+        </p:spPr>
+        <p:style>
+          <a:lnRef idx="1">
+            <a:schemeClr val="accent1"/>
+          </a:lnRef>
+          <a:fillRef idx="3">
+            <a:schemeClr val="accent1"/>
+          </a:fillRef>
+          <a:effectRef idx="2">
+            <a:schemeClr val="accent1"/>
+          </a:effectRef>
+          <a:fontRef idx="minor">
+            <a:schemeClr val="lt1"/>
+          </a:fontRef>
+        </p:style>
+        <p:txBody>
+          <a:bodyPr rtlCol="0" anchor="ctr"/>
+          <a:lstStyle/>
+          <a:p>
+            <a:pPr algn="ctr"/>
+          </a:p>
+        </p:txBody>
+      </p:sp>
+      <p:sp>
+        <p:nvSpPr>
+          <p:cNvPr id="132" name="TextBox 131"/>
+          <p:cNvSpPr txBox="1"/>
+          <p:nvPr/>
+        </p:nvSpPr>
+        <p:spPr>
+          <a:xfrm>
+            <a:off x="9960864" y="3218688"/>
+            <a:ext cx="164592" cy="182880"/>
+          </a:xfrm>
+          <a:prstGeom prst="rect">
+            <a:avLst/>
+          </a:prstGeom>
+          <a:noFill/>
+        </p:spPr>
+        <p:txBody>
+          <a:bodyPr wrap="square">
+            <a:spAutoFit/>
+          </a:bodyPr>
+          <a:lstStyle/>
+          <a:p>
+            <a:pPr algn="l"/>
+            <a:r>
+              <a:rPr sz="900" b="1" i="0">
+                <a:solidFill>
+                  <a:srgbClr val="3DBB7A"/>
+                </a:solidFill>
+                <a:latin typeface="Calibri"/>
+              </a:rPr>
+              <a:t>✓</a:t>
+            </a:r>
+          </a:p>
+        </p:txBody>
+      </p:sp>
+      <p:sp>
+        <p:nvSpPr>
+          <p:cNvPr id="133" name="TextBox 132"/>
+          <p:cNvSpPr txBox="1"/>
+          <p:nvPr/>
+        </p:nvSpPr>
+        <p:spPr>
+          <a:xfrm>
+            <a:off x="10107168" y="3218688"/>
+            <a:ext cx="1801367" cy="182880"/>
+          </a:xfrm>
+          <a:prstGeom prst="rect">
+            <a:avLst/>
+          </a:prstGeom>
+          <a:noFill/>
+        </p:spPr>
+        <p:txBody>
+          <a:bodyPr wrap="square">
+            <a:spAutoFit/>
+          </a:bodyPr>
+          <a:lstStyle/>
+          <a:p>
+            <a:pPr algn="l"/>
+            <a:r>
+              <a:rPr sz="850" b="1" i="0">
+                <a:solidFill>
+                  <a:srgbClr val="FFFFFF"/>
+                </a:solidFill>
+                <a:latin typeface="Calibri"/>
+              </a:rPr>
+              <a:t>Shareholder Letter</a:t>
+            </a:r>
+          </a:p>
+        </p:txBody>
+      </p:sp>
+      <p:sp>
+        <p:nvSpPr>
+          <p:cNvPr id="134" name="TextBox 133"/>
+          <p:cNvSpPr txBox="1"/>
+          <p:nvPr/>
+        </p:nvSpPr>
+        <p:spPr>
+          <a:xfrm>
+            <a:off x="10107168" y="3401568"/>
+            <a:ext cx="1801367" cy="155448"/>
+          </a:xfrm>
+          <a:prstGeom prst="rect">
+            <a:avLst/>
+          </a:prstGeom>
+          <a:noFill/>
+        </p:spPr>
+        <p:txBody>
+          <a:bodyPr wrap="square">
+            <a:spAutoFit/>
+          </a:bodyPr>
+          <a:lstStyle/>
+          <a:p>
+            <a:pPr algn="l"/>
+            <a:r>
+              <a:rPr sz="750" b="0" i="0">
+                <a:solidFill>
+                  <a:srgbClr val="9096B2"/>
+                </a:solidFill>
+                <a:latin typeface="Calibri"/>
+              </a:rPr>
+              <a:t>Drafted</a:t>
+            </a:r>
+          </a:p>
+        </p:txBody>
+      </p:sp>
+      <p:sp>
+        <p:nvSpPr>
+          <p:cNvPr id="135" name="Rectangle 134"/>
+          <p:cNvSpPr/>
+          <p:nvPr/>
+        </p:nvSpPr>
+        <p:spPr>
+          <a:xfrm>
+            <a:off x="9906000" y="3648456"/>
+            <a:ext cx="2057399" cy="402336"/>
+          </a:xfrm>
+          <a:prstGeom prst="rect">
+            <a:avLst/>
+          </a:prstGeom>
+          <a:solidFill>
+            <a:srgbClr val="0C1434"/>
+          </a:solidFill>
+          <a:ln>
+            <a:noFill/>
+          </a:ln>
+        </p:spPr>
+        <p:style>
+          <a:lnRef idx="1">
+            <a:schemeClr val="accent1"/>
+          </a:lnRef>
+          <a:fillRef idx="3">
+            <a:schemeClr val="accent1"/>
+          </a:fillRef>
+          <a:effectRef idx="2">
+            <a:schemeClr val="accent1"/>
+          </a:effectRef>
+          <a:fontRef idx="minor">
+            <a:schemeClr val="lt1"/>
+          </a:fontRef>
+        </p:style>
+        <p:txBody>
+          <a:bodyPr rtlCol="0" anchor="ctr"/>
+          <a:lstStyle/>
+          <a:p>
+            <a:pPr algn="ctr"/>
+          </a:p>
+        </p:txBody>
+      </p:sp>
+      <p:sp>
+        <p:nvSpPr>
+          <p:cNvPr id="136" name="Rectangle 135"/>
+          <p:cNvSpPr/>
+          <p:nvPr/>
+        </p:nvSpPr>
+        <p:spPr>
+          <a:xfrm>
+            <a:off x="9906000" y="3648456"/>
+            <a:ext cx="27432" cy="402336"/>
+          </a:xfrm>
+          <a:prstGeom prst="rect">
+            <a:avLst/>
+          </a:prstGeom>
+          <a:solidFill>
+            <a:srgbClr val="3DBB7A"/>
+          </a:solidFill>
+          <a:ln>
+            <a:noFill/>
+          </a:ln>
+        </p:spPr>
+        <p:style>
+          <a:lnRef idx="1">
+            <a:schemeClr val="accent1"/>
+          </a:lnRef>
+          <a:fillRef idx="3">
+            <a:schemeClr val="accent1"/>
+          </a:fillRef>
+          <a:effectRef idx="2">
+            <a:schemeClr val="accent1"/>
+          </a:effectRef>
+          <a:fontRef idx="minor">
+            <a:schemeClr val="lt1"/>
+          </a:fontRef>
+        </p:style>
+        <p:txBody>
+          <a:bodyPr rtlCol="0" anchor="ctr"/>
+          <a:lstStyle/>
+          <a:p>
+            <a:pPr algn="ctr"/>
+          </a:p>
+        </p:txBody>
+      </p:sp>
+      <p:sp>
+        <p:nvSpPr>
+          <p:cNvPr id="137" name="TextBox 136"/>
+          <p:cNvSpPr txBox="1"/>
+          <p:nvPr/>
+        </p:nvSpPr>
+        <p:spPr>
+          <a:xfrm>
+            <a:off x="9960864" y="3685032"/>
+            <a:ext cx="164592" cy="182880"/>
+          </a:xfrm>
+          <a:prstGeom prst="rect">
+            <a:avLst/>
+          </a:prstGeom>
+          <a:noFill/>
+        </p:spPr>
+        <p:txBody>
+          <a:bodyPr wrap="square">
+            <a:spAutoFit/>
+          </a:bodyPr>
+          <a:lstStyle/>
+          <a:p>
+            <a:pPr algn="l"/>
+            <a:r>
+              <a:rPr sz="900" b="1" i="0">
+                <a:solidFill>
+                  <a:srgbClr val="3DBB7A"/>
+                </a:solidFill>
+                <a:latin typeface="Calibri"/>
+              </a:rPr>
+              <a:t>✓</a:t>
+            </a:r>
+          </a:p>
+        </p:txBody>
+      </p:sp>
+      <p:sp>
+        <p:nvSpPr>
+          <p:cNvPr id="138" name="TextBox 137"/>
+          <p:cNvSpPr txBox="1"/>
+          <p:nvPr/>
+        </p:nvSpPr>
+        <p:spPr>
+          <a:xfrm>
+            <a:off x="10107168" y="3685032"/>
+            <a:ext cx="1801367" cy="182880"/>
+          </a:xfrm>
+          <a:prstGeom prst="rect">
+            <a:avLst/>
+          </a:prstGeom>
+          <a:noFill/>
+        </p:spPr>
+        <p:txBody>
+          <a:bodyPr wrap="square">
+            <a:spAutoFit/>
+          </a:bodyPr>
+          <a:lstStyle/>
+          <a:p>
+            <a:pPr algn="l"/>
+            <a:r>
+              <a:rPr sz="850" b="1" i="0">
+                <a:solidFill>
+                  <a:srgbClr val="FFFFFF"/>
+                </a:solidFill>
+                <a:latin typeface="Calibri"/>
+              </a:rPr>
+              <a:t>Employee Communication</a:t>
+            </a:r>
+          </a:p>
+        </p:txBody>
+      </p:sp>
+      <p:sp>
+        <p:nvSpPr>
+          <p:cNvPr id="139" name="TextBox 138"/>
+          <p:cNvSpPr txBox="1"/>
+          <p:nvPr/>
+        </p:nvSpPr>
+        <p:spPr>
+          <a:xfrm>
+            <a:off x="10107168" y="3867912"/>
+            <a:ext cx="1801367" cy="155448"/>
+          </a:xfrm>
+          <a:prstGeom prst="rect">
+            <a:avLst/>
+          </a:prstGeom>
+          <a:noFill/>
+        </p:spPr>
+        <p:txBody>
+          <a:bodyPr wrap="square">
+            <a:spAutoFit/>
+          </a:bodyPr>
+          <a:lstStyle/>
+          <a:p>
+            <a:pPr algn="l"/>
+            <a:r>
+              <a:rPr sz="750" b="0" i="0">
+                <a:solidFill>
+                  <a:srgbClr val="9096B2"/>
+                </a:solidFill>
+                <a:latin typeface="Calibri"/>
+              </a:rPr>
+              <a:t>Queued</a:t>
+            </a:r>
+          </a:p>
+        </p:txBody>
+      </p:sp>
+      <p:sp>
+        <p:nvSpPr>
+          <p:cNvPr id="140" name="Rectangle 139"/>
+          <p:cNvSpPr/>
+          <p:nvPr/>
+        </p:nvSpPr>
+        <p:spPr>
+          <a:xfrm>
+            <a:off x="9906000" y="4114800"/>
+            <a:ext cx="2057399" cy="402336"/>
+          </a:xfrm>
+          <a:prstGeom prst="rect">
+            <a:avLst/>
+          </a:prstGeom>
+          <a:solidFill>
+            <a:srgbClr val="0C1434"/>
+          </a:solidFill>
+          <a:ln>
+            <a:noFill/>
+          </a:ln>
+        </p:spPr>
+        <p:style>
+          <a:lnRef idx="1">
+            <a:schemeClr val="accent1"/>
+          </a:lnRef>
+          <a:fillRef idx="3">
+            <a:schemeClr val="accent1"/>
+          </a:fillRef>
+          <a:effectRef idx="2">
+            <a:schemeClr val="accent1"/>
+          </a:effectRef>
+          <a:fontRef idx="minor">
+            <a:schemeClr val="lt1"/>
+          </a:fontRef>
+        </p:style>
+        <p:txBody>
+          <a:bodyPr rtlCol="0" anchor="ctr"/>
+          <a:lstStyle/>
+          <a:p>
+            <a:pPr algn="ctr"/>
+          </a:p>
+        </p:txBody>
+      </p:sp>
+      <p:sp>
+        <p:nvSpPr>
+          <p:cNvPr id="141" name="Rectangle 140"/>
+          <p:cNvSpPr/>
+          <p:nvPr/>
+        </p:nvSpPr>
+        <p:spPr>
+          <a:xfrm>
+            <a:off x="9906000" y="4114800"/>
+            <a:ext cx="27432" cy="402336"/>
+          </a:xfrm>
+          <a:prstGeom prst="rect">
+            <a:avLst/>
+          </a:prstGeom>
+          <a:solidFill>
+            <a:srgbClr val="3DBB7A"/>
+          </a:solidFill>
+          <a:ln>
+            <a:noFill/>
+          </a:ln>
+        </p:spPr>
+        <p:style>
+          <a:lnRef idx="1">
+            <a:schemeClr val="accent1"/>
+          </a:lnRef>
+          <a:fillRef idx="3">
+            <a:schemeClr val="accent1"/>
+          </a:fillRef>
+          <a:effectRef idx="2">
+            <a:schemeClr val="accent1"/>
+          </a:effectRef>
+          <a:fontRef idx="minor">
+            <a:schemeClr val="lt1"/>
+          </a:fontRef>
+        </p:style>
+        <p:txBody>
+          <a:bodyPr rtlCol="0" anchor="ctr"/>
+          <a:lstStyle/>
+          <a:p>
+            <a:pPr algn="ctr"/>
+          </a:p>
+        </p:txBody>
+      </p:sp>
+      <p:sp>
+        <p:nvSpPr>
+          <p:cNvPr id="142" name="TextBox 141"/>
+          <p:cNvSpPr txBox="1"/>
+          <p:nvPr/>
+        </p:nvSpPr>
+        <p:spPr>
+          <a:xfrm>
+            <a:off x="9960864" y="4151376"/>
+            <a:ext cx="164592" cy="182880"/>
+          </a:xfrm>
+          <a:prstGeom prst="rect">
+            <a:avLst/>
+          </a:prstGeom>
+          <a:noFill/>
+        </p:spPr>
+        <p:txBody>
+          <a:bodyPr wrap="square">
+            <a:spAutoFit/>
+          </a:bodyPr>
+          <a:lstStyle/>
+          <a:p>
+            <a:pPr algn="l"/>
+            <a:r>
+              <a:rPr sz="900" b="1" i="0">
+                <a:solidFill>
+                  <a:srgbClr val="3DBB7A"/>
+                </a:solidFill>
+                <a:latin typeface="Calibri"/>
+              </a:rPr>
+              <a:t>✓</a:t>
+            </a:r>
+          </a:p>
+        </p:txBody>
+      </p:sp>
+      <p:sp>
+        <p:nvSpPr>
+          <p:cNvPr id="143" name="TextBox 142"/>
+          <p:cNvSpPr txBox="1"/>
+          <p:nvPr/>
+        </p:nvSpPr>
+        <p:spPr>
+          <a:xfrm>
+            <a:off x="10107168" y="4151376"/>
+            <a:ext cx="1801367" cy="182880"/>
+          </a:xfrm>
+          <a:prstGeom prst="rect">
+            <a:avLst/>
+          </a:prstGeom>
+          <a:noFill/>
+        </p:spPr>
+        <p:txBody>
+          <a:bodyPr wrap="square">
+            <a:spAutoFit/>
+          </a:bodyPr>
+          <a:lstStyle/>
+          <a:p>
+            <a:pPr algn="l"/>
+            <a:r>
+              <a:rPr sz="850" b="1" i="0">
+                <a:solidFill>
+                  <a:srgbClr val="FFFFFF"/>
+                </a:solidFill>
+                <a:latin typeface="Calibri"/>
+              </a:rPr>
+              <a:t>Analyst Brief</a:t>
+            </a:r>
+          </a:p>
+        </p:txBody>
+      </p:sp>
+      <p:sp>
+        <p:nvSpPr>
+          <p:cNvPr id="144" name="TextBox 143"/>
+          <p:cNvSpPr txBox="1"/>
+          <p:nvPr/>
+        </p:nvSpPr>
+        <p:spPr>
+          <a:xfrm>
+            <a:off x="10107168" y="4334256"/>
+            <a:ext cx="1801367" cy="155448"/>
+          </a:xfrm>
+          <a:prstGeom prst="rect">
+            <a:avLst/>
+          </a:prstGeom>
+          <a:noFill/>
+        </p:spPr>
+        <p:txBody>
+          <a:bodyPr wrap="square">
+            <a:spAutoFit/>
+          </a:bodyPr>
+          <a:lstStyle/>
+          <a:p>
+            <a:pPr algn="l"/>
+            <a:r>
+              <a:rPr sz="750" b="0" i="0">
+                <a:solidFill>
+                  <a:srgbClr val="9096B2"/>
+                </a:solidFill>
+                <a:latin typeface="Calibri"/>
+              </a:rPr>
+              <a:t>Prepared</a:t>
+            </a:r>
+          </a:p>
+        </p:txBody>
+      </p:sp>
+      <p:sp>
+        <p:nvSpPr>
+          <p:cNvPr id="145" name="Rectangle 144"/>
+          <p:cNvSpPr/>
+          <p:nvPr/>
+        </p:nvSpPr>
+        <p:spPr>
+          <a:xfrm>
+            <a:off x="9906000" y="4581144"/>
+            <a:ext cx="2057399" cy="402336"/>
+          </a:xfrm>
+          <a:prstGeom prst="rect">
+            <a:avLst/>
+          </a:prstGeom>
+          <a:solidFill>
+            <a:srgbClr val="0C1434"/>
+          </a:solidFill>
+          <a:ln>
+            <a:noFill/>
+          </a:ln>
+        </p:spPr>
+        <p:style>
+          <a:lnRef idx="1">
+            <a:schemeClr val="accent1"/>
+          </a:lnRef>
+          <a:fillRef idx="3">
+            <a:schemeClr val="accent1"/>
+          </a:fillRef>
+          <a:effectRef idx="2">
+            <a:schemeClr val="accent1"/>
+          </a:effectRef>
+          <a:fontRef idx="minor">
+            <a:schemeClr val="lt1"/>
+          </a:fontRef>
+        </p:style>
+        <p:txBody>
+          <a:bodyPr rtlCol="0" anchor="ctr"/>
+          <a:lstStyle/>
+          <a:p>
+            <a:pPr algn="ctr"/>
+          </a:p>
+        </p:txBody>
+      </p:sp>
+      <p:sp>
+        <p:nvSpPr>
+          <p:cNvPr id="146" name="Rectangle 145"/>
+          <p:cNvSpPr/>
+          <p:nvPr/>
+        </p:nvSpPr>
+        <p:spPr>
+          <a:xfrm>
+            <a:off x="9906000" y="4581144"/>
+            <a:ext cx="27432" cy="402336"/>
+          </a:xfrm>
+          <a:prstGeom prst="rect">
+            <a:avLst/>
+          </a:prstGeom>
+          <a:solidFill>
+            <a:srgbClr val="3DBB7A"/>
+          </a:solidFill>
+          <a:ln>
+            <a:noFill/>
+          </a:ln>
+        </p:spPr>
+        <p:style>
+          <a:lnRef idx="1">
+            <a:schemeClr val="accent1"/>
+          </a:lnRef>
+          <a:fillRef idx="3">
+            <a:schemeClr val="accent1"/>
+          </a:fillRef>
+          <a:effectRef idx="2">
+            <a:schemeClr val="accent1"/>
+          </a:effectRef>
+          <a:fontRef idx="minor">
+            <a:schemeClr val="lt1"/>
+          </a:fontRef>
+        </p:style>
+        <p:txBody>
+          <a:bodyPr rtlCol="0" anchor="ctr"/>
+          <a:lstStyle/>
+          <a:p>
+            <a:pPr algn="ctr"/>
+          </a:p>
+        </p:txBody>
+      </p:sp>
+      <p:sp>
+        <p:nvSpPr>
+          <p:cNvPr id="147" name="TextBox 146"/>
+          <p:cNvSpPr txBox="1"/>
+          <p:nvPr/>
+        </p:nvSpPr>
+        <p:spPr>
+          <a:xfrm>
+            <a:off x="9960864" y="4617720"/>
+            <a:ext cx="164592" cy="182880"/>
+          </a:xfrm>
+          <a:prstGeom prst="rect">
+            <a:avLst/>
+          </a:prstGeom>
+          <a:noFill/>
+        </p:spPr>
+        <p:txBody>
+          <a:bodyPr wrap="square">
+            <a:spAutoFit/>
+          </a:bodyPr>
+          <a:lstStyle/>
+          <a:p>
+            <a:pPr algn="l"/>
+            <a:r>
+              <a:rPr sz="900" b="1" i="0">
+                <a:solidFill>
+                  <a:srgbClr val="3DBB7A"/>
+                </a:solidFill>
+                <a:latin typeface="Calibri"/>
+              </a:rPr>
+              <a:t>✓</a:t>
+            </a:r>
+          </a:p>
+        </p:txBody>
+      </p:sp>
+      <p:sp>
+        <p:nvSpPr>
+          <p:cNvPr id="148" name="TextBox 147"/>
+          <p:cNvSpPr txBox="1"/>
+          <p:nvPr/>
+        </p:nvSpPr>
+        <p:spPr>
+          <a:xfrm>
+            <a:off x="10107168" y="4617720"/>
+            <a:ext cx="1801367" cy="182880"/>
+          </a:xfrm>
+          <a:prstGeom prst="rect">
+            <a:avLst/>
+          </a:prstGeom>
+          <a:noFill/>
+        </p:spPr>
+        <p:txBody>
+          <a:bodyPr wrap="square">
+            <a:spAutoFit/>
+          </a:bodyPr>
+          <a:lstStyle/>
+          <a:p>
+            <a:pPr algn="l"/>
+            <a:r>
+              <a:rPr sz="850" b="1" i="0">
+                <a:solidFill>
+                  <a:srgbClr val="FFFFFF"/>
+                </a:solidFill>
+                <a:latin typeface="Calibri"/>
+              </a:rPr>
+              <a:t>SEC Response Template</a:t>
+            </a:r>
+          </a:p>
+        </p:txBody>
+      </p:sp>
+      <p:sp>
+        <p:nvSpPr>
+          <p:cNvPr id="149" name="TextBox 148"/>
+          <p:cNvSpPr txBox="1"/>
+          <p:nvPr/>
+        </p:nvSpPr>
+        <p:spPr>
+          <a:xfrm>
+            <a:off x="10107168" y="4800600"/>
+            <a:ext cx="1801367" cy="155448"/>
+          </a:xfrm>
+          <a:prstGeom prst="rect">
+            <a:avLst/>
+          </a:prstGeom>
+          <a:noFill/>
+        </p:spPr>
+        <p:txBody>
+          <a:bodyPr wrap="square">
+            <a:spAutoFit/>
+          </a:bodyPr>
+          <a:lstStyle/>
+          <a:p>
+            <a:pPr algn="l"/>
+            <a:r>
+              <a:rPr sz="750" b="0" i="0">
+                <a:solidFill>
+                  <a:srgbClr val="9096B2"/>
+                </a:solidFill>
+                <a:latin typeface="Calibri"/>
+              </a:rPr>
+              <a:t>Ready</a:t>
+            </a:r>
+          </a:p>
+        </p:txBody>
+      </p:sp>
+      <p:sp>
+        <p:nvSpPr>
+          <p:cNvPr id="150" name="Rectangle 149"/>
+          <p:cNvSpPr/>
+          <p:nvPr/>
+        </p:nvSpPr>
+        <p:spPr>
+          <a:xfrm>
+            <a:off x="9906000" y="5047488"/>
+            <a:ext cx="2057399" cy="402336"/>
+          </a:xfrm>
+          <a:prstGeom prst="rect">
+            <a:avLst/>
+          </a:prstGeom>
+          <a:solidFill>
+            <a:srgbClr val="0C1434"/>
+          </a:solidFill>
+          <a:ln>
+            <a:noFill/>
+          </a:ln>
+        </p:spPr>
+        <p:style>
+          <a:lnRef idx="1">
+            <a:schemeClr val="accent1"/>
+          </a:lnRef>
+          <a:fillRef idx="3">
+            <a:schemeClr val="accent1"/>
+          </a:fillRef>
+          <a:effectRef idx="2">
+            <a:schemeClr val="accent1"/>
+          </a:effectRef>
+          <a:fontRef idx="minor">
+            <a:schemeClr val="lt1"/>
+          </a:fontRef>
+        </p:style>
+        <p:txBody>
+          <a:bodyPr rtlCol="0" anchor="ctr"/>
+          <a:lstStyle/>
+          <a:p>
+            <a:pPr algn="ctr"/>
+          </a:p>
+        </p:txBody>
+      </p:sp>
+      <p:sp>
+        <p:nvSpPr>
+          <p:cNvPr id="151" name="Rectangle 150"/>
+          <p:cNvSpPr/>
+          <p:nvPr/>
+        </p:nvSpPr>
+        <p:spPr>
+          <a:xfrm>
+            <a:off x="9906000" y="5047488"/>
+            <a:ext cx="27432" cy="402336"/>
+          </a:xfrm>
+          <a:prstGeom prst="rect">
+            <a:avLst/>
+          </a:prstGeom>
+          <a:solidFill>
+            <a:srgbClr val="E08A20"/>
+          </a:solidFill>
+          <a:ln>
+            <a:noFill/>
+          </a:ln>
+        </p:spPr>
+        <p:style>
+          <a:lnRef idx="1">
+            <a:schemeClr val="accent1"/>
+          </a:lnRef>
+          <a:fillRef idx="3">
+            <a:schemeClr val="accent1"/>
+          </a:fillRef>
+          <a:effectRef idx="2">
+            <a:schemeClr val="accent1"/>
+          </a:effectRef>
+          <a:fontRef idx="minor">
+            <a:schemeClr val="lt1"/>
+          </a:fontRef>
+        </p:style>
+        <p:txBody>
+          <a:bodyPr rtlCol="0" anchor="ctr"/>
+          <a:lstStyle/>
+          <a:p>
+            <a:pPr algn="ctr"/>
+          </a:p>
+        </p:txBody>
+      </p:sp>
+      <p:sp>
+        <p:nvSpPr>
+          <p:cNvPr id="152" name="TextBox 151"/>
+          <p:cNvSpPr txBox="1"/>
+          <p:nvPr/>
+        </p:nvSpPr>
+        <p:spPr>
+          <a:xfrm>
+            <a:off x="9960864" y="5084064"/>
+            <a:ext cx="164592" cy="182880"/>
+          </a:xfrm>
+          <a:prstGeom prst="rect">
+            <a:avLst/>
+          </a:prstGeom>
+          <a:noFill/>
+        </p:spPr>
+        <p:txBody>
+          <a:bodyPr wrap="square">
+            <a:spAutoFit/>
+          </a:bodyPr>
+          <a:lstStyle/>
+          <a:p>
+            <a:pPr algn="l"/>
+            <a:r>
+              <a:rPr sz="900" b="1" i="0">
+                <a:solidFill>
+                  <a:srgbClr val="E08A20"/>
+                </a:solidFill>
+                <a:latin typeface="Calibri"/>
+              </a:rPr>
+              <a:t>◎</a:t>
+            </a:r>
+          </a:p>
+        </p:txBody>
+      </p:sp>
+      <p:sp>
+        <p:nvSpPr>
+          <p:cNvPr id="153" name="TextBox 152"/>
+          <p:cNvSpPr txBox="1"/>
+          <p:nvPr/>
+        </p:nvSpPr>
+        <p:spPr>
+          <a:xfrm>
+            <a:off x="10107168" y="5084064"/>
+            <a:ext cx="1801367" cy="182880"/>
+          </a:xfrm>
+          <a:prstGeom prst="rect">
+            <a:avLst/>
+          </a:prstGeom>
+          <a:noFill/>
+        </p:spPr>
+        <p:txBody>
+          <a:bodyPr wrap="square">
+            <a:spAutoFit/>
+          </a:bodyPr>
+          <a:lstStyle/>
+          <a:p>
+            <a:pPr algn="l"/>
+            <a:r>
+              <a:rPr sz="850" b="1" i="0">
+                <a:solidFill>
+                  <a:srgbClr val="FFFFFF"/>
+                </a:solidFill>
+                <a:latin typeface="Calibri"/>
+              </a:rPr>
+              <a:t>Media Q&amp;A Brief</a:t>
+            </a:r>
+          </a:p>
+        </p:txBody>
+      </p:sp>
+      <p:sp>
+        <p:nvSpPr>
+          <p:cNvPr id="154" name="TextBox 153"/>
+          <p:cNvSpPr txBox="1"/>
+          <p:nvPr/>
+        </p:nvSpPr>
+        <p:spPr>
+          <a:xfrm>
+            <a:off x="10107168" y="5266944"/>
+            <a:ext cx="1801367" cy="155448"/>
+          </a:xfrm>
+          <a:prstGeom prst="rect">
+            <a:avLst/>
+          </a:prstGeom>
+          <a:noFill/>
+        </p:spPr>
+        <p:txBody>
+          <a:bodyPr wrap="square">
+            <a:spAutoFit/>
+          </a:bodyPr>
+          <a:lstStyle/>
+          <a:p>
+            <a:pPr algn="l"/>
+            <a:r>
+              <a:rPr sz="750" b="0" i="0">
+                <a:solidFill>
+                  <a:srgbClr val="9096B2"/>
+                </a:solidFill>
+                <a:latin typeface="Calibri"/>
+              </a:rPr>
+              <a:t>In Progress</a:t>
+            </a:r>
+          </a:p>
+        </p:txBody>
+      </p:sp>
+      <p:sp>
+        <p:nvSpPr>
+          <p:cNvPr id="155" name="Rectangle 154"/>
+          <p:cNvSpPr/>
+          <p:nvPr/>
+        </p:nvSpPr>
+        <p:spPr>
+          <a:xfrm>
+            <a:off x="9906000" y="5513832"/>
+            <a:ext cx="2057399" cy="402336"/>
+          </a:xfrm>
+          <a:prstGeom prst="rect">
+            <a:avLst/>
+          </a:prstGeom>
+          <a:solidFill>
+            <a:srgbClr val="0C1434"/>
+          </a:solidFill>
+          <a:ln>
+            <a:noFill/>
+          </a:ln>
+        </p:spPr>
+        <p:style>
+          <a:lnRef idx="1">
+            <a:schemeClr val="accent1"/>
+          </a:lnRef>
+          <a:fillRef idx="3">
+            <a:schemeClr val="accent1"/>
+          </a:fillRef>
+          <a:effectRef idx="2">
+            <a:schemeClr val="accent1"/>
+          </a:effectRef>
+          <a:fontRef idx="minor">
+            <a:schemeClr val="lt1"/>
+          </a:fontRef>
+        </p:style>
+        <p:txBody>
+          <a:bodyPr rtlCol="0" anchor="ctr"/>
+          <a:lstStyle/>
+          <a:p>
+            <a:pPr algn="ctr"/>
+          </a:p>
+        </p:txBody>
+      </p:sp>
+      <p:sp>
+        <p:nvSpPr>
+          <p:cNvPr id="156" name="Rectangle 155"/>
+          <p:cNvSpPr/>
+          <p:nvPr/>
+        </p:nvSpPr>
+        <p:spPr>
+          <a:xfrm>
+            <a:off x="9906000" y="5513832"/>
+            <a:ext cx="27432" cy="402336"/>
+          </a:xfrm>
+          <a:prstGeom prst="rect">
+            <a:avLst/>
+          </a:prstGeom>
+          <a:solidFill>
+            <a:srgbClr val="555C78"/>
+          </a:solidFill>
+          <a:ln>
+            <a:noFill/>
+          </a:ln>
+        </p:spPr>
+        <p:style>
+          <a:lnRef idx="1">
+            <a:schemeClr val="accent1"/>
+          </a:lnRef>
+          <a:fillRef idx="3">
+            <a:schemeClr val="accent1"/>
+          </a:fillRef>
+          <a:effectRef idx="2">
+            <a:schemeClr val="accent1"/>
+          </a:effectRef>
+          <a:fontRef idx="minor">
+            <a:schemeClr val="lt1"/>
+          </a:fontRef>
+        </p:style>
+        <p:txBody>
+          <a:bodyPr rtlCol="0" anchor="ctr"/>
+          <a:lstStyle/>
+          <a:p>
+            <a:pPr algn="ctr"/>
+          </a:p>
+        </p:txBody>
+      </p:sp>
+      <p:sp>
+        <p:nvSpPr>
+          <p:cNvPr id="157" name="TextBox 156"/>
+          <p:cNvSpPr txBox="1"/>
+          <p:nvPr/>
+        </p:nvSpPr>
+        <p:spPr>
+          <a:xfrm>
+            <a:off x="9960864" y="5550408"/>
+            <a:ext cx="164592" cy="182880"/>
+          </a:xfrm>
+          <a:prstGeom prst="rect">
+            <a:avLst/>
+          </a:prstGeom>
+          <a:noFill/>
+        </p:spPr>
+        <p:txBody>
+          <a:bodyPr wrap="square">
+            <a:spAutoFit/>
+          </a:bodyPr>
+          <a:lstStyle/>
+          <a:p>
+            <a:pPr algn="l"/>
+            <a:r>
+              <a:rPr sz="900" b="1" i="0">
+                <a:solidFill>
+                  <a:srgbClr val="555C78"/>
+                </a:solidFill>
+                <a:latin typeface="Calibri"/>
+              </a:rPr>
+              <a:t>○</a:t>
+            </a:r>
+          </a:p>
+        </p:txBody>
+      </p:sp>
+      <p:sp>
+        <p:nvSpPr>
+          <p:cNvPr id="158" name="TextBox 157"/>
+          <p:cNvSpPr txBox="1"/>
+          <p:nvPr/>
+        </p:nvSpPr>
+        <p:spPr>
+          <a:xfrm>
+            <a:off x="10107168" y="5550408"/>
+            <a:ext cx="1801367" cy="182880"/>
+          </a:xfrm>
+          <a:prstGeom prst="rect">
+            <a:avLst/>
+          </a:prstGeom>
+          <a:noFill/>
+        </p:spPr>
+        <p:txBody>
+          <a:bodyPr wrap="square">
+            <a:spAutoFit/>
+          </a:bodyPr>
+          <a:lstStyle/>
+          <a:p>
+            <a:pPr algn="l"/>
+            <a:r>
+              <a:rPr sz="850" b="1" i="0">
+                <a:solidFill>
+                  <a:srgbClr val="FFFFFF"/>
+                </a:solidFill>
+                <a:latin typeface="Calibri"/>
+              </a:rPr>
+              <a:t>Town Hall Script</a:t>
+            </a:r>
+          </a:p>
+        </p:txBody>
+      </p:sp>
+      <p:sp>
+        <p:nvSpPr>
+          <p:cNvPr id="159" name="TextBox 158"/>
+          <p:cNvSpPr txBox="1"/>
+          <p:nvPr/>
+        </p:nvSpPr>
+        <p:spPr>
+          <a:xfrm>
+            <a:off x="10107168" y="5733288"/>
+            <a:ext cx="1801367" cy="155448"/>
+          </a:xfrm>
+          <a:prstGeom prst="rect">
+            <a:avLst/>
+          </a:prstGeom>
+          <a:noFill/>
+        </p:spPr>
+        <p:txBody>
+          <a:bodyPr wrap="square">
+            <a:spAutoFit/>
+          </a:bodyPr>
+          <a:lstStyle/>
+          <a:p>
+            <a:pPr algn="l"/>
+            <a:r>
+              <a:rPr sz="750" b="0" i="0">
+                <a:solidFill>
+                  <a:srgbClr val="9096B2"/>
+                </a:solidFill>
+                <a:latin typeface="Calibri"/>
+              </a:rPr>
+              <a:t>Pending</a:t>
+            </a:r>
+          </a:p>
+        </p:txBody>
+      </p:sp>
+      <p:sp>
+        <p:nvSpPr>
+          <p:cNvPr id="160" name="Rectangle 159"/>
+          <p:cNvSpPr/>
+          <p:nvPr/>
+        </p:nvSpPr>
+        <p:spPr>
+          <a:xfrm>
+            <a:off x="4864608" y="6108192"/>
+            <a:ext cx="7269480" cy="384048"/>
+          </a:xfrm>
+          <a:prstGeom prst="rect">
+            <a:avLst/>
+          </a:prstGeom>
+          <a:solidFill>
+            <a:srgbClr val="04140E"/>
+          </a:solidFill>
+          <a:ln>
+            <a:noFill/>
+          </a:ln>
+        </p:spPr>
+        <p:style>
+          <a:lnRef idx="1">
+            <a:schemeClr val="accent1"/>
+          </a:lnRef>
+          <a:fillRef idx="3">
+            <a:schemeClr val="accent1"/>
+          </a:fillRef>
+          <a:effectRef idx="2">
+            <a:schemeClr val="accent1"/>
+          </a:effectRef>
+          <a:fontRef idx="minor">
+            <a:schemeClr val="lt1"/>
+          </a:fontRef>
+        </p:style>
+        <p:txBody>
+          <a:bodyPr rtlCol="0" anchor="ctr"/>
+          <a:lstStyle/>
+          <a:p>
+            <a:pPr algn="ctr"/>
+          </a:p>
+        </p:txBody>
+      </p:sp>
+      <p:sp>
+        <p:nvSpPr>
+          <p:cNvPr id="161" name="Rectangle 160"/>
+          <p:cNvSpPr/>
+          <p:nvPr/>
+        </p:nvSpPr>
+        <p:spPr>
+          <a:xfrm>
+            <a:off x="4864608" y="6108192"/>
+            <a:ext cx="7269480" cy="27432"/>
+          </a:xfrm>
+          <a:prstGeom prst="rect">
+            <a:avLst/>
+          </a:prstGeom>
+          <a:solidFill>
+            <a:srgbClr val="3DBB97"/>
+          </a:solidFill>
+          <a:ln>
+            <a:noFill/>
+          </a:ln>
+        </p:spPr>
+        <p:style>
+          <a:lnRef idx="1">
+            <a:schemeClr val="accent1"/>
+          </a:lnRef>
+          <a:fillRef idx="3">
+            <a:schemeClr val="accent1"/>
+          </a:fillRef>
+          <a:effectRef idx="2">
+            <a:schemeClr val="accent1"/>
+          </a:effectRef>
+          <a:fontRef idx="minor">
+            <a:schemeClr val="lt1"/>
+          </a:fontRef>
+        </p:style>
+        <p:txBody>
+          <a:bodyPr rtlCol="0" anchor="ctr"/>
+          <a:lstStyle/>
+          <a:p>
+            <a:pPr algn="ctr"/>
+          </a:p>
+        </p:txBody>
+      </p:sp>
+      <p:sp>
+        <p:nvSpPr>
+          <p:cNvPr id="162" name="TextBox 161"/>
+          <p:cNvSpPr txBox="1"/>
+          <p:nvPr/>
+        </p:nvSpPr>
+        <p:spPr>
+          <a:xfrm>
+            <a:off x="5065776" y="6199632"/>
+            <a:ext cx="6867144" cy="219456"/>
+          </a:xfrm>
+          <a:prstGeom prst="rect">
+            <a:avLst/>
+          </a:prstGeom>
+          <a:noFill/>
+        </p:spPr>
+        <p:txBody>
+          <a:bodyPr wrap="square">
+            <a:spAutoFit/>
+          </a:bodyPr>
+          <a:lstStyle/>
+          <a:p>
+            <a:pPr algn="l"/>
+            <a:r>
+              <a:rPr sz="850" b="1" i="0">
+                <a:solidFill>
+                  <a:srgbClr val="3DBB97"/>
+                </a:solidFill>
+                <a:latin typeface="Calibri"/>
+              </a:rPr>
+              <a:t>✓  FULL CROSS-FUNCTIONAL DEPLOYMENT  ·  12 minutes  ·  28 tasks  ·  6 roles active  ·  $2.4M released  ·  14 comms staged  ·  Zero meetings required</a:t>
+            </a:r>
+          </a:p>
+        </p:txBody>
+      </p:sp>
     </p:spTree>
   </p:cSld>
   <p:clrMapOvr>

--- a/attached_assets/VaughnMartin_Pitch_Deck_12Slide_FINAL.pptx
+++ b/attached_assets/VaughnMartin_Pitch_Deck_12Slide_FINAL.pptx
@@ -12885,16 +12885,137 @@
           </a:p>
         </p:txBody>
       </p:sp>
+      <p:sp>
+        <p:nvSpPr>
+          <p:cNvPr id="29" name="Rectangle 28"/>
+          <p:cNvSpPr/>
+          <p:nvPr/>
+        </p:nvSpPr>
+        <p:spPr>
+          <a:xfrm>
+            <a:off x="0" y="6528816"/>
+            <a:ext cx="12188952" cy="329184"/>
+          </a:xfrm>
+          <a:prstGeom prst="rect">
+            <a:avLst/>
+          </a:prstGeom>
+          <a:solidFill>
+            <a:srgbClr val="0A0F2E"/>
+          </a:solidFill>
+          <a:ln>
+            <a:noFill/>
+          </a:ln>
+        </p:spPr>
+        <p:style>
+          <a:lnRef idx="1">
+            <a:schemeClr val="accent1"/>
+          </a:lnRef>
+          <a:fillRef idx="3">
+            <a:schemeClr val="accent1"/>
+          </a:fillRef>
+          <a:effectRef idx="2">
+            <a:schemeClr val="accent1"/>
+          </a:effectRef>
+          <a:fontRef idx="minor">
+            <a:schemeClr val="lt1"/>
+          </a:fontRef>
+        </p:style>
+        <p:txBody>
+          <a:bodyPr rtlCol="0" anchor="ctr"/>
+          <a:lstStyle/>
+          <a:p>
+            <a:pPr algn="ctr"/>
+          </a:p>
+        </p:txBody>
+      </p:sp>
+      <p:sp>
+        <p:nvSpPr>
+          <p:cNvPr id="30" name="Rectangle 29"/>
+          <p:cNvSpPr/>
+          <p:nvPr/>
+        </p:nvSpPr>
+        <p:spPr>
+          <a:xfrm>
+            <a:off x="0" y="6528816"/>
+            <a:ext cx="12188952" cy="27432"/>
+          </a:xfrm>
+          <a:prstGeom prst="rect">
+            <a:avLst/>
+          </a:prstGeom>
+          <a:solidFill>
+            <a:srgbClr val="C9A84C"/>
+          </a:solidFill>
+          <a:ln>
+            <a:noFill/>
+          </a:ln>
+        </p:spPr>
+        <p:style>
+          <a:lnRef idx="1">
+            <a:schemeClr val="accent1"/>
+          </a:lnRef>
+          <a:fillRef idx="3">
+            <a:schemeClr val="accent1"/>
+          </a:fillRef>
+          <a:effectRef idx="2">
+            <a:schemeClr val="accent1"/>
+          </a:effectRef>
+          <a:fontRef idx="minor">
+            <a:schemeClr val="lt1"/>
+          </a:fontRef>
+        </p:style>
+        <p:txBody>
+          <a:bodyPr rtlCol="0" anchor="ctr"/>
+          <a:lstStyle/>
+          <a:p>
+            <a:pPr algn="ctr"/>
+          </a:p>
+        </p:txBody>
+      </p:sp>
+      <p:sp>
+        <p:nvSpPr>
+          <p:cNvPr id="31" name="TextBox 30"/>
+          <p:cNvSpPr txBox="1"/>
+          <p:nvPr/>
+        </p:nvSpPr>
+        <p:spPr>
+          <a:xfrm>
+            <a:off x="11091672" y="6592824"/>
+            <a:ext cx="914400" cy="219456"/>
+          </a:xfrm>
+          <a:prstGeom prst="rect">
+            <a:avLst/>
+          </a:prstGeom>
+          <a:noFill/>
+        </p:spPr>
+        <p:txBody>
+          <a:bodyPr wrap="square">
+            <a:spAutoFit/>
+          </a:bodyPr>
+          <a:lstStyle/>
+          <a:p>
+            <a:pPr algn="r"/>
+            <a:r>
+              <a:rPr sz="800" b="0" i="0">
+                <a:solidFill>
+                  <a:srgbClr val="9096B2"/>
+                </a:solidFill>
+                <a:latin typeface="Calibri"/>
+              </a:rPr>
+              <a:t>5  /  12</a:t>
+            </a:r>
+          </a:p>
+        </p:txBody>
+      </p:sp>
       <p:pic>
         <p:nvPicPr>
-          <p:cNvPr id="28" name="Picture 27" descr="slide_mission_control.jpg"/>
+          <p:cNvPr id="32" name="Picture 31" descr="image.jpg"/>
           <p:cNvPicPr>
             <a:picLocks noChangeAspect="1"/>
           </p:cNvPicPr>
           <p:nvPr/>
         </p:nvPicPr>
         <p:blipFill>
-          <a:blip r:embed="rId3"/>
+          <a:blip r:embed="rId4"/>
           <a:stretch>
             <a:fillRect/>
           </a:stretch>
@@ -12909,127 +13030,6 @@
           </a:prstGeom>
         </p:spPr>
       </p:pic>
-      <p:sp>
-        <p:nvSpPr>
-          <p:cNvPr id="29" name="Rectangle 28"/>
-          <p:cNvSpPr/>
-          <p:nvPr/>
-        </p:nvSpPr>
-        <p:spPr>
-          <a:xfrm>
-            <a:off x="0" y="6528816"/>
-            <a:ext cx="12188952" cy="329184"/>
-          </a:xfrm>
-          <a:prstGeom prst="rect">
-            <a:avLst/>
-          </a:prstGeom>
-          <a:solidFill>
-            <a:srgbClr val="0A0F2E"/>
-          </a:solidFill>
-          <a:ln>
-            <a:noFill/>
-          </a:ln>
-        </p:spPr>
-        <p:style>
-          <a:lnRef idx="1">
-            <a:schemeClr val="accent1"/>
-          </a:lnRef>
-          <a:fillRef idx="3">
-            <a:schemeClr val="accent1"/>
-          </a:fillRef>
-          <a:effectRef idx="2">
-            <a:schemeClr val="accent1"/>
-          </a:effectRef>
-          <a:fontRef idx="minor">
-            <a:schemeClr val="lt1"/>
-          </a:fontRef>
-        </p:style>
-        <p:txBody>
-          <a:bodyPr rtlCol="0" anchor="ctr"/>
-          <a:lstStyle/>
-          <a:p>
-            <a:pPr algn="ctr"/>
-          </a:p>
-        </p:txBody>
-      </p:sp>
-      <p:sp>
-        <p:nvSpPr>
-          <p:cNvPr id="30" name="Rectangle 29"/>
-          <p:cNvSpPr/>
-          <p:nvPr/>
-        </p:nvSpPr>
-        <p:spPr>
-          <a:xfrm>
-            <a:off x="0" y="6528816"/>
-            <a:ext cx="12188952" cy="27432"/>
-          </a:xfrm>
-          <a:prstGeom prst="rect">
-            <a:avLst/>
-          </a:prstGeom>
-          <a:solidFill>
-            <a:srgbClr val="C9A84C"/>
-          </a:solidFill>
-          <a:ln>
-            <a:noFill/>
-          </a:ln>
-        </p:spPr>
-        <p:style>
-          <a:lnRef idx="1">
-            <a:schemeClr val="accent1"/>
-          </a:lnRef>
-          <a:fillRef idx="3">
-            <a:schemeClr val="accent1"/>
-          </a:fillRef>
-          <a:effectRef idx="2">
-            <a:schemeClr val="accent1"/>
-          </a:effectRef>
-          <a:fontRef idx="minor">
-            <a:schemeClr val="lt1"/>
-          </a:fontRef>
-        </p:style>
-        <p:txBody>
-          <a:bodyPr rtlCol="0" anchor="ctr"/>
-          <a:lstStyle/>
-          <a:p>
-            <a:pPr algn="ctr"/>
-          </a:p>
-        </p:txBody>
-      </p:sp>
-      <p:sp>
-        <p:nvSpPr>
-          <p:cNvPr id="31" name="TextBox 30"/>
-          <p:cNvSpPr txBox="1"/>
-          <p:nvPr/>
-        </p:nvSpPr>
-        <p:spPr>
-          <a:xfrm>
-            <a:off x="11091672" y="6592824"/>
-            <a:ext cx="914400" cy="219456"/>
-          </a:xfrm>
-          <a:prstGeom prst="rect">
-            <a:avLst/>
-          </a:prstGeom>
-          <a:noFill/>
-        </p:spPr>
-        <p:txBody>
-          <a:bodyPr wrap="square">
-            <a:spAutoFit/>
-          </a:bodyPr>
-          <a:lstStyle/>
-          <a:p>
-            <a:pPr algn="r"/>
-            <a:r>
-              <a:rPr sz="800" b="0" i="0">
-                <a:solidFill>
-                  <a:srgbClr val="9096B2"/>
-                </a:solidFill>
-                <a:latin typeface="Calibri"/>
-              </a:rPr>
-              <a:t>5  /  12</a:t>
-            </a:r>
-          </a:p>
-        </p:txBody>
-      </p:sp>
     </p:spTree>
   </p:cSld>
   <p:clrMapOvr>
@@ -14075,16 +14075,137 @@
           </a:p>
         </p:txBody>
       </p:sp>
+      <p:sp>
+        <p:nvSpPr>
+          <p:cNvPr id="29" name="Rectangle 28"/>
+          <p:cNvSpPr/>
+          <p:nvPr/>
+        </p:nvSpPr>
+        <p:spPr>
+          <a:xfrm>
+            <a:off x="0" y="6528816"/>
+            <a:ext cx="12188952" cy="329184"/>
+          </a:xfrm>
+          <a:prstGeom prst="rect">
+            <a:avLst/>
+          </a:prstGeom>
+          <a:solidFill>
+            <a:srgbClr val="0A0F2E"/>
+          </a:solidFill>
+          <a:ln>
+            <a:noFill/>
+          </a:ln>
+        </p:spPr>
+        <p:style>
+          <a:lnRef idx="1">
+            <a:schemeClr val="accent1"/>
+          </a:lnRef>
+          <a:fillRef idx="3">
+            <a:schemeClr val="accent1"/>
+          </a:fillRef>
+          <a:effectRef idx="2">
+            <a:schemeClr val="accent1"/>
+          </a:effectRef>
+          <a:fontRef idx="minor">
+            <a:schemeClr val="lt1"/>
+          </a:fontRef>
+        </p:style>
+        <p:txBody>
+          <a:bodyPr rtlCol="0" anchor="ctr"/>
+          <a:lstStyle/>
+          <a:p>
+            <a:pPr algn="ctr"/>
+          </a:p>
+        </p:txBody>
+      </p:sp>
+      <p:sp>
+        <p:nvSpPr>
+          <p:cNvPr id="30" name="Rectangle 29"/>
+          <p:cNvSpPr/>
+          <p:nvPr/>
+        </p:nvSpPr>
+        <p:spPr>
+          <a:xfrm>
+            <a:off x="0" y="6528816"/>
+            <a:ext cx="12188952" cy="27432"/>
+          </a:xfrm>
+          <a:prstGeom prst="rect">
+            <a:avLst/>
+          </a:prstGeom>
+          <a:solidFill>
+            <a:srgbClr val="C9A84C"/>
+          </a:solidFill>
+          <a:ln>
+            <a:noFill/>
+          </a:ln>
+        </p:spPr>
+        <p:style>
+          <a:lnRef idx="1">
+            <a:schemeClr val="accent1"/>
+          </a:lnRef>
+          <a:fillRef idx="3">
+            <a:schemeClr val="accent1"/>
+          </a:fillRef>
+          <a:effectRef idx="2">
+            <a:schemeClr val="accent1"/>
+          </a:effectRef>
+          <a:fontRef idx="minor">
+            <a:schemeClr val="lt1"/>
+          </a:fontRef>
+        </p:style>
+        <p:txBody>
+          <a:bodyPr rtlCol="0" anchor="ctr"/>
+          <a:lstStyle/>
+          <a:p>
+            <a:pPr algn="ctr"/>
+          </a:p>
+        </p:txBody>
+      </p:sp>
+      <p:sp>
+        <p:nvSpPr>
+          <p:cNvPr id="31" name="TextBox 30"/>
+          <p:cNvSpPr txBox="1"/>
+          <p:nvPr/>
+        </p:nvSpPr>
+        <p:spPr>
+          <a:xfrm>
+            <a:off x="11091672" y="6592824"/>
+            <a:ext cx="914400" cy="219456"/>
+          </a:xfrm>
+          <a:prstGeom prst="rect">
+            <a:avLst/>
+          </a:prstGeom>
+          <a:noFill/>
+        </p:spPr>
+        <p:txBody>
+          <a:bodyPr wrap="square">
+            <a:spAutoFit/>
+          </a:bodyPr>
+          <a:lstStyle/>
+          <a:p>
+            <a:pPr algn="r"/>
+            <a:r>
+              <a:rPr sz="800" b="0" i="0">
+                <a:solidFill>
+                  <a:srgbClr val="9096B2"/>
+                </a:solidFill>
+                <a:latin typeface="Calibri"/>
+              </a:rPr>
+              <a:t>6  /  12</a:t>
+            </a:r>
+          </a:p>
+        </p:txBody>
+      </p:sp>
       <p:pic>
         <p:nvPicPr>
-          <p:cNvPr id="28" name="Picture 27" descr="deck_signals.jpg"/>
+          <p:cNvPr id="32" name="Picture 31" descr="image.jpg"/>
           <p:cNvPicPr>
             <a:picLocks noChangeAspect="1"/>
           </p:cNvPicPr>
           <p:nvPr/>
         </p:nvPicPr>
         <p:blipFill>
-          <a:blip r:embed="rId3"/>
+          <a:blip r:embed="rId4"/>
           <a:stretch>
             <a:fillRect/>
           </a:stretch>
@@ -14099,127 +14220,6 @@
           </a:prstGeom>
         </p:spPr>
       </p:pic>
-      <p:sp>
-        <p:nvSpPr>
-          <p:cNvPr id="29" name="Rectangle 28"/>
-          <p:cNvSpPr/>
-          <p:nvPr/>
-        </p:nvSpPr>
-        <p:spPr>
-          <a:xfrm>
-            <a:off x="0" y="6528816"/>
-            <a:ext cx="12188952" cy="329184"/>
-          </a:xfrm>
-          <a:prstGeom prst="rect">
-            <a:avLst/>
-          </a:prstGeom>
-          <a:solidFill>
-            <a:srgbClr val="0A0F2E"/>
-          </a:solidFill>
-          <a:ln>
-            <a:noFill/>
-          </a:ln>
-        </p:spPr>
-        <p:style>
-          <a:lnRef idx="1">
-            <a:schemeClr val="accent1"/>
-          </a:lnRef>
-          <a:fillRef idx="3">
-            <a:schemeClr val="accent1"/>
-          </a:fillRef>
-          <a:effectRef idx="2">
-            <a:schemeClr val="accent1"/>
-          </a:effectRef>
-          <a:fontRef idx="minor">
-            <a:schemeClr val="lt1"/>
-          </a:fontRef>
-        </p:style>
-        <p:txBody>
-          <a:bodyPr rtlCol="0" anchor="ctr"/>
-          <a:lstStyle/>
-          <a:p>
-            <a:pPr algn="ctr"/>
-          </a:p>
-        </p:txBody>
-      </p:sp>
-      <p:sp>
-        <p:nvSpPr>
-          <p:cNvPr id="30" name="Rectangle 29"/>
-          <p:cNvSpPr/>
-          <p:nvPr/>
-        </p:nvSpPr>
-        <p:spPr>
-          <a:xfrm>
-            <a:off x="0" y="6528816"/>
-            <a:ext cx="12188952" cy="27432"/>
-          </a:xfrm>
-          <a:prstGeom prst="rect">
-            <a:avLst/>
-          </a:prstGeom>
-          <a:solidFill>
-            <a:srgbClr val="C9A84C"/>
-          </a:solidFill>
-          <a:ln>
-            <a:noFill/>
-          </a:ln>
-        </p:spPr>
-        <p:style>
-          <a:lnRef idx="1">
-            <a:schemeClr val="accent1"/>
-          </a:lnRef>
-          <a:fillRef idx="3">
-            <a:schemeClr val="accent1"/>
-          </a:fillRef>
-          <a:effectRef idx="2">
-            <a:schemeClr val="accent1"/>
-          </a:effectRef>
-          <a:fontRef idx="minor">
-            <a:schemeClr val="lt1"/>
-          </a:fontRef>
-        </p:style>
-        <p:txBody>
-          <a:bodyPr rtlCol="0" anchor="ctr"/>
-          <a:lstStyle/>
-          <a:p>
-            <a:pPr algn="ctr"/>
-          </a:p>
-        </p:txBody>
-      </p:sp>
-      <p:sp>
-        <p:nvSpPr>
-          <p:cNvPr id="31" name="TextBox 30"/>
-          <p:cNvSpPr txBox="1"/>
-          <p:nvPr/>
-        </p:nvSpPr>
-        <p:spPr>
-          <a:xfrm>
-            <a:off x="11091672" y="6592824"/>
-            <a:ext cx="914400" cy="219456"/>
-          </a:xfrm>
-          <a:prstGeom prst="rect">
-            <a:avLst/>
-          </a:prstGeom>
-          <a:noFill/>
-        </p:spPr>
-        <p:txBody>
-          <a:bodyPr wrap="square">
-            <a:spAutoFit/>
-          </a:bodyPr>
-          <a:lstStyle/>
-          <a:p>
-            <a:pPr algn="r"/>
-            <a:r>
-              <a:rPr sz="800" b="0" i="0">
-                <a:solidFill>
-                  <a:srgbClr val="9096B2"/>
-                </a:solidFill>
-                <a:latin typeface="Calibri"/>
-              </a:rPr>
-              <a:t>6  /  12</a:t>
-            </a:r>
-          </a:p>
-        </p:txBody>
-      </p:sp>
     </p:spTree>
   </p:cSld>
   <p:clrMapOvr>

--- a/attached_assets/VaughnMartin_Pitch_Deck_12Slide_FINAL.pptx
+++ b/attached_assets/VaughnMartin_Pitch_Deck_12Slide_FINAL.pptx
@@ -6789,76 +6789,6 @@
       </p:sp>
       <p:sp>
         <p:nvSpPr>
-          <p:cNvPr id="14" name="TextBox 13"/>
-          <p:cNvSpPr txBox="1"/>
-          <p:nvPr/>
-        </p:nvSpPr>
-        <p:spPr>
-          <a:xfrm>
-            <a:off x="6693408" y="2651760"/>
-            <a:ext cx="4681728" cy="292608"/>
-          </a:xfrm>
-          <a:prstGeom prst="rect">
-            <a:avLst/>
-          </a:prstGeom>
-          <a:noFill/>
-        </p:spPr>
-        <p:txBody>
-          <a:bodyPr wrap="square">
-            <a:spAutoFit/>
-          </a:bodyPr>
-          <a:lstStyle/>
-          <a:p>
-            <a:pPr algn="l"/>
-            <a:r>
-              <a:rPr sz="950" b="1" i="0">
-                <a:solidFill>
-                  <a:srgbClr val="2B8A6E"/>
-                </a:solidFill>
-                <a:latin typeface="Calibri"/>
-              </a:rPr>
-              <a:t>NEXT STEP: EXECUTIVE SCENARIO SESSION</a:t>
-            </a:r>
-          </a:p>
-        </p:txBody>
-      </p:sp>
-      <p:sp>
-        <p:nvSpPr>
-          <p:cNvPr id="15" name="TextBox 14"/>
-          <p:cNvSpPr txBox="1"/>
-          <p:nvPr/>
-        </p:nvSpPr>
-        <p:spPr>
-          <a:xfrm>
-            <a:off x="6693408" y="3017520"/>
-            <a:ext cx="4681728" cy="1060704"/>
-          </a:xfrm>
-          <a:prstGeom prst="rect">
-            <a:avLst/>
-          </a:prstGeom>
-          <a:noFill/>
-        </p:spPr>
-        <p:txBody>
-          <a:bodyPr wrap="square">
-            <a:spAutoFit/>
-          </a:bodyPr>
-          <a:lstStyle/>
-          <a:p>
-            <a:pPr algn="l"/>
-            <a:r>
-              <a:rPr sz="1100" b="0" i="0">
-                <a:solidFill>
-                  <a:srgbClr val="9096B2"/>
-                </a:solidFill>
-                <a:latin typeface="Calibri"/>
-              </a:rPr>
-              <a:t>We walk your specific trigger context through Readiness OS live — signal detection through 12-minute execution.</a:t>
-            </a:r>
-          </a:p>
-        </p:txBody>
-      </p:sp>
-      <p:sp>
-        <p:nvSpPr>
           <p:cNvPr id="16" name="Rectangle 15"/>
           <p:cNvSpPr/>
           <p:nvPr/>
@@ -7122,6 +7052,353 @@
                 <a:latin typeface="Calibri"/>
               </a:rPr>
               <a:t>12  /  12</a:t>
+            </a:r>
+          </a:p>
+        </p:txBody>
+      </p:sp>
+      <p:sp>
+        <p:nvSpPr>
+          <p:cNvPr id="23" name="Rectangle 22"/>
+          <p:cNvSpPr/>
+          <p:nvPr/>
+        </p:nvSpPr>
+        <p:spPr>
+          <a:xfrm>
+            <a:off x="6291072" y="2523744"/>
+            <a:ext cx="5577840" cy="1463040"/>
+          </a:xfrm>
+          <a:prstGeom prst="rect">
+            <a:avLst/>
+          </a:prstGeom>
+          <a:solidFill>
+            <a:srgbClr val="0C1408"/>
+          </a:solidFill>
+          <a:ln>
+            <a:noFill/>
+          </a:ln>
+        </p:spPr>
+        <p:style>
+          <a:lnRef idx="1">
+            <a:schemeClr val="accent1"/>
+          </a:lnRef>
+          <a:fillRef idx="3">
+            <a:schemeClr val="accent1"/>
+          </a:fillRef>
+          <a:effectRef idx="2">
+            <a:schemeClr val="accent1"/>
+          </a:effectRef>
+          <a:fontRef idx="minor">
+            <a:schemeClr val="lt1"/>
+          </a:fontRef>
+        </p:style>
+        <p:txBody>
+          <a:bodyPr rtlCol="0" anchor="ctr"/>
+          <a:lstStyle/>
+          <a:p>
+            <a:pPr algn="ctr"/>
+          </a:p>
+        </p:txBody>
+      </p:sp>
+      <p:sp>
+        <p:nvSpPr>
+          <p:cNvPr id="24" name="Rectangle 23"/>
+          <p:cNvSpPr/>
+          <p:nvPr/>
+        </p:nvSpPr>
+        <p:spPr>
+          <a:xfrm>
+            <a:off x="6291072" y="2523744"/>
+            <a:ext cx="5577840" cy="54864"/>
+          </a:xfrm>
+          <a:prstGeom prst="rect">
+            <a:avLst/>
+          </a:prstGeom>
+          <a:solidFill>
+            <a:srgbClr val="3DBB97"/>
+          </a:solidFill>
+          <a:ln>
+            <a:noFill/>
+          </a:ln>
+        </p:spPr>
+        <p:style>
+          <a:lnRef idx="1">
+            <a:schemeClr val="accent1"/>
+          </a:lnRef>
+          <a:fillRef idx="3">
+            <a:schemeClr val="accent1"/>
+          </a:fillRef>
+          <a:effectRef idx="2">
+            <a:schemeClr val="accent1"/>
+          </a:effectRef>
+          <a:fontRef idx="minor">
+            <a:schemeClr val="lt1"/>
+          </a:fontRef>
+        </p:style>
+        <p:txBody>
+          <a:bodyPr rtlCol="0" anchor="ctr"/>
+          <a:lstStyle/>
+          <a:p>
+            <a:pPr algn="ctr"/>
+          </a:p>
+        </p:txBody>
+      </p:sp>
+      <p:sp>
+        <p:nvSpPr>
+          <p:cNvPr id="25" name="Rectangle 24"/>
+          <p:cNvSpPr/>
+          <p:nvPr/>
+        </p:nvSpPr>
+        <p:spPr>
+          <a:xfrm>
+            <a:off x="6291072" y="2523744"/>
+            <a:ext cx="54864" cy="1463040"/>
+          </a:xfrm>
+          <a:prstGeom prst="rect">
+            <a:avLst/>
+          </a:prstGeom>
+          <a:solidFill>
+            <a:srgbClr val="3DBB97"/>
+          </a:solidFill>
+          <a:ln>
+            <a:noFill/>
+          </a:ln>
+        </p:spPr>
+        <p:style>
+          <a:lnRef idx="1">
+            <a:schemeClr val="accent1"/>
+          </a:lnRef>
+          <a:fillRef idx="3">
+            <a:schemeClr val="accent1"/>
+          </a:fillRef>
+          <a:effectRef idx="2">
+            <a:schemeClr val="accent1"/>
+          </a:effectRef>
+          <a:fontRef idx="minor">
+            <a:schemeClr val="lt1"/>
+          </a:fontRef>
+        </p:style>
+        <p:txBody>
+          <a:bodyPr rtlCol="0" anchor="ctr"/>
+          <a:lstStyle/>
+          <a:p>
+            <a:pPr algn="ctr"/>
+          </a:p>
+        </p:txBody>
+      </p:sp>
+      <p:sp>
+        <p:nvSpPr>
+          <p:cNvPr id="26" name="TextBox 25"/>
+          <p:cNvSpPr txBox="1"/>
+          <p:nvPr/>
+        </p:nvSpPr>
+        <p:spPr>
+          <a:xfrm>
+            <a:off x="6437376" y="2615184"/>
+            <a:ext cx="5285232" cy="237744"/>
+          </a:xfrm>
+          <a:prstGeom prst="rect">
+            <a:avLst/>
+          </a:prstGeom>
+          <a:noFill/>
+        </p:spPr>
+        <p:txBody>
+          <a:bodyPr wrap="square">
+            <a:spAutoFit/>
+          </a:bodyPr>
+          <a:lstStyle/>
+          <a:p>
+            <a:pPr algn="l"/>
+            <a:r>
+              <a:rPr sz="900" b="1" i="0">
+                <a:solidFill>
+                  <a:srgbClr val="3DBB97"/>
+                </a:solidFill>
+                <a:latin typeface="Calibri"/>
+              </a:rPr>
+              <a:t>NEXT STEP</a:t>
+            </a:r>
+          </a:p>
+        </p:txBody>
+      </p:sp>
+      <p:sp>
+        <p:nvSpPr>
+          <p:cNvPr id="27" name="TextBox 26"/>
+          <p:cNvSpPr txBox="1"/>
+          <p:nvPr/>
+        </p:nvSpPr>
+        <p:spPr>
+          <a:xfrm>
+            <a:off x="6437376" y="2871216"/>
+            <a:ext cx="5285232" cy="475488"/>
+          </a:xfrm>
+          <a:prstGeom prst="rect">
+            <a:avLst/>
+          </a:prstGeom>
+          <a:noFill/>
+        </p:spPr>
+        <p:txBody>
+          <a:bodyPr wrap="square">
+            <a:spAutoFit/>
+          </a:bodyPr>
+          <a:lstStyle/>
+          <a:p>
+            <a:pPr algn="l"/>
+            <a:r>
+              <a:rPr sz="2200" b="1" i="0">
+                <a:solidFill>
+                  <a:srgbClr val="FFFFFF"/>
+                </a:solidFill>
+                <a:latin typeface="Georgia"/>
+              </a:rPr>
+              <a:t>Executive Scenario Session</a:t>
+            </a:r>
+          </a:p>
+        </p:txBody>
+      </p:sp>
+      <p:sp>
+        <p:nvSpPr>
+          <p:cNvPr id="28" name="TextBox 27"/>
+          <p:cNvSpPr txBox="1"/>
+          <p:nvPr/>
+        </p:nvSpPr>
+        <p:spPr>
+          <a:xfrm>
+            <a:off x="6437376" y="3364992"/>
+            <a:ext cx="5285232" cy="512064"/>
+          </a:xfrm>
+          <a:prstGeom prst="rect">
+            <a:avLst/>
+          </a:prstGeom>
+          <a:noFill/>
+        </p:spPr>
+        <p:txBody>
+          <a:bodyPr wrap="square">
+            <a:spAutoFit/>
+          </a:bodyPr>
+          <a:lstStyle/>
+          <a:p>
+            <a:pPr algn="l"/>
+            <a:r>
+              <a:rPr sz="1000" b="0" i="0">
+                <a:solidFill>
+                  <a:srgbClr val="BBCCBB"/>
+                </a:solidFill>
+                <a:latin typeface="Calibri"/>
+              </a:rPr>
+              <a:t>We walk your specific trigger context through Readiness OS live — from signal detection to 12-minute execution.</a:t>
+            </a:r>
+          </a:p>
+        </p:txBody>
+      </p:sp>
+      <p:sp>
+        <p:nvSpPr>
+          <p:cNvPr id="29" name="Rectangle 28"/>
+          <p:cNvSpPr/>
+          <p:nvPr/>
+        </p:nvSpPr>
+        <p:spPr>
+          <a:xfrm>
+            <a:off x="6437376" y="4041648"/>
+            <a:ext cx="2377440" cy="384048"/>
+          </a:xfrm>
+          <a:prstGeom prst="rect">
+            <a:avLst/>
+          </a:prstGeom>
+          <a:solidFill>
+            <a:srgbClr val="C9A84C"/>
+          </a:solidFill>
+          <a:ln>
+            <a:noFill/>
+          </a:ln>
+        </p:spPr>
+        <p:style>
+          <a:lnRef idx="1">
+            <a:schemeClr val="accent1"/>
+          </a:lnRef>
+          <a:fillRef idx="3">
+            <a:schemeClr val="accent1"/>
+          </a:fillRef>
+          <a:effectRef idx="2">
+            <a:schemeClr val="accent1"/>
+          </a:effectRef>
+          <a:fontRef idx="minor">
+            <a:schemeClr val="lt1"/>
+          </a:fontRef>
+        </p:style>
+        <p:txBody>
+          <a:bodyPr rtlCol="0" anchor="ctr"/>
+          <a:lstStyle/>
+          <a:p>
+            <a:pPr algn="ctr"/>
+          </a:p>
+        </p:txBody>
+      </p:sp>
+      <p:sp>
+        <p:nvSpPr>
+          <p:cNvPr id="30" name="TextBox 29"/>
+          <p:cNvSpPr txBox="1"/>
+          <p:nvPr/>
+        </p:nvSpPr>
+        <p:spPr>
+          <a:xfrm>
+            <a:off x="6437376" y="4096512"/>
+            <a:ext cx="2377440" cy="274320"/>
+          </a:xfrm>
+          <a:prstGeom prst="rect">
+            <a:avLst/>
+          </a:prstGeom>
+          <a:noFill/>
+        </p:spPr>
+        <p:txBody>
+          <a:bodyPr wrap="square">
+            <a:spAutoFit/>
+          </a:bodyPr>
+          <a:lstStyle/>
+          <a:p>
+            <a:pPr algn="ctr"/>
+            <a:r>
+              <a:rPr sz="950" b="1" i="0">
+                <a:solidFill>
+                  <a:srgbClr val="0A0F2E"/>
+                </a:solidFill>
+                <a:latin typeface="Calibri"/>
+              </a:rPr>
+              <a:t>REQUEST YOUR SESSION  →</a:t>
+            </a:r>
+          </a:p>
+        </p:txBody>
+      </p:sp>
+      <p:sp>
+        <p:nvSpPr>
+          <p:cNvPr id="31" name="TextBox 30"/>
+          <p:cNvSpPr txBox="1"/>
+          <p:nvPr/>
+        </p:nvSpPr>
+        <p:spPr>
+          <a:xfrm>
+            <a:off x="6437376" y="4498848"/>
+            <a:ext cx="5285232" cy="237744"/>
+          </a:xfrm>
+          <a:prstGeom prst="rect">
+            <a:avLst/>
+          </a:prstGeom>
+          <a:noFill/>
+        </p:spPr>
+        <p:txBody>
+          <a:bodyPr wrap="square">
+            <a:spAutoFit/>
+          </a:bodyPr>
+          <a:lstStyle/>
+          <a:p>
+            <a:pPr algn="l"/>
+            <a:r>
+              <a:rPr sz="900" b="0" i="0">
+                <a:solidFill>
+                  <a:srgbClr val="9096B2"/>
+                </a:solidFill>
+                <a:latin typeface="Calibri"/>
+              </a:rPr>
+              <a:t>founding@vaughnmartin.com  ·  vaughnmartin.com</a:t>
             </a:r>
           </a:p>
         </p:txBody>
@@ -10511,6 +10788,14 @@
           <a:lstStyle/>
           <a:p>
             <a:pPr algn="ctr"/>
+            <a:r>
+              <a:rPr sz="1000" b="0">
+                <a:solidFill>
+                  <a:srgbClr val="AAAFC8"/>
+                </a:solidFill>
+              </a:rPr>
+              <a:t>Define every strategic situation your organization has faced or is likely to face.</a:t>
+            </a:r>
           </a:p>
         </p:txBody>
       </p:sp>
@@ -10823,6 +11108,14 @@
           <a:lstStyle/>
           <a:p>
             <a:pPr algn="ctr"/>
+            <a:r>
+              <a:rPr sz="1000" b="0">
+                <a:solidFill>
+                  <a:srgbClr val="AAAFC8"/>
+                </a:solidFill>
+              </a:rPr>
+              <a:t>248+ data points. Customer-defined thresholds. Every 15 minutes.</a:t>
+            </a:r>
           </a:p>
         </p:txBody>
       </p:sp>
@@ -11135,6 +11428,14 @@
           <a:lstStyle/>
           <a:p>
             <a:pPr algn="ctr"/>
+            <a:r>
+              <a:rPr sz="1000" b="0">
+                <a:solidFill>
+                  <a:srgbClr val="AAAFC8"/>
+                </a:solidFill>
+              </a:rPr>
+              <a:t>Pre-assigned decision rights. Executives authorize. Execution deploys.</a:t>
+            </a:r>
           </a:p>
         </p:txBody>
       </p:sp>
@@ -11447,6 +11748,14 @@
           <a:lstStyle/>
           <a:p>
             <a:pPr algn="ctr"/>
+            <a:r>
+              <a:rPr sz="1000" b="0">
+                <a:solidFill>
+                  <a:srgbClr val="AAAFC8"/>
+                </a:solidFill>
+              </a:rPr>
+              <a:t>Roles, budgets, and communications deploy in 12 minutes.</a:t>
+            </a:r>
           </a:p>
         </p:txBody>
       </p:sp>
@@ -11759,6 +12068,14 @@
           <a:lstStyle/>
           <a:p>
             <a:pPr algn="ctr"/>
+            <a:r>
+              <a:rPr sz="1000" b="0">
+                <a:solidFill>
+                  <a:srgbClr val="AAAFC8"/>
+                </a:solidFill>
+              </a:rPr>
+              <a:t>Every activation feeds forward. Each cycle improves the next.</a:t>
+            </a:r>
           </a:p>
         </p:txBody>
       </p:sp>
@@ -13779,13 +14096,12 @@
           <a:p>
             <a:pPr algn="l"/>
             <a:r>
-              <a:rPr sz="850" b="1" i="0">
-                <a:solidFill>
-                  <a:srgbClr val="0A0F2E"/>
-                </a:solidFill>
-                <a:latin typeface="Calibri"/>
-              </a:rPr>
-              <a:t>221 TRIGGER PATTERNS</a:t>
+              <a:rPr sz="900" b="1">
+                <a:solidFill>
+                  <a:srgbClr val="C9A84C"/>
+                </a:solidFill>
+              </a:rPr>
+              <a:t>CONTINUOUS PATTERN SCORING</a:t>
             </a:r>
           </a:p>
         </p:txBody>
@@ -24266,13 +24582,12 @@
           <a:p>
             <a:pPr algn="ctr"/>
             <a:r>
-              <a:rPr sz="900" b="1" i="0">
-                <a:solidFill>
-                  <a:srgbClr val="CC2222"/>
-                </a:solidFill>
-                <a:latin typeface="Calibri"/>
-              </a:rPr>
-              <a:t>WITHOUT READINESS OS</a:t>
+              <a:rPr sz="1000" b="1">
+                <a:solidFill>
+                  <a:srgbClr val="FF6B5B"/>
+                </a:solidFill>
+              </a:rPr>
+              <a:t>✕  WITHOUT READINESS OS</a:t>
             </a:r>
           </a:p>
         </p:txBody>
@@ -24387,13 +24702,12 @@
           <a:p>
             <a:pPr algn="ctr"/>
             <a:r>
-              <a:rPr sz="900" b="1" i="0">
-                <a:solidFill>
-                  <a:srgbClr val="2B8A6E"/>
-                </a:solidFill>
-                <a:latin typeface="Calibri"/>
-              </a:rPr>
-              <a:t>WITH READINESS OS</a:t>
+              <a:rPr sz="1000" b="1">
+                <a:solidFill>
+                  <a:srgbClr val="3DBB97"/>
+                </a:solidFill>
+              </a:rPr>
+              <a:t>✓  WITH READINESS OS</a:t>
             </a:r>
           </a:p>
         </p:txBody>
@@ -25081,14 +25395,12 @@
           <a:p>
             <a:pPr algn="ctr"/>
             <a:r>
-              <a:rPr sz="800" b="1" i="0">
-                <a:solidFill>
-                  <a:srgbClr val="8A7332"/>
-                </a:solidFill>
-                <a:latin typeface="Calibri"/>
-              </a:rPr>
-              <a:t>9:59 AM →
-12 minutes</a:t>
+              <a:rPr sz="800" b="1">
+                <a:solidFill>
+                  <a:srgbClr val="FF6B5B"/>
+                </a:solidFill>
+              </a:rPr>
+              <a:t>DAY 14 →</a:t>
             </a:r>
           </a:p>
         </p:txBody>
@@ -25117,13 +25429,12 @@
           <a:p>
             <a:pPr algn="l"/>
             <a:r>
-              <a:rPr sz="1000" b="0" i="0">
-                <a:solidFill>
-                  <a:srgbClr val="CC2222"/>
-                </a:solidFill>
-                <a:latin typeface="Calibri"/>
-              </a:rPr>
-              <a:t>—</a:t>
+              <a:rPr sz="1000" b="0">
+                <a:solidFill>
+                  <a:srgbClr val="CC5544"/>
+                </a:solidFill>
+              </a:rPr>
+              <a:t>Still in alignment meetings. No coordinated response. The window has closed.</a:t>
             </a:r>
           </a:p>
         </p:txBody>
@@ -25152,13 +25463,12 @@
           <a:p>
             <a:pPr algn="l"/>
             <a:r>
-              <a:rPr sz="1000" b="1" i="0">
-                <a:solidFill>
-                  <a:srgbClr val="2B8A6E"/>
-                </a:solidFill>
-                <a:latin typeface="Calibri"/>
-              </a:rPr>
-              <a:t>Coordinated response live. Legal, IR, external counsel, board notified.</a:t>
+              <a:rPr sz="1000" b="1">
+                <a:solidFill>
+                  <a:srgbClr val="3DBB97"/>
+                </a:solidFill>
+              </a:rPr>
+              <a:t>Coordinated response live. Legal, IR, board, external counsel — all notified. 12 minutes.</a:t>
             </a:r>
           </a:p>
         </p:txBody>
@@ -25358,6 +25668,205 @@
                 <a:latin typeface="Calibri"/>
               </a:rPr>
               <a:t>9  /  12</a:t>
+            </a:r>
+          </a:p>
+        </p:txBody>
+      </p:sp>
+      <p:sp>
+        <p:nvSpPr>
+          <p:cNvPr id="40" name="Rectangle 39"/>
+          <p:cNvSpPr/>
+          <p:nvPr/>
+        </p:nvSpPr>
+        <p:spPr>
+          <a:xfrm>
+            <a:off x="5852160" y="1828800"/>
+            <a:ext cx="36576" cy="5010912"/>
+          </a:xfrm>
+          <a:prstGeom prst="rect">
+            <a:avLst/>
+          </a:prstGeom>
+          <a:solidFill>
+            <a:srgbClr val="1E284A"/>
+          </a:solidFill>
+          <a:ln>
+            <a:noFill/>
+          </a:ln>
+        </p:spPr>
+        <p:style>
+          <a:lnRef idx="1">
+            <a:schemeClr val="accent1"/>
+          </a:lnRef>
+          <a:fillRef idx="3">
+            <a:schemeClr val="accent1"/>
+          </a:fillRef>
+          <a:effectRef idx="2">
+            <a:schemeClr val="accent1"/>
+          </a:effectRef>
+          <a:fontRef idx="minor">
+            <a:schemeClr val="lt1"/>
+          </a:fontRef>
+        </p:style>
+        <p:txBody>
+          <a:bodyPr rtlCol="0" anchor="ctr"/>
+          <a:lstStyle/>
+          <a:p>
+            <a:pPr algn="ctr"/>
+          </a:p>
+        </p:txBody>
+      </p:sp>
+      <p:sp>
+        <p:nvSpPr>
+          <p:cNvPr id="41" name="Rectangle 40"/>
+          <p:cNvSpPr/>
+          <p:nvPr/>
+        </p:nvSpPr>
+        <p:spPr>
+          <a:xfrm>
+            <a:off x="402336" y="5596128"/>
+            <a:ext cx="5230368" cy="347472"/>
+          </a:xfrm>
+          <a:prstGeom prst="rect">
+            <a:avLst/>
+          </a:prstGeom>
+          <a:solidFill>
+            <a:srgbClr val="1A0606"/>
+          </a:solidFill>
+          <a:ln>
+            <a:noFill/>
+          </a:ln>
+        </p:spPr>
+        <p:style>
+          <a:lnRef idx="1">
+            <a:schemeClr val="accent1"/>
+          </a:lnRef>
+          <a:fillRef idx="3">
+            <a:schemeClr val="accent1"/>
+          </a:fillRef>
+          <a:effectRef idx="2">
+            <a:schemeClr val="accent1"/>
+          </a:effectRef>
+          <a:fontRef idx="minor">
+            <a:schemeClr val="lt1"/>
+          </a:fontRef>
+        </p:style>
+        <p:txBody>
+          <a:bodyPr rtlCol="0" anchor="ctr"/>
+          <a:lstStyle/>
+          <a:p>
+            <a:pPr algn="ctr"/>
+          </a:p>
+        </p:txBody>
+      </p:sp>
+      <p:sp>
+        <p:nvSpPr>
+          <p:cNvPr id="42" name="TextBox 41"/>
+          <p:cNvSpPr txBox="1"/>
+          <p:nvPr/>
+        </p:nvSpPr>
+        <p:spPr>
+          <a:xfrm>
+            <a:off x="548640" y="5650992"/>
+            <a:ext cx="4937760" cy="237744"/>
+          </a:xfrm>
+          <a:prstGeom prst="rect">
+            <a:avLst/>
+          </a:prstGeom>
+          <a:noFill/>
+        </p:spPr>
+        <p:txBody>
+          <a:bodyPr wrap="square">
+            <a:spAutoFit/>
+          </a:bodyPr>
+          <a:lstStyle/>
+          <a:p>
+            <a:pPr algn="l"/>
+            <a:r>
+              <a:rPr sz="950" b="1" i="0">
+                <a:solidFill>
+                  <a:srgbClr val="FF6B5B"/>
+                </a:solidFill>
+                <a:latin typeface="Calibri"/>
+              </a:rPr>
+              <a:t>30 days to mobilize — after the trigger fires</a:t>
+            </a:r>
+          </a:p>
+        </p:txBody>
+      </p:sp>
+      <p:sp>
+        <p:nvSpPr>
+          <p:cNvPr id="43" name="Rectangle 42"/>
+          <p:cNvSpPr/>
+          <p:nvPr/>
+        </p:nvSpPr>
+        <p:spPr>
+          <a:xfrm>
+            <a:off x="5888736" y="5596128"/>
+            <a:ext cx="5897880" cy="347472"/>
+          </a:xfrm>
+          <a:prstGeom prst="rect">
+            <a:avLst/>
+          </a:prstGeom>
+          <a:solidFill>
+            <a:srgbClr val="04140E"/>
+          </a:solidFill>
+          <a:ln>
+            <a:noFill/>
+          </a:ln>
+        </p:spPr>
+        <p:style>
+          <a:lnRef idx="1">
+            <a:schemeClr val="accent1"/>
+          </a:lnRef>
+          <a:fillRef idx="3">
+            <a:schemeClr val="accent1"/>
+          </a:fillRef>
+          <a:effectRef idx="2">
+            <a:schemeClr val="accent1"/>
+          </a:effectRef>
+          <a:fontRef idx="minor">
+            <a:schemeClr val="lt1"/>
+          </a:fontRef>
+        </p:style>
+        <p:txBody>
+          <a:bodyPr rtlCol="0" anchor="ctr"/>
+          <a:lstStyle/>
+          <a:p>
+            <a:pPr algn="ctr"/>
+          </a:p>
+        </p:txBody>
+      </p:sp>
+      <p:sp>
+        <p:nvSpPr>
+          <p:cNvPr id="44" name="TextBox 43"/>
+          <p:cNvSpPr txBox="1"/>
+          <p:nvPr/>
+        </p:nvSpPr>
+        <p:spPr>
+          <a:xfrm>
+            <a:off x="6035040" y="5650992"/>
+            <a:ext cx="5669280" cy="237744"/>
+          </a:xfrm>
+          <a:prstGeom prst="rect">
+            <a:avLst/>
+          </a:prstGeom>
+          <a:noFill/>
+        </p:spPr>
+        <p:txBody>
+          <a:bodyPr wrap="square">
+            <a:spAutoFit/>
+          </a:bodyPr>
+          <a:lstStyle/>
+          <a:p>
+            <a:pPr algn="l"/>
+            <a:r>
+              <a:rPr sz="950" b="1" i="0">
+                <a:solidFill>
+                  <a:srgbClr val="3DBB97"/>
+                </a:solidFill>
+                <a:latin typeface="Calibri"/>
+              </a:rPr>
+              <a:t>12 minutes — response complete, before the window closes</a:t>
             </a:r>
           </a:p>
         </p:txBody>

--- a/attached_assets/VaughnMartin_Pitch_Deck_12Slide_FINAL.pptx
+++ b/attached_assets/VaughnMartin_Pitch_Deck_12Slide_FINAL.pptx
@@ -8,6 +8,7 @@
     <p:sldId id="256" r:id="rId7"/>
     <p:sldId id="257" r:id="rId8"/>
     <p:sldId id="258" r:id="rId9"/>
+    <p:sldId id="268" r:id="rId19"/>
     <p:sldId id="259" r:id="rId10"/>
     <p:sldId id="260" r:id="rId11"/>
     <p:sldId id="261" r:id="rId12"/>
@@ -3317,35 +3318,43 @@
           </a:bodyPr>
           <a:lstStyle/>
           <a:p>
-            <a:pPr algn="ctr">
+            <a:pPr algn="l">
               <a:spcAft>
                 <a:spcPts val="200"/>
               </a:spcAft>
             </a:pPr>
             <a:r>
-              <a:rPr sz="4800" b="1" i="0">
+              <a:rPr sz="4000" b="1">
                 <a:solidFill>
                   <a:srgbClr val="FFFFFF"/>
                 </a:solidFill>
-                <a:latin typeface="Calibri"/>
-              </a:rPr>
-              <a:t>Signal Advantage.</a:t>
-            </a:r>
-          </a:p>
-          <a:p>
-            <a:pPr algn="ctr">
-              <a:spcAft>
-                <a:spcPts val="200"/>
-              </a:spcAft>
-            </a:pPr>
-            <a:r>
-              <a:rPr sz="4800" b="1" i="0">
+                <a:latin typeface="Cormorant Garamond"/>
+              </a:rPr>
+              <a:t>When a strategic trigger fires —</a:t>
+            </a:r>
+          </a:p>
+          <a:p>
+            <a:pPr algn="l"/>
+            <a:r>
+              <a:rPr sz="4000" b="1">
                 <a:solidFill>
                   <a:srgbClr val="FFFFFF"/>
                 </a:solidFill>
-                <a:latin typeface="Calibri"/>
-              </a:rPr>
-              <a:t>Execution Advantage.</a:t>
+                <a:latin typeface="Cormorant Garamond"/>
+              </a:rPr>
+              <a:t>are you ready in 12 minutes,</a:t>
+            </a:r>
+          </a:p>
+          <a:p>
+            <a:pPr algn="l"/>
+            <a:r>
+              <a:rPr sz="4000" b="1">
+                <a:solidFill>
+                  <a:srgbClr val="C9A84C"/>
+                </a:solidFill>
+                <a:latin typeface="Cormorant Garamond"/>
+              </a:rPr>
+              <a:t>or starting from zero?</a:t>
             </a:r>
           </a:p>
         </p:txBody>
@@ -3606,7 +3615,7 @@
                 </a:solidFill>
                 <a:latin typeface="Calibri"/>
               </a:rPr>
-              <a:t>1  /  12</a:t>
+              <a:t>1  /  13</a:t>
             </a:r>
           </a:p>
         </p:txBody>
@@ -3841,13 +3850,12 @@
           <a:p>
             <a:pPr algn="ctr"/>
             <a:r>
-              <a:rPr sz="1800" b="1" i="0">
-                <a:solidFill>
-                  <a:srgbClr val="0A0F2E"/>
-                </a:solidFill>
-                <a:latin typeface="Calibri"/>
-              </a:rPr>
-              <a:t>Live production software: onboarding, protocol flow,</a:t>
+              <a:rPr sz="1800" b="1">
+                <a:solidFill>
+                  <a:srgbClr val="FFFFFF"/>
+                </a:solidFill>
+              </a:rPr>
+              <a:t>Live in production. Detection active. Execution architecture staged.</a:t>
             </a:r>
           </a:p>
         </p:txBody>
@@ -3876,13 +3884,12 @@
           <a:p>
             <a:pPr algn="ctr"/>
             <a:r>
-              <a:rPr sz="1800" b="1" i="0">
-                <a:solidFill>
-                  <a:srgbClr val="2B8A6E"/>
-                </a:solidFill>
-                <a:latin typeface="Calibri"/>
-              </a:rPr>
-              <a:t>decision gates, and execution pathways are active now.</a:t>
+              <a:rPr sz="1400" b="0">
+                <a:solidFill>
+                  <a:srgbClr val="70789A"/>
+                </a:solidFill>
+              </a:rPr>
+              <a:t>Signal monitoring live. Protocol library armed. Executive authorization pathways ready.</a:t>
             </a:r>
           </a:p>
         </p:txBody>
@@ -4922,7 +4929,7 @@
                 </a:solidFill>
                 <a:latin typeface="Calibri"/>
               </a:rPr>
-              <a:t>10  /  12</a:t>
+              <a:t>11  /  13</a:t>
             </a:r>
           </a:p>
         </p:txBody>
@@ -5469,13 +5476,12 @@
           <a:p>
             <a:pPr algn="l"/>
             <a:r>
-              <a:rPr sz="1050" b="0" i="0">
-                <a:solidFill>
-                  <a:srgbClr val="444C66"/>
-                </a:solidFill>
-                <a:latin typeface="Calibri"/>
-              </a:rPr>
-              <a:t>Select Fortune 1000 organizations — 90-day structured validation partnership with direct founder engagement.</a:t>
+              <a:rPr sz="1050" b="0">
+                <a:solidFill>
+                  <a:srgbClr val="70789A"/>
+                </a:solidFill>
+              </a:rPr>
+              <a:t>12 Founding Partners · $75K / 90-day validation · Fortune 1000 readiness leaders · Direct founder access throughout.</a:t>
             </a:r>
           </a:p>
         </p:txBody>
@@ -5549,11 +5555,10 @@
             <a:r>
               <a:rPr sz="900" b="0" i="1">
                 <a:solidFill>
-                  <a:srgbClr val="5A627A"/>
-                </a:solidFill>
-                <a:latin typeface="Calibri"/>
-              </a:rPr>
-              <a:t>Success: one live trigger handled inside Readiness OS with documented mobilization compression vs. baseline.</a:t>
+                  <a:srgbClr val="4A526E"/>
+                </a:solidFill>
+              </a:rPr>
+              <a:t>Success metric: one live trigger handled inside Readiness OS with documented mobilization compression vs. baseline.</a:t>
             </a:r>
           </a:p>
         </p:txBody>
@@ -6290,7 +6295,7 @@
                 </a:solidFill>
                 <a:latin typeface="Calibri"/>
               </a:rPr>
-              <a:t>11  /  12</a:t>
+              <a:t>12  /  13</a:t>
             </a:r>
           </a:p>
         </p:txBody>
@@ -6488,16 +6493,39 @@
           </a:bodyPr>
           <a:lstStyle/>
           <a:p>
-            <a:pPr algn="ctr"/>
-            <a:r>
-              <a:rPr sz="2400" b="1" i="0">
+            <a:pPr algn="l"/>
+            <a:r>
+              <a:rPr sz="2000" b="0">
                 <a:solidFill>
                   <a:srgbClr val="FFFFFF"/>
                 </a:solidFill>
-                <a:latin typeface="Calibri"/>
-              </a:rPr>
-              <a:t>We're building with leaders who want operating advantage,
-not another dashboard.</a:t>
+                <a:latin typeface="Cormorant Garamond"/>
+              </a:rPr>
+              <a:t>Enterprises detect signals.</a:t>
+            </a:r>
+          </a:p>
+          <a:p>
+            <a:pPr algn="l"/>
+            <a:r>
+              <a:rPr sz="2000" b="1">
+                <a:solidFill>
+                  <a:srgbClr val="C9A84C"/>
+                </a:solidFill>
+                <a:latin typeface="Cormorant Garamond"/>
+              </a:rPr>
+              <a:t>The gap is mobilization — 30 days vs. 12 minutes.</a:t>
+            </a:r>
+          </a:p>
+          <a:p>
+            <a:pPr algn="l"/>
+            <a:r>
+              <a:rPr sz="2000" b="0">
+                <a:solidFill>
+                  <a:srgbClr val="FFFFFF"/>
+                </a:solidFill>
+                <a:latin typeface="Cormorant Garamond"/>
+              </a:rPr>
+              <a:t>Readiness OS closes that gap before the trigger fires.</a:t>
             </a:r>
           </a:p>
         </p:txBody>
@@ -6690,13 +6718,12 @@
           <a:p>
             <a:pPr algn="l"/>
             <a:r>
-              <a:rPr sz="1100" b="0" i="0">
-                <a:solidFill>
-                  <a:srgbClr val="9096B2"/>
-                </a:solidFill>
-                <a:latin typeface="Calibri"/>
-              </a:rPr>
-              <a:t>Fortune 1000 organizations and aligned investors. 90-day validation partnership. Direct founder access. First-mover positioning.</a:t>
+              <a:rPr sz="1100">
+                <a:solidFill>
+                  <a:srgbClr val="70789A"/>
+                </a:solidFill>
+              </a:rPr>
+              <a:t>Fortune 1000 organizations and aligned investors. 90-day validation partnership. 12 founding cohort slots.</a:t>
             </a:r>
           </a:p>
         </p:txBody>
@@ -7051,7 +7078,7 @@
                 </a:solidFill>
                 <a:latin typeface="Calibri"/>
               </a:rPr>
-              <a:t>12  /  12</a:t>
+              <a:t>13  /  13</a:t>
             </a:r>
           </a:p>
         </p:txBody>
@@ -7399,6 +7426,932 @@
                 <a:latin typeface="Calibri"/>
               </a:rPr>
               <a:t>founding@vaughnmartin.com  ·  vaughnmartin.com</a:t>
+            </a:r>
+          </a:p>
+        </p:txBody>
+      </p:sp>
+    </p:spTree>
+  </p:cSld>
+  <p:clrMapOvr>
+    <a:masterClrMapping/>
+  </p:clrMapOvr>
+</p:sld>
+</file>
+
+<file path=ppt/slides/slide13.xml><?xml version="1.0" encoding="utf-8"?>
+<p:sld xmlns:a="http://schemas.openxmlformats.org/drawingml/2006/main" xmlns:p="http://schemas.openxmlformats.org/presentationml/2006/main" xmlns:r="http://schemas.openxmlformats.org/officeDocument/2006/relationships">
+  <p:cSld>
+    <p:spTree>
+      <p:nvGrpSpPr>
+        <p:cNvPr id="1" name=""/>
+        <p:cNvGrpSpPr/>
+        <p:nvPr/>
+      </p:nvGrpSpPr>
+      <p:grpSpPr/>
+      <p:sp>
+        <p:nvSpPr>
+          <p:cNvPr id="2" name="Rectangle 1"/>
+          <p:cNvSpPr/>
+          <p:nvPr/>
+        </p:nvSpPr>
+        <p:spPr>
+          <a:xfrm>
+            <a:off x="0" y="0"/>
+            <a:ext cx="12188952" cy="6858000"/>
+          </a:xfrm>
+          <a:prstGeom prst="rect">
+            <a:avLst/>
+          </a:prstGeom>
+          <a:solidFill>
+            <a:srgbClr val="0A0F2E"/>
+          </a:solidFill>
+          <a:ln>
+            <a:noFill/>
+          </a:ln>
+        </p:spPr>
+        <p:style>
+          <a:lnRef idx="1">
+            <a:schemeClr val="accent1"/>
+          </a:lnRef>
+          <a:fillRef idx="3">
+            <a:schemeClr val="accent1"/>
+          </a:fillRef>
+          <a:effectRef idx="2">
+            <a:schemeClr val="accent1"/>
+          </a:effectRef>
+          <a:fontRef idx="minor">
+            <a:schemeClr val="lt1"/>
+          </a:fontRef>
+        </p:style>
+        <p:txBody>
+          <a:bodyPr rtlCol="0" anchor="ctr"/>
+          <a:lstStyle/>
+          <a:p>
+            <a:pPr algn="ctr"/>
+          </a:p>
+        </p:txBody>
+      </p:sp>
+      <p:sp>
+        <p:nvSpPr>
+          <p:cNvPr id="3" name="Rectangle 2"/>
+          <p:cNvSpPr/>
+          <p:nvPr/>
+        </p:nvSpPr>
+        <p:spPr>
+          <a:xfrm>
+            <a:off x="0" y="0"/>
+            <a:ext cx="12188952" cy="6858000"/>
+          </a:xfrm>
+          <a:prstGeom prst="rect">
+            <a:avLst/>
+          </a:prstGeom>
+          <a:solidFill>
+            <a:srgbClr val="090D26"/>
+          </a:solidFill>
+          <a:ln>
+            <a:noFill/>
+          </a:ln>
+        </p:spPr>
+        <p:style>
+          <a:lnRef idx="1">
+            <a:schemeClr val="accent1"/>
+          </a:lnRef>
+          <a:fillRef idx="3">
+            <a:schemeClr val="accent1"/>
+          </a:fillRef>
+          <a:effectRef idx="2">
+            <a:schemeClr val="accent1"/>
+          </a:effectRef>
+          <a:fontRef idx="minor">
+            <a:schemeClr val="lt1"/>
+          </a:fontRef>
+        </p:style>
+        <p:txBody>
+          <a:bodyPr rtlCol="0" anchor="ctr"/>
+          <a:lstStyle/>
+          <a:p>
+            <a:pPr algn="ctr"/>
+          </a:p>
+        </p:txBody>
+      </p:sp>
+      <p:sp>
+        <p:nvSpPr>
+          <p:cNvPr id="4" name="Rectangle 3"/>
+          <p:cNvSpPr/>
+          <p:nvPr/>
+        </p:nvSpPr>
+        <p:spPr>
+          <a:xfrm>
+            <a:off x="0" y="0"/>
+            <a:ext cx="50292" cy="6858000"/>
+          </a:xfrm>
+          <a:prstGeom prst="rect">
+            <a:avLst/>
+          </a:prstGeom>
+          <a:solidFill>
+            <a:srgbClr val="C9A84C"/>
+          </a:solidFill>
+          <a:ln>
+            <a:noFill/>
+          </a:ln>
+        </p:spPr>
+        <p:style>
+          <a:lnRef idx="1">
+            <a:schemeClr val="accent1"/>
+          </a:lnRef>
+          <a:fillRef idx="3">
+            <a:schemeClr val="accent1"/>
+          </a:fillRef>
+          <a:effectRef idx="2">
+            <a:schemeClr val="accent1"/>
+          </a:effectRef>
+          <a:fontRef idx="minor">
+            <a:schemeClr val="lt1"/>
+          </a:fontRef>
+        </p:style>
+        <p:txBody>
+          <a:bodyPr rtlCol="0" anchor="ctr"/>
+          <a:lstStyle/>
+          <a:p>
+            <a:pPr algn="ctr"/>
+          </a:p>
+        </p:txBody>
+      </p:sp>
+      <p:sp>
+        <p:nvSpPr>
+          <p:cNvPr id="5" name="Rectangle 4"/>
+          <p:cNvSpPr/>
+          <p:nvPr/>
+        </p:nvSpPr>
+        <p:spPr>
+          <a:xfrm>
+            <a:off x="0" y="0"/>
+            <a:ext cx="12188952" cy="50292"/>
+          </a:xfrm>
+          <a:prstGeom prst="rect">
+            <a:avLst/>
+          </a:prstGeom>
+          <a:solidFill>
+            <a:srgbClr val="2B8A6E"/>
+          </a:solidFill>
+          <a:ln>
+            <a:noFill/>
+          </a:ln>
+        </p:spPr>
+        <p:style>
+          <a:lnRef idx="1">
+            <a:schemeClr val="accent1"/>
+          </a:lnRef>
+          <a:fillRef idx="3">
+            <a:schemeClr val="accent1"/>
+          </a:fillRef>
+          <a:effectRef idx="2">
+            <a:schemeClr val="accent1"/>
+          </a:effectRef>
+          <a:fontRef idx="minor">
+            <a:schemeClr val="lt1"/>
+          </a:fontRef>
+        </p:style>
+        <p:txBody>
+          <a:bodyPr rtlCol="0" anchor="ctr"/>
+          <a:lstStyle/>
+          <a:p>
+            <a:pPr algn="ctr"/>
+          </a:p>
+        </p:txBody>
+      </p:sp>
+      <p:sp>
+        <p:nvSpPr>
+          <p:cNvPr id="6" name="TextBox 5"/>
+          <p:cNvSpPr txBox="1"/>
+          <p:nvPr/>
+        </p:nvSpPr>
+        <p:spPr>
+          <a:xfrm>
+            <a:off x="402336" y="164592"/>
+            <a:ext cx="2743200" cy="256032"/>
+          </a:xfrm>
+          <a:prstGeom prst="rect">
+            <a:avLst/>
+          </a:prstGeom>
+          <a:noFill/>
+        </p:spPr>
+        <p:txBody>
+          <a:bodyPr wrap="square">
+            <a:spAutoFit/>
+          </a:bodyPr>
+          <a:lstStyle/>
+          <a:p>
+            <a:pPr algn="l"/>
+            <a:r>
+              <a:rPr sz="850" b="1" i="0">
+                <a:solidFill>
+                  <a:srgbClr val="2B8A6E"/>
+                </a:solidFill>
+                <a:latin typeface="Barlow Condensed"/>
+              </a:rPr>
+              <a:t>WHY NOW</a:t>
+            </a:r>
+          </a:p>
+        </p:txBody>
+      </p:sp>
+      <p:sp>
+        <p:nvSpPr>
+          <p:cNvPr id="7" name="Rectangle 6"/>
+          <p:cNvSpPr/>
+          <p:nvPr/>
+        </p:nvSpPr>
+        <p:spPr>
+          <a:xfrm>
+            <a:off x="402336" y="457200"/>
+            <a:ext cx="1097280" cy="27432"/>
+          </a:xfrm>
+          <a:prstGeom prst="rect">
+            <a:avLst/>
+          </a:prstGeom>
+          <a:solidFill>
+            <a:srgbClr val="C9A84C"/>
+          </a:solidFill>
+          <a:ln>
+            <a:noFill/>
+          </a:ln>
+        </p:spPr>
+        <p:style>
+          <a:lnRef idx="1">
+            <a:schemeClr val="accent1"/>
+          </a:lnRef>
+          <a:fillRef idx="3">
+            <a:schemeClr val="accent1"/>
+          </a:fillRef>
+          <a:effectRef idx="2">
+            <a:schemeClr val="accent1"/>
+          </a:effectRef>
+          <a:fontRef idx="minor">
+            <a:schemeClr val="lt1"/>
+          </a:fontRef>
+        </p:style>
+        <p:txBody>
+          <a:bodyPr rtlCol="0" anchor="ctr"/>
+          <a:lstStyle/>
+          <a:p>
+            <a:pPr algn="ctr"/>
+          </a:p>
+        </p:txBody>
+      </p:sp>
+      <p:sp>
+        <p:nvSpPr>
+          <p:cNvPr id="8" name="TextBox 7"/>
+          <p:cNvSpPr txBox="1"/>
+          <p:nvPr/>
+        </p:nvSpPr>
+        <p:spPr>
+          <a:xfrm>
+            <a:off x="402336" y="530352"/>
+            <a:ext cx="7132320" cy="1005840"/>
+          </a:xfrm>
+          <a:prstGeom prst="rect">
+            <a:avLst/>
+          </a:prstGeom>
+          <a:noFill/>
+        </p:spPr>
+        <p:txBody>
+          <a:bodyPr wrap="square">
+            <a:spAutoFit/>
+          </a:bodyPr>
+          <a:lstStyle/>
+          <a:p>
+            <a:pPr algn="l"/>
+            <a:r>
+              <a:rPr sz="3000" b="1" i="0">
+                <a:solidFill>
+                  <a:srgbClr val="FFFFFF"/>
+                </a:solidFill>
+                <a:latin typeface="Cormorant Garamond"/>
+              </a:rPr>
+              <a:t>AI capability is accelerating faster than
+enterprise execution readiness.</a:t>
+            </a:r>
+          </a:p>
+        </p:txBody>
+      </p:sp>
+      <p:sp>
+        <p:nvSpPr>
+          <p:cNvPr id="9" name="TextBox 8"/>
+          <p:cNvSpPr txBox="1"/>
+          <p:nvPr/>
+        </p:nvSpPr>
+        <p:spPr>
+          <a:xfrm>
+            <a:off x="402336" y="1719072"/>
+            <a:ext cx="5303520" cy="256032"/>
+          </a:xfrm>
+          <a:prstGeom prst="rect">
+            <a:avLst/>
+          </a:prstGeom>
+          <a:noFill/>
+        </p:spPr>
+        <p:txBody>
+          <a:bodyPr wrap="square">
+            <a:spAutoFit/>
+          </a:bodyPr>
+          <a:lstStyle/>
+          <a:p>
+            <a:pPr algn="l"/>
+            <a:r>
+              <a:rPr sz="850" b="1" i="0">
+                <a:solidFill>
+                  <a:srgbClr val="C9A84C"/>
+                </a:solidFill>
+                <a:latin typeface="Barlow Condensed"/>
+              </a:rPr>
+              <a:t>AI REALITY</a:t>
+            </a:r>
+          </a:p>
+        </p:txBody>
+      </p:sp>
+      <p:sp>
+        <p:nvSpPr>
+          <p:cNvPr id="10" name="Rectangle 9"/>
+          <p:cNvSpPr/>
+          <p:nvPr/>
+        </p:nvSpPr>
+        <p:spPr>
+          <a:xfrm>
+            <a:off x="402336" y="1993392"/>
+            <a:ext cx="5029200" cy="22860"/>
+          </a:xfrm>
+          <a:prstGeom prst="rect">
+            <a:avLst/>
+          </a:prstGeom>
+          <a:solidFill>
+            <a:srgbClr val="C9A84C"/>
+          </a:solidFill>
+          <a:ln>
+            <a:noFill/>
+          </a:ln>
+        </p:spPr>
+        <p:style>
+          <a:lnRef idx="1">
+            <a:schemeClr val="accent1"/>
+          </a:lnRef>
+          <a:fillRef idx="3">
+            <a:schemeClr val="accent1"/>
+          </a:fillRef>
+          <a:effectRef idx="2">
+            <a:schemeClr val="accent1"/>
+          </a:effectRef>
+          <a:fontRef idx="minor">
+            <a:schemeClr val="lt1"/>
+          </a:fontRef>
+        </p:style>
+        <p:txBody>
+          <a:bodyPr rtlCol="0" anchor="ctr"/>
+          <a:lstStyle/>
+          <a:p>
+            <a:pPr algn="ctr"/>
+          </a:p>
+        </p:txBody>
+      </p:sp>
+      <p:sp>
+        <p:nvSpPr>
+          <p:cNvPr id="11" name="TextBox 10"/>
+          <p:cNvSpPr txBox="1"/>
+          <p:nvPr/>
+        </p:nvSpPr>
+        <p:spPr>
+          <a:xfrm>
+            <a:off x="493776" y="2084831"/>
+            <a:ext cx="5212080" cy="219456"/>
+          </a:xfrm>
+          <a:prstGeom prst="rect">
+            <a:avLst/>
+          </a:prstGeom>
+          <a:noFill/>
+        </p:spPr>
+        <p:txBody>
+          <a:bodyPr wrap="square">
+            <a:spAutoFit/>
+          </a:bodyPr>
+          <a:lstStyle/>
+          <a:p>
+            <a:pPr algn="l"/>
+            <a:r>
+              <a:rPr sz="950" b="1" i="0">
+                <a:solidFill>
+                  <a:srgbClr val="C9A84C"/>
+                </a:solidFill>
+                <a:latin typeface="Barlow Condensed"/>
+              </a:rPr>
+              <a:t>● Capability accelerating</a:t>
+            </a:r>
+          </a:p>
+        </p:txBody>
+      </p:sp>
+      <p:sp>
+        <p:nvSpPr>
+          <p:cNvPr id="12" name="TextBox 11"/>
+          <p:cNvSpPr txBox="1"/>
+          <p:nvPr/>
+        </p:nvSpPr>
+        <p:spPr>
+          <a:xfrm>
+            <a:off x="658368" y="2322576"/>
+            <a:ext cx="5047488" cy="274320"/>
+          </a:xfrm>
+          <a:prstGeom prst="rect">
+            <a:avLst/>
+          </a:prstGeom>
+          <a:noFill/>
+        </p:spPr>
+        <p:txBody>
+          <a:bodyPr wrap="square">
+            <a:spAutoFit/>
+          </a:bodyPr>
+          <a:lstStyle/>
+          <a:p>
+            <a:pPr algn="l"/>
+            <a:r>
+              <a:rPr sz="1000" b="0" i="0">
+                <a:solidFill>
+                  <a:srgbClr val="70789A"/>
+                </a:solidFill>
+                <a:latin typeface="Calibri"/>
+              </a:rPr>
+              <a:t>AI performance, tooling, and adoption continue to accelerate across all industries.</a:t>
+            </a:r>
+          </a:p>
+        </p:txBody>
+      </p:sp>
+      <p:sp>
+        <p:nvSpPr>
+          <p:cNvPr id="13" name="TextBox 12"/>
+          <p:cNvSpPr txBox="1"/>
+          <p:nvPr/>
+        </p:nvSpPr>
+        <p:spPr>
+          <a:xfrm>
+            <a:off x="493776" y="2743200"/>
+            <a:ext cx="5212080" cy="219456"/>
+          </a:xfrm>
+          <a:prstGeom prst="rect">
+            <a:avLst/>
+          </a:prstGeom>
+          <a:noFill/>
+        </p:spPr>
+        <p:txBody>
+          <a:bodyPr wrap="square">
+            <a:spAutoFit/>
+          </a:bodyPr>
+          <a:lstStyle/>
+          <a:p>
+            <a:pPr algn="l"/>
+            <a:r>
+              <a:rPr sz="950" b="1" i="0">
+                <a:solidFill>
+                  <a:srgbClr val="C9A84C"/>
+                </a:solidFill>
+                <a:latin typeface="Barlow Condensed"/>
+              </a:rPr>
+              <a:t>● Governance lagging</a:t>
+            </a:r>
+          </a:p>
+        </p:txBody>
+      </p:sp>
+      <p:sp>
+        <p:nvSpPr>
+          <p:cNvPr id="14" name="TextBox 13"/>
+          <p:cNvSpPr txBox="1"/>
+          <p:nvPr/>
+        </p:nvSpPr>
+        <p:spPr>
+          <a:xfrm>
+            <a:off x="658368" y="2980944"/>
+            <a:ext cx="5047488" cy="274320"/>
+          </a:xfrm>
+          <a:prstGeom prst="rect">
+            <a:avLst/>
+          </a:prstGeom>
+          <a:noFill/>
+        </p:spPr>
+        <p:txBody>
+          <a:bodyPr wrap="square">
+            <a:spAutoFit/>
+          </a:bodyPr>
+          <a:lstStyle/>
+          <a:p>
+            <a:pPr algn="l"/>
+            <a:r>
+              <a:rPr sz="1000" b="0" i="0">
+                <a:solidFill>
+                  <a:srgbClr val="70789A"/>
+                </a:solidFill>
+                <a:latin typeface="Calibri"/>
+              </a:rPr>
+              <a:t>Safety, accountability, and operational trust frameworks are not keeping pace.</a:t>
+            </a:r>
+          </a:p>
+        </p:txBody>
+      </p:sp>
+      <p:sp>
+        <p:nvSpPr>
+          <p:cNvPr id="15" name="TextBox 14"/>
+          <p:cNvSpPr txBox="1"/>
+          <p:nvPr/>
+        </p:nvSpPr>
+        <p:spPr>
+          <a:xfrm>
+            <a:off x="493776" y="3401568"/>
+            <a:ext cx="5212080" cy="219456"/>
+          </a:xfrm>
+          <a:prstGeom prst="rect">
+            <a:avLst/>
+          </a:prstGeom>
+          <a:noFill/>
+        </p:spPr>
+        <p:txBody>
+          <a:bodyPr wrap="square">
+            <a:spAutoFit/>
+          </a:bodyPr>
+          <a:lstStyle/>
+          <a:p>
+            <a:pPr algn="l"/>
+            <a:r>
+              <a:rPr sz="950" b="1" i="0">
+                <a:solidFill>
+                  <a:srgbClr val="C9A84C"/>
+                </a:solidFill>
+                <a:latin typeface="Barlow Condensed"/>
+              </a:rPr>
+              <a:t>● Adoption mainstream</a:t>
+            </a:r>
+          </a:p>
+        </p:txBody>
+      </p:sp>
+      <p:sp>
+        <p:nvSpPr>
+          <p:cNvPr id="16" name="TextBox 15"/>
+          <p:cNvSpPr txBox="1"/>
+          <p:nvPr/>
+        </p:nvSpPr>
+        <p:spPr>
+          <a:xfrm>
+            <a:off x="658368" y="3639311"/>
+            <a:ext cx="5047488" cy="274320"/>
+          </a:xfrm>
+          <a:prstGeom prst="rect">
+            <a:avLst/>
+          </a:prstGeom>
+          <a:noFill/>
+        </p:spPr>
+        <p:txBody>
+          <a:bodyPr wrap="square">
+            <a:spAutoFit/>
+          </a:bodyPr>
+          <a:lstStyle/>
+          <a:p>
+            <a:pPr algn="l"/>
+            <a:r>
+              <a:rPr sz="1000" b="0" i="0">
+                <a:solidFill>
+                  <a:srgbClr val="70789A"/>
+                </a:solidFill>
+                <a:latin typeface="Calibri"/>
+              </a:rPr>
+              <a:t>AI is no longer experimental — the gap is now who can govern and act on it.</a:t>
+            </a:r>
+          </a:p>
+        </p:txBody>
+      </p:sp>
+      <p:sp>
+        <p:nvSpPr>
+          <p:cNvPr id="17" name="TextBox 16"/>
+          <p:cNvSpPr txBox="1"/>
+          <p:nvPr/>
+        </p:nvSpPr>
+        <p:spPr>
+          <a:xfrm>
+            <a:off x="6492240" y="1719072"/>
+            <a:ext cx="5285232" cy="256032"/>
+          </a:xfrm>
+          <a:prstGeom prst="rect">
+            <a:avLst/>
+          </a:prstGeom>
+          <a:noFill/>
+        </p:spPr>
+        <p:txBody>
+          <a:bodyPr wrap="square">
+            <a:spAutoFit/>
+          </a:bodyPr>
+          <a:lstStyle/>
+          <a:p>
+            <a:pPr algn="l"/>
+            <a:r>
+              <a:rPr sz="850" b="1" i="0">
+                <a:solidFill>
+                  <a:srgbClr val="2B8A6E"/>
+                </a:solidFill>
+                <a:latin typeface="Barlow Condensed"/>
+              </a:rPr>
+              <a:t>THE EXECUTION GAP</a:t>
+            </a:r>
+          </a:p>
+        </p:txBody>
+      </p:sp>
+      <p:sp>
+        <p:nvSpPr>
+          <p:cNvPr id="18" name="Rectangle 17"/>
+          <p:cNvSpPr/>
+          <p:nvPr/>
+        </p:nvSpPr>
+        <p:spPr>
+          <a:xfrm>
+            <a:off x="6492240" y="1975104"/>
+            <a:ext cx="5029200" cy="22860"/>
+          </a:xfrm>
+          <a:prstGeom prst="rect">
+            <a:avLst/>
+          </a:prstGeom>
+          <a:solidFill>
+            <a:srgbClr val="2B8A6E"/>
+          </a:solidFill>
+          <a:ln>
+            <a:noFill/>
+          </a:ln>
+        </p:spPr>
+        <p:style>
+          <a:lnRef idx="1">
+            <a:schemeClr val="accent1"/>
+          </a:lnRef>
+          <a:fillRef idx="3">
+            <a:schemeClr val="accent1"/>
+          </a:fillRef>
+          <a:effectRef idx="2">
+            <a:schemeClr val="accent1"/>
+          </a:effectRef>
+          <a:fontRef idx="minor">
+            <a:schemeClr val="lt1"/>
+          </a:fontRef>
+        </p:style>
+        <p:txBody>
+          <a:bodyPr rtlCol="0" anchor="ctr"/>
+          <a:lstStyle/>
+          <a:p>
+            <a:pPr algn="ctr"/>
+          </a:p>
+        </p:txBody>
+      </p:sp>
+      <p:sp>
+        <p:nvSpPr>
+          <p:cNvPr id="19" name="TextBox 18"/>
+          <p:cNvSpPr txBox="1"/>
+          <p:nvPr/>
+        </p:nvSpPr>
+        <p:spPr>
+          <a:xfrm>
+            <a:off x="6583680" y="2084831"/>
+            <a:ext cx="5193792" cy="512064"/>
+          </a:xfrm>
+          <a:prstGeom prst="rect">
+            <a:avLst/>
+          </a:prstGeom>
+          <a:noFill/>
+        </p:spPr>
+        <p:txBody>
+          <a:bodyPr wrap="square">
+            <a:spAutoFit/>
+          </a:bodyPr>
+          <a:lstStyle/>
+          <a:p>
+            <a:pPr algn="l"/>
+            <a:r>
+              <a:rPr sz="1050" b="1" i="0">
+                <a:solidFill>
+                  <a:srgbClr val="C9A84C"/>
+                </a:solidFill>
+                <a:latin typeface="Barlow Condensed"/>
+              </a:rPr>
+              <a:t>The competitive gap is no longer who has AI —
+it is who can execute with speed, control, and authority.</a:t>
+            </a:r>
+          </a:p>
+        </p:txBody>
+      </p:sp>
+      <p:sp>
+        <p:nvSpPr>
+          <p:cNvPr id="20" name="TextBox 19"/>
+          <p:cNvSpPr txBox="1"/>
+          <p:nvPr/>
+        </p:nvSpPr>
+        <p:spPr>
+          <a:xfrm>
+            <a:off x="6583680" y="2779776"/>
+            <a:ext cx="5193792" cy="512064"/>
+          </a:xfrm>
+          <a:prstGeom prst="rect">
+            <a:avLst/>
+          </a:prstGeom>
+          <a:noFill/>
+        </p:spPr>
+        <p:txBody>
+          <a:bodyPr wrap="square">
+            <a:spAutoFit/>
+          </a:bodyPr>
+          <a:lstStyle/>
+          <a:p>
+            <a:pPr algn="l"/>
+            <a:r>
+              <a:rPr sz="1050" b="0" i="0">
+                <a:solidFill>
+                  <a:srgbClr val="70789A"/>
+                </a:solidFill>
+                <a:latin typeface="Calibri"/>
+              </a:rPr>
+              <a:t>Most organizations can now detect more signals
+but still struggle to decide and mobilize fast enough.</a:t>
+            </a:r>
+          </a:p>
+        </p:txBody>
+      </p:sp>
+      <p:sp>
+        <p:nvSpPr>
+          <p:cNvPr id="21" name="TextBox 20"/>
+          <p:cNvSpPr txBox="1"/>
+          <p:nvPr/>
+        </p:nvSpPr>
+        <p:spPr>
+          <a:xfrm>
+            <a:off x="6583680" y="3474720"/>
+            <a:ext cx="5193792" cy="512064"/>
+          </a:xfrm>
+          <a:prstGeom prst="rect">
+            <a:avLst/>
+          </a:prstGeom>
+          <a:noFill/>
+        </p:spPr>
+        <p:txBody>
+          <a:bodyPr wrap="square">
+            <a:spAutoFit/>
+          </a:bodyPr>
+          <a:lstStyle/>
+          <a:p>
+            <a:pPr algn="l"/>
+            <a:r>
+              <a:rPr sz="1050" b="0" i="0">
+                <a:solidFill>
+                  <a:srgbClr val="3DBB97"/>
+                </a:solidFill>
+                <a:latin typeface="Calibri"/>
+              </a:rPr>
+              <a:t>Readiness OS closes that gap: AI monitors continuously,
+executives authorize decisively, teams execute in minutes.</a:t>
+            </a:r>
+          </a:p>
+        </p:txBody>
+      </p:sp>
+      <p:sp>
+        <p:nvSpPr>
+          <p:cNvPr id="22" name="Rectangle 21"/>
+          <p:cNvSpPr/>
+          <p:nvPr/>
+        </p:nvSpPr>
+        <p:spPr>
+          <a:xfrm>
+            <a:off x="402336" y="6053328"/>
+            <a:ext cx="11375136" cy="347472"/>
+          </a:xfrm>
+          <a:prstGeom prst="rect">
+            <a:avLst/>
+          </a:prstGeom>
+          <a:solidFill>
+            <a:srgbClr val="06091C"/>
+          </a:solidFill>
+          <a:ln>
+            <a:noFill/>
+          </a:ln>
+        </p:spPr>
+        <p:style>
+          <a:lnRef idx="1">
+            <a:schemeClr val="accent1"/>
+          </a:lnRef>
+          <a:fillRef idx="3">
+            <a:schemeClr val="accent1"/>
+          </a:fillRef>
+          <a:effectRef idx="2">
+            <a:schemeClr val="accent1"/>
+          </a:effectRef>
+          <a:fontRef idx="minor">
+            <a:schemeClr val="lt1"/>
+          </a:fontRef>
+        </p:style>
+        <p:txBody>
+          <a:bodyPr rtlCol="0" anchor="ctr"/>
+          <a:lstStyle/>
+          <a:p>
+            <a:pPr algn="ctr"/>
+          </a:p>
+        </p:txBody>
+      </p:sp>
+      <p:sp>
+        <p:nvSpPr>
+          <p:cNvPr id="23" name="TextBox 22"/>
+          <p:cNvSpPr txBox="1"/>
+          <p:nvPr/>
+        </p:nvSpPr>
+        <p:spPr>
+          <a:xfrm>
+            <a:off x="585216" y="6108192"/>
+            <a:ext cx="11064240" cy="237744"/>
+          </a:xfrm>
+          <a:prstGeom prst="rect">
+            <a:avLst/>
+          </a:prstGeom>
+          <a:noFill/>
+        </p:spPr>
+        <p:txBody>
+          <a:bodyPr wrap="square">
+            <a:spAutoFit/>
+          </a:bodyPr>
+          <a:lstStyle/>
+          <a:p>
+            <a:pPr algn="l"/>
+            <a:r>
+              <a:rPr sz="800" b="0" i="1">
+                <a:solidFill>
+                  <a:srgbClr val="4A526E"/>
+                </a:solidFill>
+                <a:latin typeface="Calibri"/>
+              </a:rPr>
+              <a:t>Source: Stanford HAI, AI Index Report 2026 (capability acceleration + governance readiness gap)  ·  Gartner Autonomous Business 2026</a:t>
+            </a:r>
+          </a:p>
+        </p:txBody>
+      </p:sp>
+      <p:sp>
+        <p:nvSpPr>
+          <p:cNvPr id="24" name="TextBox 23"/>
+          <p:cNvSpPr txBox="1"/>
+          <p:nvPr/>
+        </p:nvSpPr>
+        <p:spPr>
+          <a:xfrm>
+            <a:off x="402336" y="6583680"/>
+            <a:ext cx="2743200" cy="201168"/>
+          </a:xfrm>
+          <a:prstGeom prst="rect">
+            <a:avLst/>
+          </a:prstGeom>
+          <a:noFill/>
+        </p:spPr>
+        <p:txBody>
+          <a:bodyPr wrap="square">
+            <a:spAutoFit/>
+          </a:bodyPr>
+          <a:lstStyle/>
+          <a:p>
+            <a:pPr algn="l"/>
+            <a:r>
+              <a:rPr sz="750" b="1" i="0">
+                <a:solidFill>
+                  <a:srgbClr val="404862"/>
+                </a:solidFill>
+                <a:latin typeface="Barlow Condensed"/>
+              </a:rPr>
+              <a:t>VaughnMartin · Readiness OS</a:t>
+            </a:r>
+          </a:p>
+        </p:txBody>
+      </p:sp>
+      <p:sp>
+        <p:nvSpPr>
+          <p:cNvPr id="25" name="TextBox 24"/>
+          <p:cNvSpPr txBox="1"/>
+          <p:nvPr/>
+        </p:nvSpPr>
+        <p:spPr>
+          <a:xfrm>
+            <a:off x="10817352" y="6583680"/>
+            <a:ext cx="1188720" cy="201168"/>
+          </a:xfrm>
+          <a:prstGeom prst="rect">
+            <a:avLst/>
+          </a:prstGeom>
+          <a:noFill/>
+        </p:spPr>
+        <p:txBody>
+          <a:bodyPr wrap="square">
+            <a:spAutoFit/>
+          </a:bodyPr>
+          <a:lstStyle/>
+          <a:p>
+            <a:pPr algn="r"/>
+            <a:r>
+              <a:rPr sz="800" b="0" i="0">
+                <a:solidFill>
+                  <a:srgbClr val="4A526E"/>
+                </a:solidFill>
+                <a:latin typeface="Calibri"/>
+              </a:rPr>
+              <a:t>4  /  13</a:t>
             </a:r>
           </a:p>
         </p:txBody>
@@ -9037,7 +9990,122 @@
                 </a:solidFill>
                 <a:latin typeface="Calibri"/>
               </a:rPr>
-              <a:t>2  /  12</a:t>
+              <a:t>2  /  13</a:t>
+            </a:r>
+          </a:p>
+        </p:txBody>
+      </p:sp>
+      <p:sp>
+        <p:nvSpPr>
+          <p:cNvPr id="43" name="Rectangle 42"/>
+          <p:cNvSpPr/>
+          <p:nvPr/>
+        </p:nvSpPr>
+        <p:spPr>
+          <a:xfrm>
+            <a:off x="402336" y="5532120"/>
+            <a:ext cx="8668512" cy="658368"/>
+          </a:xfrm>
+          <a:prstGeom prst="rect">
+            <a:avLst/>
+          </a:prstGeom>
+          <a:solidFill>
+            <a:srgbClr val="080E28"/>
+          </a:solidFill>
+          <a:ln w="18288">
+            <a:solidFill>
+              <a:srgbClr val="1E284A"/>
+            </a:solidFill>
+          </a:ln>
+        </p:spPr>
+        <p:style>
+          <a:lnRef idx="1">
+            <a:schemeClr val="accent1"/>
+          </a:lnRef>
+          <a:fillRef idx="3">
+            <a:schemeClr val="accent1"/>
+          </a:fillRef>
+          <a:effectRef idx="2">
+            <a:schemeClr val="accent1"/>
+          </a:effectRef>
+          <a:fontRef idx="minor">
+            <a:schemeClr val="lt1"/>
+          </a:fontRef>
+        </p:style>
+        <p:txBody>
+          <a:bodyPr rtlCol="0" anchor="ctr"/>
+          <a:lstStyle/>
+          <a:p>
+            <a:pPr algn="ctr"/>
+          </a:p>
+        </p:txBody>
+      </p:sp>
+      <p:sp>
+        <p:nvSpPr>
+          <p:cNvPr id="44" name="TextBox 43"/>
+          <p:cNvSpPr txBox="1"/>
+          <p:nvPr/>
+        </p:nvSpPr>
+        <p:spPr>
+          <a:xfrm>
+            <a:off x="585216" y="5596128"/>
+            <a:ext cx="8321040" cy="274320"/>
+          </a:xfrm>
+          <a:prstGeom prst="rect">
+            <a:avLst/>
+          </a:prstGeom>
+          <a:noFill/>
+        </p:spPr>
+        <p:txBody>
+          <a:bodyPr wrap="square">
+            <a:spAutoFit/>
+          </a:bodyPr>
+          <a:lstStyle/>
+          <a:p>
+            <a:pPr algn="l"/>
+            <a:r>
+              <a:rPr sz="1100" b="1" i="0">
+                <a:solidFill>
+                  <a:srgbClr val="C9A84C"/>
+                </a:solidFill>
+                <a:latin typeface="Barlow Condensed"/>
+              </a:rPr>
+              <a:t>Who calls who?  ·  Where's the brief?  ·  Who owns it?  ·  Who authorizes?</a:t>
+            </a:r>
+          </a:p>
+        </p:txBody>
+      </p:sp>
+      <p:sp>
+        <p:nvSpPr>
+          <p:cNvPr id="45" name="TextBox 44"/>
+          <p:cNvSpPr txBox="1"/>
+          <p:nvPr/>
+        </p:nvSpPr>
+        <p:spPr>
+          <a:xfrm>
+            <a:off x="585216" y="5888736"/>
+            <a:ext cx="8321040" cy="219456"/>
+          </a:xfrm>
+          <a:prstGeom prst="rect">
+            <a:avLst/>
+          </a:prstGeom>
+          <a:noFill/>
+        </p:spPr>
+        <p:txBody>
+          <a:bodyPr wrap="square">
+            <a:spAutoFit/>
+          </a:bodyPr>
+          <a:lstStyle/>
+          <a:p>
+            <a:pPr algn="l"/>
+            <a:r>
+              <a:rPr sz="900" b="0" i="1">
+                <a:solidFill>
+                  <a:srgbClr val="70789A"/>
+                </a:solidFill>
+                <a:latin typeface="Cormorant Garamond"/>
+              </a:rPr>
+              <a:t>This is a readiness problem, not a talent problem.</a:t>
             </a:r>
           </a:p>
         </p:txBody>
@@ -10147,7 +11215,7 @@
                 </a:solidFill>
                 <a:latin typeface="Calibri"/>
               </a:rPr>
-              <a:t>3  /  12</a:t>
+              <a:t>3  /  13</a:t>
             </a:r>
           </a:p>
         </p:txBody>
@@ -12152,7 +13220,85 @@
                 </a:solidFill>
                 <a:latin typeface="Calibri"/>
               </a:rPr>
-              <a:t>4  /  12</a:t>
+              <a:t>5  /  13</a:t>
+            </a:r>
+          </a:p>
+        </p:txBody>
+      </p:sp>
+      <p:sp>
+        <p:nvSpPr>
+          <p:cNvPr id="52" name="Rectangle 51"/>
+          <p:cNvSpPr/>
+          <p:nvPr/>
+        </p:nvSpPr>
+        <p:spPr>
+          <a:xfrm>
+            <a:off x="402336" y="1389888"/>
+            <a:ext cx="11393424" cy="310896"/>
+          </a:xfrm>
+          <a:prstGeom prst="rect">
+            <a:avLst/>
+          </a:prstGeom>
+          <a:solidFill>
+            <a:srgbClr val="060B20"/>
+          </a:solidFill>
+          <a:ln>
+            <a:noFill/>
+          </a:ln>
+        </p:spPr>
+        <p:style>
+          <a:lnRef idx="1">
+            <a:schemeClr val="accent1"/>
+          </a:lnRef>
+          <a:fillRef idx="3">
+            <a:schemeClr val="accent1"/>
+          </a:fillRef>
+          <a:effectRef idx="2">
+            <a:schemeClr val="accent1"/>
+          </a:effectRef>
+          <a:fontRef idx="minor">
+            <a:schemeClr val="lt1"/>
+          </a:fontRef>
+        </p:style>
+        <p:txBody>
+          <a:bodyPr rtlCol="0" anchor="ctr"/>
+          <a:lstStyle/>
+          <a:p>
+            <a:pPr algn="ctr"/>
+          </a:p>
+        </p:txBody>
+      </p:sp>
+      <p:sp>
+        <p:nvSpPr>
+          <p:cNvPr id="53" name="TextBox 52"/>
+          <p:cNvSpPr txBox="1"/>
+          <p:nvPr/>
+        </p:nvSpPr>
+        <p:spPr>
+          <a:xfrm>
+            <a:off x="585216" y="1426464"/>
+            <a:ext cx="11064240" cy="237744"/>
+          </a:xfrm>
+          <a:prstGeom prst="rect">
+            <a:avLst/>
+          </a:prstGeom>
+          <a:noFill/>
+        </p:spPr>
+        <p:txBody>
+          <a:bodyPr wrap="square">
+            <a:spAutoFit/>
+          </a:bodyPr>
+          <a:lstStyle/>
+          <a:p>
+            <a:pPr algn="ctr"/>
+            <a:r>
+              <a:rPr sz="1000" b="1" i="0">
+                <a:solidFill>
+                  <a:srgbClr val="2B8A6E"/>
+                </a:solidFill>
+                <a:latin typeface="Barlow Condensed"/>
+              </a:rPr>
+              <a:t>AI monitors continuously.  Executives authorize decisively.  Teams execute in 12 minutes.</a:t>
             </a:r>
           </a:p>
         </p:txBody>
@@ -13318,7 +14464,7 @@
                 </a:solidFill>
                 <a:latin typeface="Calibri"/>
               </a:rPr>
-              <a:t>5  /  12</a:t>
+              <a:t>6  /  13</a:t>
             </a:r>
           </a:p>
         </p:txBody>
@@ -14507,7 +15653,7 @@
                 </a:solidFill>
                 <a:latin typeface="Calibri"/>
               </a:rPr>
-              <a:t>6  /  12</a:t>
+              <a:t>7  /  13</a:t>
             </a:r>
           </a:p>
         </p:txBody>
@@ -15541,7 +16687,7 @@
                 </a:solidFill>
                 <a:latin typeface="Calibri"/>
               </a:rPr>
-              <a:t>7  /  12</a:t>
+              <a:t>8  /  13</a:t>
             </a:r>
           </a:p>
         </p:txBody>
@@ -18954,7 +20100,7 @@
                 </a:solidFill>
                 <a:latin typeface="Calibri"/>
               </a:rPr>
-              <a:t>8  /  12</a:t>
+              <a:t>9  /  13</a:t>
             </a:r>
           </a:p>
         </p:txBody>
@@ -25667,7 +26813,7 @@
                 </a:solidFill>
                 <a:latin typeface="Calibri"/>
               </a:rPr>
-              <a:t>9  /  12</a:t>
+              <a:t>10  /  13</a:t>
             </a:r>
           </a:p>
         </p:txBody>
